--- a/deliverables/RKNP/RKNP_презентация.pptx
+++ b/deliverables/RKNP/RKNP_презентация.pptx
@@ -2,27 +2,27 @@
 <file path=ppt/presentation.xml><?xml version="1.0" encoding="utf-8"?>
 <p:presentation xmlns:p="http://schemas.openxmlformats.org/presentationml/2006/main">
   <p:sldMasterIdLst>
-    <p:sldMasterId xmlns:r="http://schemas.openxmlformats.org/officeDocument/2006/relationships" id="2147483648" r:id="R4f09cda773924cc1"/>
+    <p:sldMasterId xmlns:r="http://schemas.openxmlformats.org/officeDocument/2006/relationships" id="2147483648" r:id="Rc749c4ae6c4c4885"/>
   </p:sldMasterIdLst>
   <p:notesMasterIdLst>
-    <p:notesMasterId xmlns:r="http://schemas.openxmlformats.org/officeDocument/2006/relationships" r:id="R395436fdf3f440b6"/>
+    <p:notesMasterId xmlns:r="http://schemas.openxmlformats.org/officeDocument/2006/relationships" r:id="R590a7309d6424e4f"/>
   </p:notesMasterIdLst>
   <p:sldIdLst>
-    <p:sldId xmlns:r="http://schemas.openxmlformats.org/officeDocument/2006/relationships" id="256" r:id="Raed5425336224011"/>
-    <p:sldId xmlns:r="http://schemas.openxmlformats.org/officeDocument/2006/relationships" id="257" r:id="R83256a863a0944a3"/>
-    <p:sldId xmlns:r="http://schemas.openxmlformats.org/officeDocument/2006/relationships" id="258" r:id="R6b2d4de8ae4a4f54"/>
-    <p:sldId xmlns:r="http://schemas.openxmlformats.org/officeDocument/2006/relationships" id="259" r:id="R3c128073032f4d2e"/>
-    <p:sldId xmlns:r="http://schemas.openxmlformats.org/officeDocument/2006/relationships" id="260" r:id="R55c1c2a811284e06"/>
-    <p:sldId xmlns:r="http://schemas.openxmlformats.org/officeDocument/2006/relationships" id="261" r:id="R144a355bfdc54377"/>
-    <p:sldId xmlns:r="http://schemas.openxmlformats.org/officeDocument/2006/relationships" id="262" r:id="Raa49a2fa750145d7"/>
-    <p:sldId xmlns:r="http://schemas.openxmlformats.org/officeDocument/2006/relationships" id="263" r:id="R4b8682d477a7466b"/>
-    <p:sldId xmlns:r="http://schemas.openxmlformats.org/officeDocument/2006/relationships" id="264" r:id="Rbab9a26eada54b78"/>
-    <p:sldId xmlns:r="http://schemas.openxmlformats.org/officeDocument/2006/relationships" id="265" r:id="R146755a9fb9c4803"/>
-    <p:sldId xmlns:r="http://schemas.openxmlformats.org/officeDocument/2006/relationships" id="266" r:id="R06ce90ea10a3468a"/>
-    <p:sldId xmlns:r="http://schemas.openxmlformats.org/officeDocument/2006/relationships" id="267" r:id="R8800e742194c425c"/>
-    <p:sldId xmlns:r="http://schemas.openxmlformats.org/officeDocument/2006/relationships" id="268" r:id="Rb2d6c901843841a9"/>
-    <p:sldId xmlns:r="http://schemas.openxmlformats.org/officeDocument/2006/relationships" id="269" r:id="Raa82d6ee92b74ff9"/>
-    <p:sldId xmlns:r="http://schemas.openxmlformats.org/officeDocument/2006/relationships" id="270" r:id="Rb228085a3923454a"/>
+    <p:sldId xmlns:r="http://schemas.openxmlformats.org/officeDocument/2006/relationships" id="256" r:id="R95a0a2bbcfaa411b"/>
+    <p:sldId xmlns:r="http://schemas.openxmlformats.org/officeDocument/2006/relationships" id="257" r:id="R765817667a8e4ce2"/>
+    <p:sldId xmlns:r="http://schemas.openxmlformats.org/officeDocument/2006/relationships" id="258" r:id="R063186605e734d43"/>
+    <p:sldId xmlns:r="http://schemas.openxmlformats.org/officeDocument/2006/relationships" id="259" r:id="R9dc9881802b34d47"/>
+    <p:sldId xmlns:r="http://schemas.openxmlformats.org/officeDocument/2006/relationships" id="260" r:id="R8a0f9f08367048d2"/>
+    <p:sldId xmlns:r="http://schemas.openxmlformats.org/officeDocument/2006/relationships" id="261" r:id="R47d982dc7e83497c"/>
+    <p:sldId xmlns:r="http://schemas.openxmlformats.org/officeDocument/2006/relationships" id="262" r:id="R5b15f91be8e748e8"/>
+    <p:sldId xmlns:r="http://schemas.openxmlformats.org/officeDocument/2006/relationships" id="263" r:id="Reb06606278f14030"/>
+    <p:sldId xmlns:r="http://schemas.openxmlformats.org/officeDocument/2006/relationships" id="264" r:id="Rc851c447472b4737"/>
+    <p:sldId xmlns:r="http://schemas.openxmlformats.org/officeDocument/2006/relationships" id="265" r:id="R7fe5137af4cc459b"/>
+    <p:sldId xmlns:r="http://schemas.openxmlformats.org/officeDocument/2006/relationships" id="266" r:id="R8e6b534c968c49e5"/>
+    <p:sldId xmlns:r="http://schemas.openxmlformats.org/officeDocument/2006/relationships" id="267" r:id="R62116c4741b242b5"/>
+    <p:sldId xmlns:r="http://schemas.openxmlformats.org/officeDocument/2006/relationships" id="268" r:id="R7a82aca27bf9477a"/>
+    <p:sldId xmlns:r="http://schemas.openxmlformats.org/officeDocument/2006/relationships" id="269" r:id="R809a8c5e76144b21"/>
+    <p:sldId xmlns:r="http://schemas.openxmlformats.org/officeDocument/2006/relationships" id="270" r:id="Raa601280a32d4d63"/>
   </p:sldIdLst>
   <p:sldSz cx="12192000" cy="6858000"/>
   <p:notesSz cx="6858000" cy="9144000"/>
@@ -1504,7 +1504,7 @@
   </p:cSld>
   <p:clrMap bg1="lt1" tx1="dk1" bg2="lt2" tx2="dk2" accent1="accent1" accent2="accent2" accent3="accent3" accent4="accent4" accent5="accent5" accent6="accent6" hlink="hlink" folHlink="folHlink"/>
   <p:sldLayoutIdLst>
-    <p:sldLayoutId xmlns:r="http://schemas.openxmlformats.org/officeDocument/2006/relationships" id="2147483649" r:id="Rdce173478d6242bd"/>
+    <p:sldLayoutId xmlns:r="http://schemas.openxmlformats.org/officeDocument/2006/relationships" id="2147483649" r:id="Re233b25f53e14f96"/>
   </p:sldLayoutIdLst>
   <p:txStyles>
     <p:titleStyle>
@@ -2031,705 +2031,6 @@
 </a:theme>
 </file>
 
-<file path=ppt/slides/charts/chart1.xml><?xml version="1.0" encoding="utf-8"?>
-<c:chartSpace xmlns:c="http://schemas.openxmlformats.org/drawingml/2006/chart" xmlns:r="http://schemas.openxmlformats.org/officeDocument/2006/relationships">
-  <c:lang val="en-US"/>
-  <c:chart>
-    <c:title>
-      <c:tx>
-        <c:rich>
-          <a:bodyPr xmlns:a="http://schemas.openxmlformats.org/drawingml/2006/main"/>
-          <a:lstStyle xmlns:a="http://schemas.openxmlformats.org/drawingml/2006/main"/>
-          <a:p xmlns:a="http://schemas.openxmlformats.org/drawingml/2006/main">
-            <a:r>
-              <a:rPr sz="1350" b="1">
-                <a:solidFill>
-                  <a:srgbClr val="14213D"/>
-                </a:solidFill>
-                <a:latin typeface="Arial"/>
-                <a:ea typeface="Arial"/>
-                <a:cs typeface="Arial"/>
-              </a:rPr>
-              <a:t>Доля фактических ошибок по языку (%)</a:t>
-            </a:r>
-          </a:p>
-        </c:rich>
-      </c:tx>
-      <c:overlay val="0"/>
-      <c:txPr>
-        <a:bodyPr xmlns:a="http://schemas.openxmlformats.org/drawingml/2006/main" anchorCtr="1"/>
-        <a:lstStyle xmlns:a="http://schemas.openxmlformats.org/drawingml/2006/main"/>
-        <a:p xmlns:a="http://schemas.openxmlformats.org/drawingml/2006/main">
-          <a:pPr>
-            <a:defRPr sz="1350" b="1">
-              <a:solidFill>
-                <a:srgbClr val="14213D"/>
-              </a:solidFill>
-              <a:latin typeface="Arial"/>
-              <a:ea typeface="Arial"/>
-              <a:cs typeface="Arial"/>
-            </a:defRPr>
-          </a:pPr>
-        </a:p>
-      </c:txPr>
-    </c:title>
-    <c:plotArea>
-      <c:barChart>
-        <c:barDir val="bar"/>
-        <c:grouping val="clustered"/>
-        <c:varyColors val="0"/>
-        <c:ser>
-          <c:idx val="0"/>
-          <c:order val="0"/>
-          <c:tx>
-            <c:v>Ошибки</c:v>
-          </c:tx>
-          <c:spPr>
-            <a:solidFill xmlns:a="http://schemas.openxmlformats.org/drawingml/2006/main">
-              <a:srgbClr val="2F6BFF"/>
-            </a:solidFill>
-          </c:spPr>
-          <c:dPt>
-            <c:idx val="2"/>
-            <c:invertIfNegative val="0"/>
-            <c:spPr>
-              <a:solidFill xmlns:a="http://schemas.openxmlformats.org/drawingml/2006/main">
-                <a:srgbClr val="FF6B6B"/>
-              </a:solidFill>
-            </c:spPr>
-          </c:dPt>
-          <c:cat>
-            <c:strRef>
-              <c:f>'Chart Data'!$A$2:$A$4</c:f>
-              <c:strCache>
-                <c:ptCount val="3"/>
-                <c:pt idx="0">
-                  <c:v>EN</c:v>
-                </c:pt>
-                <c:pt idx="1">
-                  <c:v>RU</c:v>
-                </c:pt>
-                <c:pt idx="2">
-                  <c:v>KK</c:v>
-                </c:pt>
-              </c:strCache>
-            </c:strRef>
-          </c:cat>
-          <c:val>
-            <c:numRef>
-              <c:f>'Chart Data'!$B$2:$B$4</c:f>
-              <c:numCache>
-                <c:formatCode>General</c:formatCode>
-                <c:ptCount val="3"/>
-                <c:pt idx="0">
-                  <c:v>14.77</c:v>
-                </c:pt>
-                <c:pt idx="1">
-                  <c:v>17.85</c:v>
-                </c:pt>
-                <c:pt idx="2">
-                  <c:v>26.53</c:v>
-                </c:pt>
-              </c:numCache>
-            </c:numRef>
-          </c:val>
-        </c:ser>
-        <c:dLbls>
-          <c:txPr>
-            <a:bodyPr xmlns:a="http://schemas.openxmlformats.org/drawingml/2006/main" anchorCtr="1"/>
-            <a:lstStyle xmlns:a="http://schemas.openxmlformats.org/drawingml/2006/main"/>
-            <a:p xmlns:a="http://schemas.openxmlformats.org/drawingml/2006/main">
-              <a:pPr>
-                <a:defRPr sz="1125" b="1">
-                  <a:solidFill>
-                    <a:srgbClr val="14213D"/>
-                  </a:solidFill>
-                  <a:latin typeface="Arial"/>
-                  <a:ea typeface="Arial"/>
-                  <a:cs typeface="Arial"/>
-                </a:defRPr>
-              </a:pPr>
-            </a:p>
-          </c:txPr>
-          <c:dLblPos val="outEnd"/>
-          <c:showLegendKey val="0"/>
-          <c:showVal val="1"/>
-          <c:showCatName val="0"/>
-          <c:showSerName val="0"/>
-          <c:showPercent val="0"/>
-          <c:showBubbleSize val="0"/>
-          <c:showLeaderLines val="0"/>
-        </c:dLbls>
-        <c:gapWidth val="55"/>
-        <c:axId val="48650112"/>
-        <c:axId val="48672768"/>
-      </c:barChart>
-      <c:catAx>
-        <c:axId val="48650112"/>
-        <c:scaling>
-          <c:orientation val="minMax"/>
-        </c:scaling>
-        <c:delete val="0"/>
-        <c:axPos val="l"/>
-        <c:majorGridlines>
-          <c:spPr>
-            <a:ln xmlns:a="http://schemas.openxmlformats.org/drawingml/2006/main" w="9525">
-              <a:solidFill>
-                <a:srgbClr val="DDE4EF"/>
-              </a:solidFill>
-              <a:prstDash val="solid"/>
-            </a:ln>
-          </c:spPr>
-        </c:majorGridlines>
-        <c:numFmt formatCode="0&quot;%&quot;"/>
-        <c:majorTickMark val="none"/>
-        <c:minorTickMark val="none"/>
-        <c:spPr>
-          <a:ln xmlns:a="http://schemas.openxmlformats.org/drawingml/2006/main" w="9525">
-            <a:solidFill>
-              <a:srgbClr val="DDE4EF"/>
-            </a:solidFill>
-          </a:ln>
-        </c:spPr>
-        <c:txPr>
-          <a:bodyPr xmlns:a="http://schemas.openxmlformats.org/drawingml/2006/main" anchorCtr="1"/>
-          <a:lstStyle xmlns:a="http://schemas.openxmlformats.org/drawingml/2006/main"/>
-          <a:p xmlns:a="http://schemas.openxmlformats.org/drawingml/2006/main">
-            <a:pPr>
-              <a:defRPr sz="975">
-                <a:solidFill>
-                  <a:srgbClr val="63708A"/>
-                </a:solidFill>
-                <a:latin typeface="Arial"/>
-                <a:ea typeface="Arial"/>
-                <a:cs typeface="Arial"/>
-              </a:defRPr>
-            </a:pPr>
-          </a:p>
-        </c:txPr>
-        <c:crossAx val="48672768"/>
-      </c:catAx>
-      <c:valAx>
-        <c:axId val="48672768"/>
-        <c:scaling>
-          <c:orientation val="minMax"/>
-        </c:scaling>
-        <c:delete val="0"/>
-        <c:axPos val="b"/>
-        <c:numFmt formatCode="General"/>
-        <c:majorTickMark val="none"/>
-        <c:minorTickMark val="none"/>
-        <c:spPr>
-          <a:ln xmlns:a="http://schemas.openxmlformats.org/drawingml/2006/main" w="0">
-            <a:noFill/>
-          </a:ln>
-        </c:spPr>
-        <c:txPr>
-          <a:bodyPr xmlns:a="http://schemas.openxmlformats.org/drawingml/2006/main" anchorCtr="1"/>
-          <a:lstStyle xmlns:a="http://schemas.openxmlformats.org/drawingml/2006/main"/>
-          <a:p xmlns:a="http://schemas.openxmlformats.org/drawingml/2006/main">
-            <a:pPr>
-              <a:defRPr sz="1125" b="1">
-                <a:solidFill>
-                  <a:srgbClr val="14213D"/>
-                </a:solidFill>
-                <a:latin typeface="Arial"/>
-                <a:ea typeface="Arial"/>
-                <a:cs typeface="Arial"/>
-              </a:defRPr>
-            </a:pPr>
-          </a:p>
-        </c:txPr>
-        <c:crossAx val="48650112"/>
-        <c:crossBetween val="between"/>
-      </c:valAx>
-    </c:plotArea>
-    <c:plotVisOnly val="1"/>
-  </c:chart>
-  <c:externalData r:id="rIdChartSnapshot1">
-    <c:autoUpdate val="0"/>
-  </c:externalData>
-</c:chartSpace>
-</file>
-
-<file path=ppt/slides/charts/chart2.xml><?xml version="1.0" encoding="utf-8"?>
-<c:chartSpace xmlns:c="http://schemas.openxmlformats.org/drawingml/2006/chart" xmlns:r="http://schemas.openxmlformats.org/officeDocument/2006/relationships">
-  <c:lang val="en-US"/>
-  <c:chart>
-    <c:title>
-      <c:tx>
-        <c:rich>
-          <a:bodyPr xmlns:a="http://schemas.openxmlformats.org/drawingml/2006/main"/>
-          <a:lstStyle xmlns:a="http://schemas.openxmlformats.org/drawingml/2006/main"/>
-          <a:p xmlns:a="http://schemas.openxmlformats.org/drawingml/2006/main">
-            <a:r>
-              <a:rPr sz="1350" b="1">
-                <a:solidFill>
-                  <a:srgbClr val="14213D"/>
-                </a:solidFill>
-                <a:latin typeface="Arial"/>
-                <a:ea typeface="Arial"/>
-                <a:cs typeface="Arial"/>
-              </a:rPr>
-              <a:t>Доля фактических ошибок по модели (%)</a:t>
-            </a:r>
-          </a:p>
-        </c:rich>
-      </c:tx>
-      <c:overlay val="0"/>
-      <c:txPr>
-        <a:bodyPr xmlns:a="http://schemas.openxmlformats.org/drawingml/2006/main" anchorCtr="1"/>
-        <a:lstStyle xmlns:a="http://schemas.openxmlformats.org/drawingml/2006/main"/>
-        <a:p xmlns:a="http://schemas.openxmlformats.org/drawingml/2006/main">
-          <a:pPr>
-            <a:defRPr sz="1350" b="1">
-              <a:solidFill>
-                <a:srgbClr val="14213D"/>
-              </a:solidFill>
-              <a:latin typeface="Arial"/>
-              <a:ea typeface="Arial"/>
-              <a:cs typeface="Arial"/>
-            </a:defRPr>
-          </a:pPr>
-        </a:p>
-      </c:txPr>
-    </c:title>
-    <c:plotArea>
-      <c:barChart>
-        <c:barDir val="bar"/>
-        <c:grouping val="clustered"/>
-        <c:varyColors val="0"/>
-        <c:ser>
-          <c:idx val="0"/>
-          <c:order val="0"/>
-          <c:tx>
-            <c:v>Ошибки</c:v>
-          </c:tx>
-          <c:spPr>
-            <a:solidFill xmlns:a="http://schemas.openxmlformats.org/drawingml/2006/main">
-              <a:srgbClr val="2F6BFF"/>
-            </a:solidFill>
-          </c:spPr>
-          <c:dPt>
-            <c:idx val="0"/>
-            <c:invertIfNegative val="0"/>
-            <c:spPr>
-              <a:solidFill xmlns:a="http://schemas.openxmlformats.org/drawingml/2006/main">
-                <a:srgbClr val="2EC4B6"/>
-              </a:solidFill>
-            </c:spPr>
-          </c:dPt>
-          <c:dPt>
-            <c:idx val="2"/>
-            <c:invertIfNegative val="0"/>
-            <c:spPr>
-              <a:solidFill xmlns:a="http://schemas.openxmlformats.org/drawingml/2006/main">
-                <a:srgbClr val="FF6B6B"/>
-              </a:solidFill>
-            </c:spPr>
-          </c:dPt>
-          <c:cat>
-            <c:strRef>
-              <c:f>'Chart Data'!$A$2:$A$4</c:f>
-              <c:strCache>
-                <c:ptCount val="3"/>
-                <c:pt idx="0">
-                  <c:v>Qwen 3.6</c:v>
-                </c:pt>
-                <c:pt idx="1">
-                  <c:v>Qwen 3.8</c:v>
-                </c:pt>
-                <c:pt idx="2">
-                  <c:v>GPT-OSS 20B</c:v>
-                </c:pt>
-              </c:strCache>
-            </c:strRef>
-          </c:cat>
-          <c:val>
-            <c:numRef>
-              <c:f>'Chart Data'!$B$2:$B$4</c:f>
-              <c:numCache>
-                <c:formatCode>General</c:formatCode>
-                <c:ptCount val="3"/>
-                <c:pt idx="0">
-                  <c:v>14.72</c:v>
-                </c:pt>
-                <c:pt idx="1">
-                  <c:v>21.16</c:v>
-                </c:pt>
-                <c:pt idx="2">
-                  <c:v>23.23</c:v>
-                </c:pt>
-              </c:numCache>
-            </c:numRef>
-          </c:val>
-        </c:ser>
-        <c:dLbls>
-          <c:txPr>
-            <a:bodyPr xmlns:a="http://schemas.openxmlformats.org/drawingml/2006/main" anchorCtr="1"/>
-            <a:lstStyle xmlns:a="http://schemas.openxmlformats.org/drawingml/2006/main"/>
-            <a:p xmlns:a="http://schemas.openxmlformats.org/drawingml/2006/main">
-              <a:pPr>
-                <a:defRPr sz="1125" b="1">
-                  <a:solidFill>
-                    <a:srgbClr val="14213D"/>
-                  </a:solidFill>
-                  <a:latin typeface="Arial"/>
-                  <a:ea typeface="Arial"/>
-                  <a:cs typeface="Arial"/>
-                </a:defRPr>
-              </a:pPr>
-            </a:p>
-          </c:txPr>
-          <c:dLblPos val="outEnd"/>
-          <c:showLegendKey val="0"/>
-          <c:showVal val="1"/>
-          <c:showCatName val="0"/>
-          <c:showSerName val="0"/>
-          <c:showPercent val="0"/>
-          <c:showBubbleSize val="0"/>
-          <c:showLeaderLines val="0"/>
-        </c:dLbls>
-        <c:gapWidth val="48"/>
-        <c:axId val="48650112"/>
-        <c:axId val="48672768"/>
-      </c:barChart>
-      <c:catAx>
-        <c:axId val="48650112"/>
-        <c:scaling>
-          <c:orientation val="minMax"/>
-        </c:scaling>
-        <c:delete val="0"/>
-        <c:axPos val="l"/>
-        <c:majorGridlines>
-          <c:spPr>
-            <a:ln xmlns:a="http://schemas.openxmlformats.org/drawingml/2006/main" w="9525">
-              <a:solidFill>
-                <a:srgbClr val="DDE4EF"/>
-              </a:solidFill>
-              <a:prstDash val="solid"/>
-            </a:ln>
-          </c:spPr>
-        </c:majorGridlines>
-        <c:numFmt formatCode="0&quot;%&quot;"/>
-        <c:majorTickMark val="none"/>
-        <c:minorTickMark val="none"/>
-        <c:spPr>
-          <a:ln xmlns:a="http://schemas.openxmlformats.org/drawingml/2006/main" w="9525">
-            <a:solidFill>
-              <a:srgbClr val="DDE4EF"/>
-            </a:solidFill>
-          </a:ln>
-        </c:spPr>
-        <c:txPr>
-          <a:bodyPr xmlns:a="http://schemas.openxmlformats.org/drawingml/2006/main" anchorCtr="1"/>
-          <a:lstStyle xmlns:a="http://schemas.openxmlformats.org/drawingml/2006/main"/>
-          <a:p xmlns:a="http://schemas.openxmlformats.org/drawingml/2006/main">
-            <a:pPr>
-              <a:defRPr sz="975">
-                <a:solidFill>
-                  <a:srgbClr val="63708A"/>
-                </a:solidFill>
-                <a:latin typeface="Arial"/>
-                <a:ea typeface="Arial"/>
-                <a:cs typeface="Arial"/>
-              </a:defRPr>
-            </a:pPr>
-          </a:p>
-        </c:txPr>
-        <c:crossAx val="48672768"/>
-      </c:catAx>
-      <c:valAx>
-        <c:axId val="48672768"/>
-        <c:scaling>
-          <c:orientation val="minMax"/>
-        </c:scaling>
-        <c:delete val="0"/>
-        <c:axPos val="b"/>
-        <c:numFmt formatCode="General"/>
-        <c:majorTickMark val="none"/>
-        <c:minorTickMark val="none"/>
-        <c:spPr>
-          <a:ln xmlns:a="http://schemas.openxmlformats.org/drawingml/2006/main" w="0">
-            <a:noFill/>
-          </a:ln>
-        </c:spPr>
-        <c:txPr>
-          <a:bodyPr xmlns:a="http://schemas.openxmlformats.org/drawingml/2006/main" anchorCtr="1"/>
-          <a:lstStyle xmlns:a="http://schemas.openxmlformats.org/drawingml/2006/main"/>
-          <a:p xmlns:a="http://schemas.openxmlformats.org/drawingml/2006/main">
-            <a:pPr>
-              <a:defRPr sz="1125" b="1">
-                <a:solidFill>
-                  <a:srgbClr val="14213D"/>
-                </a:solidFill>
-                <a:latin typeface="Arial"/>
-                <a:ea typeface="Arial"/>
-                <a:cs typeface="Arial"/>
-              </a:defRPr>
-            </a:pPr>
-          </a:p>
-        </c:txPr>
-        <c:crossAx val="48650112"/>
-        <c:crossBetween val="between"/>
-      </c:valAx>
-    </c:plotArea>
-    <c:plotVisOnly val="1"/>
-  </c:chart>
-  <c:externalData r:id="rIdChartSnapshot1">
-    <c:autoUpdate val="0"/>
-  </c:externalData>
-</c:chartSpace>
-</file>
-
-<file path=ppt/slides/charts/chart3.xml><?xml version="1.0" encoding="utf-8"?>
-<c:chartSpace xmlns:c="http://schemas.openxmlformats.org/drawingml/2006/chart" xmlns:r="http://schemas.openxmlformats.org/officeDocument/2006/relationships">
-  <c:lang val="en-US"/>
-  <c:chart>
-    <c:title>
-      <c:tx>
-        <c:rich>
-          <a:bodyPr xmlns:a="http://schemas.openxmlformats.org/drawingml/2006/main"/>
-          <a:lstStyle xmlns:a="http://schemas.openxmlformats.org/drawingml/2006/main"/>
-          <a:p xmlns:a="http://schemas.openxmlformats.org/drawingml/2006/main">
-            <a:r>
-              <a:rPr sz="1350" b="1">
-                <a:solidFill>
-                  <a:srgbClr val="14213D"/>
-                </a:solidFill>
-                <a:latin typeface="Arial"/>
-                <a:ea typeface="Arial"/>
-                <a:cs typeface="Arial"/>
-              </a:rPr>
-              <a:t>Доля фактических ошибок по категории (%)</a:t>
-            </a:r>
-          </a:p>
-        </c:rich>
-      </c:tx>
-      <c:overlay val="0"/>
-      <c:txPr>
-        <a:bodyPr xmlns:a="http://schemas.openxmlformats.org/drawingml/2006/main" anchorCtr="1"/>
-        <a:lstStyle xmlns:a="http://schemas.openxmlformats.org/drawingml/2006/main"/>
-        <a:p xmlns:a="http://schemas.openxmlformats.org/drawingml/2006/main">
-          <a:pPr>
-            <a:defRPr sz="1350" b="1">
-              <a:solidFill>
-                <a:srgbClr val="14213D"/>
-              </a:solidFill>
-              <a:latin typeface="Arial"/>
-              <a:ea typeface="Arial"/>
-              <a:cs typeface="Arial"/>
-            </a:defRPr>
-          </a:pPr>
-        </a:p>
-      </c:txPr>
-    </c:title>
-    <c:plotArea>
-      <c:barChart>
-        <c:barDir val="bar"/>
-        <c:grouping val="clustered"/>
-        <c:varyColors val="0"/>
-        <c:ser>
-          <c:idx val="0"/>
-          <c:order val="0"/>
-          <c:tx>
-            <c:v>Ошибки</c:v>
-          </c:tx>
-          <c:spPr>
-            <a:solidFill xmlns:a="http://schemas.openxmlformats.org/drawingml/2006/main">
-              <a:srgbClr val="2F6BFF"/>
-            </a:solidFill>
-          </c:spPr>
-          <c:dPt>
-            <c:idx val="4"/>
-            <c:invertIfNegative val="0"/>
-            <c:spPr>
-              <a:solidFill xmlns:a="http://schemas.openxmlformats.org/drawingml/2006/main">
-                <a:srgbClr val="FFBF47"/>
-              </a:solidFill>
-            </c:spPr>
-          </c:dPt>
-          <c:dPt>
-            <c:idx val="5"/>
-            <c:invertIfNegative val="0"/>
-            <c:spPr>
-              <a:solidFill xmlns:a="http://schemas.openxmlformats.org/drawingml/2006/main">
-                <a:srgbClr val="FF6B6B"/>
-              </a:solidFill>
-            </c:spPr>
-          </c:dPt>
-          <c:cat>
-            <c:strRef>
-              <c:f>'Chart Data'!$A$2:$A$7</c:f>
-              <c:strCache>
-                <c:ptCount val="6"/>
-                <c:pt idx="0">
-                  <c:v>Наука</c:v>
-                </c:pt>
-                <c:pt idx="1">
-                  <c:v>География</c:v>
-                </c:pt>
-                <c:pt idx="2">
-                  <c:v>История</c:v>
-                </c:pt>
-                <c:pt idx="3">
-                  <c:v>Культура</c:v>
-                </c:pt>
-                <c:pt idx="4">
-                  <c:v>Ложная предпосылка</c:v>
-                </c:pt>
-                <c:pt idx="5">
-                  <c:v>Казахстан</c:v>
-                </c:pt>
-              </c:strCache>
-            </c:strRef>
-          </c:cat>
-          <c:val>
-            <c:numRef>
-              <c:f>'Chart Data'!$B$2:$B$7</c:f>
-              <c:numCache>
-                <c:formatCode>General</c:formatCode>
-                <c:ptCount val="6"/>
-                <c:pt idx="0">
-                  <c:v>1.39</c:v>
-                </c:pt>
-                <c:pt idx="1">
-                  <c:v>5.56</c:v>
-                </c:pt>
-                <c:pt idx="2">
-                  <c:v>11.11</c:v>
-                </c:pt>
-                <c:pt idx="3">
-                  <c:v>13.77</c:v>
-                </c:pt>
-                <c:pt idx="4">
-                  <c:v>31.64</c:v>
-                </c:pt>
-                <c:pt idx="5">
-                  <c:v>52.11</c:v>
-                </c:pt>
-              </c:numCache>
-            </c:numRef>
-          </c:val>
-        </c:ser>
-        <c:dLbls>
-          <c:txPr>
-            <a:bodyPr xmlns:a="http://schemas.openxmlformats.org/drawingml/2006/main" anchorCtr="1"/>
-            <a:lstStyle xmlns:a="http://schemas.openxmlformats.org/drawingml/2006/main"/>
-            <a:p xmlns:a="http://schemas.openxmlformats.org/drawingml/2006/main">
-              <a:pPr>
-                <a:defRPr sz="1050" b="1">
-                  <a:solidFill>
-                    <a:srgbClr val="14213D"/>
-                  </a:solidFill>
-                  <a:latin typeface="Arial"/>
-                  <a:ea typeface="Arial"/>
-                  <a:cs typeface="Arial"/>
-                </a:defRPr>
-              </a:pPr>
-            </a:p>
-          </c:txPr>
-          <c:dLblPos val="outEnd"/>
-          <c:showLegendKey val="0"/>
-          <c:showVal val="1"/>
-          <c:showCatName val="0"/>
-          <c:showSerName val="0"/>
-          <c:showPercent val="0"/>
-          <c:showBubbleSize val="0"/>
-          <c:showLeaderLines val="0"/>
-        </c:dLbls>
-        <c:gapWidth val="34"/>
-        <c:axId val="48650112"/>
-        <c:axId val="48672768"/>
-      </c:barChart>
-      <c:catAx>
-        <c:axId val="48650112"/>
-        <c:scaling>
-          <c:orientation val="minMax"/>
-        </c:scaling>
-        <c:delete val="0"/>
-        <c:axPos val="l"/>
-        <c:majorGridlines>
-          <c:spPr>
-            <a:ln xmlns:a="http://schemas.openxmlformats.org/drawingml/2006/main" w="9525">
-              <a:solidFill>
-                <a:srgbClr val="DDE4EF"/>
-              </a:solidFill>
-              <a:prstDash val="solid"/>
-            </a:ln>
-          </c:spPr>
-        </c:majorGridlines>
-        <c:numFmt formatCode="0&quot;%&quot;"/>
-        <c:majorTickMark val="none"/>
-        <c:minorTickMark val="none"/>
-        <c:spPr>
-          <a:ln xmlns:a="http://schemas.openxmlformats.org/drawingml/2006/main" w="9525">
-            <a:solidFill>
-              <a:srgbClr val="DDE4EF"/>
-            </a:solidFill>
-          </a:ln>
-        </c:spPr>
-        <c:txPr>
-          <a:bodyPr xmlns:a="http://schemas.openxmlformats.org/drawingml/2006/main" anchorCtr="1"/>
-          <a:lstStyle xmlns:a="http://schemas.openxmlformats.org/drawingml/2006/main"/>
-          <a:p xmlns:a="http://schemas.openxmlformats.org/drawingml/2006/main">
-            <a:pPr>
-              <a:defRPr sz="900">
-                <a:solidFill>
-                  <a:srgbClr val="63708A"/>
-                </a:solidFill>
-                <a:latin typeface="Arial"/>
-                <a:ea typeface="Arial"/>
-                <a:cs typeface="Arial"/>
-              </a:defRPr>
-            </a:pPr>
-          </a:p>
-        </c:txPr>
-        <c:crossAx val="48672768"/>
-      </c:catAx>
-      <c:valAx>
-        <c:axId val="48672768"/>
-        <c:scaling>
-          <c:orientation val="minMax"/>
-        </c:scaling>
-        <c:delete val="0"/>
-        <c:axPos val="b"/>
-        <c:numFmt formatCode="General"/>
-        <c:majorTickMark val="none"/>
-        <c:minorTickMark val="none"/>
-        <c:spPr>
-          <a:ln xmlns:a="http://schemas.openxmlformats.org/drawingml/2006/main" w="0">
-            <a:noFill/>
-          </a:ln>
-        </c:spPr>
-        <c:txPr>
-          <a:bodyPr xmlns:a="http://schemas.openxmlformats.org/drawingml/2006/main" anchorCtr="1"/>
-          <a:lstStyle xmlns:a="http://schemas.openxmlformats.org/drawingml/2006/main"/>
-          <a:p xmlns:a="http://schemas.openxmlformats.org/drawingml/2006/main">
-            <a:pPr>
-              <a:defRPr sz="1050" b="1">
-                <a:solidFill>
-                  <a:srgbClr val="14213D"/>
-                </a:solidFill>
-                <a:latin typeface="Arial"/>
-                <a:ea typeface="Arial"/>
-                <a:cs typeface="Arial"/>
-              </a:defRPr>
-            </a:pPr>
-          </a:p>
-        </c:txPr>
-        <c:crossAx val="48650112"/>
-        <c:crossBetween val="between"/>
-      </c:valAx>
-    </c:plotArea>
-    <c:plotVisOnly val="1"/>
-  </c:chart>
-  <c:externalData r:id="rIdChartSnapshot1">
-    <c:autoUpdate val="0"/>
-  </c:externalData>
-</c:chartSpace>
-</file>
-
 <file path=ppt/slides/slide1.xml><?xml version="1.0" encoding="utf-8"?>
 <p:sld xmlns:p="http://schemas.openxmlformats.org/presentationml/2006/main">
   <p:cSld>
@@ -2758,7 +2059,7 @@
           <p:nvPr/>
         </p:nvPicPr>
         <p:blipFill>
-          <a:blip xmlns:r="http://schemas.openxmlformats.org/officeDocument/2006/relationships" xmlns:a="http://schemas.openxmlformats.org/drawingml/2006/main" r:embed="R18201c138b9d4f70"/>
+          <a:blip xmlns:r="http://schemas.openxmlformats.org/officeDocument/2006/relationships" xmlns:a="http://schemas.openxmlformats.org/drawingml/2006/main" r:embed="Rdd009f724a9b4616"/>
           <a:srcRect xmlns:a="http://schemas.openxmlformats.org/drawingml/2006/main" l="0" t="27" r="0" b="27"/>
           <a:stretch xmlns:a="http://schemas.openxmlformats.org/drawingml/2006/main">
             <a:fillRect l="0" t="0" r="0" b="0"/>
@@ -2779,7 +2080,7 @@
           <p:cNvPr id="2" name="">
             <a:extLst xmlns:a="http://schemas.openxmlformats.org/drawingml/2006/main">
               <a:ext uri="{FF2B5EF4-FFF2-40B4-BE49-F238E27FC236}">
-                <a16:creationId xmlns:a16="http://schemas.microsoft.com/office/drawing/2014/main" id="{94D117A6-DDED-4C84-9FD0-EA8A1AF388AC}"/>
+                <a16:creationId xmlns:a16="http://schemas.microsoft.com/office/drawing/2014/main" id="{B1C4A406-E90C-4AEF-BA74-B0FF4DF3A3D8}"/>
               </a:ext>
             </a:extLst>
           </p:cNvPr>
@@ -2809,7 +2110,7 @@
           <p:cNvPr id="3" name="">
             <a:extLst xmlns:a="http://schemas.openxmlformats.org/drawingml/2006/main">
               <a:ext uri="{FF2B5EF4-FFF2-40B4-BE49-F238E27FC236}">
-                <a16:creationId xmlns:a16="http://schemas.microsoft.com/office/drawing/2014/main" id="{71E9E55D-5ED6-42F3-8DE5-8E0428E09A94}"/>
+                <a16:creationId xmlns:a16="http://schemas.microsoft.com/office/drawing/2014/main" id="{B5DB9A56-2FDF-4E18-9C21-14F6F139BBDC}"/>
               </a:ext>
             </a:extLst>
           </p:cNvPr>
@@ -2841,7 +2142,7 @@
           <p:cNvPr id="4" name="">
             <a:extLst xmlns:a="http://schemas.openxmlformats.org/drawingml/2006/main">
               <a:ext uri="{FF2B5EF4-FFF2-40B4-BE49-F238E27FC236}">
-                <a16:creationId xmlns:a16="http://schemas.microsoft.com/office/drawing/2014/main" id="{B8E5C69A-1CAD-4118-BACD-B1076B7C4CED}"/>
+                <a16:creationId xmlns:a16="http://schemas.microsoft.com/office/drawing/2014/main" id="{7F3C0531-9C64-4C72-8605-D8A9D566BF39}"/>
               </a:ext>
             </a:extLst>
           </p:cNvPr>
@@ -2873,7 +2174,7 @@
           <p:cNvPr id="5" name="">
             <a:extLst xmlns:a="http://schemas.openxmlformats.org/drawingml/2006/main">
               <a:ext uri="{FF2B5EF4-FFF2-40B4-BE49-F238E27FC236}">
-                <a16:creationId xmlns:a16="http://schemas.microsoft.com/office/drawing/2014/main" id="{17A6C8B0-0F1B-49F0-AD80-6B5964A733A3}"/>
+                <a16:creationId xmlns:a16="http://schemas.microsoft.com/office/drawing/2014/main" id="{D99CD925-3FE1-4306-84CA-A284E48EADC5}"/>
               </a:ext>
             </a:extLst>
           </p:cNvPr>
@@ -2930,7 +2231,7 @@
           <p:cNvPr id="6" name="">
             <a:extLst xmlns:a="http://schemas.openxmlformats.org/drawingml/2006/main">
               <a:ext uri="{FF2B5EF4-FFF2-40B4-BE49-F238E27FC236}">
-                <a16:creationId xmlns:a16="http://schemas.microsoft.com/office/drawing/2014/main" id="{6AB06E62-980E-4A1E-A6A4-18A76DBDC296}"/>
+                <a16:creationId xmlns:a16="http://schemas.microsoft.com/office/drawing/2014/main" id="{E0EC53DC-D96F-4D7C-94FF-72379246A028}"/>
               </a:ext>
             </a:extLst>
           </p:cNvPr>
@@ -3033,7 +2334,7 @@
           <p:cNvPr id="7" name="">
             <a:extLst xmlns:a="http://schemas.openxmlformats.org/drawingml/2006/main">
               <a:ext uri="{FF2B5EF4-FFF2-40B4-BE49-F238E27FC236}">
-                <a16:creationId xmlns:a16="http://schemas.microsoft.com/office/drawing/2014/main" id="{446CE43B-9363-47B5-B8C3-51A987390AEA}"/>
+                <a16:creationId xmlns:a16="http://schemas.microsoft.com/office/drawing/2014/main" id="{F8E82501-C8AA-45BB-8868-890D93767717}"/>
               </a:ext>
             </a:extLst>
           </p:cNvPr>
@@ -3090,7 +2391,7 @@
           <p:cNvPr id="8" name="">
             <a:extLst xmlns:a="http://schemas.openxmlformats.org/drawingml/2006/main">
               <a:ext uri="{FF2B5EF4-FFF2-40B4-BE49-F238E27FC236}">
-                <a16:creationId xmlns:a16="http://schemas.microsoft.com/office/drawing/2014/main" id="{BFCEEAC1-5D75-495E-9AD1-C01DB4C2D247}"/>
+                <a16:creationId xmlns:a16="http://schemas.microsoft.com/office/drawing/2014/main" id="{5004F920-4302-465F-BC5D-5456DDE59C14}"/>
               </a:ext>
             </a:extLst>
           </p:cNvPr>
@@ -3147,7 +2448,7 @@
           <p:cNvPr id="9" name="">
             <a:extLst xmlns:a="http://schemas.openxmlformats.org/drawingml/2006/main">
               <a:ext uri="{FF2B5EF4-FFF2-40B4-BE49-F238E27FC236}">
-                <a16:creationId xmlns:a16="http://schemas.microsoft.com/office/drawing/2014/main" id="{8E324CDD-4178-49FD-BA00-DF5AD7EFFAEB}"/>
+                <a16:creationId xmlns:a16="http://schemas.microsoft.com/office/drawing/2014/main" id="{E13302FB-778E-4BF0-9B57-A2B62F462AA5}"/>
               </a:ext>
             </a:extLst>
           </p:cNvPr>
@@ -3204,7 +2505,7 @@
           <p:cNvPr id="10" name="">
             <a:extLst xmlns:a="http://schemas.openxmlformats.org/drawingml/2006/main">
               <a:ext uri="{FF2B5EF4-FFF2-40B4-BE49-F238E27FC236}">
-                <a16:creationId xmlns:a16="http://schemas.microsoft.com/office/drawing/2014/main" id="{A4AA2910-8075-4348-8714-BEDABFACD828}"/>
+                <a16:creationId xmlns:a16="http://schemas.microsoft.com/office/drawing/2014/main" id="{BE024A22-33E7-49EA-9946-1F1758584834}"/>
               </a:ext>
             </a:extLst>
           </p:cNvPr>
@@ -3261,7 +2562,7 @@
           <p:cNvPr id="11" name="">
             <a:extLst xmlns:a="http://schemas.openxmlformats.org/drawingml/2006/main">
               <a:ext uri="{FF2B5EF4-FFF2-40B4-BE49-F238E27FC236}">
-                <a16:creationId xmlns:a16="http://schemas.microsoft.com/office/drawing/2014/main" id="{51C64CB8-6309-469D-91EA-7ABFBE9798C7}"/>
+                <a16:creationId xmlns:a16="http://schemas.microsoft.com/office/drawing/2014/main" id="{D23BE94C-6C6B-44E6-801C-1BD493DF947C}"/>
               </a:ext>
             </a:extLst>
           </p:cNvPr>
@@ -3341,7 +2642,7 @@
           <p:cNvPr id="12" name="">
             <a:extLst xmlns:a="http://schemas.openxmlformats.org/drawingml/2006/main">
               <a:ext uri="{FF2B5EF4-FFF2-40B4-BE49-F238E27FC236}">
-                <a16:creationId xmlns:a16="http://schemas.microsoft.com/office/drawing/2014/main" id="{5B286333-C076-4929-BC9B-84807FB84332}"/>
+                <a16:creationId xmlns:a16="http://schemas.microsoft.com/office/drawing/2014/main" id="{6F7EC110-F637-487C-A708-22D7E2D0DEB2}"/>
               </a:ext>
             </a:extLst>
           </p:cNvPr>
@@ -3396,7 +2697,7 @@
     </p:spTree>
     <p:extLst>
       <p:ext uri="{BB962C8B-B14F-4D97-AF65-F5344CB8AC3E}">
-        <p14:creationId xmlns:p14="http://schemas.microsoft.com/office/powerpoint/2010/main" val="641328819"/>
+        <p14:creationId xmlns:p14="http://schemas.microsoft.com/office/powerpoint/2010/main" val="304009174"/>
       </p:ext>
     </p:extLst>
   </p:cSld>
@@ -3424,10 +2725,10 @@
       </p:grpSpPr>
       <p:sp>
         <p:nvSpPr>
-          <p:cNvPr id="12" name="">
-            <a:extLst xmlns:a="http://schemas.openxmlformats.org/drawingml/2006/main">
-              <a:ext uri="{FF2B5EF4-FFF2-40B4-BE49-F238E27FC236}">
-                <a16:creationId xmlns:a16="http://schemas.microsoft.com/office/drawing/2014/main" id="{41175171-F74A-4F94-B3BA-4887D30F23A1}"/>
+          <p:cNvPr id="44" name="">
+            <a:extLst xmlns:a="http://schemas.openxmlformats.org/drawingml/2006/main">
+              <a:ext uri="{FF2B5EF4-FFF2-40B4-BE49-F238E27FC236}">
+                <a16:creationId xmlns:a16="http://schemas.microsoft.com/office/drawing/2014/main" id="{CFA3022A-446F-495E-A205-451EAB380542}"/>
               </a:ext>
             </a:extLst>
           </p:cNvPr>
@@ -3457,7 +2758,7 @@
           <p:cNvPr id="2" name="">
             <a:extLst xmlns:a="http://schemas.openxmlformats.org/drawingml/2006/main">
               <a:ext uri="{FF2B5EF4-FFF2-40B4-BE49-F238E27FC236}">
-                <a16:creationId xmlns:a16="http://schemas.microsoft.com/office/drawing/2014/main" id="{75BD1BF3-40C2-406F-A7CF-44391335069B}"/>
+                <a16:creationId xmlns:a16="http://schemas.microsoft.com/office/drawing/2014/main" id="{F95E063D-D460-4D14-AFB7-F63B7DE97F7C}"/>
               </a:ext>
             </a:extLst>
           </p:cNvPr>
@@ -3514,7 +2815,7 @@
           <p:cNvPr id="3" name="">
             <a:extLst xmlns:a="http://schemas.openxmlformats.org/drawingml/2006/main">
               <a:ext uri="{FF2B5EF4-FFF2-40B4-BE49-F238E27FC236}">
-                <a16:creationId xmlns:a16="http://schemas.microsoft.com/office/drawing/2014/main" id="{F0EFEA2C-A201-498C-890A-F5BBB362AE77}"/>
+                <a16:creationId xmlns:a16="http://schemas.microsoft.com/office/drawing/2014/main" id="{F1CBBBBD-10F0-4BE2-A2A2-B079E059B310}"/>
               </a:ext>
             </a:extLst>
           </p:cNvPr>
@@ -3571,7 +2872,7 @@
           <p:cNvPr id="4" name="">
             <a:extLst xmlns:a="http://schemas.openxmlformats.org/drawingml/2006/main">
               <a:ext uri="{FF2B5EF4-FFF2-40B4-BE49-F238E27FC236}">
-                <a16:creationId xmlns:a16="http://schemas.microsoft.com/office/drawing/2014/main" id="{58667396-11A7-42A8-9799-B87340DB7A17}"/>
+                <a16:creationId xmlns:a16="http://schemas.microsoft.com/office/drawing/2014/main" id="{A3A1252E-F9CA-4B30-B20F-405712E7B135}"/>
               </a:ext>
             </a:extLst>
           </p:cNvPr>
@@ -3602,7 +2903,7 @@
           <p:cNvPr id="5" name="">
             <a:extLst xmlns:a="http://schemas.openxmlformats.org/drawingml/2006/main">
               <a:ext uri="{FF2B5EF4-FFF2-40B4-BE49-F238E27FC236}">
-                <a16:creationId xmlns:a16="http://schemas.microsoft.com/office/drawing/2014/main" id="{5D3DAAC8-F998-4822-B99F-33EC6EE04C18}"/>
+                <a16:creationId xmlns:a16="http://schemas.microsoft.com/office/drawing/2014/main" id="{E271D25D-077A-424C-839F-17030B150197}"/>
               </a:ext>
             </a:extLst>
           </p:cNvPr>
@@ -3654,28 +2955,1549 @@
           </a:p>
         </p:txBody>
       </p:sp>
-      <p:graphicFrame>
-        <p:nvGraphicFramePr>
-          <p:cNvPr id="17" name="Chart"/>
-          <p:cNvGraphicFramePr/>
-          <p:nvPr/>
-        </p:nvGraphicFramePr>
-        <p:xfrm>
-          <a:off xmlns:a="http://schemas.openxmlformats.org/drawingml/2006/main" x="723900" y="1524000"/>
-          <a:ext xmlns:a="http://schemas.openxmlformats.org/drawingml/2006/main" cx="8286750" cy="4191000"/>
-        </p:xfrm>
-        <a:graphic xmlns:a="http://schemas.openxmlformats.org/drawingml/2006/main">
-          <a:graphicData uri="http://schemas.openxmlformats.org/drawingml/2006/chart">
-            <c:chart xmlns:r="http://schemas.openxmlformats.org/officeDocument/2006/relationships" xmlns:c="http://schemas.openxmlformats.org/drawingml/2006/chart" r:id="R2dbab3e3ad204679"/>
-          </a:graphicData>
-        </a:graphic>
-      </p:graphicFrame>
+      <p:sp>
+        <p:nvSpPr>
+          <p:cNvPr id="6" name="">
+            <a:extLst xmlns:a="http://schemas.openxmlformats.org/drawingml/2006/main">
+              <a:ext uri="{FF2B5EF4-FFF2-40B4-BE49-F238E27FC236}">
+                <a16:creationId xmlns:a16="http://schemas.microsoft.com/office/drawing/2014/main" id="{4C27D545-D195-4298-BC4B-DFAEDA18859A}"/>
+              </a:ext>
+            </a:extLst>
+          </p:cNvPr>
+          <p:cNvSpPr>
+            <a:spLocks xmlns:a="http://schemas.openxmlformats.org/drawingml/2006/main" noGrp="1"/>
+          </p:cNvSpPr>
+          <p:nvPr/>
+        </p:nvSpPr>
+        <p:spPr>
+          <a:xfrm xmlns:a="http://schemas.openxmlformats.org/drawingml/2006/main">
+            <a:off x="723900" y="1524000"/>
+            <a:ext cx="8286750" cy="323850"/>
+          </a:xfrm>
+          <a:prstGeom xmlns:a="http://schemas.openxmlformats.org/drawingml/2006/main" prst="rect">
+            <a:avLst/>
+          </a:prstGeom>
+          <a:noFill xmlns:a="http://schemas.openxmlformats.org/drawingml/2006/main"/>
+          <a:ln xmlns:a="http://schemas.openxmlformats.org/drawingml/2006/main" w="0">
+            <a:noFill/>
+          </a:ln>
+        </p:spPr>
+        <p:txBody>
+          <a:bodyPr xmlns:a="http://schemas.openxmlformats.org/drawingml/2006/main" anchor="ctr">
+            <a:normAutofit fontScale="100000"/>
+          </a:bodyPr>
+          <a:lstStyle xmlns:a="http://schemas.openxmlformats.org/drawingml/2006/main"/>
+          <a:p xmlns:a="http://schemas.openxmlformats.org/drawingml/2006/main">
+            <a:pPr algn="ctr">
+              <a:defRPr sz="1350" b="1">
+                <a:solidFill>
+                  <a:srgbClr val="14213D"/>
+                </a:solidFill>
+                <a:latin typeface="Arial"/>
+                <a:ea typeface="Arial"/>
+                <a:cs typeface="Arial"/>
+              </a:defRPr>
+            </a:pPr>
+            <a:r>
+              <a:rPr sz="1350" b="1">
+                <a:solidFill>
+                  <a:srgbClr val="14213D"/>
+                </a:solidFill>
+                <a:latin typeface="Arial"/>
+                <a:ea typeface="Arial"/>
+                <a:cs typeface="Arial"/>
+              </a:rPr>
+              <a:t>Доля фактических ошибок по категории (%)</a:t>
+            </a:r>
+          </a:p>
+        </p:txBody>
+      </p:sp>
       <p:sp>
         <p:nvSpPr>
           <p:cNvPr id="7" name="">
             <a:extLst xmlns:a="http://schemas.openxmlformats.org/drawingml/2006/main">
               <a:ext uri="{FF2B5EF4-FFF2-40B4-BE49-F238E27FC236}">
-                <a16:creationId xmlns:a16="http://schemas.microsoft.com/office/drawing/2014/main" id="{2E7E71FD-0038-457C-B418-0A890E1DEEFC}"/>
+                <a16:creationId xmlns:a16="http://schemas.microsoft.com/office/drawing/2014/main" id="{8A6C4FB1-AB1C-49DA-9054-AC1464B26B3F}"/>
+              </a:ext>
+            </a:extLst>
+          </p:cNvPr>
+          <p:cNvSpPr>
+            <a:spLocks xmlns:a="http://schemas.openxmlformats.org/drawingml/2006/main" noGrp="1"/>
+          </p:cNvSpPr>
+          <p:nvPr/>
+        </p:nvSpPr>
+        <p:spPr>
+          <a:xfrm xmlns:a="http://schemas.openxmlformats.org/drawingml/2006/main">
+            <a:off x="2343150" y="2114550"/>
+            <a:ext cx="0" cy="3124200"/>
+          </a:xfrm>
+          <a:prstGeom xmlns:a="http://schemas.openxmlformats.org/drawingml/2006/main" prst="line">
+            <a:avLst/>
+          </a:prstGeom>
+          <a:noFill xmlns:a="http://schemas.openxmlformats.org/drawingml/2006/main"/>
+          <a:ln xmlns:a="http://schemas.openxmlformats.org/drawingml/2006/main" w="9525">
+            <a:solidFill>
+              <a:srgbClr val="DDE4EF"/>
+            </a:solidFill>
+            <a:prstDash val="solid"/>
+          </a:ln>
+        </p:spPr>
+      </p:sp>
+      <p:sp>
+        <p:nvSpPr>
+          <p:cNvPr id="8" name="">
+            <a:extLst xmlns:a="http://schemas.openxmlformats.org/drawingml/2006/main">
+              <a:ext uri="{FF2B5EF4-FFF2-40B4-BE49-F238E27FC236}">
+                <a16:creationId xmlns:a16="http://schemas.microsoft.com/office/drawing/2014/main" id="{139CDD31-4048-4A16-9466-D8DBB0F948B3}"/>
+              </a:ext>
+            </a:extLst>
+          </p:cNvPr>
+          <p:cNvSpPr>
+            <a:spLocks xmlns:a="http://schemas.openxmlformats.org/drawingml/2006/main" noGrp="1"/>
+          </p:cNvSpPr>
+          <p:nvPr/>
+        </p:nvSpPr>
+        <p:spPr>
+          <a:xfrm xmlns:a="http://schemas.openxmlformats.org/drawingml/2006/main">
+            <a:off x="2152650" y="5314950"/>
+            <a:ext cx="381000" cy="209550"/>
+          </a:xfrm>
+          <a:prstGeom xmlns:a="http://schemas.openxmlformats.org/drawingml/2006/main" prst="rect">
+            <a:avLst/>
+          </a:prstGeom>
+          <a:noFill xmlns:a="http://schemas.openxmlformats.org/drawingml/2006/main"/>
+          <a:ln xmlns:a="http://schemas.openxmlformats.org/drawingml/2006/main" w="0">
+            <a:noFill/>
+          </a:ln>
+        </p:spPr>
+        <p:txBody>
+          <a:bodyPr xmlns:a="http://schemas.openxmlformats.org/drawingml/2006/main" anchor="ctr">
+            <a:normAutofit fontScale="86111"/>
+          </a:bodyPr>
+          <a:lstStyle xmlns:a="http://schemas.openxmlformats.org/drawingml/2006/main"/>
+          <a:p xmlns:a="http://schemas.openxmlformats.org/drawingml/2006/main">
+            <a:pPr algn="ctr">
+              <a:defRPr sz="900" b="1">
+                <a:solidFill>
+                  <a:srgbClr val="63708A"/>
+                </a:solidFill>
+                <a:latin typeface="Arial"/>
+                <a:ea typeface="Arial"/>
+                <a:cs typeface="Arial"/>
+              </a:defRPr>
+            </a:pPr>
+            <a:r>
+              <a:rPr sz="900" b="1">
+                <a:solidFill>
+                  <a:srgbClr val="63708A"/>
+                </a:solidFill>
+                <a:latin typeface="Arial"/>
+                <a:ea typeface="Arial"/>
+                <a:cs typeface="Arial"/>
+              </a:rPr>
+              <a:t>0</a:t>
+            </a:r>
+          </a:p>
+        </p:txBody>
+      </p:sp>
+      <p:sp>
+        <p:nvSpPr>
+          <p:cNvPr id="9" name="">
+            <a:extLst xmlns:a="http://schemas.openxmlformats.org/drawingml/2006/main">
+              <a:ext uri="{FF2B5EF4-FFF2-40B4-BE49-F238E27FC236}">
+                <a16:creationId xmlns:a16="http://schemas.microsoft.com/office/drawing/2014/main" id="{BEDB92B8-AE11-4A42-B4B1-0748ECD102FA}"/>
+              </a:ext>
+            </a:extLst>
+          </p:cNvPr>
+          <p:cNvSpPr>
+            <a:spLocks xmlns:a="http://schemas.openxmlformats.org/drawingml/2006/main" noGrp="1"/>
+          </p:cNvSpPr>
+          <p:nvPr/>
+        </p:nvSpPr>
+        <p:spPr>
+          <a:xfrm xmlns:a="http://schemas.openxmlformats.org/drawingml/2006/main">
+            <a:off x="3368675" y="2114550"/>
+            <a:ext cx="0" cy="3124200"/>
+          </a:xfrm>
+          <a:prstGeom xmlns:a="http://schemas.openxmlformats.org/drawingml/2006/main" prst="line">
+            <a:avLst/>
+          </a:prstGeom>
+          <a:noFill xmlns:a="http://schemas.openxmlformats.org/drawingml/2006/main"/>
+          <a:ln xmlns:a="http://schemas.openxmlformats.org/drawingml/2006/main" w="9525">
+            <a:solidFill>
+              <a:srgbClr val="DDE4EF"/>
+            </a:solidFill>
+            <a:prstDash val="solid"/>
+          </a:ln>
+        </p:spPr>
+      </p:sp>
+      <p:sp>
+        <p:nvSpPr>
+          <p:cNvPr id="10" name="">
+            <a:extLst xmlns:a="http://schemas.openxmlformats.org/drawingml/2006/main">
+              <a:ext uri="{FF2B5EF4-FFF2-40B4-BE49-F238E27FC236}">
+                <a16:creationId xmlns:a16="http://schemas.microsoft.com/office/drawing/2014/main" id="{7A5F24E3-06CE-4391-A408-C531561B8134}"/>
+              </a:ext>
+            </a:extLst>
+          </p:cNvPr>
+          <p:cNvSpPr>
+            <a:spLocks xmlns:a="http://schemas.openxmlformats.org/drawingml/2006/main" noGrp="1"/>
+          </p:cNvSpPr>
+          <p:nvPr/>
+        </p:nvSpPr>
+        <p:spPr>
+          <a:xfrm xmlns:a="http://schemas.openxmlformats.org/drawingml/2006/main">
+            <a:off x="3178175" y="5314950"/>
+            <a:ext cx="381000" cy="209550"/>
+          </a:xfrm>
+          <a:prstGeom xmlns:a="http://schemas.openxmlformats.org/drawingml/2006/main" prst="rect">
+            <a:avLst/>
+          </a:prstGeom>
+          <a:noFill xmlns:a="http://schemas.openxmlformats.org/drawingml/2006/main"/>
+          <a:ln xmlns:a="http://schemas.openxmlformats.org/drawingml/2006/main" w="0">
+            <a:noFill/>
+          </a:ln>
+        </p:spPr>
+        <p:txBody>
+          <a:bodyPr xmlns:a="http://schemas.openxmlformats.org/drawingml/2006/main" anchor="ctr">
+            <a:normAutofit fontScale="86111"/>
+          </a:bodyPr>
+          <a:lstStyle xmlns:a="http://schemas.openxmlformats.org/drawingml/2006/main"/>
+          <a:p xmlns:a="http://schemas.openxmlformats.org/drawingml/2006/main">
+            <a:pPr algn="ctr">
+              <a:defRPr sz="900" b="0">
+                <a:solidFill>
+                  <a:srgbClr val="63708A"/>
+                </a:solidFill>
+                <a:latin typeface="Arial"/>
+                <a:ea typeface="Arial"/>
+                <a:cs typeface="Arial"/>
+              </a:defRPr>
+            </a:pPr>
+            <a:r>
+              <a:rPr sz="900" b="0">
+                <a:solidFill>
+                  <a:srgbClr val="63708A"/>
+                </a:solidFill>
+                <a:latin typeface="Arial"/>
+                <a:ea typeface="Arial"/>
+                <a:cs typeface="Arial"/>
+              </a:rPr>
+              <a:t>10</a:t>
+            </a:r>
+          </a:p>
+        </p:txBody>
+      </p:sp>
+      <p:sp>
+        <p:nvSpPr>
+          <p:cNvPr id="11" name="">
+            <a:extLst xmlns:a="http://schemas.openxmlformats.org/drawingml/2006/main">
+              <a:ext uri="{FF2B5EF4-FFF2-40B4-BE49-F238E27FC236}">
+                <a16:creationId xmlns:a16="http://schemas.microsoft.com/office/drawing/2014/main" id="{D5478913-E42C-4C86-99E8-F0AAFFBB4913}"/>
+              </a:ext>
+            </a:extLst>
+          </p:cNvPr>
+          <p:cNvSpPr>
+            <a:spLocks xmlns:a="http://schemas.openxmlformats.org/drawingml/2006/main" noGrp="1"/>
+          </p:cNvSpPr>
+          <p:nvPr/>
+        </p:nvSpPr>
+        <p:spPr>
+          <a:xfrm xmlns:a="http://schemas.openxmlformats.org/drawingml/2006/main">
+            <a:off x="4394200" y="2114550"/>
+            <a:ext cx="0" cy="3124200"/>
+          </a:xfrm>
+          <a:prstGeom xmlns:a="http://schemas.openxmlformats.org/drawingml/2006/main" prst="line">
+            <a:avLst/>
+          </a:prstGeom>
+          <a:noFill xmlns:a="http://schemas.openxmlformats.org/drawingml/2006/main"/>
+          <a:ln xmlns:a="http://schemas.openxmlformats.org/drawingml/2006/main" w="9525">
+            <a:solidFill>
+              <a:srgbClr val="DDE4EF"/>
+            </a:solidFill>
+            <a:prstDash val="solid"/>
+          </a:ln>
+        </p:spPr>
+      </p:sp>
+      <p:sp>
+        <p:nvSpPr>
+          <p:cNvPr id="12" name="">
+            <a:extLst xmlns:a="http://schemas.openxmlformats.org/drawingml/2006/main">
+              <a:ext uri="{FF2B5EF4-FFF2-40B4-BE49-F238E27FC236}">
+                <a16:creationId xmlns:a16="http://schemas.microsoft.com/office/drawing/2014/main" id="{24860B8D-73EC-4306-89C4-3E981DB118DA}"/>
+              </a:ext>
+            </a:extLst>
+          </p:cNvPr>
+          <p:cNvSpPr>
+            <a:spLocks xmlns:a="http://schemas.openxmlformats.org/drawingml/2006/main" noGrp="1"/>
+          </p:cNvSpPr>
+          <p:nvPr/>
+        </p:nvSpPr>
+        <p:spPr>
+          <a:xfrm xmlns:a="http://schemas.openxmlformats.org/drawingml/2006/main">
+            <a:off x="4203700" y="5314950"/>
+            <a:ext cx="381000" cy="209550"/>
+          </a:xfrm>
+          <a:prstGeom xmlns:a="http://schemas.openxmlformats.org/drawingml/2006/main" prst="rect">
+            <a:avLst/>
+          </a:prstGeom>
+          <a:noFill xmlns:a="http://schemas.openxmlformats.org/drawingml/2006/main"/>
+          <a:ln xmlns:a="http://schemas.openxmlformats.org/drawingml/2006/main" w="0">
+            <a:noFill/>
+          </a:ln>
+        </p:spPr>
+        <p:txBody>
+          <a:bodyPr xmlns:a="http://schemas.openxmlformats.org/drawingml/2006/main" anchor="ctr">
+            <a:normAutofit fontScale="86111"/>
+          </a:bodyPr>
+          <a:lstStyle xmlns:a="http://schemas.openxmlformats.org/drawingml/2006/main"/>
+          <a:p xmlns:a="http://schemas.openxmlformats.org/drawingml/2006/main">
+            <a:pPr algn="ctr">
+              <a:defRPr sz="900" b="0">
+                <a:solidFill>
+                  <a:srgbClr val="63708A"/>
+                </a:solidFill>
+                <a:latin typeface="Arial"/>
+                <a:ea typeface="Arial"/>
+                <a:cs typeface="Arial"/>
+              </a:defRPr>
+            </a:pPr>
+            <a:r>
+              <a:rPr sz="900" b="0">
+                <a:solidFill>
+                  <a:srgbClr val="63708A"/>
+                </a:solidFill>
+                <a:latin typeface="Arial"/>
+                <a:ea typeface="Arial"/>
+                <a:cs typeface="Arial"/>
+              </a:rPr>
+              <a:t>20</a:t>
+            </a:r>
+          </a:p>
+        </p:txBody>
+      </p:sp>
+      <p:sp>
+        <p:nvSpPr>
+          <p:cNvPr id="13" name="">
+            <a:extLst xmlns:a="http://schemas.openxmlformats.org/drawingml/2006/main">
+              <a:ext uri="{FF2B5EF4-FFF2-40B4-BE49-F238E27FC236}">
+                <a16:creationId xmlns:a16="http://schemas.microsoft.com/office/drawing/2014/main" id="{4122E33C-3AB1-46EE-AB2D-50A506CEE257}"/>
+              </a:ext>
+            </a:extLst>
+          </p:cNvPr>
+          <p:cNvSpPr>
+            <a:spLocks xmlns:a="http://schemas.openxmlformats.org/drawingml/2006/main" noGrp="1"/>
+          </p:cNvSpPr>
+          <p:nvPr/>
+        </p:nvSpPr>
+        <p:spPr>
+          <a:xfrm xmlns:a="http://schemas.openxmlformats.org/drawingml/2006/main">
+            <a:off x="5419725" y="2114550"/>
+            <a:ext cx="0" cy="3124200"/>
+          </a:xfrm>
+          <a:prstGeom xmlns:a="http://schemas.openxmlformats.org/drawingml/2006/main" prst="line">
+            <a:avLst/>
+          </a:prstGeom>
+          <a:noFill xmlns:a="http://schemas.openxmlformats.org/drawingml/2006/main"/>
+          <a:ln xmlns:a="http://schemas.openxmlformats.org/drawingml/2006/main" w="9525">
+            <a:solidFill>
+              <a:srgbClr val="DDE4EF"/>
+            </a:solidFill>
+            <a:prstDash val="solid"/>
+          </a:ln>
+        </p:spPr>
+      </p:sp>
+      <p:sp>
+        <p:nvSpPr>
+          <p:cNvPr id="14" name="">
+            <a:extLst xmlns:a="http://schemas.openxmlformats.org/drawingml/2006/main">
+              <a:ext uri="{FF2B5EF4-FFF2-40B4-BE49-F238E27FC236}">
+                <a16:creationId xmlns:a16="http://schemas.microsoft.com/office/drawing/2014/main" id="{53535AA2-0B14-4B5C-871E-B1D195ED5FD3}"/>
+              </a:ext>
+            </a:extLst>
+          </p:cNvPr>
+          <p:cNvSpPr>
+            <a:spLocks xmlns:a="http://schemas.openxmlformats.org/drawingml/2006/main" noGrp="1"/>
+          </p:cNvSpPr>
+          <p:nvPr/>
+        </p:nvSpPr>
+        <p:spPr>
+          <a:xfrm xmlns:a="http://schemas.openxmlformats.org/drawingml/2006/main">
+            <a:off x="5229225" y="5314950"/>
+            <a:ext cx="381000" cy="209550"/>
+          </a:xfrm>
+          <a:prstGeom xmlns:a="http://schemas.openxmlformats.org/drawingml/2006/main" prst="rect">
+            <a:avLst/>
+          </a:prstGeom>
+          <a:noFill xmlns:a="http://schemas.openxmlformats.org/drawingml/2006/main"/>
+          <a:ln xmlns:a="http://schemas.openxmlformats.org/drawingml/2006/main" w="0">
+            <a:noFill/>
+          </a:ln>
+        </p:spPr>
+        <p:txBody>
+          <a:bodyPr xmlns:a="http://schemas.openxmlformats.org/drawingml/2006/main" anchor="ctr">
+            <a:normAutofit fontScale="86111"/>
+          </a:bodyPr>
+          <a:lstStyle xmlns:a="http://schemas.openxmlformats.org/drawingml/2006/main"/>
+          <a:p xmlns:a="http://schemas.openxmlformats.org/drawingml/2006/main">
+            <a:pPr algn="ctr">
+              <a:defRPr sz="900" b="0">
+                <a:solidFill>
+                  <a:srgbClr val="63708A"/>
+                </a:solidFill>
+                <a:latin typeface="Arial"/>
+                <a:ea typeface="Arial"/>
+                <a:cs typeface="Arial"/>
+              </a:defRPr>
+            </a:pPr>
+            <a:r>
+              <a:rPr sz="900" b="0">
+                <a:solidFill>
+                  <a:srgbClr val="63708A"/>
+                </a:solidFill>
+                <a:latin typeface="Arial"/>
+                <a:ea typeface="Arial"/>
+                <a:cs typeface="Arial"/>
+              </a:rPr>
+              <a:t>30</a:t>
+            </a:r>
+          </a:p>
+        </p:txBody>
+      </p:sp>
+      <p:sp>
+        <p:nvSpPr>
+          <p:cNvPr id="15" name="">
+            <a:extLst xmlns:a="http://schemas.openxmlformats.org/drawingml/2006/main">
+              <a:ext uri="{FF2B5EF4-FFF2-40B4-BE49-F238E27FC236}">
+                <a16:creationId xmlns:a16="http://schemas.microsoft.com/office/drawing/2014/main" id="{3438D5D3-1075-4B74-A0B7-B1F1147E9FBF}"/>
+              </a:ext>
+            </a:extLst>
+          </p:cNvPr>
+          <p:cNvSpPr>
+            <a:spLocks xmlns:a="http://schemas.openxmlformats.org/drawingml/2006/main" noGrp="1"/>
+          </p:cNvSpPr>
+          <p:nvPr/>
+        </p:nvSpPr>
+        <p:spPr>
+          <a:xfrm xmlns:a="http://schemas.openxmlformats.org/drawingml/2006/main">
+            <a:off x="6445250" y="2114550"/>
+            <a:ext cx="0" cy="3124200"/>
+          </a:xfrm>
+          <a:prstGeom xmlns:a="http://schemas.openxmlformats.org/drawingml/2006/main" prst="line">
+            <a:avLst/>
+          </a:prstGeom>
+          <a:noFill xmlns:a="http://schemas.openxmlformats.org/drawingml/2006/main"/>
+          <a:ln xmlns:a="http://schemas.openxmlformats.org/drawingml/2006/main" w="9525">
+            <a:solidFill>
+              <a:srgbClr val="DDE4EF"/>
+            </a:solidFill>
+            <a:prstDash val="solid"/>
+          </a:ln>
+        </p:spPr>
+      </p:sp>
+      <p:sp>
+        <p:nvSpPr>
+          <p:cNvPr id="16" name="">
+            <a:extLst xmlns:a="http://schemas.openxmlformats.org/drawingml/2006/main">
+              <a:ext uri="{FF2B5EF4-FFF2-40B4-BE49-F238E27FC236}">
+                <a16:creationId xmlns:a16="http://schemas.microsoft.com/office/drawing/2014/main" id="{42173342-2E6A-4F61-ABD3-60344FE58FAD}"/>
+              </a:ext>
+            </a:extLst>
+          </p:cNvPr>
+          <p:cNvSpPr>
+            <a:spLocks xmlns:a="http://schemas.openxmlformats.org/drawingml/2006/main" noGrp="1"/>
+          </p:cNvSpPr>
+          <p:nvPr/>
+        </p:nvSpPr>
+        <p:spPr>
+          <a:xfrm xmlns:a="http://schemas.openxmlformats.org/drawingml/2006/main">
+            <a:off x="6254750" y="5314950"/>
+            <a:ext cx="381000" cy="209550"/>
+          </a:xfrm>
+          <a:prstGeom xmlns:a="http://schemas.openxmlformats.org/drawingml/2006/main" prst="rect">
+            <a:avLst/>
+          </a:prstGeom>
+          <a:noFill xmlns:a="http://schemas.openxmlformats.org/drawingml/2006/main"/>
+          <a:ln xmlns:a="http://schemas.openxmlformats.org/drawingml/2006/main" w="0">
+            <a:noFill/>
+          </a:ln>
+        </p:spPr>
+        <p:txBody>
+          <a:bodyPr xmlns:a="http://schemas.openxmlformats.org/drawingml/2006/main" anchor="ctr">
+            <a:normAutofit fontScale="86111"/>
+          </a:bodyPr>
+          <a:lstStyle xmlns:a="http://schemas.openxmlformats.org/drawingml/2006/main"/>
+          <a:p xmlns:a="http://schemas.openxmlformats.org/drawingml/2006/main">
+            <a:pPr algn="ctr">
+              <a:defRPr sz="900" b="0">
+                <a:solidFill>
+                  <a:srgbClr val="63708A"/>
+                </a:solidFill>
+                <a:latin typeface="Arial"/>
+                <a:ea typeface="Arial"/>
+                <a:cs typeface="Arial"/>
+              </a:defRPr>
+            </a:pPr>
+            <a:r>
+              <a:rPr sz="900" b="0">
+                <a:solidFill>
+                  <a:srgbClr val="63708A"/>
+                </a:solidFill>
+                <a:latin typeface="Arial"/>
+                <a:ea typeface="Arial"/>
+                <a:cs typeface="Arial"/>
+              </a:rPr>
+              <a:t>40</a:t>
+            </a:r>
+          </a:p>
+        </p:txBody>
+      </p:sp>
+      <p:sp>
+        <p:nvSpPr>
+          <p:cNvPr id="17" name="">
+            <a:extLst xmlns:a="http://schemas.openxmlformats.org/drawingml/2006/main">
+              <a:ext uri="{FF2B5EF4-FFF2-40B4-BE49-F238E27FC236}">
+                <a16:creationId xmlns:a16="http://schemas.microsoft.com/office/drawing/2014/main" id="{F3FBEF8F-BCDC-4D1E-B6BF-39EB8C46B6DD}"/>
+              </a:ext>
+            </a:extLst>
+          </p:cNvPr>
+          <p:cNvSpPr>
+            <a:spLocks xmlns:a="http://schemas.openxmlformats.org/drawingml/2006/main" noGrp="1"/>
+          </p:cNvSpPr>
+          <p:nvPr/>
+        </p:nvSpPr>
+        <p:spPr>
+          <a:xfrm xmlns:a="http://schemas.openxmlformats.org/drawingml/2006/main">
+            <a:off x="7470775" y="2114550"/>
+            <a:ext cx="0" cy="3124200"/>
+          </a:xfrm>
+          <a:prstGeom xmlns:a="http://schemas.openxmlformats.org/drawingml/2006/main" prst="line">
+            <a:avLst/>
+          </a:prstGeom>
+          <a:noFill xmlns:a="http://schemas.openxmlformats.org/drawingml/2006/main"/>
+          <a:ln xmlns:a="http://schemas.openxmlformats.org/drawingml/2006/main" w="9525">
+            <a:solidFill>
+              <a:srgbClr val="DDE4EF"/>
+            </a:solidFill>
+            <a:prstDash val="solid"/>
+          </a:ln>
+        </p:spPr>
+      </p:sp>
+      <p:sp>
+        <p:nvSpPr>
+          <p:cNvPr id="18" name="">
+            <a:extLst xmlns:a="http://schemas.openxmlformats.org/drawingml/2006/main">
+              <a:ext uri="{FF2B5EF4-FFF2-40B4-BE49-F238E27FC236}">
+                <a16:creationId xmlns:a16="http://schemas.microsoft.com/office/drawing/2014/main" id="{0F9C694F-9F97-4A05-8F2C-62B02A5CDB5B}"/>
+              </a:ext>
+            </a:extLst>
+          </p:cNvPr>
+          <p:cNvSpPr>
+            <a:spLocks xmlns:a="http://schemas.openxmlformats.org/drawingml/2006/main" noGrp="1"/>
+          </p:cNvSpPr>
+          <p:nvPr/>
+        </p:nvSpPr>
+        <p:spPr>
+          <a:xfrm xmlns:a="http://schemas.openxmlformats.org/drawingml/2006/main">
+            <a:off x="7280275" y="5314950"/>
+            <a:ext cx="381000" cy="209550"/>
+          </a:xfrm>
+          <a:prstGeom xmlns:a="http://schemas.openxmlformats.org/drawingml/2006/main" prst="rect">
+            <a:avLst/>
+          </a:prstGeom>
+          <a:noFill xmlns:a="http://schemas.openxmlformats.org/drawingml/2006/main"/>
+          <a:ln xmlns:a="http://schemas.openxmlformats.org/drawingml/2006/main" w="0">
+            <a:noFill/>
+          </a:ln>
+        </p:spPr>
+        <p:txBody>
+          <a:bodyPr xmlns:a="http://schemas.openxmlformats.org/drawingml/2006/main" anchor="ctr">
+            <a:normAutofit fontScale="86111"/>
+          </a:bodyPr>
+          <a:lstStyle xmlns:a="http://schemas.openxmlformats.org/drawingml/2006/main"/>
+          <a:p xmlns:a="http://schemas.openxmlformats.org/drawingml/2006/main">
+            <a:pPr algn="ctr">
+              <a:defRPr sz="900" b="0">
+                <a:solidFill>
+                  <a:srgbClr val="63708A"/>
+                </a:solidFill>
+                <a:latin typeface="Arial"/>
+                <a:ea typeface="Arial"/>
+                <a:cs typeface="Arial"/>
+              </a:defRPr>
+            </a:pPr>
+            <a:r>
+              <a:rPr sz="900" b="0">
+                <a:solidFill>
+                  <a:srgbClr val="63708A"/>
+                </a:solidFill>
+                <a:latin typeface="Arial"/>
+                <a:ea typeface="Arial"/>
+                <a:cs typeface="Arial"/>
+              </a:rPr>
+              <a:t>50</a:t>
+            </a:r>
+          </a:p>
+        </p:txBody>
+      </p:sp>
+      <p:sp>
+        <p:nvSpPr>
+          <p:cNvPr id="19" name="">
+            <a:extLst xmlns:a="http://schemas.openxmlformats.org/drawingml/2006/main">
+              <a:ext uri="{FF2B5EF4-FFF2-40B4-BE49-F238E27FC236}">
+                <a16:creationId xmlns:a16="http://schemas.microsoft.com/office/drawing/2014/main" id="{2CF346DF-75C9-4D96-A566-FF617D89167B}"/>
+              </a:ext>
+            </a:extLst>
+          </p:cNvPr>
+          <p:cNvSpPr>
+            <a:spLocks xmlns:a="http://schemas.openxmlformats.org/drawingml/2006/main" noGrp="1"/>
+          </p:cNvSpPr>
+          <p:nvPr/>
+        </p:nvSpPr>
+        <p:spPr>
+          <a:xfrm xmlns:a="http://schemas.openxmlformats.org/drawingml/2006/main">
+            <a:off x="8496300" y="2114550"/>
+            <a:ext cx="0" cy="3124200"/>
+          </a:xfrm>
+          <a:prstGeom xmlns:a="http://schemas.openxmlformats.org/drawingml/2006/main" prst="line">
+            <a:avLst/>
+          </a:prstGeom>
+          <a:noFill xmlns:a="http://schemas.openxmlformats.org/drawingml/2006/main"/>
+          <a:ln xmlns:a="http://schemas.openxmlformats.org/drawingml/2006/main" w="9525">
+            <a:solidFill>
+              <a:srgbClr val="DDE4EF"/>
+            </a:solidFill>
+            <a:prstDash val="solid"/>
+          </a:ln>
+        </p:spPr>
+      </p:sp>
+      <p:sp>
+        <p:nvSpPr>
+          <p:cNvPr id="20" name="">
+            <a:extLst xmlns:a="http://schemas.openxmlformats.org/drawingml/2006/main">
+              <a:ext uri="{FF2B5EF4-FFF2-40B4-BE49-F238E27FC236}">
+                <a16:creationId xmlns:a16="http://schemas.microsoft.com/office/drawing/2014/main" id="{3D305C72-EFE8-43B1-A075-D0BC670F078D}"/>
+              </a:ext>
+            </a:extLst>
+          </p:cNvPr>
+          <p:cNvSpPr>
+            <a:spLocks xmlns:a="http://schemas.openxmlformats.org/drawingml/2006/main" noGrp="1"/>
+          </p:cNvSpPr>
+          <p:nvPr/>
+        </p:nvSpPr>
+        <p:spPr>
+          <a:xfrm xmlns:a="http://schemas.openxmlformats.org/drawingml/2006/main">
+            <a:off x="8305800" y="5314950"/>
+            <a:ext cx="381000" cy="209550"/>
+          </a:xfrm>
+          <a:prstGeom xmlns:a="http://schemas.openxmlformats.org/drawingml/2006/main" prst="rect">
+            <a:avLst/>
+          </a:prstGeom>
+          <a:noFill xmlns:a="http://schemas.openxmlformats.org/drawingml/2006/main"/>
+          <a:ln xmlns:a="http://schemas.openxmlformats.org/drawingml/2006/main" w="0">
+            <a:noFill/>
+          </a:ln>
+        </p:spPr>
+        <p:txBody>
+          <a:bodyPr xmlns:a="http://schemas.openxmlformats.org/drawingml/2006/main" anchor="ctr">
+            <a:normAutofit fontScale="86111"/>
+          </a:bodyPr>
+          <a:lstStyle xmlns:a="http://schemas.openxmlformats.org/drawingml/2006/main"/>
+          <a:p xmlns:a="http://schemas.openxmlformats.org/drawingml/2006/main">
+            <a:pPr algn="ctr">
+              <a:defRPr sz="900" b="0">
+                <a:solidFill>
+                  <a:srgbClr val="63708A"/>
+                </a:solidFill>
+                <a:latin typeface="Arial"/>
+                <a:ea typeface="Arial"/>
+                <a:cs typeface="Arial"/>
+              </a:defRPr>
+            </a:pPr>
+            <a:r>
+              <a:rPr sz="900" b="0">
+                <a:solidFill>
+                  <a:srgbClr val="63708A"/>
+                </a:solidFill>
+                <a:latin typeface="Arial"/>
+                <a:ea typeface="Arial"/>
+                <a:cs typeface="Arial"/>
+              </a:rPr>
+              <a:t>60</a:t>
+            </a:r>
+          </a:p>
+        </p:txBody>
+      </p:sp>
+      <p:sp>
+        <p:nvSpPr>
+          <p:cNvPr id="21" name="">
+            <a:extLst xmlns:a="http://schemas.openxmlformats.org/drawingml/2006/main">
+              <a:ext uri="{FF2B5EF4-FFF2-40B4-BE49-F238E27FC236}">
+                <a16:creationId xmlns:a16="http://schemas.microsoft.com/office/drawing/2014/main" id="{05C889D1-23D9-40FC-8B2B-CE225D3B9931}"/>
+              </a:ext>
+            </a:extLst>
+          </p:cNvPr>
+          <p:cNvSpPr>
+            <a:spLocks xmlns:a="http://schemas.openxmlformats.org/drawingml/2006/main" noGrp="1"/>
+          </p:cNvSpPr>
+          <p:nvPr/>
+        </p:nvSpPr>
+        <p:spPr>
+          <a:xfrm xmlns:a="http://schemas.openxmlformats.org/drawingml/2006/main">
+            <a:off x="723900" y="2203450"/>
+            <a:ext cx="1504950" cy="342900"/>
+          </a:xfrm>
+          <a:prstGeom xmlns:a="http://schemas.openxmlformats.org/drawingml/2006/main" prst="rect">
+            <a:avLst/>
+          </a:prstGeom>
+          <a:noFill xmlns:a="http://schemas.openxmlformats.org/drawingml/2006/main"/>
+          <a:ln xmlns:a="http://schemas.openxmlformats.org/drawingml/2006/main" w="0">
+            <a:noFill/>
+          </a:ln>
+        </p:spPr>
+        <p:txBody>
+          <a:bodyPr xmlns:a="http://schemas.openxmlformats.org/drawingml/2006/main" anchor="ctr">
+            <a:normAutofit fontScale="100000"/>
+          </a:bodyPr>
+          <a:lstStyle xmlns:a="http://schemas.openxmlformats.org/drawingml/2006/main"/>
+          <a:p xmlns:a="http://schemas.openxmlformats.org/drawingml/2006/main">
+            <a:pPr algn="r">
+              <a:defRPr sz="1050" b="0">
+                <a:solidFill>
+                  <a:srgbClr val="63708A"/>
+                </a:solidFill>
+                <a:latin typeface="Arial"/>
+                <a:ea typeface="Arial"/>
+                <a:cs typeface="Arial"/>
+              </a:defRPr>
+            </a:pPr>
+            <a:r>
+              <a:rPr sz="1050" b="0">
+                <a:solidFill>
+                  <a:srgbClr val="63708A"/>
+                </a:solidFill>
+                <a:latin typeface="Arial"/>
+                <a:ea typeface="Arial"/>
+                <a:cs typeface="Arial"/>
+              </a:rPr>
+              <a:t>Казахстан</a:t>
+            </a:r>
+          </a:p>
+        </p:txBody>
+      </p:sp>
+      <p:sp>
+        <p:nvSpPr>
+          <p:cNvPr id="22" name="">
+            <a:extLst xmlns:a="http://schemas.openxmlformats.org/drawingml/2006/main">
+              <a:ext uri="{FF2B5EF4-FFF2-40B4-BE49-F238E27FC236}">
+                <a16:creationId xmlns:a16="http://schemas.microsoft.com/office/drawing/2014/main" id="{1A7FB6E4-E7BE-4889-ABDE-C2DACBFD1ACE}"/>
+              </a:ext>
+            </a:extLst>
+          </p:cNvPr>
+          <p:cNvSpPr>
+            <a:spLocks xmlns:a="http://schemas.openxmlformats.org/drawingml/2006/main" noGrp="1"/>
+          </p:cNvSpPr>
+          <p:nvPr/>
+        </p:nvSpPr>
+        <p:spPr>
+          <a:xfrm xmlns:a="http://schemas.openxmlformats.org/drawingml/2006/main">
+            <a:off x="2343150" y="2213483"/>
+            <a:ext cx="5344011" cy="322834"/>
+          </a:xfrm>
+          <a:prstGeom xmlns:a="http://schemas.openxmlformats.org/drawingml/2006/main" prst="rect">
+            <a:avLst/>
+          </a:prstGeom>
+          <a:solidFill xmlns:a="http://schemas.openxmlformats.org/drawingml/2006/main">
+            <a:srgbClr val="FF6B6B"/>
+          </a:solidFill>
+          <a:ln xmlns:a="http://schemas.openxmlformats.org/drawingml/2006/main" w="0">
+            <a:noFill/>
+          </a:ln>
+        </p:spPr>
+      </p:sp>
+      <p:sp>
+        <p:nvSpPr>
+          <p:cNvPr id="23" name="">
+            <a:extLst xmlns:a="http://schemas.openxmlformats.org/drawingml/2006/main">
+              <a:ext uri="{FF2B5EF4-FFF2-40B4-BE49-F238E27FC236}">
+                <a16:creationId xmlns:a16="http://schemas.microsoft.com/office/drawing/2014/main" id="{449D0293-938F-42B6-B553-457EC0CBDB73}"/>
+              </a:ext>
+            </a:extLst>
+          </p:cNvPr>
+          <p:cNvSpPr>
+            <a:spLocks xmlns:a="http://schemas.openxmlformats.org/drawingml/2006/main" noGrp="1"/>
+          </p:cNvSpPr>
+          <p:nvPr/>
+        </p:nvSpPr>
+        <p:spPr>
+          <a:xfrm xmlns:a="http://schemas.openxmlformats.org/drawingml/2006/main">
+            <a:off x="7763361" y="2203450"/>
+            <a:ext cx="609600" cy="342900"/>
+          </a:xfrm>
+          <a:prstGeom xmlns:a="http://schemas.openxmlformats.org/drawingml/2006/main" prst="rect">
+            <a:avLst/>
+          </a:prstGeom>
+          <a:noFill xmlns:a="http://schemas.openxmlformats.org/drawingml/2006/main"/>
+          <a:ln xmlns:a="http://schemas.openxmlformats.org/drawingml/2006/main" w="0">
+            <a:noFill/>
+          </a:ln>
+        </p:spPr>
+        <p:txBody>
+          <a:bodyPr xmlns:a="http://schemas.openxmlformats.org/drawingml/2006/main" anchor="ctr">
+            <a:normAutofit fontScale="100000"/>
+          </a:bodyPr>
+          <a:lstStyle xmlns:a="http://schemas.openxmlformats.org/drawingml/2006/main"/>
+          <a:p xmlns:a="http://schemas.openxmlformats.org/drawingml/2006/main">
+            <a:pPr algn="l">
+              <a:defRPr sz="1050" b="1">
+                <a:solidFill>
+                  <a:srgbClr val="14213D"/>
+                </a:solidFill>
+                <a:latin typeface="Arial"/>
+                <a:ea typeface="Arial"/>
+                <a:cs typeface="Arial"/>
+              </a:defRPr>
+            </a:pPr>
+            <a:r>
+              <a:rPr sz="1050" b="1">
+                <a:solidFill>
+                  <a:srgbClr val="14213D"/>
+                </a:solidFill>
+                <a:latin typeface="Arial"/>
+                <a:ea typeface="Arial"/>
+                <a:cs typeface="Arial"/>
+              </a:rPr>
+              <a:t>52,1%</a:t>
+            </a:r>
+          </a:p>
+        </p:txBody>
+      </p:sp>
+      <p:sp>
+        <p:nvSpPr>
+          <p:cNvPr id="24" name="">
+            <a:extLst xmlns:a="http://schemas.openxmlformats.org/drawingml/2006/main">
+              <a:ext uri="{FF2B5EF4-FFF2-40B4-BE49-F238E27FC236}">
+                <a16:creationId xmlns:a16="http://schemas.microsoft.com/office/drawing/2014/main" id="{C94D10A1-4596-4A7D-83B9-1201B02F7134}"/>
+              </a:ext>
+            </a:extLst>
+          </p:cNvPr>
+          <p:cNvSpPr>
+            <a:spLocks xmlns:a="http://schemas.openxmlformats.org/drawingml/2006/main" noGrp="1"/>
+          </p:cNvSpPr>
+          <p:nvPr/>
+        </p:nvSpPr>
+        <p:spPr>
+          <a:xfrm xmlns:a="http://schemas.openxmlformats.org/drawingml/2006/main">
+            <a:off x="723900" y="2724150"/>
+            <a:ext cx="1504950" cy="342900"/>
+          </a:xfrm>
+          <a:prstGeom xmlns:a="http://schemas.openxmlformats.org/drawingml/2006/main" prst="rect">
+            <a:avLst/>
+          </a:prstGeom>
+          <a:noFill xmlns:a="http://schemas.openxmlformats.org/drawingml/2006/main"/>
+          <a:ln xmlns:a="http://schemas.openxmlformats.org/drawingml/2006/main" w="0">
+            <a:noFill/>
+          </a:ln>
+        </p:spPr>
+        <p:txBody>
+          <a:bodyPr xmlns:a="http://schemas.openxmlformats.org/drawingml/2006/main" anchor="ctr">
+            <a:normAutofit fontScale="99761"/>
+          </a:bodyPr>
+          <a:lstStyle xmlns:a="http://schemas.openxmlformats.org/drawingml/2006/main"/>
+          <a:p xmlns:a="http://schemas.openxmlformats.org/drawingml/2006/main">
+            <a:pPr algn="r">
+              <a:defRPr sz="1050" b="0">
+                <a:solidFill>
+                  <a:srgbClr val="63708A"/>
+                </a:solidFill>
+                <a:latin typeface="Arial"/>
+                <a:ea typeface="Arial"/>
+                <a:cs typeface="Arial"/>
+              </a:defRPr>
+            </a:pPr>
+            <a:r>
+              <a:rPr sz="1050" b="0">
+                <a:solidFill>
+                  <a:srgbClr val="63708A"/>
+                </a:solidFill>
+                <a:latin typeface="Arial"/>
+                <a:ea typeface="Arial"/>
+                <a:cs typeface="Arial"/>
+              </a:rPr>
+              <a:t>Ложная предпосылка</a:t>
+            </a:r>
+          </a:p>
+        </p:txBody>
+      </p:sp>
+      <p:sp>
+        <p:nvSpPr>
+          <p:cNvPr id="25" name="">
+            <a:extLst xmlns:a="http://schemas.openxmlformats.org/drawingml/2006/main">
+              <a:ext uri="{FF2B5EF4-FFF2-40B4-BE49-F238E27FC236}">
+                <a16:creationId xmlns:a16="http://schemas.microsoft.com/office/drawing/2014/main" id="{90939A55-CDF0-4C5C-9711-5F4B52BB0CAF}"/>
+              </a:ext>
+            </a:extLst>
+          </p:cNvPr>
+          <p:cNvSpPr>
+            <a:spLocks xmlns:a="http://schemas.openxmlformats.org/drawingml/2006/main" noGrp="1"/>
+          </p:cNvSpPr>
+          <p:nvPr/>
+        </p:nvSpPr>
+        <p:spPr>
+          <a:xfrm xmlns:a="http://schemas.openxmlformats.org/drawingml/2006/main">
+            <a:off x="2343150" y="2734183"/>
+            <a:ext cx="3244761" cy="322834"/>
+          </a:xfrm>
+          <a:prstGeom xmlns:a="http://schemas.openxmlformats.org/drawingml/2006/main" prst="rect">
+            <a:avLst/>
+          </a:prstGeom>
+          <a:solidFill xmlns:a="http://schemas.openxmlformats.org/drawingml/2006/main">
+            <a:srgbClr val="FFBF47"/>
+          </a:solidFill>
+          <a:ln xmlns:a="http://schemas.openxmlformats.org/drawingml/2006/main" w="0">
+            <a:noFill/>
+          </a:ln>
+        </p:spPr>
+      </p:sp>
+      <p:sp>
+        <p:nvSpPr>
+          <p:cNvPr id="26" name="">
+            <a:extLst xmlns:a="http://schemas.openxmlformats.org/drawingml/2006/main">
+              <a:ext uri="{FF2B5EF4-FFF2-40B4-BE49-F238E27FC236}">
+                <a16:creationId xmlns:a16="http://schemas.microsoft.com/office/drawing/2014/main" id="{5B37E231-542E-45FB-9CC5-3C9FBC1BE1C7}"/>
+              </a:ext>
+            </a:extLst>
+          </p:cNvPr>
+          <p:cNvSpPr>
+            <a:spLocks xmlns:a="http://schemas.openxmlformats.org/drawingml/2006/main" noGrp="1"/>
+          </p:cNvSpPr>
+          <p:nvPr/>
+        </p:nvSpPr>
+        <p:spPr>
+          <a:xfrm xmlns:a="http://schemas.openxmlformats.org/drawingml/2006/main">
+            <a:off x="5664111" y="2724150"/>
+            <a:ext cx="609600" cy="342900"/>
+          </a:xfrm>
+          <a:prstGeom xmlns:a="http://schemas.openxmlformats.org/drawingml/2006/main" prst="rect">
+            <a:avLst/>
+          </a:prstGeom>
+          <a:noFill xmlns:a="http://schemas.openxmlformats.org/drawingml/2006/main"/>
+          <a:ln xmlns:a="http://schemas.openxmlformats.org/drawingml/2006/main" w="0">
+            <a:noFill/>
+          </a:ln>
+        </p:spPr>
+        <p:txBody>
+          <a:bodyPr xmlns:a="http://schemas.openxmlformats.org/drawingml/2006/main" anchor="ctr">
+            <a:normAutofit fontScale="100000"/>
+          </a:bodyPr>
+          <a:lstStyle xmlns:a="http://schemas.openxmlformats.org/drawingml/2006/main"/>
+          <a:p xmlns:a="http://schemas.openxmlformats.org/drawingml/2006/main">
+            <a:pPr algn="l">
+              <a:defRPr sz="1050" b="1">
+                <a:solidFill>
+                  <a:srgbClr val="14213D"/>
+                </a:solidFill>
+                <a:latin typeface="Arial"/>
+                <a:ea typeface="Arial"/>
+                <a:cs typeface="Arial"/>
+              </a:defRPr>
+            </a:pPr>
+            <a:r>
+              <a:rPr sz="1050" b="1">
+                <a:solidFill>
+                  <a:srgbClr val="14213D"/>
+                </a:solidFill>
+                <a:latin typeface="Arial"/>
+                <a:ea typeface="Arial"/>
+                <a:cs typeface="Arial"/>
+              </a:rPr>
+              <a:t>31,6%</a:t>
+            </a:r>
+          </a:p>
+        </p:txBody>
+      </p:sp>
+      <p:sp>
+        <p:nvSpPr>
+          <p:cNvPr id="27" name="">
+            <a:extLst xmlns:a="http://schemas.openxmlformats.org/drawingml/2006/main">
+              <a:ext uri="{FF2B5EF4-FFF2-40B4-BE49-F238E27FC236}">
+                <a16:creationId xmlns:a16="http://schemas.microsoft.com/office/drawing/2014/main" id="{34E96DE4-EDF7-4EC1-9032-FE43F4CEE0FE}"/>
+              </a:ext>
+            </a:extLst>
+          </p:cNvPr>
+          <p:cNvSpPr>
+            <a:spLocks xmlns:a="http://schemas.openxmlformats.org/drawingml/2006/main" noGrp="1"/>
+          </p:cNvSpPr>
+          <p:nvPr/>
+        </p:nvSpPr>
+        <p:spPr>
+          <a:xfrm xmlns:a="http://schemas.openxmlformats.org/drawingml/2006/main">
+            <a:off x="723900" y="3244850"/>
+            <a:ext cx="1504950" cy="342900"/>
+          </a:xfrm>
+          <a:prstGeom xmlns:a="http://schemas.openxmlformats.org/drawingml/2006/main" prst="rect">
+            <a:avLst/>
+          </a:prstGeom>
+          <a:noFill xmlns:a="http://schemas.openxmlformats.org/drawingml/2006/main"/>
+          <a:ln xmlns:a="http://schemas.openxmlformats.org/drawingml/2006/main" w="0">
+            <a:noFill/>
+          </a:ln>
+        </p:spPr>
+        <p:txBody>
+          <a:bodyPr xmlns:a="http://schemas.openxmlformats.org/drawingml/2006/main" anchor="ctr">
+            <a:normAutofit fontScale="100000"/>
+          </a:bodyPr>
+          <a:lstStyle xmlns:a="http://schemas.openxmlformats.org/drawingml/2006/main"/>
+          <a:p xmlns:a="http://schemas.openxmlformats.org/drawingml/2006/main">
+            <a:pPr algn="r">
+              <a:defRPr sz="1050" b="0">
+                <a:solidFill>
+                  <a:srgbClr val="63708A"/>
+                </a:solidFill>
+                <a:latin typeface="Arial"/>
+                <a:ea typeface="Arial"/>
+                <a:cs typeface="Arial"/>
+              </a:defRPr>
+            </a:pPr>
+            <a:r>
+              <a:rPr sz="1050" b="0">
+                <a:solidFill>
+                  <a:srgbClr val="63708A"/>
+                </a:solidFill>
+                <a:latin typeface="Arial"/>
+                <a:ea typeface="Arial"/>
+                <a:cs typeface="Arial"/>
+              </a:rPr>
+              <a:t>Культура</a:t>
+            </a:r>
+          </a:p>
+        </p:txBody>
+      </p:sp>
+      <p:sp>
+        <p:nvSpPr>
+          <p:cNvPr id="28" name="">
+            <a:extLst xmlns:a="http://schemas.openxmlformats.org/drawingml/2006/main">
+              <a:ext uri="{FF2B5EF4-FFF2-40B4-BE49-F238E27FC236}">
+                <a16:creationId xmlns:a16="http://schemas.microsoft.com/office/drawing/2014/main" id="{0741DC96-B1FF-4605-AE53-F1E7A3423B62}"/>
+              </a:ext>
+            </a:extLst>
+          </p:cNvPr>
+          <p:cNvSpPr>
+            <a:spLocks xmlns:a="http://schemas.openxmlformats.org/drawingml/2006/main" noGrp="1"/>
+          </p:cNvSpPr>
+          <p:nvPr/>
+        </p:nvSpPr>
+        <p:spPr>
+          <a:xfrm xmlns:a="http://schemas.openxmlformats.org/drawingml/2006/main">
+            <a:off x="2343150" y="3254883"/>
+            <a:ext cx="1412148" cy="322834"/>
+          </a:xfrm>
+          <a:prstGeom xmlns:a="http://schemas.openxmlformats.org/drawingml/2006/main" prst="rect">
+            <a:avLst/>
+          </a:prstGeom>
+          <a:solidFill xmlns:a="http://schemas.openxmlformats.org/drawingml/2006/main">
+            <a:srgbClr val="2F6BFF"/>
+          </a:solidFill>
+          <a:ln xmlns:a="http://schemas.openxmlformats.org/drawingml/2006/main" w="0">
+            <a:noFill/>
+          </a:ln>
+        </p:spPr>
+      </p:sp>
+      <p:sp>
+        <p:nvSpPr>
+          <p:cNvPr id="29" name="">
+            <a:extLst xmlns:a="http://schemas.openxmlformats.org/drawingml/2006/main">
+              <a:ext uri="{FF2B5EF4-FFF2-40B4-BE49-F238E27FC236}">
+                <a16:creationId xmlns:a16="http://schemas.microsoft.com/office/drawing/2014/main" id="{8B83BB21-39B1-4BE7-A9D6-B2D930398A19}"/>
+              </a:ext>
+            </a:extLst>
+          </p:cNvPr>
+          <p:cNvSpPr>
+            <a:spLocks xmlns:a="http://schemas.openxmlformats.org/drawingml/2006/main" noGrp="1"/>
+          </p:cNvSpPr>
+          <p:nvPr/>
+        </p:nvSpPr>
+        <p:spPr>
+          <a:xfrm xmlns:a="http://schemas.openxmlformats.org/drawingml/2006/main">
+            <a:off x="3831498" y="3244850"/>
+            <a:ext cx="609600" cy="342900"/>
+          </a:xfrm>
+          <a:prstGeom xmlns:a="http://schemas.openxmlformats.org/drawingml/2006/main" prst="rect">
+            <a:avLst/>
+          </a:prstGeom>
+          <a:noFill xmlns:a="http://schemas.openxmlformats.org/drawingml/2006/main"/>
+          <a:ln xmlns:a="http://schemas.openxmlformats.org/drawingml/2006/main" w="0">
+            <a:noFill/>
+          </a:ln>
+        </p:spPr>
+        <p:txBody>
+          <a:bodyPr xmlns:a="http://schemas.openxmlformats.org/drawingml/2006/main" anchor="ctr">
+            <a:normAutofit fontScale="100000"/>
+          </a:bodyPr>
+          <a:lstStyle xmlns:a="http://schemas.openxmlformats.org/drawingml/2006/main"/>
+          <a:p xmlns:a="http://schemas.openxmlformats.org/drawingml/2006/main">
+            <a:pPr algn="l">
+              <a:defRPr sz="1050" b="1">
+                <a:solidFill>
+                  <a:srgbClr val="14213D"/>
+                </a:solidFill>
+                <a:latin typeface="Arial"/>
+                <a:ea typeface="Arial"/>
+                <a:cs typeface="Arial"/>
+              </a:defRPr>
+            </a:pPr>
+            <a:r>
+              <a:rPr sz="1050" b="1">
+                <a:solidFill>
+                  <a:srgbClr val="14213D"/>
+                </a:solidFill>
+                <a:latin typeface="Arial"/>
+                <a:ea typeface="Arial"/>
+                <a:cs typeface="Arial"/>
+              </a:rPr>
+              <a:t>13,8%</a:t>
+            </a:r>
+          </a:p>
+        </p:txBody>
+      </p:sp>
+      <p:sp>
+        <p:nvSpPr>
+          <p:cNvPr id="30" name="">
+            <a:extLst xmlns:a="http://schemas.openxmlformats.org/drawingml/2006/main">
+              <a:ext uri="{FF2B5EF4-FFF2-40B4-BE49-F238E27FC236}">
+                <a16:creationId xmlns:a16="http://schemas.microsoft.com/office/drawing/2014/main" id="{314DABE6-31F4-417C-89C2-FAB638C74757}"/>
+              </a:ext>
+            </a:extLst>
+          </p:cNvPr>
+          <p:cNvSpPr>
+            <a:spLocks xmlns:a="http://schemas.openxmlformats.org/drawingml/2006/main" noGrp="1"/>
+          </p:cNvSpPr>
+          <p:nvPr/>
+        </p:nvSpPr>
+        <p:spPr>
+          <a:xfrm xmlns:a="http://schemas.openxmlformats.org/drawingml/2006/main">
+            <a:off x="723900" y="3765550"/>
+            <a:ext cx="1504950" cy="342900"/>
+          </a:xfrm>
+          <a:prstGeom xmlns:a="http://schemas.openxmlformats.org/drawingml/2006/main" prst="rect">
+            <a:avLst/>
+          </a:prstGeom>
+          <a:noFill xmlns:a="http://schemas.openxmlformats.org/drawingml/2006/main"/>
+          <a:ln xmlns:a="http://schemas.openxmlformats.org/drawingml/2006/main" w="0">
+            <a:noFill/>
+          </a:ln>
+        </p:spPr>
+        <p:txBody>
+          <a:bodyPr xmlns:a="http://schemas.openxmlformats.org/drawingml/2006/main" anchor="ctr">
+            <a:normAutofit fontScale="100000"/>
+          </a:bodyPr>
+          <a:lstStyle xmlns:a="http://schemas.openxmlformats.org/drawingml/2006/main"/>
+          <a:p xmlns:a="http://schemas.openxmlformats.org/drawingml/2006/main">
+            <a:pPr algn="r">
+              <a:defRPr sz="1050" b="0">
+                <a:solidFill>
+                  <a:srgbClr val="63708A"/>
+                </a:solidFill>
+                <a:latin typeface="Arial"/>
+                <a:ea typeface="Arial"/>
+                <a:cs typeface="Arial"/>
+              </a:defRPr>
+            </a:pPr>
+            <a:r>
+              <a:rPr sz="1050" b="0">
+                <a:solidFill>
+                  <a:srgbClr val="63708A"/>
+                </a:solidFill>
+                <a:latin typeface="Arial"/>
+                <a:ea typeface="Arial"/>
+                <a:cs typeface="Arial"/>
+              </a:rPr>
+              <a:t>История</a:t>
+            </a:r>
+          </a:p>
+        </p:txBody>
+      </p:sp>
+      <p:sp>
+        <p:nvSpPr>
+          <p:cNvPr id="31" name="">
+            <a:extLst xmlns:a="http://schemas.openxmlformats.org/drawingml/2006/main">
+              <a:ext uri="{FF2B5EF4-FFF2-40B4-BE49-F238E27FC236}">
+                <a16:creationId xmlns:a16="http://schemas.microsoft.com/office/drawing/2014/main" id="{EFE2622D-065D-4347-9604-9C9CEAAED114}"/>
+              </a:ext>
+            </a:extLst>
+          </p:cNvPr>
+          <p:cNvSpPr>
+            <a:spLocks xmlns:a="http://schemas.openxmlformats.org/drawingml/2006/main" noGrp="1"/>
+          </p:cNvSpPr>
+          <p:nvPr/>
+        </p:nvSpPr>
+        <p:spPr>
+          <a:xfrm xmlns:a="http://schemas.openxmlformats.org/drawingml/2006/main">
+            <a:off x="2343150" y="3775583"/>
+            <a:ext cx="1139358" cy="322834"/>
+          </a:xfrm>
+          <a:prstGeom xmlns:a="http://schemas.openxmlformats.org/drawingml/2006/main" prst="rect">
+            <a:avLst/>
+          </a:prstGeom>
+          <a:solidFill xmlns:a="http://schemas.openxmlformats.org/drawingml/2006/main">
+            <a:srgbClr val="2F6BFF"/>
+          </a:solidFill>
+          <a:ln xmlns:a="http://schemas.openxmlformats.org/drawingml/2006/main" w="0">
+            <a:noFill/>
+          </a:ln>
+        </p:spPr>
+      </p:sp>
+      <p:sp>
+        <p:nvSpPr>
+          <p:cNvPr id="32" name="">
+            <a:extLst xmlns:a="http://schemas.openxmlformats.org/drawingml/2006/main">
+              <a:ext uri="{FF2B5EF4-FFF2-40B4-BE49-F238E27FC236}">
+                <a16:creationId xmlns:a16="http://schemas.microsoft.com/office/drawing/2014/main" id="{A31DD550-A56C-47CC-B4C4-1A89A4927340}"/>
+              </a:ext>
+            </a:extLst>
+          </p:cNvPr>
+          <p:cNvSpPr>
+            <a:spLocks xmlns:a="http://schemas.openxmlformats.org/drawingml/2006/main" noGrp="1"/>
+          </p:cNvSpPr>
+          <p:nvPr/>
+        </p:nvSpPr>
+        <p:spPr>
+          <a:xfrm xmlns:a="http://schemas.openxmlformats.org/drawingml/2006/main">
+            <a:off x="3558708" y="3765550"/>
+            <a:ext cx="609600" cy="342900"/>
+          </a:xfrm>
+          <a:prstGeom xmlns:a="http://schemas.openxmlformats.org/drawingml/2006/main" prst="rect">
+            <a:avLst/>
+          </a:prstGeom>
+          <a:noFill xmlns:a="http://schemas.openxmlformats.org/drawingml/2006/main"/>
+          <a:ln xmlns:a="http://schemas.openxmlformats.org/drawingml/2006/main" w="0">
+            <a:noFill/>
+          </a:ln>
+        </p:spPr>
+        <p:txBody>
+          <a:bodyPr xmlns:a="http://schemas.openxmlformats.org/drawingml/2006/main" anchor="ctr">
+            <a:normAutofit fontScale="100000"/>
+          </a:bodyPr>
+          <a:lstStyle xmlns:a="http://schemas.openxmlformats.org/drawingml/2006/main"/>
+          <a:p xmlns:a="http://schemas.openxmlformats.org/drawingml/2006/main">
+            <a:pPr algn="l">
+              <a:defRPr sz="1050" b="1">
+                <a:solidFill>
+                  <a:srgbClr val="14213D"/>
+                </a:solidFill>
+                <a:latin typeface="Arial"/>
+                <a:ea typeface="Arial"/>
+                <a:cs typeface="Arial"/>
+              </a:defRPr>
+            </a:pPr>
+            <a:r>
+              <a:rPr sz="1050" b="1">
+                <a:solidFill>
+                  <a:srgbClr val="14213D"/>
+                </a:solidFill>
+                <a:latin typeface="Arial"/>
+                <a:ea typeface="Arial"/>
+                <a:cs typeface="Arial"/>
+              </a:rPr>
+              <a:t>11,1%</a:t>
+            </a:r>
+          </a:p>
+        </p:txBody>
+      </p:sp>
+      <p:sp>
+        <p:nvSpPr>
+          <p:cNvPr id="33" name="">
+            <a:extLst xmlns:a="http://schemas.openxmlformats.org/drawingml/2006/main">
+              <a:ext uri="{FF2B5EF4-FFF2-40B4-BE49-F238E27FC236}">
+                <a16:creationId xmlns:a16="http://schemas.microsoft.com/office/drawing/2014/main" id="{EBA47115-DAA4-4A81-A93F-DA429578807B}"/>
+              </a:ext>
+            </a:extLst>
+          </p:cNvPr>
+          <p:cNvSpPr>
+            <a:spLocks xmlns:a="http://schemas.openxmlformats.org/drawingml/2006/main" noGrp="1"/>
+          </p:cNvSpPr>
+          <p:nvPr/>
+        </p:nvSpPr>
+        <p:spPr>
+          <a:xfrm xmlns:a="http://schemas.openxmlformats.org/drawingml/2006/main">
+            <a:off x="723900" y="4286250"/>
+            <a:ext cx="1504950" cy="342900"/>
+          </a:xfrm>
+          <a:prstGeom xmlns:a="http://schemas.openxmlformats.org/drawingml/2006/main" prst="rect">
+            <a:avLst/>
+          </a:prstGeom>
+          <a:noFill xmlns:a="http://schemas.openxmlformats.org/drawingml/2006/main"/>
+          <a:ln xmlns:a="http://schemas.openxmlformats.org/drawingml/2006/main" w="0">
+            <a:noFill/>
+          </a:ln>
+        </p:spPr>
+        <p:txBody>
+          <a:bodyPr xmlns:a="http://schemas.openxmlformats.org/drawingml/2006/main" anchor="ctr">
+            <a:normAutofit fontScale="100000"/>
+          </a:bodyPr>
+          <a:lstStyle xmlns:a="http://schemas.openxmlformats.org/drawingml/2006/main"/>
+          <a:p xmlns:a="http://schemas.openxmlformats.org/drawingml/2006/main">
+            <a:pPr algn="r">
+              <a:defRPr sz="1050" b="0">
+                <a:solidFill>
+                  <a:srgbClr val="63708A"/>
+                </a:solidFill>
+                <a:latin typeface="Arial"/>
+                <a:ea typeface="Arial"/>
+                <a:cs typeface="Arial"/>
+              </a:defRPr>
+            </a:pPr>
+            <a:r>
+              <a:rPr sz="1050" b="0">
+                <a:solidFill>
+                  <a:srgbClr val="63708A"/>
+                </a:solidFill>
+                <a:latin typeface="Arial"/>
+                <a:ea typeface="Arial"/>
+                <a:cs typeface="Arial"/>
+              </a:rPr>
+              <a:t>География</a:t>
+            </a:r>
+          </a:p>
+        </p:txBody>
+      </p:sp>
+      <p:sp>
+        <p:nvSpPr>
+          <p:cNvPr id="34" name="">
+            <a:extLst xmlns:a="http://schemas.openxmlformats.org/drawingml/2006/main">
+              <a:ext uri="{FF2B5EF4-FFF2-40B4-BE49-F238E27FC236}">
+                <a16:creationId xmlns:a16="http://schemas.microsoft.com/office/drawing/2014/main" id="{CA8C9E32-B586-4905-BE6B-22FA2765EB91}"/>
+              </a:ext>
+            </a:extLst>
+          </p:cNvPr>
+          <p:cNvSpPr>
+            <a:spLocks xmlns:a="http://schemas.openxmlformats.org/drawingml/2006/main" noGrp="1"/>
+          </p:cNvSpPr>
+          <p:nvPr/>
+        </p:nvSpPr>
+        <p:spPr>
+          <a:xfrm xmlns:a="http://schemas.openxmlformats.org/drawingml/2006/main">
+            <a:off x="2343150" y="4296283"/>
+            <a:ext cx="570192" cy="322834"/>
+          </a:xfrm>
+          <a:prstGeom xmlns:a="http://schemas.openxmlformats.org/drawingml/2006/main" prst="rect">
+            <a:avLst/>
+          </a:prstGeom>
+          <a:solidFill xmlns:a="http://schemas.openxmlformats.org/drawingml/2006/main">
+            <a:srgbClr val="2EC4B6"/>
+          </a:solidFill>
+          <a:ln xmlns:a="http://schemas.openxmlformats.org/drawingml/2006/main" w="0">
+            <a:noFill/>
+          </a:ln>
+        </p:spPr>
+      </p:sp>
+      <p:sp>
+        <p:nvSpPr>
+          <p:cNvPr id="35" name="">
+            <a:extLst xmlns:a="http://schemas.openxmlformats.org/drawingml/2006/main">
+              <a:ext uri="{FF2B5EF4-FFF2-40B4-BE49-F238E27FC236}">
+                <a16:creationId xmlns:a16="http://schemas.microsoft.com/office/drawing/2014/main" id="{F6474845-01E4-4B6D-92C9-D9A8B39B116E}"/>
+              </a:ext>
+            </a:extLst>
+          </p:cNvPr>
+          <p:cNvSpPr>
+            <a:spLocks xmlns:a="http://schemas.openxmlformats.org/drawingml/2006/main" noGrp="1"/>
+          </p:cNvSpPr>
+          <p:nvPr/>
+        </p:nvSpPr>
+        <p:spPr>
+          <a:xfrm xmlns:a="http://schemas.openxmlformats.org/drawingml/2006/main">
+            <a:off x="2989542" y="4286250"/>
+            <a:ext cx="609600" cy="342900"/>
+          </a:xfrm>
+          <a:prstGeom xmlns:a="http://schemas.openxmlformats.org/drawingml/2006/main" prst="rect">
+            <a:avLst/>
+          </a:prstGeom>
+          <a:noFill xmlns:a="http://schemas.openxmlformats.org/drawingml/2006/main"/>
+          <a:ln xmlns:a="http://schemas.openxmlformats.org/drawingml/2006/main" w="0">
+            <a:noFill/>
+          </a:ln>
+        </p:spPr>
+        <p:txBody>
+          <a:bodyPr xmlns:a="http://schemas.openxmlformats.org/drawingml/2006/main" anchor="ctr">
+            <a:normAutofit fontScale="100000"/>
+          </a:bodyPr>
+          <a:lstStyle xmlns:a="http://schemas.openxmlformats.org/drawingml/2006/main"/>
+          <a:p xmlns:a="http://schemas.openxmlformats.org/drawingml/2006/main">
+            <a:pPr algn="l">
+              <a:defRPr sz="1050" b="1">
+                <a:solidFill>
+                  <a:srgbClr val="14213D"/>
+                </a:solidFill>
+                <a:latin typeface="Arial"/>
+                <a:ea typeface="Arial"/>
+                <a:cs typeface="Arial"/>
+              </a:defRPr>
+            </a:pPr>
+            <a:r>
+              <a:rPr sz="1050" b="1">
+                <a:solidFill>
+                  <a:srgbClr val="14213D"/>
+                </a:solidFill>
+                <a:latin typeface="Arial"/>
+                <a:ea typeface="Arial"/>
+                <a:cs typeface="Arial"/>
+              </a:rPr>
+              <a:t>5,6%</a:t>
+            </a:r>
+          </a:p>
+        </p:txBody>
+      </p:sp>
+      <p:sp>
+        <p:nvSpPr>
+          <p:cNvPr id="36" name="">
+            <a:extLst xmlns:a="http://schemas.openxmlformats.org/drawingml/2006/main">
+              <a:ext uri="{FF2B5EF4-FFF2-40B4-BE49-F238E27FC236}">
+                <a16:creationId xmlns:a16="http://schemas.microsoft.com/office/drawing/2014/main" id="{98ED491E-9A06-41D7-8078-E54053CFE240}"/>
+              </a:ext>
+            </a:extLst>
+          </p:cNvPr>
+          <p:cNvSpPr>
+            <a:spLocks xmlns:a="http://schemas.openxmlformats.org/drawingml/2006/main" noGrp="1"/>
+          </p:cNvSpPr>
+          <p:nvPr/>
+        </p:nvSpPr>
+        <p:spPr>
+          <a:xfrm xmlns:a="http://schemas.openxmlformats.org/drawingml/2006/main">
+            <a:off x="723900" y="4806950"/>
+            <a:ext cx="1504950" cy="342900"/>
+          </a:xfrm>
+          <a:prstGeom xmlns:a="http://schemas.openxmlformats.org/drawingml/2006/main" prst="rect">
+            <a:avLst/>
+          </a:prstGeom>
+          <a:noFill xmlns:a="http://schemas.openxmlformats.org/drawingml/2006/main"/>
+          <a:ln xmlns:a="http://schemas.openxmlformats.org/drawingml/2006/main" w="0">
+            <a:noFill/>
+          </a:ln>
+        </p:spPr>
+        <p:txBody>
+          <a:bodyPr xmlns:a="http://schemas.openxmlformats.org/drawingml/2006/main" anchor="ctr">
+            <a:normAutofit fontScale="100000"/>
+          </a:bodyPr>
+          <a:lstStyle xmlns:a="http://schemas.openxmlformats.org/drawingml/2006/main"/>
+          <a:p xmlns:a="http://schemas.openxmlformats.org/drawingml/2006/main">
+            <a:pPr algn="r">
+              <a:defRPr sz="1050" b="0">
+                <a:solidFill>
+                  <a:srgbClr val="63708A"/>
+                </a:solidFill>
+                <a:latin typeface="Arial"/>
+                <a:ea typeface="Arial"/>
+                <a:cs typeface="Arial"/>
+              </a:defRPr>
+            </a:pPr>
+            <a:r>
+              <a:rPr sz="1050" b="0">
+                <a:solidFill>
+                  <a:srgbClr val="63708A"/>
+                </a:solidFill>
+                <a:latin typeface="Arial"/>
+                <a:ea typeface="Arial"/>
+                <a:cs typeface="Arial"/>
+              </a:rPr>
+              <a:t>Наука</a:t>
+            </a:r>
+          </a:p>
+        </p:txBody>
+      </p:sp>
+      <p:sp>
+        <p:nvSpPr>
+          <p:cNvPr id="37" name="">
+            <a:extLst xmlns:a="http://schemas.openxmlformats.org/drawingml/2006/main">
+              <a:ext uri="{FF2B5EF4-FFF2-40B4-BE49-F238E27FC236}">
+                <a16:creationId xmlns:a16="http://schemas.microsoft.com/office/drawing/2014/main" id="{7E87BB14-E6B0-4565-9793-F10621DD7991}"/>
+              </a:ext>
+            </a:extLst>
+          </p:cNvPr>
+          <p:cNvSpPr>
+            <a:spLocks xmlns:a="http://schemas.openxmlformats.org/drawingml/2006/main" noGrp="1"/>
+          </p:cNvSpPr>
+          <p:nvPr/>
+        </p:nvSpPr>
+        <p:spPr>
+          <a:xfrm xmlns:a="http://schemas.openxmlformats.org/drawingml/2006/main">
+            <a:off x="2343150" y="4816983"/>
+            <a:ext cx="142548" cy="322834"/>
+          </a:xfrm>
+          <a:prstGeom xmlns:a="http://schemas.openxmlformats.org/drawingml/2006/main" prst="rect">
+            <a:avLst/>
+          </a:prstGeom>
+          <a:solidFill xmlns:a="http://schemas.openxmlformats.org/drawingml/2006/main">
+            <a:srgbClr val="2EC4B6"/>
+          </a:solidFill>
+          <a:ln xmlns:a="http://schemas.openxmlformats.org/drawingml/2006/main" w="0">
+            <a:noFill/>
+          </a:ln>
+        </p:spPr>
+      </p:sp>
+      <p:sp>
+        <p:nvSpPr>
+          <p:cNvPr id="38" name="">
+            <a:extLst xmlns:a="http://schemas.openxmlformats.org/drawingml/2006/main">
+              <a:ext uri="{FF2B5EF4-FFF2-40B4-BE49-F238E27FC236}">
+                <a16:creationId xmlns:a16="http://schemas.microsoft.com/office/drawing/2014/main" id="{88FEC3B5-514A-425E-882E-F7871FEFA256}"/>
+              </a:ext>
+            </a:extLst>
+          </p:cNvPr>
+          <p:cNvSpPr>
+            <a:spLocks xmlns:a="http://schemas.openxmlformats.org/drawingml/2006/main" noGrp="1"/>
+          </p:cNvSpPr>
+          <p:nvPr/>
+        </p:nvSpPr>
+        <p:spPr>
+          <a:xfrm xmlns:a="http://schemas.openxmlformats.org/drawingml/2006/main">
+            <a:off x="2561898" y="4806950"/>
+            <a:ext cx="609600" cy="342900"/>
+          </a:xfrm>
+          <a:prstGeom xmlns:a="http://schemas.openxmlformats.org/drawingml/2006/main" prst="rect">
+            <a:avLst/>
+          </a:prstGeom>
+          <a:noFill xmlns:a="http://schemas.openxmlformats.org/drawingml/2006/main"/>
+          <a:ln xmlns:a="http://schemas.openxmlformats.org/drawingml/2006/main" w="0">
+            <a:noFill/>
+          </a:ln>
+        </p:spPr>
+        <p:txBody>
+          <a:bodyPr xmlns:a="http://schemas.openxmlformats.org/drawingml/2006/main" anchor="ctr">
+            <a:normAutofit fontScale="100000"/>
+          </a:bodyPr>
+          <a:lstStyle xmlns:a="http://schemas.openxmlformats.org/drawingml/2006/main"/>
+          <a:p xmlns:a="http://schemas.openxmlformats.org/drawingml/2006/main">
+            <a:pPr algn="l">
+              <a:defRPr sz="1050" b="1">
+                <a:solidFill>
+                  <a:srgbClr val="14213D"/>
+                </a:solidFill>
+                <a:latin typeface="Arial"/>
+                <a:ea typeface="Arial"/>
+                <a:cs typeface="Arial"/>
+              </a:defRPr>
+            </a:pPr>
+            <a:r>
+              <a:rPr sz="1050" b="1">
+                <a:solidFill>
+                  <a:srgbClr val="14213D"/>
+                </a:solidFill>
+                <a:latin typeface="Arial"/>
+                <a:ea typeface="Arial"/>
+                <a:cs typeface="Arial"/>
+              </a:rPr>
+              <a:t>1,4%</a:t>
+            </a:r>
+          </a:p>
+        </p:txBody>
+      </p:sp>
+      <p:sp>
+        <p:nvSpPr>
+          <p:cNvPr id="39" name="">
+            <a:extLst xmlns:a="http://schemas.openxmlformats.org/drawingml/2006/main">
+              <a:ext uri="{FF2B5EF4-FFF2-40B4-BE49-F238E27FC236}">
+                <a16:creationId xmlns:a16="http://schemas.microsoft.com/office/drawing/2014/main" id="{949C24B9-F8FD-4381-9863-663FCEEE852F}"/>
               </a:ext>
             </a:extLst>
           </p:cNvPr>
@@ -3729,10 +4551,10 @@
       </p:sp>
       <p:sp>
         <p:nvSpPr>
-          <p:cNvPr id="8" name="">
-            <a:extLst xmlns:a="http://schemas.openxmlformats.org/drawingml/2006/main">
-              <a:ext uri="{FF2B5EF4-FFF2-40B4-BE49-F238E27FC236}">
-                <a16:creationId xmlns:a16="http://schemas.microsoft.com/office/drawing/2014/main" id="{062C0F65-5460-4139-B48C-0FC8760AF518}"/>
+          <p:cNvPr id="40" name="">
+            <a:extLst xmlns:a="http://schemas.openxmlformats.org/drawingml/2006/main">
+              <a:ext uri="{FF2B5EF4-FFF2-40B4-BE49-F238E27FC236}">
+                <a16:creationId xmlns:a16="http://schemas.microsoft.com/office/drawing/2014/main" id="{B31B420A-EFAD-461B-9B26-7877B693B002}"/>
               </a:ext>
             </a:extLst>
           </p:cNvPr>
@@ -3786,10 +4608,10 @@
       </p:sp>
       <p:sp>
         <p:nvSpPr>
-          <p:cNvPr id="9" name="">
-            <a:extLst xmlns:a="http://schemas.openxmlformats.org/drawingml/2006/main">
-              <a:ext uri="{FF2B5EF4-FFF2-40B4-BE49-F238E27FC236}">
-                <a16:creationId xmlns:a16="http://schemas.microsoft.com/office/drawing/2014/main" id="{C9731123-558C-42D3-9002-ED56C2336BCD}"/>
+          <p:cNvPr id="41" name="">
+            <a:extLst xmlns:a="http://schemas.openxmlformats.org/drawingml/2006/main">
+              <a:ext uri="{FF2B5EF4-FFF2-40B4-BE49-F238E27FC236}">
+                <a16:creationId xmlns:a16="http://schemas.microsoft.com/office/drawing/2014/main" id="{D6D1564A-0F78-41CD-8AAC-748C4CC62B65}"/>
               </a:ext>
             </a:extLst>
           </p:cNvPr>
@@ -3843,10 +4665,10 @@
       </p:sp>
       <p:sp>
         <p:nvSpPr>
-          <p:cNvPr id="10" name="">
-            <a:extLst xmlns:a="http://schemas.openxmlformats.org/drawingml/2006/main">
-              <a:ext uri="{FF2B5EF4-FFF2-40B4-BE49-F238E27FC236}">
-                <a16:creationId xmlns:a16="http://schemas.microsoft.com/office/drawing/2014/main" id="{029B52A1-840A-41F2-ADBF-41E6EB113D1A}"/>
+          <p:cNvPr id="42" name="">
+            <a:extLst xmlns:a="http://schemas.openxmlformats.org/drawingml/2006/main">
+              <a:ext uri="{FF2B5EF4-FFF2-40B4-BE49-F238E27FC236}">
+                <a16:creationId xmlns:a16="http://schemas.microsoft.com/office/drawing/2014/main" id="{BDF65D53-9B0A-498F-B6D4-7397EB597E84}"/>
               </a:ext>
             </a:extLst>
           </p:cNvPr>
@@ -3900,10 +4722,10 @@
       </p:sp>
       <p:sp>
         <p:nvSpPr>
-          <p:cNvPr id="11" name="">
-            <a:extLst xmlns:a="http://schemas.openxmlformats.org/drawingml/2006/main">
-              <a:ext uri="{FF2B5EF4-FFF2-40B4-BE49-F238E27FC236}">
-                <a16:creationId xmlns:a16="http://schemas.microsoft.com/office/drawing/2014/main" id="{E1819D24-326A-4A5F-ADBC-8530D21DA2A2}"/>
+          <p:cNvPr id="43" name="">
+            <a:extLst xmlns:a="http://schemas.openxmlformats.org/drawingml/2006/main">
+              <a:ext uri="{FF2B5EF4-FFF2-40B4-BE49-F238E27FC236}">
+                <a16:creationId xmlns:a16="http://schemas.microsoft.com/office/drawing/2014/main" id="{63DCF211-6BC2-4BF7-8FD8-FAF5D6937279}"/>
               </a:ext>
             </a:extLst>
           </p:cNvPr>
@@ -3958,7 +4780,7 @@
     </p:spTree>
     <p:extLst>
       <p:ext uri="{BB962C8B-B14F-4D97-AF65-F5344CB8AC3E}">
-        <p14:creationId xmlns:p14="http://schemas.microsoft.com/office/powerpoint/2010/main" val="684334600"/>
+        <p14:creationId xmlns:p14="http://schemas.microsoft.com/office/powerpoint/2010/main" val="1327774315"/>
       </p:ext>
     </p:extLst>
   </p:cSld>
@@ -3989,7 +4811,7 @@
           <p:cNvPr id="28" name="">
             <a:extLst xmlns:a="http://schemas.openxmlformats.org/drawingml/2006/main">
               <a:ext uri="{FF2B5EF4-FFF2-40B4-BE49-F238E27FC236}">
-                <a16:creationId xmlns:a16="http://schemas.microsoft.com/office/drawing/2014/main" id="{9AFF874D-BC70-44BB-A369-E34E7A943684}"/>
+                <a16:creationId xmlns:a16="http://schemas.microsoft.com/office/drawing/2014/main" id="{20288871-9CA6-420D-BFE8-F44710186E42}"/>
               </a:ext>
             </a:extLst>
           </p:cNvPr>
@@ -4019,7 +4841,7 @@
           <p:cNvPr id="2" name="">
             <a:extLst xmlns:a="http://schemas.openxmlformats.org/drawingml/2006/main">
               <a:ext uri="{FF2B5EF4-FFF2-40B4-BE49-F238E27FC236}">
-                <a16:creationId xmlns:a16="http://schemas.microsoft.com/office/drawing/2014/main" id="{3E74DF00-35B1-4E18-950F-4CD7DB8B8010}"/>
+                <a16:creationId xmlns:a16="http://schemas.microsoft.com/office/drawing/2014/main" id="{6E0CF07D-C994-43A8-9A1C-3771903FA6F1}"/>
               </a:ext>
             </a:extLst>
           </p:cNvPr>
@@ -4076,7 +4898,7 @@
           <p:cNvPr id="3" name="">
             <a:extLst xmlns:a="http://schemas.openxmlformats.org/drawingml/2006/main">
               <a:ext uri="{FF2B5EF4-FFF2-40B4-BE49-F238E27FC236}">
-                <a16:creationId xmlns:a16="http://schemas.microsoft.com/office/drawing/2014/main" id="{CE7827BD-FA1F-4E52-8D23-34916B2BAF75}"/>
+                <a16:creationId xmlns:a16="http://schemas.microsoft.com/office/drawing/2014/main" id="{10DA2AF6-E279-4934-B1F0-41362BCBFF8D}"/>
               </a:ext>
             </a:extLst>
           </p:cNvPr>
@@ -4133,7 +4955,7 @@
           <p:cNvPr id="4" name="">
             <a:extLst xmlns:a="http://schemas.openxmlformats.org/drawingml/2006/main">
               <a:ext uri="{FF2B5EF4-FFF2-40B4-BE49-F238E27FC236}">
-                <a16:creationId xmlns:a16="http://schemas.microsoft.com/office/drawing/2014/main" id="{A9A46D24-4E8B-453E-9A35-31381512DABB}"/>
+                <a16:creationId xmlns:a16="http://schemas.microsoft.com/office/drawing/2014/main" id="{E806A0AA-8A29-4E7E-94C8-152CA2714B64}"/>
               </a:ext>
             </a:extLst>
           </p:cNvPr>
@@ -4164,7 +4986,7 @@
           <p:cNvPr id="5" name="">
             <a:extLst xmlns:a="http://schemas.openxmlformats.org/drawingml/2006/main">
               <a:ext uri="{FF2B5EF4-FFF2-40B4-BE49-F238E27FC236}">
-                <a16:creationId xmlns:a16="http://schemas.microsoft.com/office/drawing/2014/main" id="{7A3CD5A4-BEDB-420D-9B46-C2B5D43718E1}"/>
+                <a16:creationId xmlns:a16="http://schemas.microsoft.com/office/drawing/2014/main" id="{F09DC9CE-F8EB-43EA-B7B5-54B9D9F41095}"/>
               </a:ext>
             </a:extLst>
           </p:cNvPr>
@@ -4221,7 +5043,7 @@
           <p:cNvPr id="6" name="">
             <a:extLst xmlns:a="http://schemas.openxmlformats.org/drawingml/2006/main">
               <a:ext uri="{FF2B5EF4-FFF2-40B4-BE49-F238E27FC236}">
-                <a16:creationId xmlns:a16="http://schemas.microsoft.com/office/drawing/2014/main" id="{BA1EE329-8A98-40D4-B7F7-CDDDF552A4CA}"/>
+                <a16:creationId xmlns:a16="http://schemas.microsoft.com/office/drawing/2014/main" id="{C94AC5BB-E09A-4E67-B989-E8F73141867C}"/>
               </a:ext>
             </a:extLst>
           </p:cNvPr>
@@ -4262,7 +5084,7 @@
           <p:cNvPr id="7" name="">
             <a:extLst xmlns:a="http://schemas.openxmlformats.org/drawingml/2006/main">
               <a:ext uri="{FF2B5EF4-FFF2-40B4-BE49-F238E27FC236}">
-                <a16:creationId xmlns:a16="http://schemas.microsoft.com/office/drawing/2014/main" id="{3EA7FDC1-EF5A-45D7-B4F5-CE821D15065C}"/>
+                <a16:creationId xmlns:a16="http://schemas.microsoft.com/office/drawing/2014/main" id="{999C4551-4970-4737-9843-D0DBB5CA4119}"/>
               </a:ext>
             </a:extLst>
           </p:cNvPr>
@@ -4294,7 +5116,7 @@
           <p:cNvPr id="8" name="">
             <a:extLst xmlns:a="http://schemas.openxmlformats.org/drawingml/2006/main">
               <a:ext uri="{FF2B5EF4-FFF2-40B4-BE49-F238E27FC236}">
-                <a16:creationId xmlns:a16="http://schemas.microsoft.com/office/drawing/2014/main" id="{DEF11D0D-D0F8-4EF0-B838-301F7DB401B5}"/>
+                <a16:creationId xmlns:a16="http://schemas.microsoft.com/office/drawing/2014/main" id="{DC5EFB73-5E4F-44BA-8762-8FEA1B12C4CA}"/>
               </a:ext>
             </a:extLst>
           </p:cNvPr>
@@ -4351,7 +5173,7 @@
           <p:cNvPr id="9" name="">
             <a:extLst xmlns:a="http://schemas.openxmlformats.org/drawingml/2006/main">
               <a:ext uri="{FF2B5EF4-FFF2-40B4-BE49-F238E27FC236}">
-                <a16:creationId xmlns:a16="http://schemas.microsoft.com/office/drawing/2014/main" id="{3D82CBDF-389B-42DB-A8F8-7736B2618096}"/>
+                <a16:creationId xmlns:a16="http://schemas.microsoft.com/office/drawing/2014/main" id="{2A3EB527-AA88-4FE0-A032-474F5B4F1ADD}"/>
               </a:ext>
             </a:extLst>
           </p:cNvPr>
@@ -4408,7 +5230,7 @@
           <p:cNvPr id="10" name="">
             <a:extLst xmlns:a="http://schemas.openxmlformats.org/drawingml/2006/main">
               <a:ext uri="{FF2B5EF4-FFF2-40B4-BE49-F238E27FC236}">
-                <a16:creationId xmlns:a16="http://schemas.microsoft.com/office/drawing/2014/main" id="{B22C7B7A-A4F3-4BE7-9404-34650C7FCBC1}"/>
+                <a16:creationId xmlns:a16="http://schemas.microsoft.com/office/drawing/2014/main" id="{8D721A52-6776-4BD8-8B50-F11939EFE151}"/>
               </a:ext>
             </a:extLst>
           </p:cNvPr>
@@ -4449,7 +5271,7 @@
           <p:cNvPr id="11" name="">
             <a:extLst xmlns:a="http://schemas.openxmlformats.org/drawingml/2006/main">
               <a:ext uri="{FF2B5EF4-FFF2-40B4-BE49-F238E27FC236}">
-                <a16:creationId xmlns:a16="http://schemas.microsoft.com/office/drawing/2014/main" id="{950939B5-1705-4688-95A5-01FCAAA0469F}"/>
+                <a16:creationId xmlns:a16="http://schemas.microsoft.com/office/drawing/2014/main" id="{336B566D-B857-4282-8AE5-7E7E3FC90A9D}"/>
               </a:ext>
             </a:extLst>
           </p:cNvPr>
@@ -4481,7 +5303,7 @@
           <p:cNvPr id="12" name="">
             <a:extLst xmlns:a="http://schemas.openxmlformats.org/drawingml/2006/main">
               <a:ext uri="{FF2B5EF4-FFF2-40B4-BE49-F238E27FC236}">
-                <a16:creationId xmlns:a16="http://schemas.microsoft.com/office/drawing/2014/main" id="{7FE9108A-80BD-4BCA-AC62-A445B7E9540D}"/>
+                <a16:creationId xmlns:a16="http://schemas.microsoft.com/office/drawing/2014/main" id="{4B06292A-5CFE-4C1D-AC39-D00771D80844}"/>
               </a:ext>
             </a:extLst>
           </p:cNvPr>
@@ -4538,7 +5360,7 @@
           <p:cNvPr id="13" name="">
             <a:extLst xmlns:a="http://schemas.openxmlformats.org/drawingml/2006/main">
               <a:ext uri="{FF2B5EF4-FFF2-40B4-BE49-F238E27FC236}">
-                <a16:creationId xmlns:a16="http://schemas.microsoft.com/office/drawing/2014/main" id="{4897AFF8-2EAD-48CA-815D-DBE998AF08BA}"/>
+                <a16:creationId xmlns:a16="http://schemas.microsoft.com/office/drawing/2014/main" id="{C97E30FE-03DA-43F8-895F-8D9687E321E7}"/>
               </a:ext>
             </a:extLst>
           </p:cNvPr>
@@ -4595,7 +5417,7 @@
           <p:cNvPr id="14" name="">
             <a:extLst xmlns:a="http://schemas.openxmlformats.org/drawingml/2006/main">
               <a:ext uri="{FF2B5EF4-FFF2-40B4-BE49-F238E27FC236}">
-                <a16:creationId xmlns:a16="http://schemas.microsoft.com/office/drawing/2014/main" id="{59A6A3B9-63DB-44B9-832C-5258F102F814}"/>
+                <a16:creationId xmlns:a16="http://schemas.microsoft.com/office/drawing/2014/main" id="{951C5B40-FBD7-4850-B17A-AE9056536DDE}"/>
               </a:ext>
             </a:extLst>
           </p:cNvPr>
@@ -4636,7 +5458,7 @@
           <p:cNvPr id="15" name="">
             <a:extLst xmlns:a="http://schemas.openxmlformats.org/drawingml/2006/main">
               <a:ext uri="{FF2B5EF4-FFF2-40B4-BE49-F238E27FC236}">
-                <a16:creationId xmlns:a16="http://schemas.microsoft.com/office/drawing/2014/main" id="{A01284A7-8402-4E28-B7C7-6DB8E51CF547}"/>
+                <a16:creationId xmlns:a16="http://schemas.microsoft.com/office/drawing/2014/main" id="{4E184836-93D1-4780-A5E4-37B5B5453CE2}"/>
               </a:ext>
             </a:extLst>
           </p:cNvPr>
@@ -4668,7 +5490,7 @@
           <p:cNvPr id="16" name="">
             <a:extLst xmlns:a="http://schemas.openxmlformats.org/drawingml/2006/main">
               <a:ext uri="{FF2B5EF4-FFF2-40B4-BE49-F238E27FC236}">
-                <a16:creationId xmlns:a16="http://schemas.microsoft.com/office/drawing/2014/main" id="{04B01A82-0355-420A-B6EC-E17F9C070F6E}"/>
+                <a16:creationId xmlns:a16="http://schemas.microsoft.com/office/drawing/2014/main" id="{C4A0C677-D657-4370-9B89-44407912300F}"/>
               </a:ext>
             </a:extLst>
           </p:cNvPr>
@@ -4725,7 +5547,7 @@
           <p:cNvPr id="17" name="">
             <a:extLst xmlns:a="http://schemas.openxmlformats.org/drawingml/2006/main">
               <a:ext uri="{FF2B5EF4-FFF2-40B4-BE49-F238E27FC236}">
-                <a16:creationId xmlns:a16="http://schemas.microsoft.com/office/drawing/2014/main" id="{8736871F-0E37-40AC-A461-57EC75CC5FF9}"/>
+                <a16:creationId xmlns:a16="http://schemas.microsoft.com/office/drawing/2014/main" id="{8058E8AC-9141-4C61-B570-44E66CC659DD}"/>
               </a:ext>
             </a:extLst>
           </p:cNvPr>
@@ -4782,7 +5604,7 @@
           <p:cNvPr id="18" name="">
             <a:extLst xmlns:a="http://schemas.openxmlformats.org/drawingml/2006/main">
               <a:ext uri="{FF2B5EF4-FFF2-40B4-BE49-F238E27FC236}">
-                <a16:creationId xmlns:a16="http://schemas.microsoft.com/office/drawing/2014/main" id="{BC80A220-1BDB-455C-831C-CDDF1024A40A}"/>
+                <a16:creationId xmlns:a16="http://schemas.microsoft.com/office/drawing/2014/main" id="{B27039BA-9879-48DA-82EC-EB390005B2B2}"/>
               </a:ext>
             </a:extLst>
           </p:cNvPr>
@@ -4823,7 +5645,7 @@
           <p:cNvPr id="19" name="">
             <a:extLst xmlns:a="http://schemas.openxmlformats.org/drawingml/2006/main">
               <a:ext uri="{FF2B5EF4-FFF2-40B4-BE49-F238E27FC236}">
-                <a16:creationId xmlns:a16="http://schemas.microsoft.com/office/drawing/2014/main" id="{F8DCE403-BA9E-4BC4-AF3D-DB9F559B3741}"/>
+                <a16:creationId xmlns:a16="http://schemas.microsoft.com/office/drawing/2014/main" id="{6A9F9B55-5C0E-4DA1-8305-D7AB95C0EF21}"/>
               </a:ext>
             </a:extLst>
           </p:cNvPr>
@@ -4855,7 +5677,7 @@
           <p:cNvPr id="20" name="">
             <a:extLst xmlns:a="http://schemas.openxmlformats.org/drawingml/2006/main">
               <a:ext uri="{FF2B5EF4-FFF2-40B4-BE49-F238E27FC236}">
-                <a16:creationId xmlns:a16="http://schemas.microsoft.com/office/drawing/2014/main" id="{749C7047-6A73-4960-94CA-FA579AE5176F}"/>
+                <a16:creationId xmlns:a16="http://schemas.microsoft.com/office/drawing/2014/main" id="{BD083880-A091-4E23-B217-106176A2C8BE}"/>
               </a:ext>
             </a:extLst>
           </p:cNvPr>
@@ -4912,7 +5734,7 @@
           <p:cNvPr id="21" name="">
             <a:extLst xmlns:a="http://schemas.openxmlformats.org/drawingml/2006/main">
               <a:ext uri="{FF2B5EF4-FFF2-40B4-BE49-F238E27FC236}">
-                <a16:creationId xmlns:a16="http://schemas.microsoft.com/office/drawing/2014/main" id="{2FC74A87-4457-4F50-94AB-0803FBA697D7}"/>
+                <a16:creationId xmlns:a16="http://schemas.microsoft.com/office/drawing/2014/main" id="{402CE7A1-A8C8-4E02-8931-0231BB25F55F}"/>
               </a:ext>
             </a:extLst>
           </p:cNvPr>
@@ -4969,7 +5791,7 @@
           <p:cNvPr id="22" name="">
             <a:extLst xmlns:a="http://schemas.openxmlformats.org/drawingml/2006/main">
               <a:ext uri="{FF2B5EF4-FFF2-40B4-BE49-F238E27FC236}">
-                <a16:creationId xmlns:a16="http://schemas.microsoft.com/office/drawing/2014/main" id="{ADFFE916-BDF0-4D26-8890-5CD9300BF08B}"/>
+                <a16:creationId xmlns:a16="http://schemas.microsoft.com/office/drawing/2014/main" id="{C4A9448E-D50C-4427-A513-2E8E17C9818A}"/>
               </a:ext>
             </a:extLst>
           </p:cNvPr>
@@ -5001,7 +5823,7 @@
           <p:cNvPr id="23" name="">
             <a:extLst xmlns:a="http://schemas.openxmlformats.org/drawingml/2006/main">
               <a:ext uri="{FF2B5EF4-FFF2-40B4-BE49-F238E27FC236}">
-                <a16:creationId xmlns:a16="http://schemas.microsoft.com/office/drawing/2014/main" id="{AF744F79-A5A6-443F-A7EC-CB85262D171F}"/>
+                <a16:creationId xmlns:a16="http://schemas.microsoft.com/office/drawing/2014/main" id="{6FD5FF17-EFA8-4C3A-870B-958FFE093A67}"/>
               </a:ext>
             </a:extLst>
           </p:cNvPr>
@@ -5058,7 +5880,7 @@
           <p:cNvPr id="24" name="">
             <a:extLst xmlns:a="http://schemas.openxmlformats.org/drawingml/2006/main">
               <a:ext uri="{FF2B5EF4-FFF2-40B4-BE49-F238E27FC236}">
-                <a16:creationId xmlns:a16="http://schemas.microsoft.com/office/drawing/2014/main" id="{B2EF311E-2B0A-4106-ACE2-64774515C736}"/>
+                <a16:creationId xmlns:a16="http://schemas.microsoft.com/office/drawing/2014/main" id="{22BAEB29-3845-493A-A75B-3E045932AE98}"/>
               </a:ext>
             </a:extLst>
           </p:cNvPr>
@@ -5115,7 +5937,7 @@
           <p:cNvPr id="25" name="">
             <a:extLst xmlns:a="http://schemas.openxmlformats.org/drawingml/2006/main">
               <a:ext uri="{FF2B5EF4-FFF2-40B4-BE49-F238E27FC236}">
-                <a16:creationId xmlns:a16="http://schemas.microsoft.com/office/drawing/2014/main" id="{305A3711-53AB-47FF-A3FD-30B4EF285D90}"/>
+                <a16:creationId xmlns:a16="http://schemas.microsoft.com/office/drawing/2014/main" id="{0D15CCE9-0EC2-48C5-B7BB-E2748869504B}"/>
               </a:ext>
             </a:extLst>
           </p:cNvPr>
@@ -5172,7 +5994,7 @@
           <p:cNvPr id="26" name="">
             <a:extLst xmlns:a="http://schemas.openxmlformats.org/drawingml/2006/main">
               <a:ext uri="{FF2B5EF4-FFF2-40B4-BE49-F238E27FC236}">
-                <a16:creationId xmlns:a16="http://schemas.microsoft.com/office/drawing/2014/main" id="{6DC5498B-7333-4288-9D9D-534C21FE9600}"/>
+                <a16:creationId xmlns:a16="http://schemas.microsoft.com/office/drawing/2014/main" id="{72C02B90-389C-4134-B937-FBA8EECB69FB}"/>
               </a:ext>
             </a:extLst>
           </p:cNvPr>
@@ -5229,7 +6051,7 @@
           <p:cNvPr id="27" name="">
             <a:extLst xmlns:a="http://schemas.openxmlformats.org/drawingml/2006/main">
               <a:ext uri="{FF2B5EF4-FFF2-40B4-BE49-F238E27FC236}">
-                <a16:creationId xmlns:a16="http://schemas.microsoft.com/office/drawing/2014/main" id="{A22EF5D5-7BCD-4BE4-ACB0-074DE582FB9A}"/>
+                <a16:creationId xmlns:a16="http://schemas.microsoft.com/office/drawing/2014/main" id="{ED749C6B-C0B2-4139-B937-10CB5493F908}"/>
               </a:ext>
             </a:extLst>
           </p:cNvPr>
@@ -5284,7 +6106,7 @@
     </p:spTree>
     <p:extLst>
       <p:ext uri="{BB962C8B-B14F-4D97-AF65-F5344CB8AC3E}">
-        <p14:creationId xmlns:p14="http://schemas.microsoft.com/office/powerpoint/2010/main" val="1951523501"/>
+        <p14:creationId xmlns:p14="http://schemas.microsoft.com/office/powerpoint/2010/main" val="849046955"/>
       </p:ext>
     </p:extLst>
   </p:cSld>
@@ -5315,7 +6137,7 @@
           <p:cNvPr id="19" name="">
             <a:extLst xmlns:a="http://schemas.openxmlformats.org/drawingml/2006/main">
               <a:ext uri="{FF2B5EF4-FFF2-40B4-BE49-F238E27FC236}">
-                <a16:creationId xmlns:a16="http://schemas.microsoft.com/office/drawing/2014/main" id="{F9E173DE-35D0-4EDD-931E-8B46D03AF59B}"/>
+                <a16:creationId xmlns:a16="http://schemas.microsoft.com/office/drawing/2014/main" id="{D0CFF359-85B6-466C-B25E-196F42C21D51}"/>
               </a:ext>
             </a:extLst>
           </p:cNvPr>
@@ -5345,7 +6167,7 @@
           <p:cNvPr id="2" name="">
             <a:extLst xmlns:a="http://schemas.openxmlformats.org/drawingml/2006/main">
               <a:ext uri="{FF2B5EF4-FFF2-40B4-BE49-F238E27FC236}">
-                <a16:creationId xmlns:a16="http://schemas.microsoft.com/office/drawing/2014/main" id="{8F6CF190-6EC6-4739-8AD8-EA9F82BD59F3}"/>
+                <a16:creationId xmlns:a16="http://schemas.microsoft.com/office/drawing/2014/main" id="{A1057E4C-ED9A-471C-8833-89988860F48F}"/>
               </a:ext>
             </a:extLst>
           </p:cNvPr>
@@ -5402,7 +6224,7 @@
           <p:cNvPr id="3" name="">
             <a:extLst xmlns:a="http://schemas.openxmlformats.org/drawingml/2006/main">
               <a:ext uri="{FF2B5EF4-FFF2-40B4-BE49-F238E27FC236}">
-                <a16:creationId xmlns:a16="http://schemas.microsoft.com/office/drawing/2014/main" id="{E0383F8F-14D9-4570-9D33-9C9E5969117E}"/>
+                <a16:creationId xmlns:a16="http://schemas.microsoft.com/office/drawing/2014/main" id="{80E3CE11-92AE-42AB-8B98-782EBEB5421D}"/>
               </a:ext>
             </a:extLst>
           </p:cNvPr>
@@ -5459,7 +6281,7 @@
           <p:cNvPr id="4" name="">
             <a:extLst xmlns:a="http://schemas.openxmlformats.org/drawingml/2006/main">
               <a:ext uri="{FF2B5EF4-FFF2-40B4-BE49-F238E27FC236}">
-                <a16:creationId xmlns:a16="http://schemas.microsoft.com/office/drawing/2014/main" id="{74041B89-8665-472F-A880-52C8E40E85E4}"/>
+                <a16:creationId xmlns:a16="http://schemas.microsoft.com/office/drawing/2014/main" id="{B4BF8998-3E7D-4B17-AB02-B5B2CC3909C8}"/>
               </a:ext>
             </a:extLst>
           </p:cNvPr>
@@ -5490,7 +6312,7 @@
           <p:cNvPr id="5" name="">
             <a:extLst xmlns:a="http://schemas.openxmlformats.org/drawingml/2006/main">
               <a:ext uri="{FF2B5EF4-FFF2-40B4-BE49-F238E27FC236}">
-                <a16:creationId xmlns:a16="http://schemas.microsoft.com/office/drawing/2014/main" id="{626ADF94-8411-4ADE-B0A5-37AA7A778AF4}"/>
+                <a16:creationId xmlns:a16="http://schemas.microsoft.com/office/drawing/2014/main" id="{FAA6C904-5B15-490B-976E-70C47BCF5044}"/>
               </a:ext>
             </a:extLst>
           </p:cNvPr>
@@ -5547,7 +6369,7 @@
           <p:cNvPr id="6" name="">
             <a:extLst xmlns:a="http://schemas.openxmlformats.org/drawingml/2006/main">
               <a:ext uri="{FF2B5EF4-FFF2-40B4-BE49-F238E27FC236}">
-                <a16:creationId xmlns:a16="http://schemas.microsoft.com/office/drawing/2014/main" id="{AA9139FE-647F-443B-A830-E0D81FBEBD42}"/>
+                <a16:creationId xmlns:a16="http://schemas.microsoft.com/office/drawing/2014/main" id="{9A6DCD69-569B-4203-A64D-97E8252B5162}"/>
               </a:ext>
             </a:extLst>
           </p:cNvPr>
@@ -5588,7 +6410,7 @@
           <p:cNvPr id="7" name="">
             <a:extLst xmlns:a="http://schemas.openxmlformats.org/drawingml/2006/main">
               <a:ext uri="{FF2B5EF4-FFF2-40B4-BE49-F238E27FC236}">
-                <a16:creationId xmlns:a16="http://schemas.microsoft.com/office/drawing/2014/main" id="{FF384081-CFAA-4248-95DC-321118948E42}"/>
+                <a16:creationId xmlns:a16="http://schemas.microsoft.com/office/drawing/2014/main" id="{E8BF96C7-51B9-43E2-91A5-516A8CE7D81C}"/>
               </a:ext>
             </a:extLst>
           </p:cNvPr>
@@ -5645,7 +6467,7 @@
           <p:cNvPr id="8" name="">
             <a:extLst xmlns:a="http://schemas.openxmlformats.org/drawingml/2006/main">
               <a:ext uri="{FF2B5EF4-FFF2-40B4-BE49-F238E27FC236}">
-                <a16:creationId xmlns:a16="http://schemas.microsoft.com/office/drawing/2014/main" id="{B4200E7F-7A6A-465F-970E-B762B10BEB2C}"/>
+                <a16:creationId xmlns:a16="http://schemas.microsoft.com/office/drawing/2014/main" id="{1DE584E4-1169-4FD3-A77C-F9B5C9E203AC}"/>
               </a:ext>
             </a:extLst>
           </p:cNvPr>
@@ -5702,7 +6524,7 @@
           <p:cNvPr id="9" name="">
             <a:extLst xmlns:a="http://schemas.openxmlformats.org/drawingml/2006/main">
               <a:ext uri="{FF2B5EF4-FFF2-40B4-BE49-F238E27FC236}">
-                <a16:creationId xmlns:a16="http://schemas.microsoft.com/office/drawing/2014/main" id="{E236D37C-90A4-4BDA-B23A-7209E2714AEF}"/>
+                <a16:creationId xmlns:a16="http://schemas.microsoft.com/office/drawing/2014/main" id="{4FA53F6B-6EFE-4DF6-B5A5-EC86EDBACB0D}"/>
               </a:ext>
             </a:extLst>
           </p:cNvPr>
@@ -5759,7 +6581,7 @@
           <p:cNvPr id="10" name="">
             <a:extLst xmlns:a="http://schemas.openxmlformats.org/drawingml/2006/main">
               <a:ext uri="{FF2B5EF4-FFF2-40B4-BE49-F238E27FC236}">
-                <a16:creationId xmlns:a16="http://schemas.microsoft.com/office/drawing/2014/main" id="{76382C0A-466D-4B53-8529-54B85F0B1C8F}"/>
+                <a16:creationId xmlns:a16="http://schemas.microsoft.com/office/drawing/2014/main" id="{7E898751-FD8F-4299-B797-B616D250F755}"/>
               </a:ext>
             </a:extLst>
           </p:cNvPr>
@@ -5816,7 +6638,7 @@
           <p:cNvPr id="11" name="">
             <a:extLst xmlns:a="http://schemas.openxmlformats.org/drawingml/2006/main">
               <a:ext uri="{FF2B5EF4-FFF2-40B4-BE49-F238E27FC236}">
-                <a16:creationId xmlns:a16="http://schemas.microsoft.com/office/drawing/2014/main" id="{FC55B382-4ABF-426D-A36A-885D17E85695}"/>
+                <a16:creationId xmlns:a16="http://schemas.microsoft.com/office/drawing/2014/main" id="{20E0927A-6573-4B9F-B8A1-8348F47356B8}"/>
               </a:ext>
             </a:extLst>
           </p:cNvPr>
@@ -5848,7 +6670,7 @@
           <p:cNvPr id="12" name="">
             <a:extLst xmlns:a="http://schemas.openxmlformats.org/drawingml/2006/main">
               <a:ext uri="{FF2B5EF4-FFF2-40B4-BE49-F238E27FC236}">
-                <a16:creationId xmlns:a16="http://schemas.microsoft.com/office/drawing/2014/main" id="{FAE462FE-C2CD-45B5-A131-748C8F7EE3AA}"/>
+                <a16:creationId xmlns:a16="http://schemas.microsoft.com/office/drawing/2014/main" id="{81586209-E096-4D5A-B9F1-120B2C26CAED}"/>
               </a:ext>
             </a:extLst>
           </p:cNvPr>
@@ -5905,7 +6727,7 @@
           <p:cNvPr id="13" name="">
             <a:extLst xmlns:a="http://schemas.openxmlformats.org/drawingml/2006/main">
               <a:ext uri="{FF2B5EF4-FFF2-40B4-BE49-F238E27FC236}">
-                <a16:creationId xmlns:a16="http://schemas.microsoft.com/office/drawing/2014/main" id="{F2E8EA80-7C35-4FFE-B14D-21A6A75643FF}"/>
+                <a16:creationId xmlns:a16="http://schemas.microsoft.com/office/drawing/2014/main" id="{229C7634-2CBA-4B95-A3D7-FB813EEAF1AE}"/>
               </a:ext>
             </a:extLst>
           </p:cNvPr>
@@ -5962,7 +6784,7 @@
           <p:cNvPr id="14" name="">
             <a:extLst xmlns:a="http://schemas.openxmlformats.org/drawingml/2006/main">
               <a:ext uri="{FF2B5EF4-FFF2-40B4-BE49-F238E27FC236}">
-                <a16:creationId xmlns:a16="http://schemas.microsoft.com/office/drawing/2014/main" id="{0C2BBE1E-A3D6-4D43-90CF-A8067202C36E}"/>
+                <a16:creationId xmlns:a16="http://schemas.microsoft.com/office/drawing/2014/main" id="{9AFC284D-1A4A-440C-938E-E969D9E51D05}"/>
               </a:ext>
             </a:extLst>
           </p:cNvPr>
@@ -6019,7 +6841,7 @@
           <p:cNvPr id="15" name="">
             <a:extLst xmlns:a="http://schemas.openxmlformats.org/drawingml/2006/main">
               <a:ext uri="{FF2B5EF4-FFF2-40B4-BE49-F238E27FC236}">
-                <a16:creationId xmlns:a16="http://schemas.microsoft.com/office/drawing/2014/main" id="{043C4350-9DD4-4EAC-960A-B8D5345517E8}"/>
+                <a16:creationId xmlns:a16="http://schemas.microsoft.com/office/drawing/2014/main" id="{B5186AD6-3D12-4723-AF1F-1A2C5571523B}"/>
               </a:ext>
             </a:extLst>
           </p:cNvPr>
@@ -6076,7 +6898,7 @@
           <p:cNvPr id="16" name="">
             <a:extLst xmlns:a="http://schemas.openxmlformats.org/drawingml/2006/main">
               <a:ext uri="{FF2B5EF4-FFF2-40B4-BE49-F238E27FC236}">
-                <a16:creationId xmlns:a16="http://schemas.microsoft.com/office/drawing/2014/main" id="{09BA695D-E771-4301-9E4A-F22ACC8905B7}"/>
+                <a16:creationId xmlns:a16="http://schemas.microsoft.com/office/drawing/2014/main" id="{4FEEF2DE-6F89-420C-B603-451B826EB2EB}"/>
               </a:ext>
             </a:extLst>
           </p:cNvPr>
@@ -6108,7 +6930,7 @@
           <p:cNvPr id="17" name="">
             <a:extLst xmlns:a="http://schemas.openxmlformats.org/drawingml/2006/main">
               <a:ext uri="{FF2B5EF4-FFF2-40B4-BE49-F238E27FC236}">
-                <a16:creationId xmlns:a16="http://schemas.microsoft.com/office/drawing/2014/main" id="{F3C37D52-93A5-40DC-89FF-4FD4EFC59D60}"/>
+                <a16:creationId xmlns:a16="http://schemas.microsoft.com/office/drawing/2014/main" id="{AD4C8C18-F529-458B-A406-BD545A482E69}"/>
               </a:ext>
             </a:extLst>
           </p:cNvPr>
@@ -6165,7 +6987,7 @@
           <p:cNvPr id="18" name="">
             <a:extLst xmlns:a="http://schemas.openxmlformats.org/drawingml/2006/main">
               <a:ext uri="{FF2B5EF4-FFF2-40B4-BE49-F238E27FC236}">
-                <a16:creationId xmlns:a16="http://schemas.microsoft.com/office/drawing/2014/main" id="{8B2D2F3F-0BC9-4252-A23D-2ED1E1327AD0}"/>
+                <a16:creationId xmlns:a16="http://schemas.microsoft.com/office/drawing/2014/main" id="{3EF97D6A-A8CB-4B7C-82FA-7C12963167C1}"/>
               </a:ext>
             </a:extLst>
           </p:cNvPr>
@@ -6220,7 +7042,7 @@
     </p:spTree>
     <p:extLst>
       <p:ext uri="{BB962C8B-B14F-4D97-AF65-F5344CB8AC3E}">
-        <p14:creationId xmlns:p14="http://schemas.microsoft.com/office/powerpoint/2010/main" val="1539387149"/>
+        <p14:creationId xmlns:p14="http://schemas.microsoft.com/office/powerpoint/2010/main" val="1115319679"/>
       </p:ext>
     </p:extLst>
   </p:cSld>
@@ -6251,7 +7073,7 @@
           <p:cNvPr id="34" name="">
             <a:extLst xmlns:a="http://schemas.openxmlformats.org/drawingml/2006/main">
               <a:ext uri="{FF2B5EF4-FFF2-40B4-BE49-F238E27FC236}">
-                <a16:creationId xmlns:a16="http://schemas.microsoft.com/office/drawing/2014/main" id="{AA6CC720-042E-451C-912F-ED680E8735AB}"/>
+                <a16:creationId xmlns:a16="http://schemas.microsoft.com/office/drawing/2014/main" id="{73C2A681-65A1-41F9-8C00-D8A2C96CAFF2}"/>
               </a:ext>
             </a:extLst>
           </p:cNvPr>
@@ -6281,7 +7103,7 @@
           <p:cNvPr id="2" name="">
             <a:extLst xmlns:a="http://schemas.openxmlformats.org/drawingml/2006/main">
               <a:ext uri="{FF2B5EF4-FFF2-40B4-BE49-F238E27FC236}">
-                <a16:creationId xmlns:a16="http://schemas.microsoft.com/office/drawing/2014/main" id="{660A440F-2A02-498E-97A7-88674B0E255E}"/>
+                <a16:creationId xmlns:a16="http://schemas.microsoft.com/office/drawing/2014/main" id="{405AAD34-0D18-4DC7-8F81-52759BD26EE4}"/>
               </a:ext>
             </a:extLst>
           </p:cNvPr>
@@ -6338,7 +7160,7 @@
           <p:cNvPr id="3" name="">
             <a:extLst xmlns:a="http://schemas.openxmlformats.org/drawingml/2006/main">
               <a:ext uri="{FF2B5EF4-FFF2-40B4-BE49-F238E27FC236}">
-                <a16:creationId xmlns:a16="http://schemas.microsoft.com/office/drawing/2014/main" id="{0C338377-C213-4E67-82E2-CD0605551136}"/>
+                <a16:creationId xmlns:a16="http://schemas.microsoft.com/office/drawing/2014/main" id="{D27914DB-76E0-432E-8FB8-DD0911C17174}"/>
               </a:ext>
             </a:extLst>
           </p:cNvPr>
@@ -6395,7 +7217,7 @@
           <p:cNvPr id="4" name="">
             <a:extLst xmlns:a="http://schemas.openxmlformats.org/drawingml/2006/main">
               <a:ext uri="{FF2B5EF4-FFF2-40B4-BE49-F238E27FC236}">
-                <a16:creationId xmlns:a16="http://schemas.microsoft.com/office/drawing/2014/main" id="{E8BC56A5-5E3F-4406-BA36-8D32B1AF72A7}"/>
+                <a16:creationId xmlns:a16="http://schemas.microsoft.com/office/drawing/2014/main" id="{A3A0471A-4F98-42C0-8B20-258226D6A323}"/>
               </a:ext>
             </a:extLst>
           </p:cNvPr>
@@ -6426,7 +7248,7 @@
           <p:cNvPr id="5" name="">
             <a:extLst xmlns:a="http://schemas.openxmlformats.org/drawingml/2006/main">
               <a:ext uri="{FF2B5EF4-FFF2-40B4-BE49-F238E27FC236}">
-                <a16:creationId xmlns:a16="http://schemas.microsoft.com/office/drawing/2014/main" id="{A7B4248B-06C7-4809-A500-546DC1D0E2D7}"/>
+                <a16:creationId xmlns:a16="http://schemas.microsoft.com/office/drawing/2014/main" id="{C1B519C0-5F95-4513-9AEF-B7885E519C72}"/>
               </a:ext>
             </a:extLst>
           </p:cNvPr>
@@ -6483,7 +7305,7 @@
           <p:cNvPr id="6" name="">
             <a:extLst xmlns:a="http://schemas.openxmlformats.org/drawingml/2006/main">
               <a:ext uri="{FF2B5EF4-FFF2-40B4-BE49-F238E27FC236}">
-                <a16:creationId xmlns:a16="http://schemas.microsoft.com/office/drawing/2014/main" id="{B8C2A1E1-5937-4F99-9AD3-D07673C4671C}"/>
+                <a16:creationId xmlns:a16="http://schemas.microsoft.com/office/drawing/2014/main" id="{9BE6E6A1-1DE9-4DFB-9E3A-D9AFADF85227}"/>
               </a:ext>
             </a:extLst>
           </p:cNvPr>
@@ -6524,7 +7346,7 @@
           <p:cNvPr id="7" name="">
             <a:extLst xmlns:a="http://schemas.openxmlformats.org/drawingml/2006/main">
               <a:ext uri="{FF2B5EF4-FFF2-40B4-BE49-F238E27FC236}">
-                <a16:creationId xmlns:a16="http://schemas.microsoft.com/office/drawing/2014/main" id="{A769ED55-8B2A-4154-B8DC-5AB3BFDA971E}"/>
+                <a16:creationId xmlns:a16="http://schemas.microsoft.com/office/drawing/2014/main" id="{99B5993C-A458-438F-9A96-3809A0FB330B}"/>
               </a:ext>
             </a:extLst>
           </p:cNvPr>
@@ -6581,7 +7403,7 @@
           <p:cNvPr id="8" name="">
             <a:extLst xmlns:a="http://schemas.openxmlformats.org/drawingml/2006/main">
               <a:ext uri="{FF2B5EF4-FFF2-40B4-BE49-F238E27FC236}">
-                <a16:creationId xmlns:a16="http://schemas.microsoft.com/office/drawing/2014/main" id="{70156909-9A05-4536-A1FB-DC898674F20A}"/>
+                <a16:creationId xmlns:a16="http://schemas.microsoft.com/office/drawing/2014/main" id="{9E78CEA9-C8CD-48C5-89CE-49FBF2D7C30F}"/>
               </a:ext>
             </a:extLst>
           </p:cNvPr>
@@ -6638,7 +7460,7 @@
           <p:cNvPr id="9" name="">
             <a:extLst xmlns:a="http://schemas.openxmlformats.org/drawingml/2006/main">
               <a:ext uri="{FF2B5EF4-FFF2-40B4-BE49-F238E27FC236}">
-                <a16:creationId xmlns:a16="http://schemas.microsoft.com/office/drawing/2014/main" id="{4FC7CB86-569D-4531-8375-A29C8BAF0791}"/>
+                <a16:creationId xmlns:a16="http://schemas.microsoft.com/office/drawing/2014/main" id="{A5C0B70C-AE30-49F5-A86A-E4C285DC9742}"/>
               </a:ext>
             </a:extLst>
           </p:cNvPr>
@@ -6669,7 +7491,7 @@
           <p:cNvPr id="10" name="">
             <a:extLst xmlns:a="http://schemas.openxmlformats.org/drawingml/2006/main">
               <a:ext uri="{FF2B5EF4-FFF2-40B4-BE49-F238E27FC236}">
-                <a16:creationId xmlns:a16="http://schemas.microsoft.com/office/drawing/2014/main" id="{EF08D3AA-6EAA-468E-88F7-6AFD3AD38A16}"/>
+                <a16:creationId xmlns:a16="http://schemas.microsoft.com/office/drawing/2014/main" id="{95B63845-17C9-438C-8BBA-D6F9A88CEC45}"/>
               </a:ext>
             </a:extLst>
           </p:cNvPr>
@@ -6726,7 +7548,7 @@
           <p:cNvPr id="11" name="">
             <a:extLst xmlns:a="http://schemas.openxmlformats.org/drawingml/2006/main">
               <a:ext uri="{FF2B5EF4-FFF2-40B4-BE49-F238E27FC236}">
-                <a16:creationId xmlns:a16="http://schemas.microsoft.com/office/drawing/2014/main" id="{05589FA3-5AFB-43F0-BFF5-EA75373FCF19}"/>
+                <a16:creationId xmlns:a16="http://schemas.microsoft.com/office/drawing/2014/main" id="{6DB74EC9-ECB5-4471-9399-8FDD4A18C610}"/>
               </a:ext>
             </a:extLst>
           </p:cNvPr>
@@ -6767,7 +7589,7 @@
           <p:cNvPr id="12" name="">
             <a:extLst xmlns:a="http://schemas.openxmlformats.org/drawingml/2006/main">
               <a:ext uri="{FF2B5EF4-FFF2-40B4-BE49-F238E27FC236}">
-                <a16:creationId xmlns:a16="http://schemas.microsoft.com/office/drawing/2014/main" id="{AE645800-E212-4D39-9252-AE01EAF01258}"/>
+                <a16:creationId xmlns:a16="http://schemas.microsoft.com/office/drawing/2014/main" id="{0921B670-A5DD-44E9-8571-412D1B8D9868}"/>
               </a:ext>
             </a:extLst>
           </p:cNvPr>
@@ -6824,7 +7646,7 @@
           <p:cNvPr id="13" name="">
             <a:extLst xmlns:a="http://schemas.openxmlformats.org/drawingml/2006/main">
               <a:ext uri="{FF2B5EF4-FFF2-40B4-BE49-F238E27FC236}">
-                <a16:creationId xmlns:a16="http://schemas.microsoft.com/office/drawing/2014/main" id="{C490A24F-BDFC-4478-B6CC-9D0CF75DCF3B}"/>
+                <a16:creationId xmlns:a16="http://schemas.microsoft.com/office/drawing/2014/main" id="{B929B5EF-0359-4609-97C0-96EE0097FF97}"/>
               </a:ext>
             </a:extLst>
           </p:cNvPr>
@@ -6881,7 +7703,7 @@
           <p:cNvPr id="14" name="">
             <a:extLst xmlns:a="http://schemas.openxmlformats.org/drawingml/2006/main">
               <a:ext uri="{FF2B5EF4-FFF2-40B4-BE49-F238E27FC236}">
-                <a16:creationId xmlns:a16="http://schemas.microsoft.com/office/drawing/2014/main" id="{D027299C-175E-43F3-B53C-CA80909CA79E}"/>
+                <a16:creationId xmlns:a16="http://schemas.microsoft.com/office/drawing/2014/main" id="{C59AEC88-49BE-4730-A854-9FC7B362AB84}"/>
               </a:ext>
             </a:extLst>
           </p:cNvPr>
@@ -6912,7 +7734,7 @@
           <p:cNvPr id="15" name="">
             <a:extLst xmlns:a="http://schemas.openxmlformats.org/drawingml/2006/main">
               <a:ext uri="{FF2B5EF4-FFF2-40B4-BE49-F238E27FC236}">
-                <a16:creationId xmlns:a16="http://schemas.microsoft.com/office/drawing/2014/main" id="{E0175D7A-2EB6-463C-898F-0D59E008EDFF}"/>
+                <a16:creationId xmlns:a16="http://schemas.microsoft.com/office/drawing/2014/main" id="{AD82BAF6-1A3A-4280-AE61-D9CC51F2F301}"/>
               </a:ext>
             </a:extLst>
           </p:cNvPr>
@@ -6969,7 +7791,7 @@
           <p:cNvPr id="16" name="">
             <a:extLst xmlns:a="http://schemas.openxmlformats.org/drawingml/2006/main">
               <a:ext uri="{FF2B5EF4-FFF2-40B4-BE49-F238E27FC236}">
-                <a16:creationId xmlns:a16="http://schemas.microsoft.com/office/drawing/2014/main" id="{B076CBD9-53EC-46EF-8031-B6A75129C208}"/>
+                <a16:creationId xmlns:a16="http://schemas.microsoft.com/office/drawing/2014/main" id="{6BF5D71F-F44B-491A-BD9D-26A3916AC5EF}"/>
               </a:ext>
             </a:extLst>
           </p:cNvPr>
@@ -7010,7 +7832,7 @@
           <p:cNvPr id="17" name="">
             <a:extLst xmlns:a="http://schemas.openxmlformats.org/drawingml/2006/main">
               <a:ext uri="{FF2B5EF4-FFF2-40B4-BE49-F238E27FC236}">
-                <a16:creationId xmlns:a16="http://schemas.microsoft.com/office/drawing/2014/main" id="{5F6FDEB0-06D0-4FF7-83AB-FEBA1642F899}"/>
+                <a16:creationId xmlns:a16="http://schemas.microsoft.com/office/drawing/2014/main" id="{EFFFE9EA-D8C4-4B00-8C5F-27614C179D38}"/>
               </a:ext>
             </a:extLst>
           </p:cNvPr>
@@ -7067,7 +7889,7 @@
           <p:cNvPr id="18" name="">
             <a:extLst xmlns:a="http://schemas.openxmlformats.org/drawingml/2006/main">
               <a:ext uri="{FF2B5EF4-FFF2-40B4-BE49-F238E27FC236}">
-                <a16:creationId xmlns:a16="http://schemas.microsoft.com/office/drawing/2014/main" id="{9233D6A3-C7F1-46F5-801E-4B2F5892417C}"/>
+                <a16:creationId xmlns:a16="http://schemas.microsoft.com/office/drawing/2014/main" id="{6360A0E9-AAB1-426F-AD14-04BCE09416E7}"/>
               </a:ext>
             </a:extLst>
           </p:cNvPr>
@@ -7124,7 +7946,7 @@
           <p:cNvPr id="19" name="">
             <a:extLst xmlns:a="http://schemas.openxmlformats.org/drawingml/2006/main">
               <a:ext uri="{FF2B5EF4-FFF2-40B4-BE49-F238E27FC236}">
-                <a16:creationId xmlns:a16="http://schemas.microsoft.com/office/drawing/2014/main" id="{25116F96-CE1F-4869-B824-299423B9C1A3}"/>
+                <a16:creationId xmlns:a16="http://schemas.microsoft.com/office/drawing/2014/main" id="{31CA594D-9BCE-4787-9507-57A9A1AD42C4}"/>
               </a:ext>
             </a:extLst>
           </p:cNvPr>
@@ -7155,7 +7977,7 @@
           <p:cNvPr id="20" name="">
             <a:extLst xmlns:a="http://schemas.openxmlformats.org/drawingml/2006/main">
               <a:ext uri="{FF2B5EF4-FFF2-40B4-BE49-F238E27FC236}">
-                <a16:creationId xmlns:a16="http://schemas.microsoft.com/office/drawing/2014/main" id="{3CA148D4-C717-42B9-826C-5216116866B3}"/>
+                <a16:creationId xmlns:a16="http://schemas.microsoft.com/office/drawing/2014/main" id="{DD69D11F-DA8F-4C1C-B592-EA8D83ED96AE}"/>
               </a:ext>
             </a:extLst>
           </p:cNvPr>
@@ -7212,7 +8034,7 @@
           <p:cNvPr id="21" name="">
             <a:extLst xmlns:a="http://schemas.openxmlformats.org/drawingml/2006/main">
               <a:ext uri="{FF2B5EF4-FFF2-40B4-BE49-F238E27FC236}">
-                <a16:creationId xmlns:a16="http://schemas.microsoft.com/office/drawing/2014/main" id="{D8373A0E-41FD-41FC-9AA5-4893691909AD}"/>
+                <a16:creationId xmlns:a16="http://schemas.microsoft.com/office/drawing/2014/main" id="{8A82DEA3-E9AA-4152-821F-53F21436E5F8}"/>
               </a:ext>
             </a:extLst>
           </p:cNvPr>
@@ -7253,7 +8075,7 @@
           <p:cNvPr id="22" name="">
             <a:extLst xmlns:a="http://schemas.openxmlformats.org/drawingml/2006/main">
               <a:ext uri="{FF2B5EF4-FFF2-40B4-BE49-F238E27FC236}">
-                <a16:creationId xmlns:a16="http://schemas.microsoft.com/office/drawing/2014/main" id="{C5941A14-7A76-4024-8FE8-01B44EC5384D}"/>
+                <a16:creationId xmlns:a16="http://schemas.microsoft.com/office/drawing/2014/main" id="{F20B44F2-1BC3-40CC-A657-C89D402D99B9}"/>
               </a:ext>
             </a:extLst>
           </p:cNvPr>
@@ -7310,7 +8132,7 @@
           <p:cNvPr id="23" name="">
             <a:extLst xmlns:a="http://schemas.openxmlformats.org/drawingml/2006/main">
               <a:ext uri="{FF2B5EF4-FFF2-40B4-BE49-F238E27FC236}">
-                <a16:creationId xmlns:a16="http://schemas.microsoft.com/office/drawing/2014/main" id="{EB7C4C51-842C-480A-ACCC-0211469A888A}"/>
+                <a16:creationId xmlns:a16="http://schemas.microsoft.com/office/drawing/2014/main" id="{A664F0B5-A334-4E1E-8B96-B2308EEE2793}"/>
               </a:ext>
             </a:extLst>
           </p:cNvPr>
@@ -7367,7 +8189,7 @@
           <p:cNvPr id="24" name="">
             <a:extLst xmlns:a="http://schemas.openxmlformats.org/drawingml/2006/main">
               <a:ext uri="{FF2B5EF4-FFF2-40B4-BE49-F238E27FC236}">
-                <a16:creationId xmlns:a16="http://schemas.microsoft.com/office/drawing/2014/main" id="{9A49B4FA-9F2E-405B-BA4F-5D7738E670D9}"/>
+                <a16:creationId xmlns:a16="http://schemas.microsoft.com/office/drawing/2014/main" id="{416E14B9-13BC-475B-B619-D67E0DE7B9ED}"/>
               </a:ext>
             </a:extLst>
           </p:cNvPr>
@@ -7398,7 +8220,7 @@
           <p:cNvPr id="25" name="">
             <a:extLst xmlns:a="http://schemas.openxmlformats.org/drawingml/2006/main">
               <a:ext uri="{FF2B5EF4-FFF2-40B4-BE49-F238E27FC236}">
-                <a16:creationId xmlns:a16="http://schemas.microsoft.com/office/drawing/2014/main" id="{99BB7A1D-7FE7-4E12-9292-9D7FB125AA74}"/>
+                <a16:creationId xmlns:a16="http://schemas.microsoft.com/office/drawing/2014/main" id="{2C85B965-4FCC-4917-A6D2-220DD766BEBC}"/>
               </a:ext>
             </a:extLst>
           </p:cNvPr>
@@ -7455,7 +8277,7 @@
           <p:cNvPr id="26" name="">
             <a:extLst xmlns:a="http://schemas.openxmlformats.org/drawingml/2006/main">
               <a:ext uri="{FF2B5EF4-FFF2-40B4-BE49-F238E27FC236}">
-                <a16:creationId xmlns:a16="http://schemas.microsoft.com/office/drawing/2014/main" id="{D44A3C85-11E2-42F9-BE6E-B6427EAF0B99}"/>
+                <a16:creationId xmlns:a16="http://schemas.microsoft.com/office/drawing/2014/main" id="{BDD04747-4D87-4D68-9BBB-BCCCAB2CC759}"/>
               </a:ext>
             </a:extLst>
           </p:cNvPr>
@@ -7496,7 +8318,7 @@
           <p:cNvPr id="27" name="">
             <a:extLst xmlns:a="http://schemas.openxmlformats.org/drawingml/2006/main">
               <a:ext uri="{FF2B5EF4-FFF2-40B4-BE49-F238E27FC236}">
-                <a16:creationId xmlns:a16="http://schemas.microsoft.com/office/drawing/2014/main" id="{18D0175B-1991-4630-81C5-F62AF4C4CB69}"/>
+                <a16:creationId xmlns:a16="http://schemas.microsoft.com/office/drawing/2014/main" id="{76DA80F8-24BE-41CA-B3FE-FF0956BE17B7}"/>
               </a:ext>
             </a:extLst>
           </p:cNvPr>
@@ -7553,7 +8375,7 @@
           <p:cNvPr id="28" name="">
             <a:extLst xmlns:a="http://schemas.openxmlformats.org/drawingml/2006/main">
               <a:ext uri="{FF2B5EF4-FFF2-40B4-BE49-F238E27FC236}">
-                <a16:creationId xmlns:a16="http://schemas.microsoft.com/office/drawing/2014/main" id="{303B4039-9FDD-4642-8975-B1D35185630F}"/>
+                <a16:creationId xmlns:a16="http://schemas.microsoft.com/office/drawing/2014/main" id="{EF3138F8-A48D-4EFA-A432-0622782F8364}"/>
               </a:ext>
             </a:extLst>
           </p:cNvPr>
@@ -7610,7 +8432,7 @@
           <p:cNvPr id="29" name="">
             <a:extLst xmlns:a="http://schemas.openxmlformats.org/drawingml/2006/main">
               <a:ext uri="{FF2B5EF4-FFF2-40B4-BE49-F238E27FC236}">
-                <a16:creationId xmlns:a16="http://schemas.microsoft.com/office/drawing/2014/main" id="{E9107EB8-10FC-47F1-A89C-E7AE2196AD06}"/>
+                <a16:creationId xmlns:a16="http://schemas.microsoft.com/office/drawing/2014/main" id="{DE34F61C-1FC4-47C4-AE04-C56ADB82936F}"/>
               </a:ext>
             </a:extLst>
           </p:cNvPr>
@@ -7641,7 +8463,7 @@
           <p:cNvPr id="30" name="">
             <a:extLst xmlns:a="http://schemas.openxmlformats.org/drawingml/2006/main">
               <a:ext uri="{FF2B5EF4-FFF2-40B4-BE49-F238E27FC236}">
-                <a16:creationId xmlns:a16="http://schemas.microsoft.com/office/drawing/2014/main" id="{31AE8626-AEFF-458C-AE59-2901A35FC321}"/>
+                <a16:creationId xmlns:a16="http://schemas.microsoft.com/office/drawing/2014/main" id="{49A2507E-1027-4AB6-9EB6-73D9D64D7579}"/>
               </a:ext>
             </a:extLst>
           </p:cNvPr>
@@ -7698,7 +8520,7 @@
           <p:cNvPr id="31" name="">
             <a:extLst xmlns:a="http://schemas.openxmlformats.org/drawingml/2006/main">
               <a:ext uri="{FF2B5EF4-FFF2-40B4-BE49-F238E27FC236}">
-                <a16:creationId xmlns:a16="http://schemas.microsoft.com/office/drawing/2014/main" id="{618DBE6D-1D98-4D57-8658-6BF9055B1C65}"/>
+                <a16:creationId xmlns:a16="http://schemas.microsoft.com/office/drawing/2014/main" id="{6D84B8C5-B80E-4F45-A86F-F51541B6B5FF}"/>
               </a:ext>
             </a:extLst>
           </p:cNvPr>
@@ -7730,7 +8552,7 @@
           <p:cNvPr id="32" name="">
             <a:extLst xmlns:a="http://schemas.openxmlformats.org/drawingml/2006/main">
               <a:ext uri="{FF2B5EF4-FFF2-40B4-BE49-F238E27FC236}">
-                <a16:creationId xmlns:a16="http://schemas.microsoft.com/office/drawing/2014/main" id="{5F0FE271-A837-49CC-86B9-46D2F33FBB5D}"/>
+                <a16:creationId xmlns:a16="http://schemas.microsoft.com/office/drawing/2014/main" id="{21FC1DC2-CD11-4D1B-A4D1-D6AE2D2E6ED1}"/>
               </a:ext>
             </a:extLst>
           </p:cNvPr>
@@ -7787,7 +8609,7 @@
           <p:cNvPr id="33" name="">
             <a:extLst xmlns:a="http://schemas.openxmlformats.org/drawingml/2006/main">
               <a:ext uri="{FF2B5EF4-FFF2-40B4-BE49-F238E27FC236}">
-                <a16:creationId xmlns:a16="http://schemas.microsoft.com/office/drawing/2014/main" id="{BD8EC019-69DB-4115-9BA9-D75813E6D0F9}"/>
+                <a16:creationId xmlns:a16="http://schemas.microsoft.com/office/drawing/2014/main" id="{9C02103E-C14F-4C8A-96C2-24AA2860369D}"/>
               </a:ext>
             </a:extLst>
           </p:cNvPr>
@@ -7842,7 +8664,7 @@
     </p:spTree>
     <p:extLst>
       <p:ext uri="{BB962C8B-B14F-4D97-AF65-F5344CB8AC3E}">
-        <p14:creationId xmlns:p14="http://schemas.microsoft.com/office/powerpoint/2010/main" val="1226032332"/>
+        <p14:creationId xmlns:p14="http://schemas.microsoft.com/office/powerpoint/2010/main" val="2122279196"/>
       </p:ext>
     </p:extLst>
   </p:cSld>
@@ -7873,7 +8695,7 @@
           <p:cNvPr id="46" name="">
             <a:extLst xmlns:a="http://schemas.openxmlformats.org/drawingml/2006/main">
               <a:ext uri="{FF2B5EF4-FFF2-40B4-BE49-F238E27FC236}">
-                <a16:creationId xmlns:a16="http://schemas.microsoft.com/office/drawing/2014/main" id="{53271E29-A844-40E2-BBAB-40A7D6907F1E}"/>
+                <a16:creationId xmlns:a16="http://schemas.microsoft.com/office/drawing/2014/main" id="{934DE280-4D06-4A95-8859-982C77516F03}"/>
               </a:ext>
             </a:extLst>
           </p:cNvPr>
@@ -7903,7 +8725,7 @@
           <p:cNvPr id="2" name="">
             <a:extLst xmlns:a="http://schemas.openxmlformats.org/drawingml/2006/main">
               <a:ext uri="{FF2B5EF4-FFF2-40B4-BE49-F238E27FC236}">
-                <a16:creationId xmlns:a16="http://schemas.microsoft.com/office/drawing/2014/main" id="{3A7263A9-E4FF-4C19-A15F-9DB423EAFD4F}"/>
+                <a16:creationId xmlns:a16="http://schemas.microsoft.com/office/drawing/2014/main" id="{0612CF85-8FE4-41FF-BBE7-CF64EA32A7C1}"/>
               </a:ext>
             </a:extLst>
           </p:cNvPr>
@@ -7960,7 +8782,7 @@
           <p:cNvPr id="3" name="">
             <a:extLst xmlns:a="http://schemas.openxmlformats.org/drawingml/2006/main">
               <a:ext uri="{FF2B5EF4-FFF2-40B4-BE49-F238E27FC236}">
-                <a16:creationId xmlns:a16="http://schemas.microsoft.com/office/drawing/2014/main" id="{5E6B9B65-6830-4479-B76F-F5A1F198D44E}"/>
+                <a16:creationId xmlns:a16="http://schemas.microsoft.com/office/drawing/2014/main" id="{5F9854DE-3EA3-4A7F-893E-532434446A70}"/>
               </a:ext>
             </a:extLst>
           </p:cNvPr>
@@ -8017,7 +8839,7 @@
           <p:cNvPr id="4" name="">
             <a:extLst xmlns:a="http://schemas.openxmlformats.org/drawingml/2006/main">
               <a:ext uri="{FF2B5EF4-FFF2-40B4-BE49-F238E27FC236}">
-                <a16:creationId xmlns:a16="http://schemas.microsoft.com/office/drawing/2014/main" id="{78356E2A-D76F-4214-8ADF-AB94EED56E27}"/>
+                <a16:creationId xmlns:a16="http://schemas.microsoft.com/office/drawing/2014/main" id="{9D1EE050-4820-4DED-92CF-EAB6BD42664F}"/>
               </a:ext>
             </a:extLst>
           </p:cNvPr>
@@ -8048,7 +8870,7 @@
           <p:cNvPr id="5" name="">
             <a:extLst xmlns:a="http://schemas.openxmlformats.org/drawingml/2006/main">
               <a:ext uri="{FF2B5EF4-FFF2-40B4-BE49-F238E27FC236}">
-                <a16:creationId xmlns:a16="http://schemas.microsoft.com/office/drawing/2014/main" id="{4E988D66-EA3C-48F8-AB5E-143027CEA2CF}"/>
+                <a16:creationId xmlns:a16="http://schemas.microsoft.com/office/drawing/2014/main" id="{72F36306-567E-4148-A8A6-2AD2D087B948}"/>
               </a:ext>
             </a:extLst>
           </p:cNvPr>
@@ -8105,7 +8927,7 @@
           <p:cNvPr id="6" name="">
             <a:extLst xmlns:a="http://schemas.openxmlformats.org/drawingml/2006/main">
               <a:ext uri="{FF2B5EF4-FFF2-40B4-BE49-F238E27FC236}">
-                <a16:creationId xmlns:a16="http://schemas.microsoft.com/office/drawing/2014/main" id="{FF3CBCD2-3CEC-48A6-8077-B999B2066302}"/>
+                <a16:creationId xmlns:a16="http://schemas.microsoft.com/office/drawing/2014/main" id="{5EC0C251-DDAA-4E8E-BB16-BF461180F0EE}"/>
               </a:ext>
             </a:extLst>
           </p:cNvPr>
@@ -8136,7 +8958,7 @@
           <p:cNvPr id="7" name="">
             <a:extLst xmlns:a="http://schemas.openxmlformats.org/drawingml/2006/main">
               <a:ext uri="{FF2B5EF4-FFF2-40B4-BE49-F238E27FC236}">
-                <a16:creationId xmlns:a16="http://schemas.microsoft.com/office/drawing/2014/main" id="{1A08580A-A525-4325-8FE9-843BE3AEC5D4}"/>
+                <a16:creationId xmlns:a16="http://schemas.microsoft.com/office/drawing/2014/main" id="{236018BA-7147-44D3-BBDC-2E519EE5950E}"/>
               </a:ext>
             </a:extLst>
           </p:cNvPr>
@@ -8168,7 +8990,7 @@
           <p:cNvPr id="8" name="">
             <a:extLst xmlns:a="http://schemas.openxmlformats.org/drawingml/2006/main">
               <a:ext uri="{FF2B5EF4-FFF2-40B4-BE49-F238E27FC236}">
-                <a16:creationId xmlns:a16="http://schemas.microsoft.com/office/drawing/2014/main" id="{B99F09AE-F53A-4466-B7A1-9504D1F642BC}"/>
+                <a16:creationId xmlns:a16="http://schemas.microsoft.com/office/drawing/2014/main" id="{7E52C45B-8799-44BA-9AAB-983D126C63E6}"/>
               </a:ext>
             </a:extLst>
           </p:cNvPr>
@@ -8192,7 +9014,7 @@
         </p:spPr>
         <p:txBody>
           <a:bodyPr xmlns:a="http://schemas.openxmlformats.org/drawingml/2006/main" anchor="ctr">
-            <a:normAutofit fontScale="81919"/>
+            <a:normAutofit fontScale="94444"/>
           </a:bodyPr>
           <a:lstStyle xmlns:a="http://schemas.openxmlformats.org/drawingml/2006/main"/>
           <a:p xmlns:a="http://schemas.openxmlformats.org/drawingml/2006/main">
@@ -8225,7 +9047,7 @@
           <p:cNvPr id="9" name="">
             <a:extLst xmlns:a="http://schemas.openxmlformats.org/drawingml/2006/main">
               <a:ext uri="{FF2B5EF4-FFF2-40B4-BE49-F238E27FC236}">
-                <a16:creationId xmlns:a16="http://schemas.microsoft.com/office/drawing/2014/main" id="{4BB1E5D9-B6A4-4F36-90FB-449EFBBBCCF2}"/>
+                <a16:creationId xmlns:a16="http://schemas.microsoft.com/office/drawing/2014/main" id="{0954D027-5C84-4940-B79D-34A3790322D3}"/>
               </a:ext>
             </a:extLst>
           </p:cNvPr>
@@ -8282,7 +9104,7 @@
           <p:cNvPr id="10" name="">
             <a:extLst xmlns:a="http://schemas.openxmlformats.org/drawingml/2006/main">
               <a:ext uri="{FF2B5EF4-FFF2-40B4-BE49-F238E27FC236}">
-                <a16:creationId xmlns:a16="http://schemas.microsoft.com/office/drawing/2014/main" id="{B0563E5C-D708-43B6-9B50-E71852035613}"/>
+                <a16:creationId xmlns:a16="http://schemas.microsoft.com/office/drawing/2014/main" id="{6187CEF3-6DAF-40B7-9E47-B7E22B0B9AC7}"/>
               </a:ext>
             </a:extLst>
           </p:cNvPr>
@@ -8339,7 +9161,7 @@
           <p:cNvPr id="11" name="">
             <a:extLst xmlns:a="http://schemas.openxmlformats.org/drawingml/2006/main">
               <a:ext uri="{FF2B5EF4-FFF2-40B4-BE49-F238E27FC236}">
-                <a16:creationId xmlns:a16="http://schemas.microsoft.com/office/drawing/2014/main" id="{FB91F5FA-C7E7-4B5C-B37F-4A817EBC2857}"/>
+                <a16:creationId xmlns:a16="http://schemas.microsoft.com/office/drawing/2014/main" id="{3B7D1956-4864-4278-B487-81F0E39D8358}"/>
               </a:ext>
             </a:extLst>
           </p:cNvPr>
@@ -8371,7 +9193,7 @@
           <p:cNvPr id="12" name="">
             <a:extLst xmlns:a="http://schemas.openxmlformats.org/drawingml/2006/main">
               <a:ext uri="{FF2B5EF4-FFF2-40B4-BE49-F238E27FC236}">
-                <a16:creationId xmlns:a16="http://schemas.microsoft.com/office/drawing/2014/main" id="{AFE90936-336E-488A-A23A-88299806C8FB}"/>
+                <a16:creationId xmlns:a16="http://schemas.microsoft.com/office/drawing/2014/main" id="{ABC866B2-1220-4660-91F6-832D37BE74A1}"/>
               </a:ext>
             </a:extLst>
           </p:cNvPr>
@@ -8428,7 +9250,7 @@
           <p:cNvPr id="13" name="">
             <a:extLst xmlns:a="http://schemas.openxmlformats.org/drawingml/2006/main">
               <a:ext uri="{FF2B5EF4-FFF2-40B4-BE49-F238E27FC236}">
-                <a16:creationId xmlns:a16="http://schemas.microsoft.com/office/drawing/2014/main" id="{563FFA4D-E165-4213-B2B9-1530B0EB0238}"/>
+                <a16:creationId xmlns:a16="http://schemas.microsoft.com/office/drawing/2014/main" id="{DF855A1B-FF66-4241-AE6D-99A480B4A7E2}"/>
               </a:ext>
             </a:extLst>
           </p:cNvPr>
@@ -8460,7 +9282,7 @@
           <p:cNvPr id="14" name="">
             <a:extLst xmlns:a="http://schemas.openxmlformats.org/drawingml/2006/main">
               <a:ext uri="{FF2B5EF4-FFF2-40B4-BE49-F238E27FC236}">
-                <a16:creationId xmlns:a16="http://schemas.microsoft.com/office/drawing/2014/main" id="{6166F41F-1A9E-40C3-A1A9-28A4B2C6D716}"/>
+                <a16:creationId xmlns:a16="http://schemas.microsoft.com/office/drawing/2014/main" id="{F3FC99AB-BA10-4316-9467-97ADE8AD3222}"/>
               </a:ext>
             </a:extLst>
           </p:cNvPr>
@@ -8484,7 +9306,7 @@
         </p:spPr>
         <p:txBody>
           <a:bodyPr xmlns:a="http://schemas.openxmlformats.org/drawingml/2006/main" anchor="ctr">
-            <a:normAutofit fontScale="81919"/>
+            <a:normAutofit fontScale="94444"/>
           </a:bodyPr>
           <a:lstStyle xmlns:a="http://schemas.openxmlformats.org/drawingml/2006/main"/>
           <a:p xmlns:a="http://schemas.openxmlformats.org/drawingml/2006/main">
@@ -8517,7 +9339,7 @@
           <p:cNvPr id="15" name="">
             <a:extLst xmlns:a="http://schemas.openxmlformats.org/drawingml/2006/main">
               <a:ext uri="{FF2B5EF4-FFF2-40B4-BE49-F238E27FC236}">
-                <a16:creationId xmlns:a16="http://schemas.microsoft.com/office/drawing/2014/main" id="{76C2E841-43E5-4D27-8038-93CE2ED9D116}"/>
+                <a16:creationId xmlns:a16="http://schemas.microsoft.com/office/drawing/2014/main" id="{F6F895ED-BC0C-44DA-80F2-7B3816D1BB1B}"/>
               </a:ext>
             </a:extLst>
           </p:cNvPr>
@@ -8574,7 +9396,7 @@
           <p:cNvPr id="16" name="">
             <a:extLst xmlns:a="http://schemas.openxmlformats.org/drawingml/2006/main">
               <a:ext uri="{FF2B5EF4-FFF2-40B4-BE49-F238E27FC236}">
-                <a16:creationId xmlns:a16="http://schemas.microsoft.com/office/drawing/2014/main" id="{103ECBC2-D1B2-4D1D-B7E0-2D3B2DBD595C}"/>
+                <a16:creationId xmlns:a16="http://schemas.microsoft.com/office/drawing/2014/main" id="{914BB4A1-4B1C-4589-BFAF-D27652A25755}"/>
               </a:ext>
             </a:extLst>
           </p:cNvPr>
@@ -8631,7 +9453,7 @@
           <p:cNvPr id="17" name="">
             <a:extLst xmlns:a="http://schemas.openxmlformats.org/drawingml/2006/main">
               <a:ext uri="{FF2B5EF4-FFF2-40B4-BE49-F238E27FC236}">
-                <a16:creationId xmlns:a16="http://schemas.microsoft.com/office/drawing/2014/main" id="{DED53E5D-DE18-4D57-A7C6-9E5D65E4BCF1}"/>
+                <a16:creationId xmlns:a16="http://schemas.microsoft.com/office/drawing/2014/main" id="{B332B70B-0C1F-4B8D-9DD7-2CFF200786F8}"/>
               </a:ext>
             </a:extLst>
           </p:cNvPr>
@@ -8663,7 +9485,7 @@
           <p:cNvPr id="18" name="">
             <a:extLst xmlns:a="http://schemas.openxmlformats.org/drawingml/2006/main">
               <a:ext uri="{FF2B5EF4-FFF2-40B4-BE49-F238E27FC236}">
-                <a16:creationId xmlns:a16="http://schemas.microsoft.com/office/drawing/2014/main" id="{C342028D-7D3D-4A7A-8F41-9CADF9ED3124}"/>
+                <a16:creationId xmlns:a16="http://schemas.microsoft.com/office/drawing/2014/main" id="{990710EA-4BDA-493B-9113-3064DA88B2B0}"/>
               </a:ext>
             </a:extLst>
           </p:cNvPr>
@@ -8720,7 +9542,7 @@
           <p:cNvPr id="19" name="">
             <a:extLst xmlns:a="http://schemas.openxmlformats.org/drawingml/2006/main">
               <a:ext uri="{FF2B5EF4-FFF2-40B4-BE49-F238E27FC236}">
-                <a16:creationId xmlns:a16="http://schemas.microsoft.com/office/drawing/2014/main" id="{AFC9EEA9-0E3D-45FB-80EF-F1604849ECE8}"/>
+                <a16:creationId xmlns:a16="http://schemas.microsoft.com/office/drawing/2014/main" id="{D138482A-83B1-47FA-9A66-599AC823CD14}"/>
               </a:ext>
             </a:extLst>
           </p:cNvPr>
@@ -8752,7 +9574,7 @@
           <p:cNvPr id="20" name="">
             <a:extLst xmlns:a="http://schemas.openxmlformats.org/drawingml/2006/main">
               <a:ext uri="{FF2B5EF4-FFF2-40B4-BE49-F238E27FC236}">
-                <a16:creationId xmlns:a16="http://schemas.microsoft.com/office/drawing/2014/main" id="{CA015BD4-F445-46AE-B173-E5EDB696A7E9}"/>
+                <a16:creationId xmlns:a16="http://schemas.microsoft.com/office/drawing/2014/main" id="{E350E95B-7D0C-4F23-AC7B-9BFCE1F05CD9}"/>
               </a:ext>
             </a:extLst>
           </p:cNvPr>
@@ -8776,7 +9598,7 @@
         </p:spPr>
         <p:txBody>
           <a:bodyPr xmlns:a="http://schemas.openxmlformats.org/drawingml/2006/main" anchor="ctr">
-            <a:normAutofit fontScale="81919"/>
+            <a:normAutofit fontScale="94444"/>
           </a:bodyPr>
           <a:lstStyle xmlns:a="http://schemas.openxmlformats.org/drawingml/2006/main"/>
           <a:p xmlns:a="http://schemas.openxmlformats.org/drawingml/2006/main">
@@ -8809,7 +9631,7 @@
           <p:cNvPr id="21" name="">
             <a:extLst xmlns:a="http://schemas.openxmlformats.org/drawingml/2006/main">
               <a:ext uri="{FF2B5EF4-FFF2-40B4-BE49-F238E27FC236}">
-                <a16:creationId xmlns:a16="http://schemas.microsoft.com/office/drawing/2014/main" id="{F9834F74-4731-4DA8-AFEE-6574527F00C4}"/>
+                <a16:creationId xmlns:a16="http://schemas.microsoft.com/office/drawing/2014/main" id="{47F88E04-A05D-41A6-BCC3-E8DF8D02DB38}"/>
               </a:ext>
             </a:extLst>
           </p:cNvPr>
@@ -8866,7 +9688,7 @@
           <p:cNvPr id="22" name="">
             <a:extLst xmlns:a="http://schemas.openxmlformats.org/drawingml/2006/main">
               <a:ext uri="{FF2B5EF4-FFF2-40B4-BE49-F238E27FC236}">
-                <a16:creationId xmlns:a16="http://schemas.microsoft.com/office/drawing/2014/main" id="{B8FF4ACD-9555-416C-912B-732C68037DCF}"/>
+                <a16:creationId xmlns:a16="http://schemas.microsoft.com/office/drawing/2014/main" id="{2CB03684-9D21-49D9-8F5F-8208E9C27688}"/>
               </a:ext>
             </a:extLst>
           </p:cNvPr>
@@ -8923,7 +9745,7 @@
           <p:cNvPr id="23" name="">
             <a:extLst xmlns:a="http://schemas.openxmlformats.org/drawingml/2006/main">
               <a:ext uri="{FF2B5EF4-FFF2-40B4-BE49-F238E27FC236}">
-                <a16:creationId xmlns:a16="http://schemas.microsoft.com/office/drawing/2014/main" id="{3A670638-400B-4F68-8E78-DA0C44883CDF}"/>
+                <a16:creationId xmlns:a16="http://schemas.microsoft.com/office/drawing/2014/main" id="{9B4F9D0C-8728-44FA-B6C9-8FDA761B40E3}"/>
               </a:ext>
             </a:extLst>
           </p:cNvPr>
@@ -8955,7 +9777,7 @@
           <p:cNvPr id="24" name="">
             <a:extLst xmlns:a="http://schemas.openxmlformats.org/drawingml/2006/main">
               <a:ext uri="{FF2B5EF4-FFF2-40B4-BE49-F238E27FC236}">
-                <a16:creationId xmlns:a16="http://schemas.microsoft.com/office/drawing/2014/main" id="{07C02341-9E39-4805-95C8-D3CF0033733F}"/>
+                <a16:creationId xmlns:a16="http://schemas.microsoft.com/office/drawing/2014/main" id="{D07FCF56-3ACF-4129-B06F-D55987EF5F22}"/>
               </a:ext>
             </a:extLst>
           </p:cNvPr>
@@ -9012,7 +9834,7 @@
           <p:cNvPr id="25" name="">
             <a:extLst xmlns:a="http://schemas.openxmlformats.org/drawingml/2006/main">
               <a:ext uri="{FF2B5EF4-FFF2-40B4-BE49-F238E27FC236}">
-                <a16:creationId xmlns:a16="http://schemas.microsoft.com/office/drawing/2014/main" id="{D1E89EC1-77F6-46EB-B0B9-97E000661C91}"/>
+                <a16:creationId xmlns:a16="http://schemas.microsoft.com/office/drawing/2014/main" id="{90317139-C82E-45B1-8BC4-204D7647F4EB}"/>
               </a:ext>
             </a:extLst>
           </p:cNvPr>
@@ -9044,7 +9866,7 @@
           <p:cNvPr id="26" name="">
             <a:extLst xmlns:a="http://schemas.openxmlformats.org/drawingml/2006/main">
               <a:ext uri="{FF2B5EF4-FFF2-40B4-BE49-F238E27FC236}">
-                <a16:creationId xmlns:a16="http://schemas.microsoft.com/office/drawing/2014/main" id="{AE355C13-2DDA-4CC5-A47E-02482CBDE0A0}"/>
+                <a16:creationId xmlns:a16="http://schemas.microsoft.com/office/drawing/2014/main" id="{C780743E-03D2-44B0-9960-9D5267C25DD3}"/>
               </a:ext>
             </a:extLst>
           </p:cNvPr>
@@ -9068,7 +9890,7 @@
         </p:spPr>
         <p:txBody>
           <a:bodyPr xmlns:a="http://schemas.openxmlformats.org/drawingml/2006/main" anchor="ctr">
-            <a:normAutofit fontScale="81919"/>
+            <a:normAutofit fontScale="94444"/>
           </a:bodyPr>
           <a:lstStyle xmlns:a="http://schemas.openxmlformats.org/drawingml/2006/main"/>
           <a:p xmlns:a="http://schemas.openxmlformats.org/drawingml/2006/main">
@@ -9101,7 +9923,7 @@
           <p:cNvPr id="27" name="">
             <a:extLst xmlns:a="http://schemas.openxmlformats.org/drawingml/2006/main">
               <a:ext uri="{FF2B5EF4-FFF2-40B4-BE49-F238E27FC236}">
-                <a16:creationId xmlns:a16="http://schemas.microsoft.com/office/drawing/2014/main" id="{57C614AE-D7CB-46D0-BD5E-08EA2DA34183}"/>
+                <a16:creationId xmlns:a16="http://schemas.microsoft.com/office/drawing/2014/main" id="{425D3628-0F6F-4DBD-B655-9B2A6DF5A110}"/>
               </a:ext>
             </a:extLst>
           </p:cNvPr>
@@ -9158,7 +9980,7 @@
           <p:cNvPr id="28" name="">
             <a:extLst xmlns:a="http://schemas.openxmlformats.org/drawingml/2006/main">
               <a:ext uri="{FF2B5EF4-FFF2-40B4-BE49-F238E27FC236}">
-                <a16:creationId xmlns:a16="http://schemas.microsoft.com/office/drawing/2014/main" id="{ABD73049-EE4B-480C-91B3-5EBA6839985C}"/>
+                <a16:creationId xmlns:a16="http://schemas.microsoft.com/office/drawing/2014/main" id="{78C1C027-70C5-4DE0-845A-93A3FC5E4E36}"/>
               </a:ext>
             </a:extLst>
           </p:cNvPr>
@@ -9215,7 +10037,7 @@
           <p:cNvPr id="29" name="">
             <a:extLst xmlns:a="http://schemas.openxmlformats.org/drawingml/2006/main">
               <a:ext uri="{FF2B5EF4-FFF2-40B4-BE49-F238E27FC236}">
-                <a16:creationId xmlns:a16="http://schemas.microsoft.com/office/drawing/2014/main" id="{CD9D8C75-6402-4EC6-BA47-85140559A558}"/>
+                <a16:creationId xmlns:a16="http://schemas.microsoft.com/office/drawing/2014/main" id="{0007E5A1-15AF-490E-BBE8-45B753FC77CC}"/>
               </a:ext>
             </a:extLst>
           </p:cNvPr>
@@ -9247,7 +10069,7 @@
           <p:cNvPr id="30" name="">
             <a:extLst xmlns:a="http://schemas.openxmlformats.org/drawingml/2006/main">
               <a:ext uri="{FF2B5EF4-FFF2-40B4-BE49-F238E27FC236}">
-                <a16:creationId xmlns:a16="http://schemas.microsoft.com/office/drawing/2014/main" id="{3342120F-8AB2-4DDB-83CE-AE19AAAAC086}"/>
+                <a16:creationId xmlns:a16="http://schemas.microsoft.com/office/drawing/2014/main" id="{BF824B6B-C1A7-4BDC-89AF-2A6955998570}"/>
               </a:ext>
             </a:extLst>
           </p:cNvPr>
@@ -9304,7 +10126,7 @@
           <p:cNvPr id="31" name="">
             <a:extLst xmlns:a="http://schemas.openxmlformats.org/drawingml/2006/main">
               <a:ext uri="{FF2B5EF4-FFF2-40B4-BE49-F238E27FC236}">
-                <a16:creationId xmlns:a16="http://schemas.microsoft.com/office/drawing/2014/main" id="{13BD073E-9781-4101-B255-42AEBC6D7B76}"/>
+                <a16:creationId xmlns:a16="http://schemas.microsoft.com/office/drawing/2014/main" id="{381ACF48-7EED-4979-88C3-AD03F616D9A5}"/>
               </a:ext>
             </a:extLst>
           </p:cNvPr>
@@ -9336,7 +10158,7 @@
           <p:cNvPr id="32" name="">
             <a:extLst xmlns:a="http://schemas.openxmlformats.org/drawingml/2006/main">
               <a:ext uri="{FF2B5EF4-FFF2-40B4-BE49-F238E27FC236}">
-                <a16:creationId xmlns:a16="http://schemas.microsoft.com/office/drawing/2014/main" id="{8227011A-5F51-4085-B20D-3F8AA5DA90FC}"/>
+                <a16:creationId xmlns:a16="http://schemas.microsoft.com/office/drawing/2014/main" id="{4010351E-30AB-43DC-9957-217ACFC827A8}"/>
               </a:ext>
             </a:extLst>
           </p:cNvPr>
@@ -9360,7 +10182,7 @@
         </p:spPr>
         <p:txBody>
           <a:bodyPr xmlns:a="http://schemas.openxmlformats.org/drawingml/2006/main" anchor="ctr">
-            <a:normAutofit fontScale="81919"/>
+            <a:normAutofit fontScale="94444"/>
           </a:bodyPr>
           <a:lstStyle xmlns:a="http://schemas.openxmlformats.org/drawingml/2006/main"/>
           <a:p xmlns:a="http://schemas.openxmlformats.org/drawingml/2006/main">
@@ -9393,7 +10215,7 @@
           <p:cNvPr id="33" name="">
             <a:extLst xmlns:a="http://schemas.openxmlformats.org/drawingml/2006/main">
               <a:ext uri="{FF2B5EF4-FFF2-40B4-BE49-F238E27FC236}">
-                <a16:creationId xmlns:a16="http://schemas.microsoft.com/office/drawing/2014/main" id="{AE0149F8-81FB-41C6-8604-3BF7A1F29553}"/>
+                <a16:creationId xmlns:a16="http://schemas.microsoft.com/office/drawing/2014/main" id="{35096B33-836B-4464-B091-3B55FF7C3EC1}"/>
               </a:ext>
             </a:extLst>
           </p:cNvPr>
@@ -9450,7 +10272,7 @@
           <p:cNvPr id="34" name="">
             <a:extLst xmlns:a="http://schemas.openxmlformats.org/drawingml/2006/main">
               <a:ext uri="{FF2B5EF4-FFF2-40B4-BE49-F238E27FC236}">
-                <a16:creationId xmlns:a16="http://schemas.microsoft.com/office/drawing/2014/main" id="{29D888C5-352E-441E-9C17-E676C45515A4}"/>
+                <a16:creationId xmlns:a16="http://schemas.microsoft.com/office/drawing/2014/main" id="{36D9ADA5-B1CE-425A-94A1-8CCC0371AF0F}"/>
               </a:ext>
             </a:extLst>
           </p:cNvPr>
@@ -9507,7 +10329,7 @@
           <p:cNvPr id="35" name="">
             <a:extLst xmlns:a="http://schemas.openxmlformats.org/drawingml/2006/main">
               <a:ext uri="{FF2B5EF4-FFF2-40B4-BE49-F238E27FC236}">
-                <a16:creationId xmlns:a16="http://schemas.microsoft.com/office/drawing/2014/main" id="{7A3ECC12-699D-4A21-AAB9-EBD6270157BE}"/>
+                <a16:creationId xmlns:a16="http://schemas.microsoft.com/office/drawing/2014/main" id="{3F64573D-2050-4E79-8589-30F805949DD3}"/>
               </a:ext>
             </a:extLst>
           </p:cNvPr>
@@ -9539,7 +10361,7 @@
           <p:cNvPr id="36" name="">
             <a:extLst xmlns:a="http://schemas.openxmlformats.org/drawingml/2006/main">
               <a:ext uri="{FF2B5EF4-FFF2-40B4-BE49-F238E27FC236}">
-                <a16:creationId xmlns:a16="http://schemas.microsoft.com/office/drawing/2014/main" id="{58BBAD50-E94B-4B4B-A03D-12DA771C338F}"/>
+                <a16:creationId xmlns:a16="http://schemas.microsoft.com/office/drawing/2014/main" id="{E89D3334-A971-473D-8748-2875E7342269}"/>
               </a:ext>
             </a:extLst>
           </p:cNvPr>
@@ -9596,7 +10418,7 @@
           <p:cNvPr id="37" name="">
             <a:extLst xmlns:a="http://schemas.openxmlformats.org/drawingml/2006/main">
               <a:ext uri="{FF2B5EF4-FFF2-40B4-BE49-F238E27FC236}">
-                <a16:creationId xmlns:a16="http://schemas.microsoft.com/office/drawing/2014/main" id="{8D12A316-1339-42F3-9C99-C7EB48B36274}"/>
+                <a16:creationId xmlns:a16="http://schemas.microsoft.com/office/drawing/2014/main" id="{5721B559-E97D-4750-9CB7-1A3D80A02DDA}"/>
               </a:ext>
             </a:extLst>
           </p:cNvPr>
@@ -9628,7 +10450,7 @@
           <p:cNvPr id="38" name="">
             <a:extLst xmlns:a="http://schemas.openxmlformats.org/drawingml/2006/main">
               <a:ext uri="{FF2B5EF4-FFF2-40B4-BE49-F238E27FC236}">
-                <a16:creationId xmlns:a16="http://schemas.microsoft.com/office/drawing/2014/main" id="{8422FAEB-957D-4E92-A2C5-EDA7C6649007}"/>
+                <a16:creationId xmlns:a16="http://schemas.microsoft.com/office/drawing/2014/main" id="{AE270A56-50E9-40F0-B3C2-494C05C77054}"/>
               </a:ext>
             </a:extLst>
           </p:cNvPr>
@@ -9652,7 +10474,7 @@
         </p:spPr>
         <p:txBody>
           <a:bodyPr xmlns:a="http://schemas.openxmlformats.org/drawingml/2006/main" anchor="ctr">
-            <a:normAutofit fontScale="81919"/>
+            <a:normAutofit fontScale="94444"/>
           </a:bodyPr>
           <a:lstStyle xmlns:a="http://schemas.openxmlformats.org/drawingml/2006/main"/>
           <a:p xmlns:a="http://schemas.openxmlformats.org/drawingml/2006/main">
@@ -9685,7 +10507,7 @@
           <p:cNvPr id="39" name="">
             <a:extLst xmlns:a="http://schemas.openxmlformats.org/drawingml/2006/main">
               <a:ext uri="{FF2B5EF4-FFF2-40B4-BE49-F238E27FC236}">
-                <a16:creationId xmlns:a16="http://schemas.microsoft.com/office/drawing/2014/main" id="{BA3211F8-3E4B-4F32-845B-ABCA46145DB3}"/>
+                <a16:creationId xmlns:a16="http://schemas.microsoft.com/office/drawing/2014/main" id="{A7087087-2B9E-4EE5-8988-04323B10089D}"/>
               </a:ext>
             </a:extLst>
           </p:cNvPr>
@@ -9742,7 +10564,7 @@
           <p:cNvPr id="40" name="">
             <a:extLst xmlns:a="http://schemas.openxmlformats.org/drawingml/2006/main">
               <a:ext uri="{FF2B5EF4-FFF2-40B4-BE49-F238E27FC236}">
-                <a16:creationId xmlns:a16="http://schemas.microsoft.com/office/drawing/2014/main" id="{60ACB5D9-05C2-4E6A-8D81-B685BA624045}"/>
+                <a16:creationId xmlns:a16="http://schemas.microsoft.com/office/drawing/2014/main" id="{2DE60635-B328-4D97-8DC9-A32D7E0AC4EB}"/>
               </a:ext>
             </a:extLst>
           </p:cNvPr>
@@ -9799,7 +10621,7 @@
           <p:cNvPr id="41" name="">
             <a:extLst xmlns:a="http://schemas.openxmlformats.org/drawingml/2006/main">
               <a:ext uri="{FF2B5EF4-FFF2-40B4-BE49-F238E27FC236}">
-                <a16:creationId xmlns:a16="http://schemas.microsoft.com/office/drawing/2014/main" id="{0F9CBC13-83EC-44B1-B334-68B8CF686BDF}"/>
+                <a16:creationId xmlns:a16="http://schemas.microsoft.com/office/drawing/2014/main" id="{F8071DDA-CC9E-4010-A57C-5ECC4798E925}"/>
               </a:ext>
             </a:extLst>
           </p:cNvPr>
@@ -9831,7 +10653,7 @@
           <p:cNvPr id="42" name="">
             <a:extLst xmlns:a="http://schemas.openxmlformats.org/drawingml/2006/main">
               <a:ext uri="{FF2B5EF4-FFF2-40B4-BE49-F238E27FC236}">
-                <a16:creationId xmlns:a16="http://schemas.microsoft.com/office/drawing/2014/main" id="{B8AC7DF0-10DD-4FE4-BBF6-23316D3F7EF9}"/>
+                <a16:creationId xmlns:a16="http://schemas.microsoft.com/office/drawing/2014/main" id="{5B03145B-2FFB-4F3A-9D44-A61D8634D5D7}"/>
               </a:ext>
             </a:extLst>
           </p:cNvPr>
@@ -9888,7 +10710,7 @@
           <p:cNvPr id="43" name="">
             <a:extLst xmlns:a="http://schemas.openxmlformats.org/drawingml/2006/main">
               <a:ext uri="{FF2B5EF4-FFF2-40B4-BE49-F238E27FC236}">
-                <a16:creationId xmlns:a16="http://schemas.microsoft.com/office/drawing/2014/main" id="{0B114D78-6F1A-4DA7-A2D2-DFD761657810}"/>
+                <a16:creationId xmlns:a16="http://schemas.microsoft.com/office/drawing/2014/main" id="{AC7622AF-BADF-4535-B27B-B98BD25310B3}"/>
               </a:ext>
             </a:extLst>
           </p:cNvPr>
@@ -9923,7 +10745,7 @@
           <p:cNvPr id="44" name="">
             <a:extLst xmlns:a="http://schemas.openxmlformats.org/drawingml/2006/main">
               <a:ext uri="{FF2B5EF4-FFF2-40B4-BE49-F238E27FC236}">
-                <a16:creationId xmlns:a16="http://schemas.microsoft.com/office/drawing/2014/main" id="{EC9CDA3B-974B-4D76-84F5-7B690014BA8A}"/>
+                <a16:creationId xmlns:a16="http://schemas.microsoft.com/office/drawing/2014/main" id="{4BEFEBEC-1CAE-4D6E-A29F-F539EB1CD338}"/>
               </a:ext>
             </a:extLst>
           </p:cNvPr>
@@ -9980,7 +10802,7 @@
           <p:cNvPr id="45" name="">
             <a:extLst xmlns:a="http://schemas.openxmlformats.org/drawingml/2006/main">
               <a:ext uri="{FF2B5EF4-FFF2-40B4-BE49-F238E27FC236}">
-                <a16:creationId xmlns:a16="http://schemas.microsoft.com/office/drawing/2014/main" id="{9F045087-36A3-4BAF-B3EC-879B3B05A4E4}"/>
+                <a16:creationId xmlns:a16="http://schemas.microsoft.com/office/drawing/2014/main" id="{4053B61C-326A-4C7A-A186-E6F3F954CBDE}"/>
               </a:ext>
             </a:extLst>
           </p:cNvPr>
@@ -10035,7 +10857,7 @@
     </p:spTree>
     <p:extLst>
       <p:ext uri="{BB962C8B-B14F-4D97-AF65-F5344CB8AC3E}">
-        <p14:creationId xmlns:p14="http://schemas.microsoft.com/office/powerpoint/2010/main" val="934451018"/>
+        <p14:creationId xmlns:p14="http://schemas.microsoft.com/office/powerpoint/2010/main" val="71810416"/>
       </p:ext>
     </p:extLst>
   </p:cSld>
@@ -10066,7 +10888,7 @@
           <p:cNvPr id="26" name="">
             <a:extLst xmlns:a="http://schemas.openxmlformats.org/drawingml/2006/main">
               <a:ext uri="{FF2B5EF4-FFF2-40B4-BE49-F238E27FC236}">
-                <a16:creationId xmlns:a16="http://schemas.microsoft.com/office/drawing/2014/main" id="{7666D6B0-1E4A-402A-8CF9-C82CE90B4770}"/>
+                <a16:creationId xmlns:a16="http://schemas.microsoft.com/office/drawing/2014/main" id="{D229D4AE-351B-4BCE-A100-3BBC7E0DCD8E}"/>
               </a:ext>
             </a:extLst>
           </p:cNvPr>
@@ -10123,7 +10945,7 @@
           <p:cNvPr id="2" name="">
             <a:extLst xmlns:a="http://schemas.openxmlformats.org/drawingml/2006/main">
               <a:ext uri="{FF2B5EF4-FFF2-40B4-BE49-F238E27FC236}">
-                <a16:creationId xmlns:a16="http://schemas.microsoft.com/office/drawing/2014/main" id="{56B49723-0B96-4C98-A93E-62C6C7034723}"/>
+                <a16:creationId xmlns:a16="http://schemas.microsoft.com/office/drawing/2014/main" id="{7EC20261-C318-4DBA-98D3-03E212D3B550}"/>
               </a:ext>
             </a:extLst>
           </p:cNvPr>
@@ -10155,7 +10977,7 @@
           <p:cNvPr id="3" name="">
             <a:extLst xmlns:a="http://schemas.openxmlformats.org/drawingml/2006/main">
               <a:ext uri="{FF2B5EF4-FFF2-40B4-BE49-F238E27FC236}">
-                <a16:creationId xmlns:a16="http://schemas.microsoft.com/office/drawing/2014/main" id="{5FABAC16-DE7D-4B58-B3E4-FFA190DE89A7}"/>
+                <a16:creationId xmlns:a16="http://schemas.microsoft.com/office/drawing/2014/main" id="{F9B3D8F6-CCC1-4251-9A3B-08F2810A0FEA}"/>
               </a:ext>
             </a:extLst>
           </p:cNvPr>
@@ -10212,7 +11034,7 @@
           <p:cNvPr id="4" name="">
             <a:extLst xmlns:a="http://schemas.openxmlformats.org/drawingml/2006/main">
               <a:ext uri="{FF2B5EF4-FFF2-40B4-BE49-F238E27FC236}">
-                <a16:creationId xmlns:a16="http://schemas.microsoft.com/office/drawing/2014/main" id="{904AA8CB-CEDD-4541-AE63-DDC476D1465E}"/>
+                <a16:creationId xmlns:a16="http://schemas.microsoft.com/office/drawing/2014/main" id="{AC46A14C-0F4B-4934-BBAE-840BA6AF86AC}"/>
               </a:ext>
             </a:extLst>
           </p:cNvPr>
@@ -10269,7 +11091,7 @@
           <p:cNvPr id="5" name="">
             <a:extLst xmlns:a="http://schemas.openxmlformats.org/drawingml/2006/main">
               <a:ext uri="{FF2B5EF4-FFF2-40B4-BE49-F238E27FC236}">
-                <a16:creationId xmlns:a16="http://schemas.microsoft.com/office/drawing/2014/main" id="{C5901672-E0F4-45C8-ABCE-E5C62BAFE8D9}"/>
+                <a16:creationId xmlns:a16="http://schemas.microsoft.com/office/drawing/2014/main" id="{2146BBC0-2748-4DCF-A818-E086FE65C59D}"/>
               </a:ext>
             </a:extLst>
           </p:cNvPr>
@@ -10326,7 +11148,7 @@
           <p:cNvPr id="6" name="">
             <a:extLst xmlns:a="http://schemas.openxmlformats.org/drawingml/2006/main">
               <a:ext uri="{FF2B5EF4-FFF2-40B4-BE49-F238E27FC236}">
-                <a16:creationId xmlns:a16="http://schemas.microsoft.com/office/drawing/2014/main" id="{F3B54914-0AD9-40C7-A4E2-DE52CEAFFF6B}"/>
+                <a16:creationId xmlns:a16="http://schemas.microsoft.com/office/drawing/2014/main" id="{9896C5A6-BC36-4904-98B8-87100A48B539}"/>
               </a:ext>
             </a:extLst>
           </p:cNvPr>
@@ -10357,7 +11179,7 @@
           <p:cNvPr id="7" name="">
             <a:extLst xmlns:a="http://schemas.openxmlformats.org/drawingml/2006/main">
               <a:ext uri="{FF2B5EF4-FFF2-40B4-BE49-F238E27FC236}">
-                <a16:creationId xmlns:a16="http://schemas.microsoft.com/office/drawing/2014/main" id="{C143206B-AB2F-49F5-B31B-BA0F5609A372}"/>
+                <a16:creationId xmlns:a16="http://schemas.microsoft.com/office/drawing/2014/main" id="{4539FFE1-7CB5-4FE8-8055-C06905C337E5}"/>
               </a:ext>
             </a:extLst>
           </p:cNvPr>
@@ -10414,7 +11236,7 @@
           <p:cNvPr id="8" name="">
             <a:extLst xmlns:a="http://schemas.openxmlformats.org/drawingml/2006/main">
               <a:ext uri="{FF2B5EF4-FFF2-40B4-BE49-F238E27FC236}">
-                <a16:creationId xmlns:a16="http://schemas.microsoft.com/office/drawing/2014/main" id="{0299381B-7259-43D6-AD3B-4E0289AAAD82}"/>
+                <a16:creationId xmlns:a16="http://schemas.microsoft.com/office/drawing/2014/main" id="{1833E0AB-FBFB-4EF5-AC91-A4EEEFDDBE1B}"/>
               </a:ext>
             </a:extLst>
           </p:cNvPr>
@@ -10471,7 +11293,7 @@
           <p:cNvPr id="9" name="">
             <a:extLst xmlns:a="http://schemas.openxmlformats.org/drawingml/2006/main">
               <a:ext uri="{FF2B5EF4-FFF2-40B4-BE49-F238E27FC236}">
-                <a16:creationId xmlns:a16="http://schemas.microsoft.com/office/drawing/2014/main" id="{395CCD63-D190-42A4-BB40-EEEE2278D37E}"/>
+                <a16:creationId xmlns:a16="http://schemas.microsoft.com/office/drawing/2014/main" id="{9C831BD4-CE48-4BAD-9B6B-99A14B7CFD1E}"/>
               </a:ext>
             </a:extLst>
           </p:cNvPr>
@@ -10528,7 +11350,7 @@
           <p:cNvPr id="10" name="">
             <a:extLst xmlns:a="http://schemas.openxmlformats.org/drawingml/2006/main">
               <a:ext uri="{FF2B5EF4-FFF2-40B4-BE49-F238E27FC236}">
-                <a16:creationId xmlns:a16="http://schemas.microsoft.com/office/drawing/2014/main" id="{C31336DF-ADDA-4295-A37F-8BDE279D857D}"/>
+                <a16:creationId xmlns:a16="http://schemas.microsoft.com/office/drawing/2014/main" id="{1C49F178-F422-41DE-895A-EACE99F4E45F}"/>
               </a:ext>
             </a:extLst>
           </p:cNvPr>
@@ -10608,7 +11430,7 @@
           <p:cNvPr id="11" name="">
             <a:extLst xmlns:a="http://schemas.openxmlformats.org/drawingml/2006/main">
               <a:ext uri="{FF2B5EF4-FFF2-40B4-BE49-F238E27FC236}">
-                <a16:creationId xmlns:a16="http://schemas.microsoft.com/office/drawing/2014/main" id="{3655B03D-1CDE-4532-A85D-E3F44B720514}"/>
+                <a16:creationId xmlns:a16="http://schemas.microsoft.com/office/drawing/2014/main" id="{B4055E39-1CEA-4B40-A7FA-3C89E7B960B2}"/>
               </a:ext>
             </a:extLst>
           </p:cNvPr>
@@ -10640,7 +11462,7 @@
           <p:cNvPr id="12" name="">
             <a:extLst xmlns:a="http://schemas.openxmlformats.org/drawingml/2006/main">
               <a:ext uri="{FF2B5EF4-FFF2-40B4-BE49-F238E27FC236}">
-                <a16:creationId xmlns:a16="http://schemas.microsoft.com/office/drawing/2014/main" id="{586362EA-6E84-479D-BB1D-898FF4D3C367}"/>
+                <a16:creationId xmlns:a16="http://schemas.microsoft.com/office/drawing/2014/main" id="{66502A9B-32D9-47EB-BFDB-F05377038C4B}"/>
               </a:ext>
             </a:extLst>
           </p:cNvPr>
@@ -10697,7 +11519,7 @@
           <p:cNvPr id="13" name="">
             <a:extLst xmlns:a="http://schemas.openxmlformats.org/drawingml/2006/main">
               <a:ext uri="{FF2B5EF4-FFF2-40B4-BE49-F238E27FC236}">
-                <a16:creationId xmlns:a16="http://schemas.microsoft.com/office/drawing/2014/main" id="{8E970F13-4B2D-4F9A-9FC9-B9165B0AD34C}"/>
+                <a16:creationId xmlns:a16="http://schemas.microsoft.com/office/drawing/2014/main" id="{107CED74-6F20-4147-A761-87E96E399D5F}"/>
               </a:ext>
             </a:extLst>
           </p:cNvPr>
@@ -10729,7 +11551,7 @@
           <p:cNvPr id="14" name="">
             <a:extLst xmlns:a="http://schemas.openxmlformats.org/drawingml/2006/main">
               <a:ext uri="{FF2B5EF4-FFF2-40B4-BE49-F238E27FC236}">
-                <a16:creationId xmlns:a16="http://schemas.microsoft.com/office/drawing/2014/main" id="{1A122FEF-36F4-4A99-B058-27B038D2C4A0}"/>
+                <a16:creationId xmlns:a16="http://schemas.microsoft.com/office/drawing/2014/main" id="{4C70B464-E6A4-44D2-9E9C-823B8D19E425}"/>
               </a:ext>
             </a:extLst>
           </p:cNvPr>
@@ -10753,7 +11575,7 @@
         </p:spPr>
         <p:txBody>
           <a:bodyPr xmlns:a="http://schemas.openxmlformats.org/drawingml/2006/main" anchor="ctr">
-            <a:normAutofit fontScale="70808"/>
+            <a:normAutofit fontScale="92069"/>
           </a:bodyPr>
           <a:lstStyle xmlns:a="http://schemas.openxmlformats.org/drawingml/2006/main"/>
           <a:p xmlns:a="http://schemas.openxmlformats.org/drawingml/2006/main">
@@ -10786,7 +11608,7 @@
           <p:cNvPr id="15" name="">
             <a:extLst xmlns:a="http://schemas.openxmlformats.org/drawingml/2006/main">
               <a:ext uri="{FF2B5EF4-FFF2-40B4-BE49-F238E27FC236}">
-                <a16:creationId xmlns:a16="http://schemas.microsoft.com/office/drawing/2014/main" id="{51F9309A-4B71-4593-932E-5C791B80AA35}"/>
+                <a16:creationId xmlns:a16="http://schemas.microsoft.com/office/drawing/2014/main" id="{75B66A94-918C-4F36-AB34-E0448BD9C32F}"/>
               </a:ext>
             </a:extLst>
           </p:cNvPr>
@@ -10843,7 +11665,7 @@
           <p:cNvPr id="16" name="">
             <a:extLst xmlns:a="http://schemas.openxmlformats.org/drawingml/2006/main">
               <a:ext uri="{FF2B5EF4-FFF2-40B4-BE49-F238E27FC236}">
-                <a16:creationId xmlns:a16="http://schemas.microsoft.com/office/drawing/2014/main" id="{26D3529C-362F-408E-A04D-83EF86B0EC93}"/>
+                <a16:creationId xmlns:a16="http://schemas.microsoft.com/office/drawing/2014/main" id="{A5AD1171-C386-4FC6-A9CE-DA36D389517D}"/>
               </a:ext>
             </a:extLst>
           </p:cNvPr>
@@ -10900,7 +11722,7 @@
           <p:cNvPr id="17" name="">
             <a:extLst xmlns:a="http://schemas.openxmlformats.org/drawingml/2006/main">
               <a:ext uri="{FF2B5EF4-FFF2-40B4-BE49-F238E27FC236}">
-                <a16:creationId xmlns:a16="http://schemas.microsoft.com/office/drawing/2014/main" id="{8C235C0A-0BB1-4EDA-A9D6-EA10325B5C9B}"/>
+                <a16:creationId xmlns:a16="http://schemas.microsoft.com/office/drawing/2014/main" id="{F4ED43DB-7DD9-4A42-9C31-5C939580BC8E}"/>
               </a:ext>
             </a:extLst>
           </p:cNvPr>
@@ -10932,7 +11754,7 @@
           <p:cNvPr id="18" name="">
             <a:extLst xmlns:a="http://schemas.openxmlformats.org/drawingml/2006/main">
               <a:ext uri="{FF2B5EF4-FFF2-40B4-BE49-F238E27FC236}">
-                <a16:creationId xmlns:a16="http://schemas.microsoft.com/office/drawing/2014/main" id="{41C8F1B3-041C-4141-96BA-844FA5E31ECA}"/>
+                <a16:creationId xmlns:a16="http://schemas.microsoft.com/office/drawing/2014/main" id="{03C3DD6F-1DB9-4EBF-8BCA-EA817E8F49A9}"/>
               </a:ext>
             </a:extLst>
           </p:cNvPr>
@@ -10956,7 +11778,7 @@
         </p:spPr>
         <p:txBody>
           <a:bodyPr xmlns:a="http://schemas.openxmlformats.org/drawingml/2006/main" anchor="ctr">
-            <a:normAutofit fontScale="70808"/>
+            <a:normAutofit fontScale="92069"/>
           </a:bodyPr>
           <a:lstStyle xmlns:a="http://schemas.openxmlformats.org/drawingml/2006/main"/>
           <a:p xmlns:a="http://schemas.openxmlformats.org/drawingml/2006/main">
@@ -10989,7 +11811,7 @@
           <p:cNvPr id="19" name="">
             <a:extLst xmlns:a="http://schemas.openxmlformats.org/drawingml/2006/main">
               <a:ext uri="{FF2B5EF4-FFF2-40B4-BE49-F238E27FC236}">
-                <a16:creationId xmlns:a16="http://schemas.microsoft.com/office/drawing/2014/main" id="{C30071AB-152E-4444-A132-693F7B62A035}"/>
+                <a16:creationId xmlns:a16="http://schemas.microsoft.com/office/drawing/2014/main" id="{D5BC3972-7BC7-4EFC-9A50-DC38A7229B01}"/>
               </a:ext>
             </a:extLst>
           </p:cNvPr>
@@ -11046,7 +11868,7 @@
           <p:cNvPr id="20" name="">
             <a:extLst xmlns:a="http://schemas.openxmlformats.org/drawingml/2006/main">
               <a:ext uri="{FF2B5EF4-FFF2-40B4-BE49-F238E27FC236}">
-                <a16:creationId xmlns:a16="http://schemas.microsoft.com/office/drawing/2014/main" id="{25FD0217-D534-47AB-8729-D1F9DE31D4E0}"/>
+                <a16:creationId xmlns:a16="http://schemas.microsoft.com/office/drawing/2014/main" id="{A8A8E76D-DE29-44A1-A2E8-483259B89587}"/>
               </a:ext>
             </a:extLst>
           </p:cNvPr>
@@ -11103,7 +11925,7 @@
           <p:cNvPr id="21" name="">
             <a:extLst xmlns:a="http://schemas.openxmlformats.org/drawingml/2006/main">
               <a:ext uri="{FF2B5EF4-FFF2-40B4-BE49-F238E27FC236}">
-                <a16:creationId xmlns:a16="http://schemas.microsoft.com/office/drawing/2014/main" id="{C836D2C2-ADDC-4E99-8990-599F63A09B22}"/>
+                <a16:creationId xmlns:a16="http://schemas.microsoft.com/office/drawing/2014/main" id="{C25C57E8-D6FD-44CD-B634-0EA16699B859}"/>
               </a:ext>
             </a:extLst>
           </p:cNvPr>
@@ -11135,7 +11957,7 @@
           <p:cNvPr id="22" name="">
             <a:extLst xmlns:a="http://schemas.openxmlformats.org/drawingml/2006/main">
               <a:ext uri="{FF2B5EF4-FFF2-40B4-BE49-F238E27FC236}">
-                <a16:creationId xmlns:a16="http://schemas.microsoft.com/office/drawing/2014/main" id="{AEC822AF-E61D-4BEC-AA1D-0703C1F11497}"/>
+                <a16:creationId xmlns:a16="http://schemas.microsoft.com/office/drawing/2014/main" id="{EF9D9463-0AD5-4503-91EB-0C393D7678AC}"/>
               </a:ext>
             </a:extLst>
           </p:cNvPr>
@@ -11159,7 +11981,7 @@
         </p:spPr>
         <p:txBody>
           <a:bodyPr xmlns:a="http://schemas.openxmlformats.org/drawingml/2006/main" anchor="ctr">
-            <a:normAutofit fontScale="70808"/>
+            <a:normAutofit fontScale="92069"/>
           </a:bodyPr>
           <a:lstStyle xmlns:a="http://schemas.openxmlformats.org/drawingml/2006/main"/>
           <a:p xmlns:a="http://schemas.openxmlformats.org/drawingml/2006/main">
@@ -11192,7 +12014,7 @@
           <p:cNvPr id="23" name="">
             <a:extLst xmlns:a="http://schemas.openxmlformats.org/drawingml/2006/main">
               <a:ext uri="{FF2B5EF4-FFF2-40B4-BE49-F238E27FC236}">
-                <a16:creationId xmlns:a16="http://schemas.microsoft.com/office/drawing/2014/main" id="{BCCF176F-3AE7-4D64-86F1-593664A28943}"/>
+                <a16:creationId xmlns:a16="http://schemas.microsoft.com/office/drawing/2014/main" id="{643E33F9-20F5-43C0-8BC8-AA5FE6C90D74}"/>
               </a:ext>
             </a:extLst>
           </p:cNvPr>
@@ -11249,7 +12071,7 @@
           <p:cNvPr id="24" name="">
             <a:extLst xmlns:a="http://schemas.openxmlformats.org/drawingml/2006/main">
               <a:ext uri="{FF2B5EF4-FFF2-40B4-BE49-F238E27FC236}">
-                <a16:creationId xmlns:a16="http://schemas.microsoft.com/office/drawing/2014/main" id="{CD06DFE3-7F84-4D04-BF77-6D4045AC8A3B}"/>
+                <a16:creationId xmlns:a16="http://schemas.microsoft.com/office/drawing/2014/main" id="{9D2D73F2-CFE0-4882-A908-D24DECBB3647}"/>
               </a:ext>
             </a:extLst>
           </p:cNvPr>
@@ -11306,7 +12128,7 @@
           <p:cNvPr id="25" name="">
             <a:extLst xmlns:a="http://schemas.openxmlformats.org/drawingml/2006/main">
               <a:ext uri="{FF2B5EF4-FFF2-40B4-BE49-F238E27FC236}">
-                <a16:creationId xmlns:a16="http://schemas.microsoft.com/office/drawing/2014/main" id="{DD8315B5-A508-427F-B2A2-64BDEFE8A061}"/>
+                <a16:creationId xmlns:a16="http://schemas.microsoft.com/office/drawing/2014/main" id="{0A68715F-A7B4-4C07-966A-F7CE88DC2858}"/>
               </a:ext>
             </a:extLst>
           </p:cNvPr>
@@ -11361,7 +12183,7 @@
     </p:spTree>
     <p:extLst>
       <p:ext uri="{BB962C8B-B14F-4D97-AF65-F5344CB8AC3E}">
-        <p14:creationId xmlns:p14="http://schemas.microsoft.com/office/powerpoint/2010/main" val="343548885"/>
+        <p14:creationId xmlns:p14="http://schemas.microsoft.com/office/powerpoint/2010/main" val="1576440910"/>
       </p:ext>
     </p:extLst>
   </p:cSld>
@@ -11392,7 +12214,7 @@
           <p:cNvPr id="16" name="">
             <a:extLst xmlns:a="http://schemas.openxmlformats.org/drawingml/2006/main">
               <a:ext uri="{FF2B5EF4-FFF2-40B4-BE49-F238E27FC236}">
-                <a16:creationId xmlns:a16="http://schemas.microsoft.com/office/drawing/2014/main" id="{D20DBD6B-ED26-41FE-BBA5-BB5F77891AEC}"/>
+                <a16:creationId xmlns:a16="http://schemas.microsoft.com/office/drawing/2014/main" id="{521E4FD7-DF48-4081-92D3-CE58E62114AB}"/>
               </a:ext>
             </a:extLst>
           </p:cNvPr>
@@ -11422,7 +12244,7 @@
           <p:cNvPr id="2" name="">
             <a:extLst xmlns:a="http://schemas.openxmlformats.org/drawingml/2006/main">
               <a:ext uri="{FF2B5EF4-FFF2-40B4-BE49-F238E27FC236}">
-                <a16:creationId xmlns:a16="http://schemas.microsoft.com/office/drawing/2014/main" id="{6295A472-A2BF-4CFD-8EFF-76C7B08CBBB0}"/>
+                <a16:creationId xmlns:a16="http://schemas.microsoft.com/office/drawing/2014/main" id="{C0DB19E6-D320-4A07-A18C-B7B7F31305EB}"/>
               </a:ext>
             </a:extLst>
           </p:cNvPr>
@@ -11479,7 +12301,7 @@
           <p:cNvPr id="3" name="">
             <a:extLst xmlns:a="http://schemas.openxmlformats.org/drawingml/2006/main">
               <a:ext uri="{FF2B5EF4-FFF2-40B4-BE49-F238E27FC236}">
-                <a16:creationId xmlns:a16="http://schemas.microsoft.com/office/drawing/2014/main" id="{6C7214CA-8428-4837-8F41-CFD8E3D1D40A}"/>
+                <a16:creationId xmlns:a16="http://schemas.microsoft.com/office/drawing/2014/main" id="{B04B12F6-0C3C-493C-B312-B5230F8D9F9D}"/>
               </a:ext>
             </a:extLst>
           </p:cNvPr>
@@ -11536,7 +12358,7 @@
           <p:cNvPr id="4" name="">
             <a:extLst xmlns:a="http://schemas.openxmlformats.org/drawingml/2006/main">
               <a:ext uri="{FF2B5EF4-FFF2-40B4-BE49-F238E27FC236}">
-                <a16:creationId xmlns:a16="http://schemas.microsoft.com/office/drawing/2014/main" id="{720099F7-0569-41AB-AB59-0E2F51FEECD8}"/>
+                <a16:creationId xmlns:a16="http://schemas.microsoft.com/office/drawing/2014/main" id="{9B895579-1276-4D74-96C4-6D7ECA2C4A38}"/>
               </a:ext>
             </a:extLst>
           </p:cNvPr>
@@ -11567,7 +12389,7 @@
           <p:cNvPr id="5" name="">
             <a:extLst xmlns:a="http://schemas.openxmlformats.org/drawingml/2006/main">
               <a:ext uri="{FF2B5EF4-FFF2-40B4-BE49-F238E27FC236}">
-                <a16:creationId xmlns:a16="http://schemas.microsoft.com/office/drawing/2014/main" id="{99395F41-5E17-4027-BF69-09F718A705E4}"/>
+                <a16:creationId xmlns:a16="http://schemas.microsoft.com/office/drawing/2014/main" id="{1B4A5ADC-6F65-42A9-9E42-62BE3B102CF7}"/>
               </a:ext>
             </a:extLst>
           </p:cNvPr>
@@ -11624,7 +12446,7 @@
           <p:cNvPr id="6" name="">
             <a:extLst xmlns:a="http://schemas.openxmlformats.org/drawingml/2006/main">
               <a:ext uri="{FF2B5EF4-FFF2-40B4-BE49-F238E27FC236}">
-                <a16:creationId xmlns:a16="http://schemas.microsoft.com/office/drawing/2014/main" id="{A8653AED-63DA-45D4-9AF2-8C46EE0F5B22}"/>
+                <a16:creationId xmlns:a16="http://schemas.microsoft.com/office/drawing/2014/main" id="{6E72DEF4-8DE8-439A-B10A-9C5A4BC6B6F4}"/>
               </a:ext>
             </a:extLst>
           </p:cNvPr>
@@ -11681,7 +12503,7 @@
           <p:cNvPr id="7" name="">
             <a:extLst xmlns:a="http://schemas.openxmlformats.org/drawingml/2006/main">
               <a:ext uri="{FF2B5EF4-FFF2-40B4-BE49-F238E27FC236}">
-                <a16:creationId xmlns:a16="http://schemas.microsoft.com/office/drawing/2014/main" id="{0B0440E2-E905-44F1-9676-FF309FF2008F}"/>
+                <a16:creationId xmlns:a16="http://schemas.microsoft.com/office/drawing/2014/main" id="{3F8D309A-4EAD-4DB2-B647-1ED1086A3156}"/>
               </a:ext>
             </a:extLst>
           </p:cNvPr>
@@ -11738,7 +12560,7 @@
           <p:cNvPr id="8" name="">
             <a:extLst xmlns:a="http://schemas.openxmlformats.org/drawingml/2006/main">
               <a:ext uri="{FF2B5EF4-FFF2-40B4-BE49-F238E27FC236}">
-                <a16:creationId xmlns:a16="http://schemas.microsoft.com/office/drawing/2014/main" id="{20622450-61EA-4BA6-8BC4-1940935C75C9}"/>
+                <a16:creationId xmlns:a16="http://schemas.microsoft.com/office/drawing/2014/main" id="{6954F4BF-BAD6-479E-85B6-95BFE75A144F}"/>
               </a:ext>
             </a:extLst>
           </p:cNvPr>
@@ -11769,7 +12591,7 @@
           <p:cNvPr id="9" name="">
             <a:extLst xmlns:a="http://schemas.openxmlformats.org/drawingml/2006/main">
               <a:ext uri="{FF2B5EF4-FFF2-40B4-BE49-F238E27FC236}">
-                <a16:creationId xmlns:a16="http://schemas.microsoft.com/office/drawing/2014/main" id="{0F58212D-EC23-4B92-A586-F16574D6F8CF}"/>
+                <a16:creationId xmlns:a16="http://schemas.microsoft.com/office/drawing/2014/main" id="{2C58AC04-31DD-4C42-91D9-D9414BEEEF28}"/>
               </a:ext>
             </a:extLst>
           </p:cNvPr>
@@ -11826,7 +12648,7 @@
           <p:cNvPr id="10" name="">
             <a:extLst xmlns:a="http://schemas.openxmlformats.org/drawingml/2006/main">
               <a:ext uri="{FF2B5EF4-FFF2-40B4-BE49-F238E27FC236}">
-                <a16:creationId xmlns:a16="http://schemas.microsoft.com/office/drawing/2014/main" id="{922C4006-652D-410E-A22E-A3D48F11DD9B}"/>
+                <a16:creationId xmlns:a16="http://schemas.microsoft.com/office/drawing/2014/main" id="{27A6E56F-B0C0-430B-8ECA-382AEA53E9C8}"/>
               </a:ext>
             </a:extLst>
           </p:cNvPr>
@@ -11883,7 +12705,7 @@
           <p:cNvPr id="11" name="">
             <a:extLst xmlns:a="http://schemas.openxmlformats.org/drawingml/2006/main">
               <a:ext uri="{FF2B5EF4-FFF2-40B4-BE49-F238E27FC236}">
-                <a16:creationId xmlns:a16="http://schemas.microsoft.com/office/drawing/2014/main" id="{5D97DD60-16FC-4105-8DFD-BC25A751ADF7}"/>
+                <a16:creationId xmlns:a16="http://schemas.microsoft.com/office/drawing/2014/main" id="{35EE5969-F6E7-46B1-80BC-D0029A215005}"/>
               </a:ext>
             </a:extLst>
           </p:cNvPr>
@@ -11924,7 +12746,7 @@
           <p:cNvPr id="12" name="">
             <a:extLst xmlns:a="http://schemas.openxmlformats.org/drawingml/2006/main">
               <a:ext uri="{FF2B5EF4-FFF2-40B4-BE49-F238E27FC236}">
-                <a16:creationId xmlns:a16="http://schemas.microsoft.com/office/drawing/2014/main" id="{1F6DDB5B-D96B-4004-8D9B-0C3095F38B44}"/>
+                <a16:creationId xmlns:a16="http://schemas.microsoft.com/office/drawing/2014/main" id="{B6230A23-D9DE-4FA8-917D-44A4CF49791B}"/>
               </a:ext>
             </a:extLst>
           </p:cNvPr>
@@ -11981,7 +12803,7 @@
           <p:cNvPr id="13" name="">
             <a:extLst xmlns:a="http://schemas.openxmlformats.org/drawingml/2006/main">
               <a:ext uri="{FF2B5EF4-FFF2-40B4-BE49-F238E27FC236}">
-                <a16:creationId xmlns:a16="http://schemas.microsoft.com/office/drawing/2014/main" id="{3956DB01-04D1-4633-8FE0-344F0307A094}"/>
+                <a16:creationId xmlns:a16="http://schemas.microsoft.com/office/drawing/2014/main" id="{AB7589D5-3DB3-47DA-ADD1-DA43DBCF5536}"/>
               </a:ext>
             </a:extLst>
           </p:cNvPr>
@@ -12038,7 +12860,7 @@
           <p:cNvPr id="14" name="">
             <a:extLst xmlns:a="http://schemas.openxmlformats.org/drawingml/2006/main">
               <a:ext uri="{FF2B5EF4-FFF2-40B4-BE49-F238E27FC236}">
-                <a16:creationId xmlns:a16="http://schemas.microsoft.com/office/drawing/2014/main" id="{75E1FE46-ABE7-426B-BB25-BA586818E702}"/>
+                <a16:creationId xmlns:a16="http://schemas.microsoft.com/office/drawing/2014/main" id="{E82B0B0D-0DEA-456D-B63E-FAD2F855DE1F}"/>
               </a:ext>
             </a:extLst>
           </p:cNvPr>
@@ -12070,7 +12892,7 @@
           <p:cNvPr id="15" name="">
             <a:extLst xmlns:a="http://schemas.openxmlformats.org/drawingml/2006/main">
               <a:ext uri="{FF2B5EF4-FFF2-40B4-BE49-F238E27FC236}">
-                <a16:creationId xmlns:a16="http://schemas.microsoft.com/office/drawing/2014/main" id="{459808FF-636C-4435-B624-098AF3937E7C}"/>
+                <a16:creationId xmlns:a16="http://schemas.microsoft.com/office/drawing/2014/main" id="{8015AFED-2EBF-4163-83D9-554EF33AEE17}"/>
               </a:ext>
             </a:extLst>
           </p:cNvPr>
@@ -12125,7 +12947,7 @@
     </p:spTree>
     <p:extLst>
       <p:ext uri="{BB962C8B-B14F-4D97-AF65-F5344CB8AC3E}">
-        <p14:creationId xmlns:p14="http://schemas.microsoft.com/office/powerpoint/2010/main" val="605895461"/>
+        <p14:creationId xmlns:p14="http://schemas.microsoft.com/office/powerpoint/2010/main" val="1175895082"/>
       </p:ext>
     </p:extLst>
   </p:cSld>
@@ -12156,7 +12978,7 @@
           <p:cNvPr id="15" name="">
             <a:extLst xmlns:a="http://schemas.openxmlformats.org/drawingml/2006/main">
               <a:ext uri="{FF2B5EF4-FFF2-40B4-BE49-F238E27FC236}">
-                <a16:creationId xmlns:a16="http://schemas.microsoft.com/office/drawing/2014/main" id="{91E0B438-09C4-4E23-84B9-122E937EA3EB}"/>
+                <a16:creationId xmlns:a16="http://schemas.microsoft.com/office/drawing/2014/main" id="{70C45053-468A-4086-AEA5-9D151DA8DE5C}"/>
               </a:ext>
             </a:extLst>
           </p:cNvPr>
@@ -12186,7 +13008,7 @@
           <p:cNvPr id="2" name="">
             <a:extLst xmlns:a="http://schemas.openxmlformats.org/drawingml/2006/main">
               <a:ext uri="{FF2B5EF4-FFF2-40B4-BE49-F238E27FC236}">
-                <a16:creationId xmlns:a16="http://schemas.microsoft.com/office/drawing/2014/main" id="{78B65701-80BA-4A37-8617-DEF8B40F8B2D}"/>
+                <a16:creationId xmlns:a16="http://schemas.microsoft.com/office/drawing/2014/main" id="{B799BE8A-2CE0-4DF3-AF4D-B031F372B15A}"/>
               </a:ext>
             </a:extLst>
           </p:cNvPr>
@@ -12243,7 +13065,7 @@
           <p:cNvPr id="3" name="">
             <a:extLst xmlns:a="http://schemas.openxmlformats.org/drawingml/2006/main">
               <a:ext uri="{FF2B5EF4-FFF2-40B4-BE49-F238E27FC236}">
-                <a16:creationId xmlns:a16="http://schemas.microsoft.com/office/drawing/2014/main" id="{DE2ACE1E-0021-414F-9102-B371BC245FC4}"/>
+                <a16:creationId xmlns:a16="http://schemas.microsoft.com/office/drawing/2014/main" id="{CA893B23-7430-42A5-A341-78A3814CEC74}"/>
               </a:ext>
             </a:extLst>
           </p:cNvPr>
@@ -12300,7 +13122,7 @@
           <p:cNvPr id="4" name="">
             <a:extLst xmlns:a="http://schemas.openxmlformats.org/drawingml/2006/main">
               <a:ext uri="{FF2B5EF4-FFF2-40B4-BE49-F238E27FC236}">
-                <a16:creationId xmlns:a16="http://schemas.microsoft.com/office/drawing/2014/main" id="{4ADF2A0A-70D0-42AB-BB31-A29BA8E4A341}"/>
+                <a16:creationId xmlns:a16="http://schemas.microsoft.com/office/drawing/2014/main" id="{AA6A1A65-8436-465A-91D7-6B6E2131899B}"/>
               </a:ext>
             </a:extLst>
           </p:cNvPr>
@@ -12331,7 +13153,7 @@
           <p:cNvPr id="5" name="">
             <a:extLst xmlns:a="http://schemas.openxmlformats.org/drawingml/2006/main">
               <a:ext uri="{FF2B5EF4-FFF2-40B4-BE49-F238E27FC236}">
-                <a16:creationId xmlns:a16="http://schemas.microsoft.com/office/drawing/2014/main" id="{6AA0764D-DD51-40B6-B5B9-17A3D42DA77A}"/>
+                <a16:creationId xmlns:a16="http://schemas.microsoft.com/office/drawing/2014/main" id="{F42CE9E8-0E50-4CCC-A79C-A617BDCC3604}"/>
               </a:ext>
             </a:extLst>
           </p:cNvPr>
@@ -12388,7 +13210,7 @@
           <p:cNvPr id="6" name="">
             <a:extLst xmlns:a="http://schemas.openxmlformats.org/drawingml/2006/main">
               <a:ext uri="{FF2B5EF4-FFF2-40B4-BE49-F238E27FC236}">
-                <a16:creationId xmlns:a16="http://schemas.microsoft.com/office/drawing/2014/main" id="{11175822-D9E9-4D47-96D9-07D9B6C73238}"/>
+                <a16:creationId xmlns:a16="http://schemas.microsoft.com/office/drawing/2014/main" id="{9F173F0D-D523-418A-B659-C024E72AEFE3}"/>
               </a:ext>
             </a:extLst>
           </p:cNvPr>
@@ -12445,7 +13267,7 @@
           <p:cNvPr id="7" name="">
             <a:extLst xmlns:a="http://schemas.openxmlformats.org/drawingml/2006/main">
               <a:ext uri="{FF2B5EF4-FFF2-40B4-BE49-F238E27FC236}">
-                <a16:creationId xmlns:a16="http://schemas.microsoft.com/office/drawing/2014/main" id="{FB7A1291-617D-42DF-BF9A-1993AA52F7C6}"/>
+                <a16:creationId xmlns:a16="http://schemas.microsoft.com/office/drawing/2014/main" id="{D7DCFF5C-83F3-4A07-ACAA-8192FE609846}"/>
               </a:ext>
             </a:extLst>
           </p:cNvPr>
@@ -12476,7 +13298,7 @@
           <p:cNvPr id="8" name="">
             <a:extLst xmlns:a="http://schemas.openxmlformats.org/drawingml/2006/main">
               <a:ext uri="{FF2B5EF4-FFF2-40B4-BE49-F238E27FC236}">
-                <a16:creationId xmlns:a16="http://schemas.microsoft.com/office/drawing/2014/main" id="{AE48022D-A639-4C5B-940B-6437D8D9C7F2}"/>
+                <a16:creationId xmlns:a16="http://schemas.microsoft.com/office/drawing/2014/main" id="{32C9C169-E91E-4C3A-9DB8-8B5F6E99CAA0}"/>
               </a:ext>
             </a:extLst>
           </p:cNvPr>
@@ -12517,7 +13339,7 @@
           <p:cNvPr id="9" name="">
             <a:extLst xmlns:a="http://schemas.openxmlformats.org/drawingml/2006/main">
               <a:ext uri="{FF2B5EF4-FFF2-40B4-BE49-F238E27FC236}">
-                <a16:creationId xmlns:a16="http://schemas.microsoft.com/office/drawing/2014/main" id="{F9F6360D-6B2B-4E39-800B-4FBD6472967A}"/>
+                <a16:creationId xmlns:a16="http://schemas.microsoft.com/office/drawing/2014/main" id="{B29856BE-861A-483B-A6B7-A67023E89984}"/>
               </a:ext>
             </a:extLst>
           </p:cNvPr>
@@ -12574,7 +13396,7 @@
           <p:cNvPr id="10" name="">
             <a:extLst xmlns:a="http://schemas.openxmlformats.org/drawingml/2006/main">
               <a:ext uri="{FF2B5EF4-FFF2-40B4-BE49-F238E27FC236}">
-                <a16:creationId xmlns:a16="http://schemas.microsoft.com/office/drawing/2014/main" id="{521A45EA-1F88-4B88-B108-2CC38EC1609E}"/>
+                <a16:creationId xmlns:a16="http://schemas.microsoft.com/office/drawing/2014/main" id="{6F7B8F14-00C3-47D1-A92B-484A50066619}"/>
               </a:ext>
             </a:extLst>
           </p:cNvPr>
@@ -12654,7 +13476,7 @@
           <p:cNvPr id="11" name="">
             <a:extLst xmlns:a="http://schemas.openxmlformats.org/drawingml/2006/main">
               <a:ext uri="{FF2B5EF4-FFF2-40B4-BE49-F238E27FC236}">
-                <a16:creationId xmlns:a16="http://schemas.microsoft.com/office/drawing/2014/main" id="{C91CD0B7-740B-4D6F-B33D-70CBE86337FE}"/>
+                <a16:creationId xmlns:a16="http://schemas.microsoft.com/office/drawing/2014/main" id="{6D3A7C65-5866-4CD6-9BDD-198A7C4EBB8D}"/>
               </a:ext>
             </a:extLst>
           </p:cNvPr>
@@ -12695,7 +13517,7 @@
           <p:cNvPr id="12" name="">
             <a:extLst xmlns:a="http://schemas.openxmlformats.org/drawingml/2006/main">
               <a:ext uri="{FF2B5EF4-FFF2-40B4-BE49-F238E27FC236}">
-                <a16:creationId xmlns:a16="http://schemas.microsoft.com/office/drawing/2014/main" id="{F840459F-E359-4D5D-913C-38EE066104FC}"/>
+                <a16:creationId xmlns:a16="http://schemas.microsoft.com/office/drawing/2014/main" id="{2E20FFAF-4A0F-4B51-B2B3-5F04FE2E08E8}"/>
               </a:ext>
             </a:extLst>
           </p:cNvPr>
@@ -12752,7 +13574,7 @@
           <p:cNvPr id="13" name="">
             <a:extLst xmlns:a="http://schemas.openxmlformats.org/drawingml/2006/main">
               <a:ext uri="{FF2B5EF4-FFF2-40B4-BE49-F238E27FC236}">
-                <a16:creationId xmlns:a16="http://schemas.microsoft.com/office/drawing/2014/main" id="{1B902A82-1ECC-4D08-AE41-251A2FF5601A}"/>
+                <a16:creationId xmlns:a16="http://schemas.microsoft.com/office/drawing/2014/main" id="{96F12C54-B51D-466C-B576-09A649D28D4D}"/>
               </a:ext>
             </a:extLst>
           </p:cNvPr>
@@ -12832,7 +13654,7 @@
           <p:cNvPr id="14" name="">
             <a:extLst xmlns:a="http://schemas.openxmlformats.org/drawingml/2006/main">
               <a:ext uri="{FF2B5EF4-FFF2-40B4-BE49-F238E27FC236}">
-                <a16:creationId xmlns:a16="http://schemas.microsoft.com/office/drawing/2014/main" id="{E78D0358-3D5E-4985-8DD8-13E0786F4962}"/>
+                <a16:creationId xmlns:a16="http://schemas.microsoft.com/office/drawing/2014/main" id="{860842D8-894A-4852-A602-2F5C6D17A3F8}"/>
               </a:ext>
             </a:extLst>
           </p:cNvPr>
@@ -12887,7 +13709,7 @@
     </p:spTree>
     <p:extLst>
       <p:ext uri="{BB962C8B-B14F-4D97-AF65-F5344CB8AC3E}">
-        <p14:creationId xmlns:p14="http://schemas.microsoft.com/office/powerpoint/2010/main" val="1724795337"/>
+        <p14:creationId xmlns:p14="http://schemas.microsoft.com/office/powerpoint/2010/main" val="683715065"/>
       </p:ext>
     </p:extLst>
   </p:cSld>
@@ -12918,7 +13740,7 @@
           <p:cNvPr id="29" name="">
             <a:extLst xmlns:a="http://schemas.openxmlformats.org/drawingml/2006/main">
               <a:ext uri="{FF2B5EF4-FFF2-40B4-BE49-F238E27FC236}">
-                <a16:creationId xmlns:a16="http://schemas.microsoft.com/office/drawing/2014/main" id="{ACF3D059-E7D6-4CB3-AAD8-C360ABB801AF}"/>
+                <a16:creationId xmlns:a16="http://schemas.microsoft.com/office/drawing/2014/main" id="{183AAE9D-C148-4C34-B6CE-F40EF06AA1D5}"/>
               </a:ext>
             </a:extLst>
           </p:cNvPr>
@@ -12948,7 +13770,7 @@
           <p:cNvPr id="2" name="">
             <a:extLst xmlns:a="http://schemas.openxmlformats.org/drawingml/2006/main">
               <a:ext uri="{FF2B5EF4-FFF2-40B4-BE49-F238E27FC236}">
-                <a16:creationId xmlns:a16="http://schemas.microsoft.com/office/drawing/2014/main" id="{C0AA8DDF-6A13-4907-B0CE-D05A67C6B118}"/>
+                <a16:creationId xmlns:a16="http://schemas.microsoft.com/office/drawing/2014/main" id="{B6694377-AA23-4ECE-86CB-7B9C02D48ECC}"/>
               </a:ext>
             </a:extLst>
           </p:cNvPr>
@@ -13005,7 +13827,7 @@
           <p:cNvPr id="3" name="">
             <a:extLst xmlns:a="http://schemas.openxmlformats.org/drawingml/2006/main">
               <a:ext uri="{FF2B5EF4-FFF2-40B4-BE49-F238E27FC236}">
-                <a16:creationId xmlns:a16="http://schemas.microsoft.com/office/drawing/2014/main" id="{F8AAC5BF-678C-4AB9-8952-BCE812EC7551}"/>
+                <a16:creationId xmlns:a16="http://schemas.microsoft.com/office/drawing/2014/main" id="{B781CC61-B18C-4A12-A8F8-9C4B3AD2D897}"/>
               </a:ext>
             </a:extLst>
           </p:cNvPr>
@@ -13062,7 +13884,7 @@
           <p:cNvPr id="4" name="">
             <a:extLst xmlns:a="http://schemas.openxmlformats.org/drawingml/2006/main">
               <a:ext uri="{FF2B5EF4-FFF2-40B4-BE49-F238E27FC236}">
-                <a16:creationId xmlns:a16="http://schemas.microsoft.com/office/drawing/2014/main" id="{A62E9950-4482-4988-99CD-5193CA17FC21}"/>
+                <a16:creationId xmlns:a16="http://schemas.microsoft.com/office/drawing/2014/main" id="{EC79AF75-7B2B-4281-AAA4-A9DBECE4B9F2}"/>
               </a:ext>
             </a:extLst>
           </p:cNvPr>
@@ -13093,7 +13915,7 @@
           <p:cNvPr id="5" name="">
             <a:extLst xmlns:a="http://schemas.openxmlformats.org/drawingml/2006/main">
               <a:ext uri="{FF2B5EF4-FFF2-40B4-BE49-F238E27FC236}">
-                <a16:creationId xmlns:a16="http://schemas.microsoft.com/office/drawing/2014/main" id="{B80157F3-44DE-4556-B06A-FEECA3295596}"/>
+                <a16:creationId xmlns:a16="http://schemas.microsoft.com/office/drawing/2014/main" id="{5BFCEFBB-AD58-479A-A835-594A99271327}"/>
               </a:ext>
             </a:extLst>
           </p:cNvPr>
@@ -13150,7 +13972,7 @@
           <p:cNvPr id="6" name="">
             <a:extLst xmlns:a="http://schemas.openxmlformats.org/drawingml/2006/main">
               <a:ext uri="{FF2B5EF4-FFF2-40B4-BE49-F238E27FC236}">
-                <a16:creationId xmlns:a16="http://schemas.microsoft.com/office/drawing/2014/main" id="{DF66B8BE-BAB0-4942-A692-4C4CDBFAE35F}"/>
+                <a16:creationId xmlns:a16="http://schemas.microsoft.com/office/drawing/2014/main" id="{9BCAD247-6942-441C-A808-C8782BFC23C9}"/>
               </a:ext>
             </a:extLst>
           </p:cNvPr>
@@ -13191,7 +14013,7 @@
           <p:cNvPr id="7" name="">
             <a:extLst xmlns:a="http://schemas.openxmlformats.org/drawingml/2006/main">
               <a:ext uri="{FF2B5EF4-FFF2-40B4-BE49-F238E27FC236}">
-                <a16:creationId xmlns:a16="http://schemas.microsoft.com/office/drawing/2014/main" id="{E907AFB9-09A1-45EA-9E08-F999649F439D}"/>
+                <a16:creationId xmlns:a16="http://schemas.microsoft.com/office/drawing/2014/main" id="{55022F3B-0E5C-4624-AE51-DABA84BCD2CF}"/>
               </a:ext>
             </a:extLst>
           </p:cNvPr>
@@ -13223,7 +14045,7 @@
           <p:cNvPr id="8" name="">
             <a:extLst xmlns:a="http://schemas.openxmlformats.org/drawingml/2006/main">
               <a:ext uri="{FF2B5EF4-FFF2-40B4-BE49-F238E27FC236}">
-                <a16:creationId xmlns:a16="http://schemas.microsoft.com/office/drawing/2014/main" id="{0ABCB460-1BEE-4429-9E7A-C1D0F1C5C348}"/>
+                <a16:creationId xmlns:a16="http://schemas.microsoft.com/office/drawing/2014/main" id="{4DF96B0D-711B-49DF-8B6C-C8164961CF43}"/>
               </a:ext>
             </a:extLst>
           </p:cNvPr>
@@ -13280,7 +14102,7 @@
           <p:cNvPr id="9" name="">
             <a:extLst xmlns:a="http://schemas.openxmlformats.org/drawingml/2006/main">
               <a:ext uri="{FF2B5EF4-FFF2-40B4-BE49-F238E27FC236}">
-                <a16:creationId xmlns:a16="http://schemas.microsoft.com/office/drawing/2014/main" id="{143DFD80-0CEC-47B2-A09B-30154A784CEA}"/>
+                <a16:creationId xmlns:a16="http://schemas.microsoft.com/office/drawing/2014/main" id="{28CB7F99-00FF-42EA-A7C2-9859DF68DBC0}"/>
               </a:ext>
             </a:extLst>
           </p:cNvPr>
@@ -13337,7 +14159,7 @@
           <p:cNvPr id="10" name="">
             <a:extLst xmlns:a="http://schemas.openxmlformats.org/drawingml/2006/main">
               <a:ext uri="{FF2B5EF4-FFF2-40B4-BE49-F238E27FC236}">
-                <a16:creationId xmlns:a16="http://schemas.microsoft.com/office/drawing/2014/main" id="{63F6E6C3-111B-4F21-9AC6-E97047AC7390}"/>
+                <a16:creationId xmlns:a16="http://schemas.microsoft.com/office/drawing/2014/main" id="{0BBEA8E8-C25C-4CBF-80DC-B12E284AFAEC}"/>
               </a:ext>
             </a:extLst>
           </p:cNvPr>
@@ -13394,7 +14216,7 @@
           <p:cNvPr id="11" name="">
             <a:extLst xmlns:a="http://schemas.openxmlformats.org/drawingml/2006/main">
               <a:ext uri="{FF2B5EF4-FFF2-40B4-BE49-F238E27FC236}">
-                <a16:creationId xmlns:a16="http://schemas.microsoft.com/office/drawing/2014/main" id="{5F153228-6A85-4E67-8542-CA524D43124A}"/>
+                <a16:creationId xmlns:a16="http://schemas.microsoft.com/office/drawing/2014/main" id="{1AB9D6AF-E7EE-4A77-AF7C-17B241430190}"/>
               </a:ext>
             </a:extLst>
           </p:cNvPr>
@@ -13435,7 +14257,7 @@
           <p:cNvPr id="12" name="">
             <a:extLst xmlns:a="http://schemas.openxmlformats.org/drawingml/2006/main">
               <a:ext uri="{FF2B5EF4-FFF2-40B4-BE49-F238E27FC236}">
-                <a16:creationId xmlns:a16="http://schemas.microsoft.com/office/drawing/2014/main" id="{5F2F8E91-0717-4D56-BD89-FC6149F40298}"/>
+                <a16:creationId xmlns:a16="http://schemas.microsoft.com/office/drawing/2014/main" id="{57A9F8BA-A083-4C1D-848F-65CE8ACC822D}"/>
               </a:ext>
             </a:extLst>
           </p:cNvPr>
@@ -13467,7 +14289,7 @@
           <p:cNvPr id="13" name="">
             <a:extLst xmlns:a="http://schemas.openxmlformats.org/drawingml/2006/main">
               <a:ext uri="{FF2B5EF4-FFF2-40B4-BE49-F238E27FC236}">
-                <a16:creationId xmlns:a16="http://schemas.microsoft.com/office/drawing/2014/main" id="{FF39BEDE-E57C-4F98-8EF1-3DDFBA0F11D7}"/>
+                <a16:creationId xmlns:a16="http://schemas.microsoft.com/office/drawing/2014/main" id="{579C96E8-53A7-4950-B9C3-76028492E014}"/>
               </a:ext>
             </a:extLst>
           </p:cNvPr>
@@ -13524,7 +14346,7 @@
           <p:cNvPr id="14" name="">
             <a:extLst xmlns:a="http://schemas.openxmlformats.org/drawingml/2006/main">
               <a:ext uri="{FF2B5EF4-FFF2-40B4-BE49-F238E27FC236}">
-                <a16:creationId xmlns:a16="http://schemas.microsoft.com/office/drawing/2014/main" id="{93D901E0-8316-43C9-ACEB-2AF64E835865}"/>
+                <a16:creationId xmlns:a16="http://schemas.microsoft.com/office/drawing/2014/main" id="{589002A0-2E70-477B-AC00-C758D9B261C7}"/>
               </a:ext>
             </a:extLst>
           </p:cNvPr>
@@ -13581,7 +14403,7 @@
           <p:cNvPr id="15" name="">
             <a:extLst xmlns:a="http://schemas.openxmlformats.org/drawingml/2006/main">
               <a:ext uri="{FF2B5EF4-FFF2-40B4-BE49-F238E27FC236}">
-                <a16:creationId xmlns:a16="http://schemas.microsoft.com/office/drawing/2014/main" id="{0E72A879-DB53-42BC-894B-0E9A7051E1ED}"/>
+                <a16:creationId xmlns:a16="http://schemas.microsoft.com/office/drawing/2014/main" id="{6C8FFA5C-6B52-488B-B85B-89006FAC3D89}"/>
               </a:ext>
             </a:extLst>
           </p:cNvPr>
@@ -13638,7 +14460,7 @@
           <p:cNvPr id="16" name="">
             <a:extLst xmlns:a="http://schemas.openxmlformats.org/drawingml/2006/main">
               <a:ext uri="{FF2B5EF4-FFF2-40B4-BE49-F238E27FC236}">
-                <a16:creationId xmlns:a16="http://schemas.microsoft.com/office/drawing/2014/main" id="{E63672CA-688E-4CA9-B1FE-BBB3D651B779}"/>
+                <a16:creationId xmlns:a16="http://schemas.microsoft.com/office/drawing/2014/main" id="{1CC73A49-3317-4915-8B52-55854D8A2CB2}"/>
               </a:ext>
             </a:extLst>
           </p:cNvPr>
@@ -13679,7 +14501,7 @@
           <p:cNvPr id="17" name="">
             <a:extLst xmlns:a="http://schemas.openxmlformats.org/drawingml/2006/main">
               <a:ext uri="{FF2B5EF4-FFF2-40B4-BE49-F238E27FC236}">
-                <a16:creationId xmlns:a16="http://schemas.microsoft.com/office/drawing/2014/main" id="{DDCF105E-4B15-434E-B47D-9BA75DF65A04}"/>
+                <a16:creationId xmlns:a16="http://schemas.microsoft.com/office/drawing/2014/main" id="{8198D048-7E92-4F3E-88D0-75A0ABF41919}"/>
               </a:ext>
             </a:extLst>
           </p:cNvPr>
@@ -13711,7 +14533,7 @@
           <p:cNvPr id="18" name="">
             <a:extLst xmlns:a="http://schemas.openxmlformats.org/drawingml/2006/main">
               <a:ext uri="{FF2B5EF4-FFF2-40B4-BE49-F238E27FC236}">
-                <a16:creationId xmlns:a16="http://schemas.microsoft.com/office/drawing/2014/main" id="{26434DCB-9615-4EEC-88F8-16475F5DF000}"/>
+                <a16:creationId xmlns:a16="http://schemas.microsoft.com/office/drawing/2014/main" id="{3B995455-A99D-483E-A6E5-7CCA30D3371B}"/>
               </a:ext>
             </a:extLst>
           </p:cNvPr>
@@ -13768,7 +14590,7 @@
           <p:cNvPr id="19" name="">
             <a:extLst xmlns:a="http://schemas.openxmlformats.org/drawingml/2006/main">
               <a:ext uri="{FF2B5EF4-FFF2-40B4-BE49-F238E27FC236}">
-                <a16:creationId xmlns:a16="http://schemas.microsoft.com/office/drawing/2014/main" id="{7D9D54E1-D75B-4C98-86D7-A75AC96E79AB}"/>
+                <a16:creationId xmlns:a16="http://schemas.microsoft.com/office/drawing/2014/main" id="{8E95A7DD-2FA8-442E-982F-64238FF7F137}"/>
               </a:ext>
             </a:extLst>
           </p:cNvPr>
@@ -13825,7 +14647,7 @@
           <p:cNvPr id="20" name="">
             <a:extLst xmlns:a="http://schemas.openxmlformats.org/drawingml/2006/main">
               <a:ext uri="{FF2B5EF4-FFF2-40B4-BE49-F238E27FC236}">
-                <a16:creationId xmlns:a16="http://schemas.microsoft.com/office/drawing/2014/main" id="{C9DCAF48-D0F9-4248-8D1D-4A2EF0FBAFBF}"/>
+                <a16:creationId xmlns:a16="http://schemas.microsoft.com/office/drawing/2014/main" id="{0BAC8E93-2C66-49AB-A415-2B93F3EF7EFC}"/>
               </a:ext>
             </a:extLst>
           </p:cNvPr>
@@ -13882,7 +14704,7 @@
           <p:cNvPr id="21" name="">
             <a:extLst xmlns:a="http://schemas.openxmlformats.org/drawingml/2006/main">
               <a:ext uri="{FF2B5EF4-FFF2-40B4-BE49-F238E27FC236}">
-                <a16:creationId xmlns:a16="http://schemas.microsoft.com/office/drawing/2014/main" id="{C5B25475-C6AC-40C2-B44A-FB0B6C649E0C}"/>
+                <a16:creationId xmlns:a16="http://schemas.microsoft.com/office/drawing/2014/main" id="{5C22766C-E7A1-4518-8D92-1596AC334A67}"/>
               </a:ext>
             </a:extLst>
           </p:cNvPr>
@@ -13923,7 +14745,7 @@
           <p:cNvPr id="22" name="">
             <a:extLst xmlns:a="http://schemas.openxmlformats.org/drawingml/2006/main">
               <a:ext uri="{FF2B5EF4-FFF2-40B4-BE49-F238E27FC236}">
-                <a16:creationId xmlns:a16="http://schemas.microsoft.com/office/drawing/2014/main" id="{3F24052A-8F1E-4CFA-8A7B-BAB72EE36724}"/>
+                <a16:creationId xmlns:a16="http://schemas.microsoft.com/office/drawing/2014/main" id="{2F54BEB5-0EDD-443E-9435-7EA2228C1BA2}"/>
               </a:ext>
             </a:extLst>
           </p:cNvPr>
@@ -13955,7 +14777,7 @@
           <p:cNvPr id="23" name="">
             <a:extLst xmlns:a="http://schemas.openxmlformats.org/drawingml/2006/main">
               <a:ext uri="{FF2B5EF4-FFF2-40B4-BE49-F238E27FC236}">
-                <a16:creationId xmlns:a16="http://schemas.microsoft.com/office/drawing/2014/main" id="{649BBFDB-D81E-4E41-BCB8-5527972492CF}"/>
+                <a16:creationId xmlns:a16="http://schemas.microsoft.com/office/drawing/2014/main" id="{BC240008-74F2-49B8-9008-78FF86925291}"/>
               </a:ext>
             </a:extLst>
           </p:cNvPr>
@@ -14012,7 +14834,7 @@
           <p:cNvPr id="24" name="">
             <a:extLst xmlns:a="http://schemas.openxmlformats.org/drawingml/2006/main">
               <a:ext uri="{FF2B5EF4-FFF2-40B4-BE49-F238E27FC236}">
-                <a16:creationId xmlns:a16="http://schemas.microsoft.com/office/drawing/2014/main" id="{5E1999D0-7B81-4999-8E6D-CFEB66B4096C}"/>
+                <a16:creationId xmlns:a16="http://schemas.microsoft.com/office/drawing/2014/main" id="{C162F7BC-D6D4-4CC1-B0B3-93A6817DE9C8}"/>
               </a:ext>
             </a:extLst>
           </p:cNvPr>
@@ -14069,7 +14891,7 @@
           <p:cNvPr id="25" name="">
             <a:extLst xmlns:a="http://schemas.openxmlformats.org/drawingml/2006/main">
               <a:ext uri="{FF2B5EF4-FFF2-40B4-BE49-F238E27FC236}">
-                <a16:creationId xmlns:a16="http://schemas.microsoft.com/office/drawing/2014/main" id="{67B29F4C-5D1F-46A7-A83B-15E2C14CFF85}"/>
+                <a16:creationId xmlns:a16="http://schemas.microsoft.com/office/drawing/2014/main" id="{94C7D44C-E25C-44D5-A7B8-C5FA1DD8AAB4}"/>
               </a:ext>
             </a:extLst>
           </p:cNvPr>
@@ -14101,7 +14923,7 @@
           <p:cNvPr id="26" name="">
             <a:extLst xmlns:a="http://schemas.openxmlformats.org/drawingml/2006/main">
               <a:ext uri="{FF2B5EF4-FFF2-40B4-BE49-F238E27FC236}">
-                <a16:creationId xmlns:a16="http://schemas.microsoft.com/office/drawing/2014/main" id="{8AF0BBDB-41E2-4BAF-89EE-D3A5916CF77C}"/>
+                <a16:creationId xmlns:a16="http://schemas.microsoft.com/office/drawing/2014/main" id="{27B6DDD8-E253-40A5-95ED-EE143F285BAA}"/>
               </a:ext>
             </a:extLst>
           </p:cNvPr>
@@ -14158,7 +14980,7 @@
           <p:cNvPr id="27" name="">
             <a:extLst xmlns:a="http://schemas.openxmlformats.org/drawingml/2006/main">
               <a:ext uri="{FF2B5EF4-FFF2-40B4-BE49-F238E27FC236}">
-                <a16:creationId xmlns:a16="http://schemas.microsoft.com/office/drawing/2014/main" id="{00DF5416-B5C1-4D64-AF3B-97BBC423CDA4}"/>
+                <a16:creationId xmlns:a16="http://schemas.microsoft.com/office/drawing/2014/main" id="{9C87447F-5158-4EC3-B03B-1E77AEB2CB34}"/>
               </a:ext>
             </a:extLst>
           </p:cNvPr>
@@ -14215,7 +15037,7 @@
           <p:cNvPr id="28" name="">
             <a:extLst xmlns:a="http://schemas.openxmlformats.org/drawingml/2006/main">
               <a:ext uri="{FF2B5EF4-FFF2-40B4-BE49-F238E27FC236}">
-                <a16:creationId xmlns:a16="http://schemas.microsoft.com/office/drawing/2014/main" id="{EE58762F-BD7A-46C7-84B5-93F6DC96588E}"/>
+                <a16:creationId xmlns:a16="http://schemas.microsoft.com/office/drawing/2014/main" id="{C10EFC5C-6541-4EFC-8414-3DA23250527F}"/>
               </a:ext>
             </a:extLst>
           </p:cNvPr>
@@ -14270,7 +15092,7 @@
     </p:spTree>
     <p:extLst>
       <p:ext uri="{BB962C8B-B14F-4D97-AF65-F5344CB8AC3E}">
-        <p14:creationId xmlns:p14="http://schemas.microsoft.com/office/powerpoint/2010/main" val="2035105142"/>
+        <p14:creationId xmlns:p14="http://schemas.microsoft.com/office/powerpoint/2010/main" val="1280617796"/>
       </p:ext>
     </p:extLst>
   </p:cSld>
@@ -14301,7 +15123,7 @@
           <p:cNvPr id="37" name="">
             <a:extLst xmlns:a="http://schemas.openxmlformats.org/drawingml/2006/main">
               <a:ext uri="{FF2B5EF4-FFF2-40B4-BE49-F238E27FC236}">
-                <a16:creationId xmlns:a16="http://schemas.microsoft.com/office/drawing/2014/main" id="{F2A13746-BBF7-4F6F-8E35-FE25F317D0B3}"/>
+                <a16:creationId xmlns:a16="http://schemas.microsoft.com/office/drawing/2014/main" id="{C10BDD3C-E559-4255-9652-EFEBF418ACDC}"/>
               </a:ext>
             </a:extLst>
           </p:cNvPr>
@@ -14331,7 +15153,7 @@
           <p:cNvPr id="2" name="">
             <a:extLst xmlns:a="http://schemas.openxmlformats.org/drawingml/2006/main">
               <a:ext uri="{FF2B5EF4-FFF2-40B4-BE49-F238E27FC236}">
-                <a16:creationId xmlns:a16="http://schemas.microsoft.com/office/drawing/2014/main" id="{A8C8B851-0F99-4059-9ADB-44335D7AD2FC}"/>
+                <a16:creationId xmlns:a16="http://schemas.microsoft.com/office/drawing/2014/main" id="{F0408DAC-CC21-4C97-A0C9-CD57C3399C1C}"/>
               </a:ext>
             </a:extLst>
           </p:cNvPr>
@@ -14388,7 +15210,7 @@
           <p:cNvPr id="3" name="">
             <a:extLst xmlns:a="http://schemas.openxmlformats.org/drawingml/2006/main">
               <a:ext uri="{FF2B5EF4-FFF2-40B4-BE49-F238E27FC236}">
-                <a16:creationId xmlns:a16="http://schemas.microsoft.com/office/drawing/2014/main" id="{C7B735D2-B51E-4089-8738-DCC3A6648D48}"/>
+                <a16:creationId xmlns:a16="http://schemas.microsoft.com/office/drawing/2014/main" id="{D991E8ED-0B31-4844-90D7-EB00834D6341}"/>
               </a:ext>
             </a:extLst>
           </p:cNvPr>
@@ -14445,7 +15267,7 @@
           <p:cNvPr id="4" name="">
             <a:extLst xmlns:a="http://schemas.openxmlformats.org/drawingml/2006/main">
               <a:ext uri="{FF2B5EF4-FFF2-40B4-BE49-F238E27FC236}">
-                <a16:creationId xmlns:a16="http://schemas.microsoft.com/office/drawing/2014/main" id="{27F0DFD0-4B9C-42DD-BA0D-F71BE26C4C4B}"/>
+                <a16:creationId xmlns:a16="http://schemas.microsoft.com/office/drawing/2014/main" id="{7ECDA70C-6BEB-47E7-BE41-74BD00B38341}"/>
               </a:ext>
             </a:extLst>
           </p:cNvPr>
@@ -14476,7 +15298,7 @@
           <p:cNvPr id="5" name="">
             <a:extLst xmlns:a="http://schemas.openxmlformats.org/drawingml/2006/main">
               <a:ext uri="{FF2B5EF4-FFF2-40B4-BE49-F238E27FC236}">
-                <a16:creationId xmlns:a16="http://schemas.microsoft.com/office/drawing/2014/main" id="{B3D91127-C28D-41B6-8122-D0E9A163E2DA}"/>
+                <a16:creationId xmlns:a16="http://schemas.microsoft.com/office/drawing/2014/main" id="{882BB26E-DFB1-4DA5-A633-32B41F7EAAA0}"/>
               </a:ext>
             </a:extLst>
           </p:cNvPr>
@@ -14533,7 +15355,7 @@
           <p:cNvPr id="6" name="">
             <a:extLst xmlns:a="http://schemas.openxmlformats.org/drawingml/2006/main">
               <a:ext uri="{FF2B5EF4-FFF2-40B4-BE49-F238E27FC236}">
-                <a16:creationId xmlns:a16="http://schemas.microsoft.com/office/drawing/2014/main" id="{374BE12C-7EAD-48F4-8E04-C0BDE644D5B0}"/>
+                <a16:creationId xmlns:a16="http://schemas.microsoft.com/office/drawing/2014/main" id="{134888F2-EC6B-4CEB-8B65-72874D07A6E2}"/>
               </a:ext>
             </a:extLst>
           </p:cNvPr>
@@ -14574,7 +15396,7 @@
           <p:cNvPr id="7" name="">
             <a:extLst xmlns:a="http://schemas.openxmlformats.org/drawingml/2006/main">
               <a:ext uri="{FF2B5EF4-FFF2-40B4-BE49-F238E27FC236}">
-                <a16:creationId xmlns:a16="http://schemas.microsoft.com/office/drawing/2014/main" id="{EFE1B252-6BAF-44F2-8694-45F5D6285801}"/>
+                <a16:creationId xmlns:a16="http://schemas.microsoft.com/office/drawing/2014/main" id="{0844E635-AACF-414B-A6A2-1E095E319DE0}"/>
               </a:ext>
             </a:extLst>
           </p:cNvPr>
@@ -14606,7 +15428,7 @@
           <p:cNvPr id="8" name="">
             <a:extLst xmlns:a="http://schemas.openxmlformats.org/drawingml/2006/main">
               <a:ext uri="{FF2B5EF4-FFF2-40B4-BE49-F238E27FC236}">
-                <a16:creationId xmlns:a16="http://schemas.microsoft.com/office/drawing/2014/main" id="{3747ABB0-5C7B-4188-81DB-C18D396A759D}"/>
+                <a16:creationId xmlns:a16="http://schemas.microsoft.com/office/drawing/2014/main" id="{AF183D48-5F3E-433D-8E17-B219F8B8B23A}"/>
               </a:ext>
             </a:extLst>
           </p:cNvPr>
@@ -14663,7 +15485,7 @@
           <p:cNvPr id="9" name="">
             <a:extLst xmlns:a="http://schemas.openxmlformats.org/drawingml/2006/main">
               <a:ext uri="{FF2B5EF4-FFF2-40B4-BE49-F238E27FC236}">
-                <a16:creationId xmlns:a16="http://schemas.microsoft.com/office/drawing/2014/main" id="{D2F9204A-8DF7-4618-BA7F-3FE3BDE206EA}"/>
+                <a16:creationId xmlns:a16="http://schemas.microsoft.com/office/drawing/2014/main" id="{1168C9DA-D814-4D81-AB8A-AA352F7F94DF}"/>
               </a:ext>
             </a:extLst>
           </p:cNvPr>
@@ -14720,7 +15542,7 @@
           <p:cNvPr id="10" name="">
             <a:extLst xmlns:a="http://schemas.openxmlformats.org/drawingml/2006/main">
               <a:ext uri="{FF2B5EF4-FFF2-40B4-BE49-F238E27FC236}">
-                <a16:creationId xmlns:a16="http://schemas.microsoft.com/office/drawing/2014/main" id="{8DF33248-882B-4E77-837C-C03DE067A33C}"/>
+                <a16:creationId xmlns:a16="http://schemas.microsoft.com/office/drawing/2014/main" id="{2044CED6-87EC-439E-8613-E50A031F76E3}"/>
               </a:ext>
             </a:extLst>
           </p:cNvPr>
@@ -14777,7 +15599,7 @@
           <p:cNvPr id="11" name="">
             <a:extLst xmlns:a="http://schemas.openxmlformats.org/drawingml/2006/main">
               <a:ext uri="{FF2B5EF4-FFF2-40B4-BE49-F238E27FC236}">
-                <a16:creationId xmlns:a16="http://schemas.microsoft.com/office/drawing/2014/main" id="{995D64E2-BF7A-440A-836D-CD8F2FD435ED}"/>
+                <a16:creationId xmlns:a16="http://schemas.microsoft.com/office/drawing/2014/main" id="{E5D2B652-0F6A-4171-AC4C-DDCAB9820897}"/>
               </a:ext>
             </a:extLst>
           </p:cNvPr>
@@ -14818,7 +15640,7 @@
           <p:cNvPr id="12" name="">
             <a:extLst xmlns:a="http://schemas.openxmlformats.org/drawingml/2006/main">
               <a:ext uri="{FF2B5EF4-FFF2-40B4-BE49-F238E27FC236}">
-                <a16:creationId xmlns:a16="http://schemas.microsoft.com/office/drawing/2014/main" id="{77027674-AF04-4821-AAED-AC7581391867}"/>
+                <a16:creationId xmlns:a16="http://schemas.microsoft.com/office/drawing/2014/main" id="{CFA139DF-612B-4FF8-877C-EBC81E3E21CC}"/>
               </a:ext>
             </a:extLst>
           </p:cNvPr>
@@ -14850,7 +15672,7 @@
           <p:cNvPr id="13" name="">
             <a:extLst xmlns:a="http://schemas.openxmlformats.org/drawingml/2006/main">
               <a:ext uri="{FF2B5EF4-FFF2-40B4-BE49-F238E27FC236}">
-                <a16:creationId xmlns:a16="http://schemas.microsoft.com/office/drawing/2014/main" id="{F3BED7DE-9E86-4891-984C-119E29410AB2}"/>
+                <a16:creationId xmlns:a16="http://schemas.microsoft.com/office/drawing/2014/main" id="{CE84F507-B20A-4631-87EE-447DAF7A592B}"/>
               </a:ext>
             </a:extLst>
           </p:cNvPr>
@@ -14907,7 +15729,7 @@
           <p:cNvPr id="14" name="">
             <a:extLst xmlns:a="http://schemas.openxmlformats.org/drawingml/2006/main">
               <a:ext uri="{FF2B5EF4-FFF2-40B4-BE49-F238E27FC236}">
-                <a16:creationId xmlns:a16="http://schemas.microsoft.com/office/drawing/2014/main" id="{7660A886-8989-465E-9B03-87CF3FC349AD}"/>
+                <a16:creationId xmlns:a16="http://schemas.microsoft.com/office/drawing/2014/main" id="{48374AD4-4CF5-4542-9EAA-69E1A95B8C2D}"/>
               </a:ext>
             </a:extLst>
           </p:cNvPr>
@@ -14964,7 +15786,7 @@
           <p:cNvPr id="15" name="">
             <a:extLst xmlns:a="http://schemas.openxmlformats.org/drawingml/2006/main">
               <a:ext uri="{FF2B5EF4-FFF2-40B4-BE49-F238E27FC236}">
-                <a16:creationId xmlns:a16="http://schemas.microsoft.com/office/drawing/2014/main" id="{F2331042-293F-45EF-8FFF-7FF357BECB35}"/>
+                <a16:creationId xmlns:a16="http://schemas.microsoft.com/office/drawing/2014/main" id="{0202F8E0-ED1E-4118-9F44-DD8D2335573E}"/>
               </a:ext>
             </a:extLst>
           </p:cNvPr>
@@ -15021,7 +15843,7 @@
           <p:cNvPr id="16" name="">
             <a:extLst xmlns:a="http://schemas.openxmlformats.org/drawingml/2006/main">
               <a:ext uri="{FF2B5EF4-FFF2-40B4-BE49-F238E27FC236}">
-                <a16:creationId xmlns:a16="http://schemas.microsoft.com/office/drawing/2014/main" id="{1AE803E1-76B3-4E48-AD0C-17498BF0DD9C}"/>
+                <a16:creationId xmlns:a16="http://schemas.microsoft.com/office/drawing/2014/main" id="{5FE5BDA1-8848-4FF8-9E48-21EB7802816A}"/>
               </a:ext>
             </a:extLst>
           </p:cNvPr>
@@ -15062,7 +15884,7 @@
           <p:cNvPr id="17" name="">
             <a:extLst xmlns:a="http://schemas.openxmlformats.org/drawingml/2006/main">
               <a:ext uri="{FF2B5EF4-FFF2-40B4-BE49-F238E27FC236}">
-                <a16:creationId xmlns:a16="http://schemas.microsoft.com/office/drawing/2014/main" id="{C3286DDB-F05D-4C8D-9CB6-717FD2B81D30}"/>
+                <a16:creationId xmlns:a16="http://schemas.microsoft.com/office/drawing/2014/main" id="{B32E3BC0-B474-4105-B47A-FDBEBACC8C84}"/>
               </a:ext>
             </a:extLst>
           </p:cNvPr>
@@ -15094,7 +15916,7 @@
           <p:cNvPr id="18" name="">
             <a:extLst xmlns:a="http://schemas.openxmlformats.org/drawingml/2006/main">
               <a:ext uri="{FF2B5EF4-FFF2-40B4-BE49-F238E27FC236}">
-                <a16:creationId xmlns:a16="http://schemas.microsoft.com/office/drawing/2014/main" id="{A1F39480-E2F6-4708-838A-180E904A8D14}"/>
+                <a16:creationId xmlns:a16="http://schemas.microsoft.com/office/drawing/2014/main" id="{38AC6119-0647-4642-B372-159678392F18}"/>
               </a:ext>
             </a:extLst>
           </p:cNvPr>
@@ -15151,7 +15973,7 @@
           <p:cNvPr id="19" name="">
             <a:extLst xmlns:a="http://schemas.openxmlformats.org/drawingml/2006/main">
               <a:ext uri="{FF2B5EF4-FFF2-40B4-BE49-F238E27FC236}">
-                <a16:creationId xmlns:a16="http://schemas.microsoft.com/office/drawing/2014/main" id="{7597AC4E-C598-4A7F-B6A9-A3D0412C1695}"/>
+                <a16:creationId xmlns:a16="http://schemas.microsoft.com/office/drawing/2014/main" id="{28F3D5D4-2D4A-4B3E-8A5E-ADFFAF9258E7}"/>
               </a:ext>
             </a:extLst>
           </p:cNvPr>
@@ -15208,7 +16030,7 @@
           <p:cNvPr id="20" name="">
             <a:extLst xmlns:a="http://schemas.openxmlformats.org/drawingml/2006/main">
               <a:ext uri="{FF2B5EF4-FFF2-40B4-BE49-F238E27FC236}">
-                <a16:creationId xmlns:a16="http://schemas.microsoft.com/office/drawing/2014/main" id="{185FCC0B-C11E-4B8D-AF56-233E1BCA2EF1}"/>
+                <a16:creationId xmlns:a16="http://schemas.microsoft.com/office/drawing/2014/main" id="{6D173117-6382-424E-9B3E-B585259F9F4B}"/>
               </a:ext>
             </a:extLst>
           </p:cNvPr>
@@ -15265,7 +16087,7 @@
           <p:cNvPr id="21" name="">
             <a:extLst xmlns:a="http://schemas.openxmlformats.org/drawingml/2006/main">
               <a:ext uri="{FF2B5EF4-FFF2-40B4-BE49-F238E27FC236}">
-                <a16:creationId xmlns:a16="http://schemas.microsoft.com/office/drawing/2014/main" id="{E6867E48-0DDA-43B8-AF7F-BB5F08C988CA}"/>
+                <a16:creationId xmlns:a16="http://schemas.microsoft.com/office/drawing/2014/main" id="{162B72CA-77E7-4869-8ACE-210B839575C4}"/>
               </a:ext>
             </a:extLst>
           </p:cNvPr>
@@ -15306,7 +16128,7 @@
           <p:cNvPr id="22" name="">
             <a:extLst xmlns:a="http://schemas.openxmlformats.org/drawingml/2006/main">
               <a:ext uri="{FF2B5EF4-FFF2-40B4-BE49-F238E27FC236}">
-                <a16:creationId xmlns:a16="http://schemas.microsoft.com/office/drawing/2014/main" id="{585861AB-E245-4ED3-A6CB-4B416131300E}"/>
+                <a16:creationId xmlns:a16="http://schemas.microsoft.com/office/drawing/2014/main" id="{24076EDD-E960-4616-9810-68667A781CEC}"/>
               </a:ext>
             </a:extLst>
           </p:cNvPr>
@@ -15338,7 +16160,7 @@
           <p:cNvPr id="23" name="">
             <a:extLst xmlns:a="http://schemas.openxmlformats.org/drawingml/2006/main">
               <a:ext uri="{FF2B5EF4-FFF2-40B4-BE49-F238E27FC236}">
-                <a16:creationId xmlns:a16="http://schemas.microsoft.com/office/drawing/2014/main" id="{9D59D0D1-81D7-4F84-81E8-843FB9EC6B41}"/>
+                <a16:creationId xmlns:a16="http://schemas.microsoft.com/office/drawing/2014/main" id="{2A2817AC-37CB-47B5-AE4A-DA55E30B7E2D}"/>
               </a:ext>
             </a:extLst>
           </p:cNvPr>
@@ -15395,7 +16217,7 @@
           <p:cNvPr id="24" name="">
             <a:extLst xmlns:a="http://schemas.openxmlformats.org/drawingml/2006/main">
               <a:ext uri="{FF2B5EF4-FFF2-40B4-BE49-F238E27FC236}">
-                <a16:creationId xmlns:a16="http://schemas.microsoft.com/office/drawing/2014/main" id="{B7C5C7F9-996C-4B43-BF3D-69EAF47FBB33}"/>
+                <a16:creationId xmlns:a16="http://schemas.microsoft.com/office/drawing/2014/main" id="{2FA619D0-74E5-4514-A183-8158075F7027}"/>
               </a:ext>
             </a:extLst>
           </p:cNvPr>
@@ -15452,7 +16274,7 @@
           <p:cNvPr id="25" name="">
             <a:extLst xmlns:a="http://schemas.openxmlformats.org/drawingml/2006/main">
               <a:ext uri="{FF2B5EF4-FFF2-40B4-BE49-F238E27FC236}">
-                <a16:creationId xmlns:a16="http://schemas.microsoft.com/office/drawing/2014/main" id="{548EC21B-0A87-4B55-98E7-FEE46CD30319}"/>
+                <a16:creationId xmlns:a16="http://schemas.microsoft.com/office/drawing/2014/main" id="{3EAAC18F-A64F-41B7-BD5A-B6E2623CABDA}"/>
               </a:ext>
             </a:extLst>
           </p:cNvPr>
@@ -15509,7 +16331,7 @@
           <p:cNvPr id="26" name="">
             <a:extLst xmlns:a="http://schemas.openxmlformats.org/drawingml/2006/main">
               <a:ext uri="{FF2B5EF4-FFF2-40B4-BE49-F238E27FC236}">
-                <a16:creationId xmlns:a16="http://schemas.microsoft.com/office/drawing/2014/main" id="{5C5D2138-1550-45BC-9362-A3872BF0658C}"/>
+                <a16:creationId xmlns:a16="http://schemas.microsoft.com/office/drawing/2014/main" id="{37EA3868-18CE-42C0-BE77-158B755CB9F7}"/>
               </a:ext>
             </a:extLst>
           </p:cNvPr>
@@ -15550,7 +16372,7 @@
           <p:cNvPr id="27" name="">
             <a:extLst xmlns:a="http://schemas.openxmlformats.org/drawingml/2006/main">
               <a:ext uri="{FF2B5EF4-FFF2-40B4-BE49-F238E27FC236}">
-                <a16:creationId xmlns:a16="http://schemas.microsoft.com/office/drawing/2014/main" id="{78865C2A-65A5-4C5D-B6CA-CCAC64801782}"/>
+                <a16:creationId xmlns:a16="http://schemas.microsoft.com/office/drawing/2014/main" id="{CB0BD7B0-A387-4846-A261-E30AADECDB7A}"/>
               </a:ext>
             </a:extLst>
           </p:cNvPr>
@@ -15582,7 +16404,7 @@
           <p:cNvPr id="28" name="">
             <a:extLst xmlns:a="http://schemas.openxmlformats.org/drawingml/2006/main">
               <a:ext uri="{FF2B5EF4-FFF2-40B4-BE49-F238E27FC236}">
-                <a16:creationId xmlns:a16="http://schemas.microsoft.com/office/drawing/2014/main" id="{09EA80C5-EF9A-439C-ADE1-4BB21B23C247}"/>
+                <a16:creationId xmlns:a16="http://schemas.microsoft.com/office/drawing/2014/main" id="{B1EA6F59-DE3E-4271-9C77-7E1F92DCDC2F}"/>
               </a:ext>
             </a:extLst>
           </p:cNvPr>
@@ -15639,7 +16461,7 @@
           <p:cNvPr id="29" name="">
             <a:extLst xmlns:a="http://schemas.openxmlformats.org/drawingml/2006/main">
               <a:ext uri="{FF2B5EF4-FFF2-40B4-BE49-F238E27FC236}">
-                <a16:creationId xmlns:a16="http://schemas.microsoft.com/office/drawing/2014/main" id="{AAC75CF6-F76E-4E93-BA06-F75438A84F11}"/>
+                <a16:creationId xmlns:a16="http://schemas.microsoft.com/office/drawing/2014/main" id="{E23977D0-B3CD-476C-AA1E-C8DF7642D4E1}"/>
               </a:ext>
             </a:extLst>
           </p:cNvPr>
@@ -15696,7 +16518,7 @@
           <p:cNvPr id="30" name="">
             <a:extLst xmlns:a="http://schemas.openxmlformats.org/drawingml/2006/main">
               <a:ext uri="{FF2B5EF4-FFF2-40B4-BE49-F238E27FC236}">
-                <a16:creationId xmlns:a16="http://schemas.microsoft.com/office/drawing/2014/main" id="{97D80704-D03A-413F-B5E9-D62DBA906D10}"/>
+                <a16:creationId xmlns:a16="http://schemas.microsoft.com/office/drawing/2014/main" id="{45747B05-8BBD-4023-8924-77664C277DA7}"/>
               </a:ext>
             </a:extLst>
           </p:cNvPr>
@@ -15753,7 +16575,7 @@
           <p:cNvPr id="31" name="">
             <a:extLst xmlns:a="http://schemas.openxmlformats.org/drawingml/2006/main">
               <a:ext uri="{FF2B5EF4-FFF2-40B4-BE49-F238E27FC236}">
-                <a16:creationId xmlns:a16="http://schemas.microsoft.com/office/drawing/2014/main" id="{CE9D112A-EE7A-49C8-9905-A9AB47C6348F}"/>
+                <a16:creationId xmlns:a16="http://schemas.microsoft.com/office/drawing/2014/main" id="{3244B1F2-AAE2-4909-B2F1-E474B61D0206}"/>
               </a:ext>
             </a:extLst>
           </p:cNvPr>
@@ -15794,7 +16616,7 @@
           <p:cNvPr id="32" name="">
             <a:extLst xmlns:a="http://schemas.openxmlformats.org/drawingml/2006/main">
               <a:ext uri="{FF2B5EF4-FFF2-40B4-BE49-F238E27FC236}">
-                <a16:creationId xmlns:a16="http://schemas.microsoft.com/office/drawing/2014/main" id="{957EEA86-F8EC-44FB-AF8B-EFDF675C8F3B}"/>
+                <a16:creationId xmlns:a16="http://schemas.microsoft.com/office/drawing/2014/main" id="{DF5B6C1B-420A-4BAB-99A7-27DA516F307F}"/>
               </a:ext>
             </a:extLst>
           </p:cNvPr>
@@ -15826,7 +16648,7 @@
           <p:cNvPr id="33" name="">
             <a:extLst xmlns:a="http://schemas.openxmlformats.org/drawingml/2006/main">
               <a:ext uri="{FF2B5EF4-FFF2-40B4-BE49-F238E27FC236}">
-                <a16:creationId xmlns:a16="http://schemas.microsoft.com/office/drawing/2014/main" id="{9D3DE825-4842-4DF0-9476-38DA587F8126}"/>
+                <a16:creationId xmlns:a16="http://schemas.microsoft.com/office/drawing/2014/main" id="{5FCA1D32-3DC5-444B-A6A1-C5C59AA55CF8}"/>
               </a:ext>
             </a:extLst>
           </p:cNvPr>
@@ -15883,7 +16705,7 @@
           <p:cNvPr id="34" name="">
             <a:extLst xmlns:a="http://schemas.openxmlformats.org/drawingml/2006/main">
               <a:ext uri="{FF2B5EF4-FFF2-40B4-BE49-F238E27FC236}">
-                <a16:creationId xmlns:a16="http://schemas.microsoft.com/office/drawing/2014/main" id="{64926A11-6996-48EB-B203-241B5D41F1F0}"/>
+                <a16:creationId xmlns:a16="http://schemas.microsoft.com/office/drawing/2014/main" id="{EEB73CAE-E3CC-48EA-A518-C17D3E15AAFF}"/>
               </a:ext>
             </a:extLst>
           </p:cNvPr>
@@ -15940,7 +16762,7 @@
           <p:cNvPr id="35" name="">
             <a:extLst xmlns:a="http://schemas.openxmlformats.org/drawingml/2006/main">
               <a:ext uri="{FF2B5EF4-FFF2-40B4-BE49-F238E27FC236}">
-                <a16:creationId xmlns:a16="http://schemas.microsoft.com/office/drawing/2014/main" id="{7BF3DE0D-14CC-4893-B5F9-CA2CB291BEB3}"/>
+                <a16:creationId xmlns:a16="http://schemas.microsoft.com/office/drawing/2014/main" id="{630B8265-1617-4C79-A6B6-97BF267448AF}"/>
               </a:ext>
             </a:extLst>
           </p:cNvPr>
@@ -15997,7 +16819,7 @@
           <p:cNvPr id="36" name="">
             <a:extLst xmlns:a="http://schemas.openxmlformats.org/drawingml/2006/main">
               <a:ext uri="{FF2B5EF4-FFF2-40B4-BE49-F238E27FC236}">
-                <a16:creationId xmlns:a16="http://schemas.microsoft.com/office/drawing/2014/main" id="{453ACAE4-A7A4-4AEE-A339-A0603D7713E9}"/>
+                <a16:creationId xmlns:a16="http://schemas.microsoft.com/office/drawing/2014/main" id="{7E70EAD1-6133-41ED-B390-D22F32C094A1}"/>
               </a:ext>
             </a:extLst>
           </p:cNvPr>
@@ -16052,7 +16874,7 @@
     </p:spTree>
     <p:extLst>
       <p:ext uri="{BB962C8B-B14F-4D97-AF65-F5344CB8AC3E}">
-        <p14:creationId xmlns:p14="http://schemas.microsoft.com/office/powerpoint/2010/main" val="258613025"/>
+        <p14:creationId xmlns:p14="http://schemas.microsoft.com/office/powerpoint/2010/main" val="42395084"/>
       </p:ext>
     </p:extLst>
   </p:cSld>
@@ -16083,7 +16905,7 @@
           <p:cNvPr id="27" name="">
             <a:extLst xmlns:a="http://schemas.openxmlformats.org/drawingml/2006/main">
               <a:ext uri="{FF2B5EF4-FFF2-40B4-BE49-F238E27FC236}">
-                <a16:creationId xmlns:a16="http://schemas.microsoft.com/office/drawing/2014/main" id="{58186720-EBBA-4838-A89A-B87FF6190BEB}"/>
+                <a16:creationId xmlns:a16="http://schemas.microsoft.com/office/drawing/2014/main" id="{9A279E6E-D49D-436E-B1C8-4314E0C633E7}"/>
               </a:ext>
             </a:extLst>
           </p:cNvPr>
@@ -16113,7 +16935,7 @@
           <p:cNvPr id="2" name="">
             <a:extLst xmlns:a="http://schemas.openxmlformats.org/drawingml/2006/main">
               <a:ext uri="{FF2B5EF4-FFF2-40B4-BE49-F238E27FC236}">
-                <a16:creationId xmlns:a16="http://schemas.microsoft.com/office/drawing/2014/main" id="{3E32A8C2-6E2A-4378-BA99-BE8394D795E0}"/>
+                <a16:creationId xmlns:a16="http://schemas.microsoft.com/office/drawing/2014/main" id="{4A9264F3-5904-4C3B-94D5-D646A391793C}"/>
               </a:ext>
             </a:extLst>
           </p:cNvPr>
@@ -16170,7 +16992,7 @@
           <p:cNvPr id="3" name="">
             <a:extLst xmlns:a="http://schemas.openxmlformats.org/drawingml/2006/main">
               <a:ext uri="{FF2B5EF4-FFF2-40B4-BE49-F238E27FC236}">
-                <a16:creationId xmlns:a16="http://schemas.microsoft.com/office/drawing/2014/main" id="{6DE03D05-5336-4997-9615-0B3B7B7FCC4C}"/>
+                <a16:creationId xmlns:a16="http://schemas.microsoft.com/office/drawing/2014/main" id="{6D8A9D04-9C6A-45E4-B4F7-AB56CD4642E8}"/>
               </a:ext>
             </a:extLst>
           </p:cNvPr>
@@ -16227,7 +17049,7 @@
           <p:cNvPr id="4" name="">
             <a:extLst xmlns:a="http://schemas.openxmlformats.org/drawingml/2006/main">
               <a:ext uri="{FF2B5EF4-FFF2-40B4-BE49-F238E27FC236}">
-                <a16:creationId xmlns:a16="http://schemas.microsoft.com/office/drawing/2014/main" id="{33FDB518-EFA7-4F3A-9BFD-892FCBC9E881}"/>
+                <a16:creationId xmlns:a16="http://schemas.microsoft.com/office/drawing/2014/main" id="{5EBD1100-A97E-42D9-A0E8-1AE828DF75AB}"/>
               </a:ext>
             </a:extLst>
           </p:cNvPr>
@@ -16258,7 +17080,7 @@
           <p:cNvPr id="5" name="">
             <a:extLst xmlns:a="http://schemas.openxmlformats.org/drawingml/2006/main">
               <a:ext uri="{FF2B5EF4-FFF2-40B4-BE49-F238E27FC236}">
-                <a16:creationId xmlns:a16="http://schemas.microsoft.com/office/drawing/2014/main" id="{54BC5465-ECE9-415F-AC30-C539CDB55195}"/>
+                <a16:creationId xmlns:a16="http://schemas.microsoft.com/office/drawing/2014/main" id="{B733DA96-A774-4A1C-819E-36B466314297}"/>
               </a:ext>
             </a:extLst>
           </p:cNvPr>
@@ -16315,7 +17137,7 @@
           <p:cNvPr id="6" name="">
             <a:extLst xmlns:a="http://schemas.openxmlformats.org/drawingml/2006/main">
               <a:ext uri="{FF2B5EF4-FFF2-40B4-BE49-F238E27FC236}">
-                <a16:creationId xmlns:a16="http://schemas.microsoft.com/office/drawing/2014/main" id="{065D3B9C-8275-4FF0-B000-335C098B08AD}"/>
+                <a16:creationId xmlns:a16="http://schemas.microsoft.com/office/drawing/2014/main" id="{D634E2B5-8449-4300-B360-F20202CC1A13}"/>
               </a:ext>
             </a:extLst>
           </p:cNvPr>
@@ -16356,7 +17178,7 @@
           <p:cNvPr id="7" name="">
             <a:extLst xmlns:a="http://schemas.openxmlformats.org/drawingml/2006/main">
               <a:ext uri="{FF2B5EF4-FFF2-40B4-BE49-F238E27FC236}">
-                <a16:creationId xmlns:a16="http://schemas.microsoft.com/office/drawing/2014/main" id="{55A90949-3F17-4AC6-9A68-958C734535AD}"/>
+                <a16:creationId xmlns:a16="http://schemas.microsoft.com/office/drawing/2014/main" id="{E5BE6BF0-C87D-4348-B10D-91556BD6403C}"/>
               </a:ext>
             </a:extLst>
           </p:cNvPr>
@@ -16413,7 +17235,7 @@
           <p:cNvPr id="8" name="">
             <a:extLst xmlns:a="http://schemas.openxmlformats.org/drawingml/2006/main">
               <a:ext uri="{FF2B5EF4-FFF2-40B4-BE49-F238E27FC236}">
-                <a16:creationId xmlns:a16="http://schemas.microsoft.com/office/drawing/2014/main" id="{79387530-C91B-4386-A733-64841F4330CA}"/>
+                <a16:creationId xmlns:a16="http://schemas.microsoft.com/office/drawing/2014/main" id="{3057D257-51A4-483B-9FC5-A499D8D1FD75}"/>
               </a:ext>
             </a:extLst>
           </p:cNvPr>
@@ -16454,7 +17276,7 @@
           <p:cNvPr id="9" name="">
             <a:extLst xmlns:a="http://schemas.openxmlformats.org/drawingml/2006/main">
               <a:ext uri="{FF2B5EF4-FFF2-40B4-BE49-F238E27FC236}">
-                <a16:creationId xmlns:a16="http://schemas.microsoft.com/office/drawing/2014/main" id="{5CCD8778-352A-4FBB-9952-344D494578FF}"/>
+                <a16:creationId xmlns:a16="http://schemas.microsoft.com/office/drawing/2014/main" id="{FE56151C-EFCA-47BD-9380-DD69D02F01D2}"/>
               </a:ext>
             </a:extLst>
           </p:cNvPr>
@@ -16534,7 +17356,7 @@
           <p:cNvPr id="10" name="">
             <a:extLst xmlns:a="http://schemas.openxmlformats.org/drawingml/2006/main">
               <a:ext uri="{FF2B5EF4-FFF2-40B4-BE49-F238E27FC236}">
-                <a16:creationId xmlns:a16="http://schemas.microsoft.com/office/drawing/2014/main" id="{27EDCCC3-3DC6-402B-AA2E-62CE3044A0D0}"/>
+                <a16:creationId xmlns:a16="http://schemas.microsoft.com/office/drawing/2014/main" id="{8C5D2FC3-8FE0-454E-91D3-846BD6100DA3}"/>
               </a:ext>
             </a:extLst>
           </p:cNvPr>
@@ -16575,7 +17397,7 @@
           <p:cNvPr id="11" name="">
             <a:extLst xmlns:a="http://schemas.openxmlformats.org/drawingml/2006/main">
               <a:ext uri="{FF2B5EF4-FFF2-40B4-BE49-F238E27FC236}">
-                <a16:creationId xmlns:a16="http://schemas.microsoft.com/office/drawing/2014/main" id="{506BC335-5EF2-4655-9FE8-A85A1A8C925E}"/>
+                <a16:creationId xmlns:a16="http://schemas.microsoft.com/office/drawing/2014/main" id="{728512D7-8A49-41AD-97FB-F92FD84E39F9}"/>
               </a:ext>
             </a:extLst>
           </p:cNvPr>
@@ -16655,7 +17477,7 @@
           <p:cNvPr id="12" name="">
             <a:extLst xmlns:a="http://schemas.openxmlformats.org/drawingml/2006/main">
               <a:ext uri="{FF2B5EF4-FFF2-40B4-BE49-F238E27FC236}">
-                <a16:creationId xmlns:a16="http://schemas.microsoft.com/office/drawing/2014/main" id="{6BA73176-C096-4F6C-BFD9-9A79D1BE053C}"/>
+                <a16:creationId xmlns:a16="http://schemas.microsoft.com/office/drawing/2014/main" id="{9DC9B5BF-6C57-4377-AC6B-88B18C79B217}"/>
               </a:ext>
             </a:extLst>
           </p:cNvPr>
@@ -16696,7 +17518,7 @@
           <p:cNvPr id="13" name="">
             <a:extLst xmlns:a="http://schemas.openxmlformats.org/drawingml/2006/main">
               <a:ext uri="{FF2B5EF4-FFF2-40B4-BE49-F238E27FC236}">
-                <a16:creationId xmlns:a16="http://schemas.microsoft.com/office/drawing/2014/main" id="{1BD9FEAE-CEAE-4400-A3FA-B35B7F3A411B}"/>
+                <a16:creationId xmlns:a16="http://schemas.microsoft.com/office/drawing/2014/main" id="{80E46456-70F2-4FB7-975F-8A805D3A46D7}"/>
               </a:ext>
             </a:extLst>
           </p:cNvPr>
@@ -16776,7 +17598,7 @@
           <p:cNvPr id="14" name="">
             <a:extLst xmlns:a="http://schemas.openxmlformats.org/drawingml/2006/main">
               <a:ext uri="{FF2B5EF4-FFF2-40B4-BE49-F238E27FC236}">
-                <a16:creationId xmlns:a16="http://schemas.microsoft.com/office/drawing/2014/main" id="{037543E4-6A31-4B58-922B-63EE0A7A84A9}"/>
+                <a16:creationId xmlns:a16="http://schemas.microsoft.com/office/drawing/2014/main" id="{D4DE90BC-B68B-432B-A623-DB4A8AB21F27}"/>
               </a:ext>
             </a:extLst>
           </p:cNvPr>
@@ -16817,7 +17639,7 @@
           <p:cNvPr id="15" name="">
             <a:extLst xmlns:a="http://schemas.openxmlformats.org/drawingml/2006/main">
               <a:ext uri="{FF2B5EF4-FFF2-40B4-BE49-F238E27FC236}">
-                <a16:creationId xmlns:a16="http://schemas.microsoft.com/office/drawing/2014/main" id="{122645C5-203F-490D-8C76-8CEC66D86FDC}"/>
+                <a16:creationId xmlns:a16="http://schemas.microsoft.com/office/drawing/2014/main" id="{F95DBB15-453E-4A2B-AEB1-614638ED7707}"/>
               </a:ext>
             </a:extLst>
           </p:cNvPr>
@@ -16874,7 +17696,7 @@
           <p:cNvPr id="16" name="">
             <a:extLst xmlns:a="http://schemas.openxmlformats.org/drawingml/2006/main">
               <a:ext uri="{FF2B5EF4-FFF2-40B4-BE49-F238E27FC236}">
-                <a16:creationId xmlns:a16="http://schemas.microsoft.com/office/drawing/2014/main" id="{20984901-C7B9-45C7-8C9F-ECC36730E0BA}"/>
+                <a16:creationId xmlns:a16="http://schemas.microsoft.com/office/drawing/2014/main" id="{121DFD19-2D37-4321-B568-CBA898738DA0}"/>
               </a:ext>
             </a:extLst>
           </p:cNvPr>
@@ -16915,7 +17737,7 @@
           <p:cNvPr id="17" name="">
             <a:extLst xmlns:a="http://schemas.openxmlformats.org/drawingml/2006/main">
               <a:ext uri="{FF2B5EF4-FFF2-40B4-BE49-F238E27FC236}">
-                <a16:creationId xmlns:a16="http://schemas.microsoft.com/office/drawing/2014/main" id="{7498D150-1D8C-4034-9BD6-609BE8E09653}"/>
+                <a16:creationId xmlns:a16="http://schemas.microsoft.com/office/drawing/2014/main" id="{96F55F73-205A-428A-99CB-0709BC7A6F4B}"/>
               </a:ext>
             </a:extLst>
           </p:cNvPr>
@@ -16972,7 +17794,7 @@
           <p:cNvPr id="18" name="">
             <a:extLst xmlns:a="http://schemas.openxmlformats.org/drawingml/2006/main">
               <a:ext uri="{FF2B5EF4-FFF2-40B4-BE49-F238E27FC236}">
-                <a16:creationId xmlns:a16="http://schemas.microsoft.com/office/drawing/2014/main" id="{9C3CBD49-E15A-4C1D-9743-E47F03B35911}"/>
+                <a16:creationId xmlns:a16="http://schemas.microsoft.com/office/drawing/2014/main" id="{E6EE3DAA-FEDC-46F8-AA4F-9A7CB0DB2D55}"/>
               </a:ext>
             </a:extLst>
           </p:cNvPr>
@@ -17003,7 +17825,7 @@
           <p:cNvPr id="19" name="">
             <a:extLst xmlns:a="http://schemas.openxmlformats.org/drawingml/2006/main">
               <a:ext uri="{FF2B5EF4-FFF2-40B4-BE49-F238E27FC236}">
-                <a16:creationId xmlns:a16="http://schemas.microsoft.com/office/drawing/2014/main" id="{F7DE5CB9-F8B3-4DED-9980-C81275D8AA7D}"/>
+                <a16:creationId xmlns:a16="http://schemas.microsoft.com/office/drawing/2014/main" id="{781CC182-6A96-4108-9DD1-5677319D35C7}"/>
               </a:ext>
             </a:extLst>
           </p:cNvPr>
@@ -17034,7 +17856,7 @@
           <p:cNvPr id="20" name="">
             <a:extLst xmlns:a="http://schemas.openxmlformats.org/drawingml/2006/main">
               <a:ext uri="{FF2B5EF4-FFF2-40B4-BE49-F238E27FC236}">
-                <a16:creationId xmlns:a16="http://schemas.microsoft.com/office/drawing/2014/main" id="{240A4077-9F1E-42C1-AFD6-90F5215A2880}"/>
+                <a16:creationId xmlns:a16="http://schemas.microsoft.com/office/drawing/2014/main" id="{2BEED7D7-7145-417E-BC4A-BDC9157810A1}"/>
               </a:ext>
             </a:extLst>
           </p:cNvPr>
@@ -17065,7 +17887,7 @@
           <p:cNvPr id="21" name="">
             <a:extLst xmlns:a="http://schemas.openxmlformats.org/drawingml/2006/main">
               <a:ext uri="{FF2B5EF4-FFF2-40B4-BE49-F238E27FC236}">
-                <a16:creationId xmlns:a16="http://schemas.microsoft.com/office/drawing/2014/main" id="{1487F479-59F9-45E7-9A4E-29179FC276CC}"/>
+                <a16:creationId xmlns:a16="http://schemas.microsoft.com/office/drawing/2014/main" id="{CED14E5D-2270-4A64-872D-DB007B359E6C}"/>
               </a:ext>
             </a:extLst>
           </p:cNvPr>
@@ -17096,7 +17918,7 @@
           <p:cNvPr id="22" name="">
             <a:extLst xmlns:a="http://schemas.openxmlformats.org/drawingml/2006/main">
               <a:ext uri="{FF2B5EF4-FFF2-40B4-BE49-F238E27FC236}">
-                <a16:creationId xmlns:a16="http://schemas.microsoft.com/office/drawing/2014/main" id="{FB7259A4-4795-4866-B1FC-DBEA7E71CC89}"/>
+                <a16:creationId xmlns:a16="http://schemas.microsoft.com/office/drawing/2014/main" id="{633AA339-00F6-4CB6-9E4A-20FCD0FF524B}"/>
               </a:ext>
             </a:extLst>
           </p:cNvPr>
@@ -17127,7 +17949,7 @@
           <p:cNvPr id="23" name="">
             <a:extLst xmlns:a="http://schemas.openxmlformats.org/drawingml/2006/main">
               <a:ext uri="{FF2B5EF4-FFF2-40B4-BE49-F238E27FC236}">
-                <a16:creationId xmlns:a16="http://schemas.microsoft.com/office/drawing/2014/main" id="{15908898-450A-4BBE-B493-CED314AF9B9E}"/>
+                <a16:creationId xmlns:a16="http://schemas.microsoft.com/office/drawing/2014/main" id="{D37E2F43-E8E3-4EFC-A86F-F424223AFCE0}"/>
               </a:ext>
             </a:extLst>
           </p:cNvPr>
@@ -17162,7 +17984,7 @@
           <p:cNvPr id="24" name="">
             <a:extLst xmlns:a="http://schemas.openxmlformats.org/drawingml/2006/main">
               <a:ext uri="{FF2B5EF4-FFF2-40B4-BE49-F238E27FC236}">
-                <a16:creationId xmlns:a16="http://schemas.microsoft.com/office/drawing/2014/main" id="{58A8C670-B967-479F-A4BC-810DE11F0712}"/>
+                <a16:creationId xmlns:a16="http://schemas.microsoft.com/office/drawing/2014/main" id="{DE65F22B-5189-49DC-B89F-E3BBA73581B3}"/>
               </a:ext>
             </a:extLst>
           </p:cNvPr>
@@ -17219,7 +18041,7 @@
           <p:cNvPr id="25" name="">
             <a:extLst xmlns:a="http://schemas.openxmlformats.org/drawingml/2006/main">
               <a:ext uri="{FF2B5EF4-FFF2-40B4-BE49-F238E27FC236}">
-                <a16:creationId xmlns:a16="http://schemas.microsoft.com/office/drawing/2014/main" id="{9A682DAD-C8CF-44CD-B4B1-9542B30449FF}"/>
+                <a16:creationId xmlns:a16="http://schemas.microsoft.com/office/drawing/2014/main" id="{CF513DBE-A523-46CA-A755-E88B44E7F67C}"/>
               </a:ext>
             </a:extLst>
           </p:cNvPr>
@@ -17276,7 +18098,7 @@
           <p:cNvPr id="26" name="">
             <a:extLst xmlns:a="http://schemas.openxmlformats.org/drawingml/2006/main">
               <a:ext uri="{FF2B5EF4-FFF2-40B4-BE49-F238E27FC236}">
-                <a16:creationId xmlns:a16="http://schemas.microsoft.com/office/drawing/2014/main" id="{6E1A3A89-FAF8-473C-BA1E-4CBB84D95012}"/>
+                <a16:creationId xmlns:a16="http://schemas.microsoft.com/office/drawing/2014/main" id="{27B72443-31FC-4715-B2EC-4CC233510867}"/>
               </a:ext>
             </a:extLst>
           </p:cNvPr>
@@ -17331,7 +18153,7 @@
     </p:spTree>
     <p:extLst>
       <p:ext uri="{BB962C8B-B14F-4D97-AF65-F5344CB8AC3E}">
-        <p14:creationId xmlns:p14="http://schemas.microsoft.com/office/powerpoint/2010/main" val="634380711"/>
+        <p14:creationId xmlns:p14="http://schemas.microsoft.com/office/powerpoint/2010/main" val="455825323"/>
       </p:ext>
     </p:extLst>
   </p:cSld>
@@ -17362,7 +18184,7 @@
           <p:cNvPr id="30" name="">
             <a:extLst xmlns:a="http://schemas.openxmlformats.org/drawingml/2006/main">
               <a:ext uri="{FF2B5EF4-FFF2-40B4-BE49-F238E27FC236}">
-                <a16:creationId xmlns:a16="http://schemas.microsoft.com/office/drawing/2014/main" id="{534AAA93-81DB-4881-B08F-45ACEAE6840D}"/>
+                <a16:creationId xmlns:a16="http://schemas.microsoft.com/office/drawing/2014/main" id="{BD43B9D8-1748-4CE4-AE75-4C7D3F0CD225}"/>
               </a:ext>
             </a:extLst>
           </p:cNvPr>
@@ -17392,7 +18214,7 @@
           <p:cNvPr id="2" name="">
             <a:extLst xmlns:a="http://schemas.openxmlformats.org/drawingml/2006/main">
               <a:ext uri="{FF2B5EF4-FFF2-40B4-BE49-F238E27FC236}">
-                <a16:creationId xmlns:a16="http://schemas.microsoft.com/office/drawing/2014/main" id="{E900961B-62F0-40BD-BB1C-61F0ED345451}"/>
+                <a16:creationId xmlns:a16="http://schemas.microsoft.com/office/drawing/2014/main" id="{D12A0DD4-2726-4908-9CCF-AF590D22B07B}"/>
               </a:ext>
             </a:extLst>
           </p:cNvPr>
@@ -17449,7 +18271,7 @@
           <p:cNvPr id="3" name="">
             <a:extLst xmlns:a="http://schemas.openxmlformats.org/drawingml/2006/main">
               <a:ext uri="{FF2B5EF4-FFF2-40B4-BE49-F238E27FC236}">
-                <a16:creationId xmlns:a16="http://schemas.microsoft.com/office/drawing/2014/main" id="{A403FFCB-4FAB-41B0-8A1D-927F5442A2C8}"/>
+                <a16:creationId xmlns:a16="http://schemas.microsoft.com/office/drawing/2014/main" id="{7ED7490C-AB79-49D6-88D9-80BC2B52FEDC}"/>
               </a:ext>
             </a:extLst>
           </p:cNvPr>
@@ -17506,7 +18328,7 @@
           <p:cNvPr id="4" name="">
             <a:extLst xmlns:a="http://schemas.openxmlformats.org/drawingml/2006/main">
               <a:ext uri="{FF2B5EF4-FFF2-40B4-BE49-F238E27FC236}">
-                <a16:creationId xmlns:a16="http://schemas.microsoft.com/office/drawing/2014/main" id="{FE4DBBC4-8BBB-4580-8AD1-2F80C0067348}"/>
+                <a16:creationId xmlns:a16="http://schemas.microsoft.com/office/drawing/2014/main" id="{F66E86BC-F20F-4101-A90B-8BA328D2AABD}"/>
               </a:ext>
             </a:extLst>
           </p:cNvPr>
@@ -17537,7 +18359,7 @@
           <p:cNvPr id="5" name="">
             <a:extLst xmlns:a="http://schemas.openxmlformats.org/drawingml/2006/main">
               <a:ext uri="{FF2B5EF4-FFF2-40B4-BE49-F238E27FC236}">
-                <a16:creationId xmlns:a16="http://schemas.microsoft.com/office/drawing/2014/main" id="{392EA8A3-1E31-4E7B-8656-4A7A41F2BBFB}"/>
+                <a16:creationId xmlns:a16="http://schemas.microsoft.com/office/drawing/2014/main" id="{28C5A4C8-FAE0-435F-98F5-39BFDDA19A4C}"/>
               </a:ext>
             </a:extLst>
           </p:cNvPr>
@@ -17594,7 +18416,7 @@
           <p:cNvPr id="6" name="">
             <a:extLst xmlns:a="http://schemas.openxmlformats.org/drawingml/2006/main">
               <a:ext uri="{FF2B5EF4-FFF2-40B4-BE49-F238E27FC236}">
-                <a16:creationId xmlns:a16="http://schemas.microsoft.com/office/drawing/2014/main" id="{7489BD0A-A86F-4ADC-8A72-48707F35142A}"/>
+                <a16:creationId xmlns:a16="http://schemas.microsoft.com/office/drawing/2014/main" id="{D60EBBB2-9D0A-40F8-8B48-EEDF2BEB621F}"/>
               </a:ext>
             </a:extLst>
           </p:cNvPr>
@@ -17635,7 +18457,7 @@
           <p:cNvPr id="7" name="">
             <a:extLst xmlns:a="http://schemas.openxmlformats.org/drawingml/2006/main">
               <a:ext uri="{FF2B5EF4-FFF2-40B4-BE49-F238E27FC236}">
-                <a16:creationId xmlns:a16="http://schemas.microsoft.com/office/drawing/2014/main" id="{C562C454-046A-451B-A4F4-5924502210C8}"/>
+                <a16:creationId xmlns:a16="http://schemas.microsoft.com/office/drawing/2014/main" id="{0AEC1B28-6D10-40B6-91C1-95EFE9567B91}"/>
               </a:ext>
             </a:extLst>
           </p:cNvPr>
@@ -17667,7 +18489,7 @@
           <p:cNvPr id="8" name="">
             <a:extLst xmlns:a="http://schemas.openxmlformats.org/drawingml/2006/main">
               <a:ext uri="{FF2B5EF4-FFF2-40B4-BE49-F238E27FC236}">
-                <a16:creationId xmlns:a16="http://schemas.microsoft.com/office/drawing/2014/main" id="{DD0F946B-B71B-4B0A-9DE1-510AA4D4341E}"/>
+                <a16:creationId xmlns:a16="http://schemas.microsoft.com/office/drawing/2014/main" id="{A6DE30F0-0B7A-4CD5-960A-A5973E0A6CA5}"/>
               </a:ext>
             </a:extLst>
           </p:cNvPr>
@@ -17724,7 +18546,7 @@
           <p:cNvPr id="9" name="">
             <a:extLst xmlns:a="http://schemas.openxmlformats.org/drawingml/2006/main">
               <a:ext uri="{FF2B5EF4-FFF2-40B4-BE49-F238E27FC236}">
-                <a16:creationId xmlns:a16="http://schemas.microsoft.com/office/drawing/2014/main" id="{989F0C02-4AEC-410A-84C8-280CA0676961}"/>
+                <a16:creationId xmlns:a16="http://schemas.microsoft.com/office/drawing/2014/main" id="{33DA5643-8C0F-4F07-92DA-DC5066ACD451}"/>
               </a:ext>
             </a:extLst>
           </p:cNvPr>
@@ -17781,7 +18603,7 @@
           <p:cNvPr id="10" name="">
             <a:extLst xmlns:a="http://schemas.openxmlformats.org/drawingml/2006/main">
               <a:ext uri="{FF2B5EF4-FFF2-40B4-BE49-F238E27FC236}">
-                <a16:creationId xmlns:a16="http://schemas.microsoft.com/office/drawing/2014/main" id="{E4597FDF-CEB0-4D38-BBA3-0E057F994DE2}"/>
+                <a16:creationId xmlns:a16="http://schemas.microsoft.com/office/drawing/2014/main" id="{AAA83E73-0561-4E8E-B21D-FEBAB35EC9C7}"/>
               </a:ext>
             </a:extLst>
           </p:cNvPr>
@@ -17822,7 +18644,7 @@
           <p:cNvPr id="11" name="">
             <a:extLst xmlns:a="http://schemas.openxmlformats.org/drawingml/2006/main">
               <a:ext uri="{FF2B5EF4-FFF2-40B4-BE49-F238E27FC236}">
-                <a16:creationId xmlns:a16="http://schemas.microsoft.com/office/drawing/2014/main" id="{E75EBE6D-6F75-4924-B326-F7B7C5587F68}"/>
+                <a16:creationId xmlns:a16="http://schemas.microsoft.com/office/drawing/2014/main" id="{3EBC2DB3-5163-4B11-8A74-E596E6A0B2F3}"/>
               </a:ext>
             </a:extLst>
           </p:cNvPr>
@@ -17854,7 +18676,7 @@
           <p:cNvPr id="12" name="">
             <a:extLst xmlns:a="http://schemas.openxmlformats.org/drawingml/2006/main">
               <a:ext uri="{FF2B5EF4-FFF2-40B4-BE49-F238E27FC236}">
-                <a16:creationId xmlns:a16="http://schemas.microsoft.com/office/drawing/2014/main" id="{32D69165-8306-4547-BBCD-08D286FAD397}"/>
+                <a16:creationId xmlns:a16="http://schemas.microsoft.com/office/drawing/2014/main" id="{426E7157-BFCD-44A7-A1DB-922C1EC2394B}"/>
               </a:ext>
             </a:extLst>
           </p:cNvPr>
@@ -17911,7 +18733,7 @@
           <p:cNvPr id="13" name="">
             <a:extLst xmlns:a="http://schemas.openxmlformats.org/drawingml/2006/main">
               <a:ext uri="{FF2B5EF4-FFF2-40B4-BE49-F238E27FC236}">
-                <a16:creationId xmlns:a16="http://schemas.microsoft.com/office/drawing/2014/main" id="{718F4748-51AC-40FC-8697-8633B9D3F15A}"/>
+                <a16:creationId xmlns:a16="http://schemas.microsoft.com/office/drawing/2014/main" id="{F42B30D6-42CF-43EF-A1E9-1ED549DC26A8}"/>
               </a:ext>
             </a:extLst>
           </p:cNvPr>
@@ -17968,7 +18790,7 @@
           <p:cNvPr id="14" name="">
             <a:extLst xmlns:a="http://schemas.openxmlformats.org/drawingml/2006/main">
               <a:ext uri="{FF2B5EF4-FFF2-40B4-BE49-F238E27FC236}">
-                <a16:creationId xmlns:a16="http://schemas.microsoft.com/office/drawing/2014/main" id="{188A51AE-5F4A-4D92-B996-45E045DB89D4}"/>
+                <a16:creationId xmlns:a16="http://schemas.microsoft.com/office/drawing/2014/main" id="{F3536D29-EBED-476C-BD21-6F4C4055C13D}"/>
               </a:ext>
             </a:extLst>
           </p:cNvPr>
@@ -18009,7 +18831,7 @@
           <p:cNvPr id="15" name="">
             <a:extLst xmlns:a="http://schemas.openxmlformats.org/drawingml/2006/main">
               <a:ext uri="{FF2B5EF4-FFF2-40B4-BE49-F238E27FC236}">
-                <a16:creationId xmlns:a16="http://schemas.microsoft.com/office/drawing/2014/main" id="{CAA1255D-2B3D-4A26-A39B-57CB082E6935}"/>
+                <a16:creationId xmlns:a16="http://schemas.microsoft.com/office/drawing/2014/main" id="{40B09A84-7317-47C7-9B90-B988508B5E29}"/>
               </a:ext>
             </a:extLst>
           </p:cNvPr>
@@ -18041,7 +18863,7 @@
           <p:cNvPr id="16" name="">
             <a:extLst xmlns:a="http://schemas.openxmlformats.org/drawingml/2006/main">
               <a:ext uri="{FF2B5EF4-FFF2-40B4-BE49-F238E27FC236}">
-                <a16:creationId xmlns:a16="http://schemas.microsoft.com/office/drawing/2014/main" id="{55BE5594-35F8-4E50-B022-D4BA6F9C0624}"/>
+                <a16:creationId xmlns:a16="http://schemas.microsoft.com/office/drawing/2014/main" id="{23AA95BA-4745-4194-858B-ACA308D2F750}"/>
               </a:ext>
             </a:extLst>
           </p:cNvPr>
@@ -18098,7 +18920,7 @@
           <p:cNvPr id="17" name="">
             <a:extLst xmlns:a="http://schemas.openxmlformats.org/drawingml/2006/main">
               <a:ext uri="{FF2B5EF4-FFF2-40B4-BE49-F238E27FC236}">
-                <a16:creationId xmlns:a16="http://schemas.microsoft.com/office/drawing/2014/main" id="{D4CFE736-008D-482A-A861-5C8A4BB59AB8}"/>
+                <a16:creationId xmlns:a16="http://schemas.microsoft.com/office/drawing/2014/main" id="{5DB72978-DD85-4191-85B7-7264D45391E0}"/>
               </a:ext>
             </a:extLst>
           </p:cNvPr>
@@ -18155,7 +18977,7 @@
           <p:cNvPr id="18" name="">
             <a:extLst xmlns:a="http://schemas.openxmlformats.org/drawingml/2006/main">
               <a:ext uri="{FF2B5EF4-FFF2-40B4-BE49-F238E27FC236}">
-                <a16:creationId xmlns:a16="http://schemas.microsoft.com/office/drawing/2014/main" id="{630CB356-65BA-438E-BFBD-F0D1E4D6A747}"/>
+                <a16:creationId xmlns:a16="http://schemas.microsoft.com/office/drawing/2014/main" id="{4E275E29-5DB3-4EC3-915D-3BB6411761AB}"/>
               </a:ext>
             </a:extLst>
           </p:cNvPr>
@@ -18196,7 +19018,7 @@
           <p:cNvPr id="19" name="">
             <a:extLst xmlns:a="http://schemas.openxmlformats.org/drawingml/2006/main">
               <a:ext uri="{FF2B5EF4-FFF2-40B4-BE49-F238E27FC236}">
-                <a16:creationId xmlns:a16="http://schemas.microsoft.com/office/drawing/2014/main" id="{C2A48A0E-92D3-4BDE-B7B9-2E86C8CB0409}"/>
+                <a16:creationId xmlns:a16="http://schemas.microsoft.com/office/drawing/2014/main" id="{2C5F9DA5-29B4-4C55-834A-E48EF57F4340}"/>
               </a:ext>
             </a:extLst>
           </p:cNvPr>
@@ -18228,7 +19050,7 @@
           <p:cNvPr id="20" name="">
             <a:extLst xmlns:a="http://schemas.openxmlformats.org/drawingml/2006/main">
               <a:ext uri="{FF2B5EF4-FFF2-40B4-BE49-F238E27FC236}">
-                <a16:creationId xmlns:a16="http://schemas.microsoft.com/office/drawing/2014/main" id="{56E5C763-9EDD-4C37-A2A0-0DF9D272DEF7}"/>
+                <a16:creationId xmlns:a16="http://schemas.microsoft.com/office/drawing/2014/main" id="{855F14BA-F4F9-4153-A9D9-9601CBB25A86}"/>
               </a:ext>
             </a:extLst>
           </p:cNvPr>
@@ -18285,7 +19107,7 @@
           <p:cNvPr id="21" name="">
             <a:extLst xmlns:a="http://schemas.openxmlformats.org/drawingml/2006/main">
               <a:ext uri="{FF2B5EF4-FFF2-40B4-BE49-F238E27FC236}">
-                <a16:creationId xmlns:a16="http://schemas.microsoft.com/office/drawing/2014/main" id="{E428F3DB-80E9-4C98-B6B3-E2F2598F8F18}"/>
+                <a16:creationId xmlns:a16="http://schemas.microsoft.com/office/drawing/2014/main" id="{C6752610-AA94-480B-A8E5-96CA13ECC33D}"/>
               </a:ext>
             </a:extLst>
           </p:cNvPr>
@@ -18342,7 +19164,7 @@
           <p:cNvPr id="22" name="">
             <a:extLst xmlns:a="http://schemas.openxmlformats.org/drawingml/2006/main">
               <a:ext uri="{FF2B5EF4-FFF2-40B4-BE49-F238E27FC236}">
-                <a16:creationId xmlns:a16="http://schemas.microsoft.com/office/drawing/2014/main" id="{EC949027-ADC6-43C5-B0A1-E0B7BC705704}"/>
+                <a16:creationId xmlns:a16="http://schemas.microsoft.com/office/drawing/2014/main" id="{2366F678-6528-4B4B-8595-3905259F8111}"/>
               </a:ext>
             </a:extLst>
           </p:cNvPr>
@@ -18377,7 +19199,7 @@
           <p:cNvPr id="23" name="">
             <a:extLst xmlns:a="http://schemas.openxmlformats.org/drawingml/2006/main">
               <a:ext uri="{FF2B5EF4-FFF2-40B4-BE49-F238E27FC236}">
-                <a16:creationId xmlns:a16="http://schemas.microsoft.com/office/drawing/2014/main" id="{B4FC69E0-4ACE-45AE-A471-95655319EF4F}"/>
+                <a16:creationId xmlns:a16="http://schemas.microsoft.com/office/drawing/2014/main" id="{250E9A92-51B3-4B10-9AB4-D90B8A5AA8CC}"/>
               </a:ext>
             </a:extLst>
           </p:cNvPr>
@@ -18434,7 +19256,7 @@
           <p:cNvPr id="24" name="">
             <a:extLst xmlns:a="http://schemas.openxmlformats.org/drawingml/2006/main">
               <a:ext uri="{FF2B5EF4-FFF2-40B4-BE49-F238E27FC236}">
-                <a16:creationId xmlns:a16="http://schemas.microsoft.com/office/drawing/2014/main" id="{B8ABC7CA-7141-4D62-80CC-64C84D4E6FB4}"/>
+                <a16:creationId xmlns:a16="http://schemas.microsoft.com/office/drawing/2014/main" id="{7E5DF9E0-66D6-4B2B-A84E-4AAD51B4B2E7}"/>
               </a:ext>
             </a:extLst>
           </p:cNvPr>
@@ -18491,7 +19313,7 @@
           <p:cNvPr id="25" name="">
             <a:extLst xmlns:a="http://schemas.openxmlformats.org/drawingml/2006/main">
               <a:ext uri="{FF2B5EF4-FFF2-40B4-BE49-F238E27FC236}">
-                <a16:creationId xmlns:a16="http://schemas.microsoft.com/office/drawing/2014/main" id="{39492509-BA76-4EDE-97A4-9032D1F26047}"/>
+                <a16:creationId xmlns:a16="http://schemas.microsoft.com/office/drawing/2014/main" id="{B9069847-F1ED-4808-9FE9-A6F891578E52}"/>
               </a:ext>
             </a:extLst>
           </p:cNvPr>
@@ -18548,7 +19370,7 @@
           <p:cNvPr id="26" name="">
             <a:extLst xmlns:a="http://schemas.openxmlformats.org/drawingml/2006/main">
               <a:ext uri="{FF2B5EF4-FFF2-40B4-BE49-F238E27FC236}">
-                <a16:creationId xmlns:a16="http://schemas.microsoft.com/office/drawing/2014/main" id="{D0F90572-B782-4BC3-90BE-15F3303BAA87}"/>
+                <a16:creationId xmlns:a16="http://schemas.microsoft.com/office/drawing/2014/main" id="{2260805B-39BA-4BE9-B178-D49D7DA305C3}"/>
               </a:ext>
             </a:extLst>
           </p:cNvPr>
@@ -18605,7 +19427,7 @@
           <p:cNvPr id="27" name="">
             <a:extLst xmlns:a="http://schemas.openxmlformats.org/drawingml/2006/main">
               <a:ext uri="{FF2B5EF4-FFF2-40B4-BE49-F238E27FC236}">
-                <a16:creationId xmlns:a16="http://schemas.microsoft.com/office/drawing/2014/main" id="{22456829-BF0F-4039-B461-44CE07FF9774}"/>
+                <a16:creationId xmlns:a16="http://schemas.microsoft.com/office/drawing/2014/main" id="{C47A601D-0CEC-4042-8A97-64D5B3201910}"/>
               </a:ext>
             </a:extLst>
           </p:cNvPr>
@@ -18662,7 +19484,7 @@
           <p:cNvPr id="28" name="">
             <a:extLst xmlns:a="http://schemas.openxmlformats.org/drawingml/2006/main">
               <a:ext uri="{FF2B5EF4-FFF2-40B4-BE49-F238E27FC236}">
-                <a16:creationId xmlns:a16="http://schemas.microsoft.com/office/drawing/2014/main" id="{C8931F10-A61E-4834-B34E-2A0E8D4BA06D}"/>
+                <a16:creationId xmlns:a16="http://schemas.microsoft.com/office/drawing/2014/main" id="{CAB11062-D911-4FC7-A7C8-D7E624672F5C}"/>
               </a:ext>
             </a:extLst>
           </p:cNvPr>
@@ -18719,7 +19541,7 @@
           <p:cNvPr id="29" name="">
             <a:extLst xmlns:a="http://schemas.openxmlformats.org/drawingml/2006/main">
               <a:ext uri="{FF2B5EF4-FFF2-40B4-BE49-F238E27FC236}">
-                <a16:creationId xmlns:a16="http://schemas.microsoft.com/office/drawing/2014/main" id="{4C7A8EC0-F1D5-4045-9076-6DDB45E66AFA}"/>
+                <a16:creationId xmlns:a16="http://schemas.microsoft.com/office/drawing/2014/main" id="{31913FA6-A39F-4A4B-8F09-8CB4EFE9A643}"/>
               </a:ext>
             </a:extLst>
           </p:cNvPr>
@@ -18774,7 +19596,7 @@
     </p:spTree>
     <p:extLst>
       <p:ext uri="{BB962C8B-B14F-4D97-AF65-F5344CB8AC3E}">
-        <p14:creationId xmlns:p14="http://schemas.microsoft.com/office/powerpoint/2010/main" val="1046584361"/>
+        <p14:creationId xmlns:p14="http://schemas.microsoft.com/office/powerpoint/2010/main" val="1908765391"/>
       </p:ext>
     </p:extLst>
   </p:cSld>
@@ -18802,10 +19624,10 @@
       </p:grpSpPr>
       <p:sp>
         <p:nvSpPr>
-          <p:cNvPr id="13" name="">
-            <a:extLst xmlns:a="http://schemas.openxmlformats.org/drawingml/2006/main">
-              <a:ext uri="{FF2B5EF4-FFF2-40B4-BE49-F238E27FC236}">
-                <a16:creationId xmlns:a16="http://schemas.microsoft.com/office/drawing/2014/main" id="{AA214167-B619-4002-B057-5A7EA0951D28}"/>
+          <p:cNvPr id="36" name="">
+            <a:extLst xmlns:a="http://schemas.openxmlformats.org/drawingml/2006/main">
+              <a:ext uri="{FF2B5EF4-FFF2-40B4-BE49-F238E27FC236}">
+                <a16:creationId xmlns:a16="http://schemas.microsoft.com/office/drawing/2014/main" id="{658B9A61-2A95-4648-A529-C25D5CA208D1}"/>
               </a:ext>
             </a:extLst>
           </p:cNvPr>
@@ -18835,7 +19657,7 @@
           <p:cNvPr id="2" name="">
             <a:extLst xmlns:a="http://schemas.openxmlformats.org/drawingml/2006/main">
               <a:ext uri="{FF2B5EF4-FFF2-40B4-BE49-F238E27FC236}">
-                <a16:creationId xmlns:a16="http://schemas.microsoft.com/office/drawing/2014/main" id="{7F2B02A9-8639-4C6F-8BD6-1EC0CD313EBF}"/>
+                <a16:creationId xmlns:a16="http://schemas.microsoft.com/office/drawing/2014/main" id="{9A03205D-B4A0-4851-811C-69B120660D5F}"/>
               </a:ext>
             </a:extLst>
           </p:cNvPr>
@@ -18892,7 +19714,7 @@
           <p:cNvPr id="3" name="">
             <a:extLst xmlns:a="http://schemas.openxmlformats.org/drawingml/2006/main">
               <a:ext uri="{FF2B5EF4-FFF2-40B4-BE49-F238E27FC236}">
-                <a16:creationId xmlns:a16="http://schemas.microsoft.com/office/drawing/2014/main" id="{CCE1DDA0-D129-4426-8A35-C97EF77F452A}"/>
+                <a16:creationId xmlns:a16="http://schemas.microsoft.com/office/drawing/2014/main" id="{AEF43DA9-7DB8-414F-8F3D-A895AE099CDB}"/>
               </a:ext>
             </a:extLst>
           </p:cNvPr>
@@ -18949,7 +19771,7 @@
           <p:cNvPr id="4" name="">
             <a:extLst xmlns:a="http://schemas.openxmlformats.org/drawingml/2006/main">
               <a:ext uri="{FF2B5EF4-FFF2-40B4-BE49-F238E27FC236}">
-                <a16:creationId xmlns:a16="http://schemas.microsoft.com/office/drawing/2014/main" id="{08268FBF-F6F9-4591-882B-A4C9A4D5D601}"/>
+                <a16:creationId xmlns:a16="http://schemas.microsoft.com/office/drawing/2014/main" id="{ED4880F9-3127-4D50-B49C-C18280EC1CBA}"/>
               </a:ext>
             </a:extLst>
           </p:cNvPr>
@@ -18980,7 +19802,7 @@
           <p:cNvPr id="5" name="">
             <a:extLst xmlns:a="http://schemas.openxmlformats.org/drawingml/2006/main">
               <a:ext uri="{FF2B5EF4-FFF2-40B4-BE49-F238E27FC236}">
-                <a16:creationId xmlns:a16="http://schemas.microsoft.com/office/drawing/2014/main" id="{D6E036A1-1111-4688-A553-C8C0A21928A9}"/>
+                <a16:creationId xmlns:a16="http://schemas.microsoft.com/office/drawing/2014/main" id="{C7F90354-69F4-41A0-8BED-F6C3728882F7}"/>
               </a:ext>
             </a:extLst>
           </p:cNvPr>
@@ -19032,28 +19854,1117 @@
           </a:p>
         </p:txBody>
       </p:sp>
-      <p:graphicFrame>
-        <p:nvGraphicFramePr>
-          <p:cNvPr id="18" name="Chart"/>
-          <p:cNvGraphicFramePr/>
-          <p:nvPr/>
-        </p:nvGraphicFramePr>
-        <p:xfrm>
-          <a:off xmlns:a="http://schemas.openxmlformats.org/drawingml/2006/main" x="876300" y="1619250"/>
-          <a:ext xmlns:a="http://schemas.openxmlformats.org/drawingml/2006/main" cx="7239000" cy="3857625"/>
-        </p:xfrm>
-        <a:graphic xmlns:a="http://schemas.openxmlformats.org/drawingml/2006/main">
-          <a:graphicData uri="http://schemas.openxmlformats.org/drawingml/2006/chart">
-            <c:chart xmlns:r="http://schemas.openxmlformats.org/officeDocument/2006/relationships" xmlns:c="http://schemas.openxmlformats.org/drawingml/2006/chart" r:id="Ra9bf3ffad39f442b"/>
-          </a:graphicData>
-        </a:graphic>
-      </p:graphicFrame>
+      <p:sp>
+        <p:nvSpPr>
+          <p:cNvPr id="6" name="">
+            <a:extLst xmlns:a="http://schemas.openxmlformats.org/drawingml/2006/main">
+              <a:ext uri="{FF2B5EF4-FFF2-40B4-BE49-F238E27FC236}">
+                <a16:creationId xmlns:a16="http://schemas.microsoft.com/office/drawing/2014/main" id="{65388DE3-1063-442C-8164-179ACD7F6244}"/>
+              </a:ext>
+            </a:extLst>
+          </p:cNvPr>
+          <p:cNvSpPr>
+            <a:spLocks xmlns:a="http://schemas.openxmlformats.org/drawingml/2006/main" noGrp="1"/>
+          </p:cNvSpPr>
+          <p:nvPr/>
+        </p:nvSpPr>
+        <p:spPr>
+          <a:xfrm xmlns:a="http://schemas.openxmlformats.org/drawingml/2006/main">
+            <a:off x="876300" y="1619250"/>
+            <a:ext cx="7239000" cy="323850"/>
+          </a:xfrm>
+          <a:prstGeom xmlns:a="http://schemas.openxmlformats.org/drawingml/2006/main" prst="rect">
+            <a:avLst/>
+          </a:prstGeom>
+          <a:noFill xmlns:a="http://schemas.openxmlformats.org/drawingml/2006/main"/>
+          <a:ln xmlns:a="http://schemas.openxmlformats.org/drawingml/2006/main" w="0">
+            <a:noFill/>
+          </a:ln>
+        </p:spPr>
+        <p:txBody>
+          <a:bodyPr xmlns:a="http://schemas.openxmlformats.org/drawingml/2006/main" anchor="ctr">
+            <a:normAutofit fontScale="100000"/>
+          </a:bodyPr>
+          <a:lstStyle xmlns:a="http://schemas.openxmlformats.org/drawingml/2006/main"/>
+          <a:p xmlns:a="http://schemas.openxmlformats.org/drawingml/2006/main">
+            <a:pPr algn="ctr">
+              <a:defRPr sz="1350" b="1">
+                <a:solidFill>
+                  <a:srgbClr val="14213D"/>
+                </a:solidFill>
+                <a:latin typeface="Arial"/>
+                <a:ea typeface="Arial"/>
+                <a:cs typeface="Arial"/>
+              </a:defRPr>
+            </a:pPr>
+            <a:r>
+              <a:rPr sz="1350" b="1">
+                <a:solidFill>
+                  <a:srgbClr val="14213D"/>
+                </a:solidFill>
+                <a:latin typeface="Arial"/>
+                <a:ea typeface="Arial"/>
+                <a:cs typeface="Arial"/>
+              </a:rPr>
+              <a:t>Доля фактических ошибок по языку (%)</a:t>
+            </a:r>
+          </a:p>
+        </p:txBody>
+      </p:sp>
       <p:sp>
         <p:nvSpPr>
           <p:cNvPr id="7" name="">
             <a:extLst xmlns:a="http://schemas.openxmlformats.org/drawingml/2006/main">
               <a:ext uri="{FF2B5EF4-FFF2-40B4-BE49-F238E27FC236}">
-                <a16:creationId xmlns:a16="http://schemas.microsoft.com/office/drawing/2014/main" id="{F10AE32B-0D08-4D73-A0BE-7B8C2C00C5AC}"/>
+                <a16:creationId xmlns:a16="http://schemas.microsoft.com/office/drawing/2014/main" id="{C0602A5F-CC0E-4A10-94BE-27556F8EF9D6}"/>
+              </a:ext>
+            </a:extLst>
+          </p:cNvPr>
+          <p:cNvSpPr>
+            <a:spLocks xmlns:a="http://schemas.openxmlformats.org/drawingml/2006/main" noGrp="1"/>
+          </p:cNvSpPr>
+          <p:nvPr/>
+        </p:nvSpPr>
+        <p:spPr>
+          <a:xfrm xmlns:a="http://schemas.openxmlformats.org/drawingml/2006/main">
+            <a:off x="1600200" y="2209800"/>
+            <a:ext cx="0" cy="2790825"/>
+          </a:xfrm>
+          <a:prstGeom xmlns:a="http://schemas.openxmlformats.org/drawingml/2006/main" prst="line">
+            <a:avLst/>
+          </a:prstGeom>
+          <a:noFill xmlns:a="http://schemas.openxmlformats.org/drawingml/2006/main"/>
+          <a:ln xmlns:a="http://schemas.openxmlformats.org/drawingml/2006/main" w="9525">
+            <a:solidFill>
+              <a:srgbClr val="DDE4EF"/>
+            </a:solidFill>
+            <a:prstDash val="solid"/>
+          </a:ln>
+        </p:spPr>
+      </p:sp>
+      <p:sp>
+        <p:nvSpPr>
+          <p:cNvPr id="8" name="">
+            <a:extLst xmlns:a="http://schemas.openxmlformats.org/drawingml/2006/main">
+              <a:ext uri="{FF2B5EF4-FFF2-40B4-BE49-F238E27FC236}">
+                <a16:creationId xmlns:a16="http://schemas.microsoft.com/office/drawing/2014/main" id="{F7CD4E62-EF94-4B69-8B73-3793A62753AD}"/>
+              </a:ext>
+            </a:extLst>
+          </p:cNvPr>
+          <p:cNvSpPr>
+            <a:spLocks xmlns:a="http://schemas.openxmlformats.org/drawingml/2006/main" noGrp="1"/>
+          </p:cNvSpPr>
+          <p:nvPr/>
+        </p:nvSpPr>
+        <p:spPr>
+          <a:xfrm xmlns:a="http://schemas.openxmlformats.org/drawingml/2006/main">
+            <a:off x="1409700" y="5076825"/>
+            <a:ext cx="381000" cy="209550"/>
+          </a:xfrm>
+          <a:prstGeom xmlns:a="http://schemas.openxmlformats.org/drawingml/2006/main" prst="rect">
+            <a:avLst/>
+          </a:prstGeom>
+          <a:noFill xmlns:a="http://schemas.openxmlformats.org/drawingml/2006/main"/>
+          <a:ln xmlns:a="http://schemas.openxmlformats.org/drawingml/2006/main" w="0">
+            <a:noFill/>
+          </a:ln>
+        </p:spPr>
+        <p:txBody>
+          <a:bodyPr xmlns:a="http://schemas.openxmlformats.org/drawingml/2006/main" anchor="ctr">
+            <a:normAutofit fontScale="86111"/>
+          </a:bodyPr>
+          <a:lstStyle xmlns:a="http://schemas.openxmlformats.org/drawingml/2006/main"/>
+          <a:p xmlns:a="http://schemas.openxmlformats.org/drawingml/2006/main">
+            <a:pPr algn="ctr">
+              <a:defRPr sz="900" b="1">
+                <a:solidFill>
+                  <a:srgbClr val="63708A"/>
+                </a:solidFill>
+                <a:latin typeface="Arial"/>
+                <a:ea typeface="Arial"/>
+                <a:cs typeface="Arial"/>
+              </a:defRPr>
+            </a:pPr>
+            <a:r>
+              <a:rPr sz="900" b="1">
+                <a:solidFill>
+                  <a:srgbClr val="63708A"/>
+                </a:solidFill>
+                <a:latin typeface="Arial"/>
+                <a:ea typeface="Arial"/>
+                <a:cs typeface="Arial"/>
+              </a:rPr>
+              <a:t>0</a:t>
+            </a:r>
+          </a:p>
+        </p:txBody>
+      </p:sp>
+      <p:sp>
+        <p:nvSpPr>
+          <p:cNvPr id="9" name="">
+            <a:extLst xmlns:a="http://schemas.openxmlformats.org/drawingml/2006/main">
+              <a:ext uri="{FF2B5EF4-FFF2-40B4-BE49-F238E27FC236}">
+                <a16:creationId xmlns:a16="http://schemas.microsoft.com/office/drawing/2014/main" id="{C00023A9-7692-4589-80BC-60EFD9B1FC91}"/>
+              </a:ext>
+            </a:extLst>
+          </p:cNvPr>
+          <p:cNvSpPr>
+            <a:spLocks xmlns:a="http://schemas.openxmlformats.org/drawingml/2006/main" noGrp="1"/>
+          </p:cNvSpPr>
+          <p:nvPr/>
+        </p:nvSpPr>
+        <p:spPr>
+          <a:xfrm xmlns:a="http://schemas.openxmlformats.org/drawingml/2006/main">
+            <a:off x="2600325" y="2209800"/>
+            <a:ext cx="0" cy="2790825"/>
+          </a:xfrm>
+          <a:prstGeom xmlns:a="http://schemas.openxmlformats.org/drawingml/2006/main" prst="line">
+            <a:avLst/>
+          </a:prstGeom>
+          <a:noFill xmlns:a="http://schemas.openxmlformats.org/drawingml/2006/main"/>
+          <a:ln xmlns:a="http://schemas.openxmlformats.org/drawingml/2006/main" w="9525">
+            <a:solidFill>
+              <a:srgbClr val="DDE4EF"/>
+            </a:solidFill>
+            <a:prstDash val="solid"/>
+          </a:ln>
+        </p:spPr>
+      </p:sp>
+      <p:sp>
+        <p:nvSpPr>
+          <p:cNvPr id="10" name="">
+            <a:extLst xmlns:a="http://schemas.openxmlformats.org/drawingml/2006/main">
+              <a:ext uri="{FF2B5EF4-FFF2-40B4-BE49-F238E27FC236}">
+                <a16:creationId xmlns:a16="http://schemas.microsoft.com/office/drawing/2014/main" id="{FBC8BA79-8817-4F83-8720-6CE5DBCF9506}"/>
+              </a:ext>
+            </a:extLst>
+          </p:cNvPr>
+          <p:cNvSpPr>
+            <a:spLocks xmlns:a="http://schemas.openxmlformats.org/drawingml/2006/main" noGrp="1"/>
+          </p:cNvSpPr>
+          <p:nvPr/>
+        </p:nvSpPr>
+        <p:spPr>
+          <a:xfrm xmlns:a="http://schemas.openxmlformats.org/drawingml/2006/main">
+            <a:off x="2409825" y="5076825"/>
+            <a:ext cx="381000" cy="209550"/>
+          </a:xfrm>
+          <a:prstGeom xmlns:a="http://schemas.openxmlformats.org/drawingml/2006/main" prst="rect">
+            <a:avLst/>
+          </a:prstGeom>
+          <a:noFill xmlns:a="http://schemas.openxmlformats.org/drawingml/2006/main"/>
+          <a:ln xmlns:a="http://schemas.openxmlformats.org/drawingml/2006/main" w="0">
+            <a:noFill/>
+          </a:ln>
+        </p:spPr>
+        <p:txBody>
+          <a:bodyPr xmlns:a="http://schemas.openxmlformats.org/drawingml/2006/main" anchor="ctr">
+            <a:normAutofit fontScale="86111"/>
+          </a:bodyPr>
+          <a:lstStyle xmlns:a="http://schemas.openxmlformats.org/drawingml/2006/main"/>
+          <a:p xmlns:a="http://schemas.openxmlformats.org/drawingml/2006/main">
+            <a:pPr algn="ctr">
+              <a:defRPr sz="900" b="0">
+                <a:solidFill>
+                  <a:srgbClr val="63708A"/>
+                </a:solidFill>
+                <a:latin typeface="Arial"/>
+                <a:ea typeface="Arial"/>
+                <a:cs typeface="Arial"/>
+              </a:defRPr>
+            </a:pPr>
+            <a:r>
+              <a:rPr sz="900" b="0">
+                <a:solidFill>
+                  <a:srgbClr val="63708A"/>
+                </a:solidFill>
+                <a:latin typeface="Arial"/>
+                <a:ea typeface="Arial"/>
+                <a:cs typeface="Arial"/>
+              </a:rPr>
+              <a:t>5</a:t>
+            </a:r>
+          </a:p>
+        </p:txBody>
+      </p:sp>
+      <p:sp>
+        <p:nvSpPr>
+          <p:cNvPr id="11" name="">
+            <a:extLst xmlns:a="http://schemas.openxmlformats.org/drawingml/2006/main">
+              <a:ext uri="{FF2B5EF4-FFF2-40B4-BE49-F238E27FC236}">
+                <a16:creationId xmlns:a16="http://schemas.microsoft.com/office/drawing/2014/main" id="{09B84C75-40BF-4E82-9289-18150C58BE42}"/>
+              </a:ext>
+            </a:extLst>
+          </p:cNvPr>
+          <p:cNvSpPr>
+            <a:spLocks xmlns:a="http://schemas.openxmlformats.org/drawingml/2006/main" noGrp="1"/>
+          </p:cNvSpPr>
+          <p:nvPr/>
+        </p:nvSpPr>
+        <p:spPr>
+          <a:xfrm xmlns:a="http://schemas.openxmlformats.org/drawingml/2006/main">
+            <a:off x="3600450" y="2209800"/>
+            <a:ext cx="0" cy="2790825"/>
+          </a:xfrm>
+          <a:prstGeom xmlns:a="http://schemas.openxmlformats.org/drawingml/2006/main" prst="line">
+            <a:avLst/>
+          </a:prstGeom>
+          <a:noFill xmlns:a="http://schemas.openxmlformats.org/drawingml/2006/main"/>
+          <a:ln xmlns:a="http://schemas.openxmlformats.org/drawingml/2006/main" w="9525">
+            <a:solidFill>
+              <a:srgbClr val="DDE4EF"/>
+            </a:solidFill>
+            <a:prstDash val="solid"/>
+          </a:ln>
+        </p:spPr>
+      </p:sp>
+      <p:sp>
+        <p:nvSpPr>
+          <p:cNvPr id="12" name="">
+            <a:extLst xmlns:a="http://schemas.openxmlformats.org/drawingml/2006/main">
+              <a:ext uri="{FF2B5EF4-FFF2-40B4-BE49-F238E27FC236}">
+                <a16:creationId xmlns:a16="http://schemas.microsoft.com/office/drawing/2014/main" id="{3E18A369-FCFC-467E-9A3B-422566D83DE2}"/>
+              </a:ext>
+            </a:extLst>
+          </p:cNvPr>
+          <p:cNvSpPr>
+            <a:spLocks xmlns:a="http://schemas.openxmlformats.org/drawingml/2006/main" noGrp="1"/>
+          </p:cNvSpPr>
+          <p:nvPr/>
+        </p:nvSpPr>
+        <p:spPr>
+          <a:xfrm xmlns:a="http://schemas.openxmlformats.org/drawingml/2006/main">
+            <a:off x="3409950" y="5076825"/>
+            <a:ext cx="381000" cy="209550"/>
+          </a:xfrm>
+          <a:prstGeom xmlns:a="http://schemas.openxmlformats.org/drawingml/2006/main" prst="rect">
+            <a:avLst/>
+          </a:prstGeom>
+          <a:noFill xmlns:a="http://schemas.openxmlformats.org/drawingml/2006/main"/>
+          <a:ln xmlns:a="http://schemas.openxmlformats.org/drawingml/2006/main" w="0">
+            <a:noFill/>
+          </a:ln>
+        </p:spPr>
+        <p:txBody>
+          <a:bodyPr xmlns:a="http://schemas.openxmlformats.org/drawingml/2006/main" anchor="ctr">
+            <a:normAutofit fontScale="86111"/>
+          </a:bodyPr>
+          <a:lstStyle xmlns:a="http://schemas.openxmlformats.org/drawingml/2006/main"/>
+          <a:p xmlns:a="http://schemas.openxmlformats.org/drawingml/2006/main">
+            <a:pPr algn="ctr">
+              <a:defRPr sz="900" b="0">
+                <a:solidFill>
+                  <a:srgbClr val="63708A"/>
+                </a:solidFill>
+                <a:latin typeface="Arial"/>
+                <a:ea typeface="Arial"/>
+                <a:cs typeface="Arial"/>
+              </a:defRPr>
+            </a:pPr>
+            <a:r>
+              <a:rPr sz="900" b="0">
+                <a:solidFill>
+                  <a:srgbClr val="63708A"/>
+                </a:solidFill>
+                <a:latin typeface="Arial"/>
+                <a:ea typeface="Arial"/>
+                <a:cs typeface="Arial"/>
+              </a:rPr>
+              <a:t>10</a:t>
+            </a:r>
+          </a:p>
+        </p:txBody>
+      </p:sp>
+      <p:sp>
+        <p:nvSpPr>
+          <p:cNvPr id="13" name="">
+            <a:extLst xmlns:a="http://schemas.openxmlformats.org/drawingml/2006/main">
+              <a:ext uri="{FF2B5EF4-FFF2-40B4-BE49-F238E27FC236}">
+                <a16:creationId xmlns:a16="http://schemas.microsoft.com/office/drawing/2014/main" id="{D5EF22AF-80E0-4DAA-8F51-02DA8DF6D0D0}"/>
+              </a:ext>
+            </a:extLst>
+          </p:cNvPr>
+          <p:cNvSpPr>
+            <a:spLocks xmlns:a="http://schemas.openxmlformats.org/drawingml/2006/main" noGrp="1"/>
+          </p:cNvSpPr>
+          <p:nvPr/>
+        </p:nvSpPr>
+        <p:spPr>
+          <a:xfrm xmlns:a="http://schemas.openxmlformats.org/drawingml/2006/main">
+            <a:off x="4600575" y="2209800"/>
+            <a:ext cx="0" cy="2790825"/>
+          </a:xfrm>
+          <a:prstGeom xmlns:a="http://schemas.openxmlformats.org/drawingml/2006/main" prst="line">
+            <a:avLst/>
+          </a:prstGeom>
+          <a:noFill xmlns:a="http://schemas.openxmlformats.org/drawingml/2006/main"/>
+          <a:ln xmlns:a="http://schemas.openxmlformats.org/drawingml/2006/main" w="9525">
+            <a:solidFill>
+              <a:srgbClr val="DDE4EF"/>
+            </a:solidFill>
+            <a:prstDash val="solid"/>
+          </a:ln>
+        </p:spPr>
+      </p:sp>
+      <p:sp>
+        <p:nvSpPr>
+          <p:cNvPr id="14" name="">
+            <a:extLst xmlns:a="http://schemas.openxmlformats.org/drawingml/2006/main">
+              <a:ext uri="{FF2B5EF4-FFF2-40B4-BE49-F238E27FC236}">
+                <a16:creationId xmlns:a16="http://schemas.microsoft.com/office/drawing/2014/main" id="{A061121C-44DC-4F1E-9B94-2CA38D3B9E38}"/>
+              </a:ext>
+            </a:extLst>
+          </p:cNvPr>
+          <p:cNvSpPr>
+            <a:spLocks xmlns:a="http://schemas.openxmlformats.org/drawingml/2006/main" noGrp="1"/>
+          </p:cNvSpPr>
+          <p:nvPr/>
+        </p:nvSpPr>
+        <p:spPr>
+          <a:xfrm xmlns:a="http://schemas.openxmlformats.org/drawingml/2006/main">
+            <a:off x="4410075" y="5076825"/>
+            <a:ext cx="381000" cy="209550"/>
+          </a:xfrm>
+          <a:prstGeom xmlns:a="http://schemas.openxmlformats.org/drawingml/2006/main" prst="rect">
+            <a:avLst/>
+          </a:prstGeom>
+          <a:noFill xmlns:a="http://schemas.openxmlformats.org/drawingml/2006/main"/>
+          <a:ln xmlns:a="http://schemas.openxmlformats.org/drawingml/2006/main" w="0">
+            <a:noFill/>
+          </a:ln>
+        </p:spPr>
+        <p:txBody>
+          <a:bodyPr xmlns:a="http://schemas.openxmlformats.org/drawingml/2006/main" anchor="ctr">
+            <a:normAutofit fontScale="86111"/>
+          </a:bodyPr>
+          <a:lstStyle xmlns:a="http://schemas.openxmlformats.org/drawingml/2006/main"/>
+          <a:p xmlns:a="http://schemas.openxmlformats.org/drawingml/2006/main">
+            <a:pPr algn="ctr">
+              <a:defRPr sz="900" b="0">
+                <a:solidFill>
+                  <a:srgbClr val="63708A"/>
+                </a:solidFill>
+                <a:latin typeface="Arial"/>
+                <a:ea typeface="Arial"/>
+                <a:cs typeface="Arial"/>
+              </a:defRPr>
+            </a:pPr>
+            <a:r>
+              <a:rPr sz="900" b="0">
+                <a:solidFill>
+                  <a:srgbClr val="63708A"/>
+                </a:solidFill>
+                <a:latin typeface="Arial"/>
+                <a:ea typeface="Arial"/>
+                <a:cs typeface="Arial"/>
+              </a:rPr>
+              <a:t>15</a:t>
+            </a:r>
+          </a:p>
+        </p:txBody>
+      </p:sp>
+      <p:sp>
+        <p:nvSpPr>
+          <p:cNvPr id="15" name="">
+            <a:extLst xmlns:a="http://schemas.openxmlformats.org/drawingml/2006/main">
+              <a:ext uri="{FF2B5EF4-FFF2-40B4-BE49-F238E27FC236}">
+                <a16:creationId xmlns:a16="http://schemas.microsoft.com/office/drawing/2014/main" id="{B5CED93F-86E3-4E84-9167-34821219E982}"/>
+              </a:ext>
+            </a:extLst>
+          </p:cNvPr>
+          <p:cNvSpPr>
+            <a:spLocks xmlns:a="http://schemas.openxmlformats.org/drawingml/2006/main" noGrp="1"/>
+          </p:cNvSpPr>
+          <p:nvPr/>
+        </p:nvSpPr>
+        <p:spPr>
+          <a:xfrm xmlns:a="http://schemas.openxmlformats.org/drawingml/2006/main">
+            <a:off x="5600700" y="2209800"/>
+            <a:ext cx="0" cy="2790825"/>
+          </a:xfrm>
+          <a:prstGeom xmlns:a="http://schemas.openxmlformats.org/drawingml/2006/main" prst="line">
+            <a:avLst/>
+          </a:prstGeom>
+          <a:noFill xmlns:a="http://schemas.openxmlformats.org/drawingml/2006/main"/>
+          <a:ln xmlns:a="http://schemas.openxmlformats.org/drawingml/2006/main" w="9525">
+            <a:solidFill>
+              <a:srgbClr val="DDE4EF"/>
+            </a:solidFill>
+            <a:prstDash val="solid"/>
+          </a:ln>
+        </p:spPr>
+      </p:sp>
+      <p:sp>
+        <p:nvSpPr>
+          <p:cNvPr id="16" name="">
+            <a:extLst xmlns:a="http://schemas.openxmlformats.org/drawingml/2006/main">
+              <a:ext uri="{FF2B5EF4-FFF2-40B4-BE49-F238E27FC236}">
+                <a16:creationId xmlns:a16="http://schemas.microsoft.com/office/drawing/2014/main" id="{941C5A2F-E8A6-4651-9526-CCB6CC979976}"/>
+              </a:ext>
+            </a:extLst>
+          </p:cNvPr>
+          <p:cNvSpPr>
+            <a:spLocks xmlns:a="http://schemas.openxmlformats.org/drawingml/2006/main" noGrp="1"/>
+          </p:cNvSpPr>
+          <p:nvPr/>
+        </p:nvSpPr>
+        <p:spPr>
+          <a:xfrm xmlns:a="http://schemas.openxmlformats.org/drawingml/2006/main">
+            <a:off x="5410200" y="5076825"/>
+            <a:ext cx="381000" cy="209550"/>
+          </a:xfrm>
+          <a:prstGeom xmlns:a="http://schemas.openxmlformats.org/drawingml/2006/main" prst="rect">
+            <a:avLst/>
+          </a:prstGeom>
+          <a:noFill xmlns:a="http://schemas.openxmlformats.org/drawingml/2006/main"/>
+          <a:ln xmlns:a="http://schemas.openxmlformats.org/drawingml/2006/main" w="0">
+            <a:noFill/>
+          </a:ln>
+        </p:spPr>
+        <p:txBody>
+          <a:bodyPr xmlns:a="http://schemas.openxmlformats.org/drawingml/2006/main" anchor="ctr">
+            <a:normAutofit fontScale="86111"/>
+          </a:bodyPr>
+          <a:lstStyle xmlns:a="http://schemas.openxmlformats.org/drawingml/2006/main"/>
+          <a:p xmlns:a="http://schemas.openxmlformats.org/drawingml/2006/main">
+            <a:pPr algn="ctr">
+              <a:defRPr sz="900" b="0">
+                <a:solidFill>
+                  <a:srgbClr val="63708A"/>
+                </a:solidFill>
+                <a:latin typeface="Arial"/>
+                <a:ea typeface="Arial"/>
+                <a:cs typeface="Arial"/>
+              </a:defRPr>
+            </a:pPr>
+            <a:r>
+              <a:rPr sz="900" b="0">
+                <a:solidFill>
+                  <a:srgbClr val="63708A"/>
+                </a:solidFill>
+                <a:latin typeface="Arial"/>
+                <a:ea typeface="Arial"/>
+                <a:cs typeface="Arial"/>
+              </a:rPr>
+              <a:t>20</a:t>
+            </a:r>
+          </a:p>
+        </p:txBody>
+      </p:sp>
+      <p:sp>
+        <p:nvSpPr>
+          <p:cNvPr id="17" name="">
+            <a:extLst xmlns:a="http://schemas.openxmlformats.org/drawingml/2006/main">
+              <a:ext uri="{FF2B5EF4-FFF2-40B4-BE49-F238E27FC236}">
+                <a16:creationId xmlns:a16="http://schemas.microsoft.com/office/drawing/2014/main" id="{24F0FF4E-589B-40E8-9D99-073A517A7903}"/>
+              </a:ext>
+            </a:extLst>
+          </p:cNvPr>
+          <p:cNvSpPr>
+            <a:spLocks xmlns:a="http://schemas.openxmlformats.org/drawingml/2006/main" noGrp="1"/>
+          </p:cNvSpPr>
+          <p:nvPr/>
+        </p:nvSpPr>
+        <p:spPr>
+          <a:xfrm xmlns:a="http://schemas.openxmlformats.org/drawingml/2006/main">
+            <a:off x="6600825" y="2209800"/>
+            <a:ext cx="0" cy="2790825"/>
+          </a:xfrm>
+          <a:prstGeom xmlns:a="http://schemas.openxmlformats.org/drawingml/2006/main" prst="line">
+            <a:avLst/>
+          </a:prstGeom>
+          <a:noFill xmlns:a="http://schemas.openxmlformats.org/drawingml/2006/main"/>
+          <a:ln xmlns:a="http://schemas.openxmlformats.org/drawingml/2006/main" w="9525">
+            <a:solidFill>
+              <a:srgbClr val="DDE4EF"/>
+            </a:solidFill>
+            <a:prstDash val="solid"/>
+          </a:ln>
+        </p:spPr>
+      </p:sp>
+      <p:sp>
+        <p:nvSpPr>
+          <p:cNvPr id="18" name="">
+            <a:extLst xmlns:a="http://schemas.openxmlformats.org/drawingml/2006/main">
+              <a:ext uri="{FF2B5EF4-FFF2-40B4-BE49-F238E27FC236}">
+                <a16:creationId xmlns:a16="http://schemas.microsoft.com/office/drawing/2014/main" id="{FCB727DF-9C2D-44D5-8953-490DA4018ABD}"/>
+              </a:ext>
+            </a:extLst>
+          </p:cNvPr>
+          <p:cNvSpPr>
+            <a:spLocks xmlns:a="http://schemas.openxmlformats.org/drawingml/2006/main" noGrp="1"/>
+          </p:cNvSpPr>
+          <p:nvPr/>
+        </p:nvSpPr>
+        <p:spPr>
+          <a:xfrm xmlns:a="http://schemas.openxmlformats.org/drawingml/2006/main">
+            <a:off x="6410325" y="5076825"/>
+            <a:ext cx="381000" cy="209550"/>
+          </a:xfrm>
+          <a:prstGeom xmlns:a="http://schemas.openxmlformats.org/drawingml/2006/main" prst="rect">
+            <a:avLst/>
+          </a:prstGeom>
+          <a:noFill xmlns:a="http://schemas.openxmlformats.org/drawingml/2006/main"/>
+          <a:ln xmlns:a="http://schemas.openxmlformats.org/drawingml/2006/main" w="0">
+            <a:noFill/>
+          </a:ln>
+        </p:spPr>
+        <p:txBody>
+          <a:bodyPr xmlns:a="http://schemas.openxmlformats.org/drawingml/2006/main" anchor="ctr">
+            <a:normAutofit fontScale="86111"/>
+          </a:bodyPr>
+          <a:lstStyle xmlns:a="http://schemas.openxmlformats.org/drawingml/2006/main"/>
+          <a:p xmlns:a="http://schemas.openxmlformats.org/drawingml/2006/main">
+            <a:pPr algn="ctr">
+              <a:defRPr sz="900" b="0">
+                <a:solidFill>
+                  <a:srgbClr val="63708A"/>
+                </a:solidFill>
+                <a:latin typeface="Arial"/>
+                <a:ea typeface="Arial"/>
+                <a:cs typeface="Arial"/>
+              </a:defRPr>
+            </a:pPr>
+            <a:r>
+              <a:rPr sz="900" b="0">
+                <a:solidFill>
+                  <a:srgbClr val="63708A"/>
+                </a:solidFill>
+                <a:latin typeface="Arial"/>
+                <a:ea typeface="Arial"/>
+                <a:cs typeface="Arial"/>
+              </a:rPr>
+              <a:t>25</a:t>
+            </a:r>
+          </a:p>
+        </p:txBody>
+      </p:sp>
+      <p:sp>
+        <p:nvSpPr>
+          <p:cNvPr id="19" name="">
+            <a:extLst xmlns:a="http://schemas.openxmlformats.org/drawingml/2006/main">
+              <a:ext uri="{FF2B5EF4-FFF2-40B4-BE49-F238E27FC236}">
+                <a16:creationId xmlns:a16="http://schemas.microsoft.com/office/drawing/2014/main" id="{4CAE45AE-2143-464D-9CFF-8035455F9A63}"/>
+              </a:ext>
+            </a:extLst>
+          </p:cNvPr>
+          <p:cNvSpPr>
+            <a:spLocks xmlns:a="http://schemas.openxmlformats.org/drawingml/2006/main" noGrp="1"/>
+          </p:cNvSpPr>
+          <p:nvPr/>
+        </p:nvSpPr>
+        <p:spPr>
+          <a:xfrm xmlns:a="http://schemas.openxmlformats.org/drawingml/2006/main">
+            <a:off x="7600950" y="2209800"/>
+            <a:ext cx="0" cy="2790825"/>
+          </a:xfrm>
+          <a:prstGeom xmlns:a="http://schemas.openxmlformats.org/drawingml/2006/main" prst="line">
+            <a:avLst/>
+          </a:prstGeom>
+          <a:noFill xmlns:a="http://schemas.openxmlformats.org/drawingml/2006/main"/>
+          <a:ln xmlns:a="http://schemas.openxmlformats.org/drawingml/2006/main" w="9525">
+            <a:solidFill>
+              <a:srgbClr val="DDE4EF"/>
+            </a:solidFill>
+            <a:prstDash val="solid"/>
+          </a:ln>
+        </p:spPr>
+      </p:sp>
+      <p:sp>
+        <p:nvSpPr>
+          <p:cNvPr id="20" name="">
+            <a:extLst xmlns:a="http://schemas.openxmlformats.org/drawingml/2006/main">
+              <a:ext uri="{FF2B5EF4-FFF2-40B4-BE49-F238E27FC236}">
+                <a16:creationId xmlns:a16="http://schemas.microsoft.com/office/drawing/2014/main" id="{0B46E7AF-6B6C-415A-A4F7-A5BD37998A47}"/>
+              </a:ext>
+            </a:extLst>
+          </p:cNvPr>
+          <p:cNvSpPr>
+            <a:spLocks xmlns:a="http://schemas.openxmlformats.org/drawingml/2006/main" noGrp="1"/>
+          </p:cNvSpPr>
+          <p:nvPr/>
+        </p:nvSpPr>
+        <p:spPr>
+          <a:xfrm xmlns:a="http://schemas.openxmlformats.org/drawingml/2006/main">
+            <a:off x="7410450" y="5076825"/>
+            <a:ext cx="381000" cy="209550"/>
+          </a:xfrm>
+          <a:prstGeom xmlns:a="http://schemas.openxmlformats.org/drawingml/2006/main" prst="rect">
+            <a:avLst/>
+          </a:prstGeom>
+          <a:noFill xmlns:a="http://schemas.openxmlformats.org/drawingml/2006/main"/>
+          <a:ln xmlns:a="http://schemas.openxmlformats.org/drawingml/2006/main" w="0">
+            <a:noFill/>
+          </a:ln>
+        </p:spPr>
+        <p:txBody>
+          <a:bodyPr xmlns:a="http://schemas.openxmlformats.org/drawingml/2006/main" anchor="ctr">
+            <a:normAutofit fontScale="86111"/>
+          </a:bodyPr>
+          <a:lstStyle xmlns:a="http://schemas.openxmlformats.org/drawingml/2006/main"/>
+          <a:p xmlns:a="http://schemas.openxmlformats.org/drawingml/2006/main">
+            <a:pPr algn="ctr">
+              <a:defRPr sz="900" b="0">
+                <a:solidFill>
+                  <a:srgbClr val="63708A"/>
+                </a:solidFill>
+                <a:latin typeface="Arial"/>
+                <a:ea typeface="Arial"/>
+                <a:cs typeface="Arial"/>
+              </a:defRPr>
+            </a:pPr>
+            <a:r>
+              <a:rPr sz="900" b="0">
+                <a:solidFill>
+                  <a:srgbClr val="63708A"/>
+                </a:solidFill>
+                <a:latin typeface="Arial"/>
+                <a:ea typeface="Arial"/>
+                <a:cs typeface="Arial"/>
+              </a:rPr>
+              <a:t>30</a:t>
+            </a:r>
+          </a:p>
+        </p:txBody>
+      </p:sp>
+      <p:sp>
+        <p:nvSpPr>
+          <p:cNvPr id="21" name="">
+            <a:extLst xmlns:a="http://schemas.openxmlformats.org/drawingml/2006/main">
+              <a:ext uri="{FF2B5EF4-FFF2-40B4-BE49-F238E27FC236}">
+                <a16:creationId xmlns:a16="http://schemas.microsoft.com/office/drawing/2014/main" id="{A6C25FF0-76C8-4F40-A7C8-51077FC626D7}"/>
+              </a:ext>
+            </a:extLst>
+          </p:cNvPr>
+          <p:cNvSpPr>
+            <a:spLocks xmlns:a="http://schemas.openxmlformats.org/drawingml/2006/main" noGrp="1"/>
+          </p:cNvSpPr>
+          <p:nvPr/>
+        </p:nvSpPr>
+        <p:spPr>
+          <a:xfrm xmlns:a="http://schemas.openxmlformats.org/drawingml/2006/main">
+            <a:off x="876300" y="2503488"/>
+            <a:ext cx="609600" cy="342900"/>
+          </a:xfrm>
+          <a:prstGeom xmlns:a="http://schemas.openxmlformats.org/drawingml/2006/main" prst="rect">
+            <a:avLst/>
+          </a:prstGeom>
+          <a:noFill xmlns:a="http://schemas.openxmlformats.org/drawingml/2006/main"/>
+          <a:ln xmlns:a="http://schemas.openxmlformats.org/drawingml/2006/main" w="0">
+            <a:noFill/>
+          </a:ln>
+        </p:spPr>
+        <p:txBody>
+          <a:bodyPr xmlns:a="http://schemas.openxmlformats.org/drawingml/2006/main" anchor="ctr">
+            <a:normAutofit fontScale="100000"/>
+          </a:bodyPr>
+          <a:lstStyle xmlns:a="http://schemas.openxmlformats.org/drawingml/2006/main"/>
+          <a:p xmlns:a="http://schemas.openxmlformats.org/drawingml/2006/main">
+            <a:pPr algn="r">
+              <a:defRPr sz="1050" b="0">
+                <a:solidFill>
+                  <a:srgbClr val="63708A"/>
+                </a:solidFill>
+                <a:latin typeface="Arial"/>
+                <a:ea typeface="Arial"/>
+                <a:cs typeface="Arial"/>
+              </a:defRPr>
+            </a:pPr>
+            <a:r>
+              <a:rPr sz="1050" b="0">
+                <a:solidFill>
+                  <a:srgbClr val="63708A"/>
+                </a:solidFill>
+                <a:latin typeface="Arial"/>
+                <a:ea typeface="Arial"/>
+                <a:cs typeface="Arial"/>
+              </a:rPr>
+              <a:t>KK</a:t>
+            </a:r>
+          </a:p>
+        </p:txBody>
+      </p:sp>
+      <p:sp>
+        <p:nvSpPr>
+          <p:cNvPr id="22" name="">
+            <a:extLst xmlns:a="http://schemas.openxmlformats.org/drawingml/2006/main">
+              <a:ext uri="{FF2B5EF4-FFF2-40B4-BE49-F238E27FC236}">
+                <a16:creationId xmlns:a16="http://schemas.microsoft.com/office/drawing/2014/main" id="{78CF3A0B-F5E3-43B9-8FF7-3006047AEA5A}"/>
+              </a:ext>
+            </a:extLst>
+          </p:cNvPr>
+          <p:cNvSpPr>
+            <a:spLocks xmlns:a="http://schemas.openxmlformats.org/drawingml/2006/main" noGrp="1"/>
+          </p:cNvSpPr>
+          <p:nvPr/>
+        </p:nvSpPr>
+        <p:spPr>
+          <a:xfrm xmlns:a="http://schemas.openxmlformats.org/drawingml/2006/main">
+            <a:off x="1600200" y="2408238"/>
+            <a:ext cx="5306663" cy="533400"/>
+          </a:xfrm>
+          <a:prstGeom xmlns:a="http://schemas.openxmlformats.org/drawingml/2006/main" prst="rect">
+            <a:avLst/>
+          </a:prstGeom>
+          <a:solidFill xmlns:a="http://schemas.openxmlformats.org/drawingml/2006/main">
+            <a:srgbClr val="FF6B6B"/>
+          </a:solidFill>
+          <a:ln xmlns:a="http://schemas.openxmlformats.org/drawingml/2006/main" w="0">
+            <a:noFill/>
+          </a:ln>
+        </p:spPr>
+      </p:sp>
+      <p:sp>
+        <p:nvSpPr>
+          <p:cNvPr id="23" name="">
+            <a:extLst xmlns:a="http://schemas.openxmlformats.org/drawingml/2006/main">
+              <a:ext uri="{FF2B5EF4-FFF2-40B4-BE49-F238E27FC236}">
+                <a16:creationId xmlns:a16="http://schemas.microsoft.com/office/drawing/2014/main" id="{776A74BF-F1CD-470E-AF33-E2107B108B09}"/>
+              </a:ext>
+            </a:extLst>
+          </p:cNvPr>
+          <p:cNvSpPr>
+            <a:spLocks xmlns:a="http://schemas.openxmlformats.org/drawingml/2006/main" noGrp="1"/>
+          </p:cNvSpPr>
+          <p:nvPr/>
+        </p:nvSpPr>
+        <p:spPr>
+          <a:xfrm xmlns:a="http://schemas.openxmlformats.org/drawingml/2006/main">
+            <a:off x="6983063" y="2503488"/>
+            <a:ext cx="609600" cy="342900"/>
+          </a:xfrm>
+          <a:prstGeom xmlns:a="http://schemas.openxmlformats.org/drawingml/2006/main" prst="rect">
+            <a:avLst/>
+          </a:prstGeom>
+          <a:noFill xmlns:a="http://schemas.openxmlformats.org/drawingml/2006/main"/>
+          <a:ln xmlns:a="http://schemas.openxmlformats.org/drawingml/2006/main" w="0">
+            <a:noFill/>
+          </a:ln>
+        </p:spPr>
+        <p:txBody>
+          <a:bodyPr xmlns:a="http://schemas.openxmlformats.org/drawingml/2006/main" anchor="ctr">
+            <a:normAutofit fontScale="100000"/>
+          </a:bodyPr>
+          <a:lstStyle xmlns:a="http://schemas.openxmlformats.org/drawingml/2006/main"/>
+          <a:p xmlns:a="http://schemas.openxmlformats.org/drawingml/2006/main">
+            <a:pPr algn="l">
+              <a:defRPr sz="1050" b="1">
+                <a:solidFill>
+                  <a:srgbClr val="14213D"/>
+                </a:solidFill>
+                <a:latin typeface="Arial"/>
+                <a:ea typeface="Arial"/>
+                <a:cs typeface="Arial"/>
+              </a:defRPr>
+            </a:pPr>
+            <a:r>
+              <a:rPr sz="1050" b="1">
+                <a:solidFill>
+                  <a:srgbClr val="14213D"/>
+                </a:solidFill>
+                <a:latin typeface="Arial"/>
+                <a:ea typeface="Arial"/>
+                <a:cs typeface="Arial"/>
+              </a:rPr>
+              <a:t>26,5%</a:t>
+            </a:r>
+          </a:p>
+        </p:txBody>
+      </p:sp>
+      <p:sp>
+        <p:nvSpPr>
+          <p:cNvPr id="24" name="">
+            <a:extLst xmlns:a="http://schemas.openxmlformats.org/drawingml/2006/main">
+              <a:ext uri="{FF2B5EF4-FFF2-40B4-BE49-F238E27FC236}">
+                <a16:creationId xmlns:a16="http://schemas.microsoft.com/office/drawing/2014/main" id="{EE1EC7E5-C940-4683-ABBA-7890A4EE1EE7}"/>
+              </a:ext>
+            </a:extLst>
+          </p:cNvPr>
+          <p:cNvSpPr>
+            <a:spLocks xmlns:a="http://schemas.openxmlformats.org/drawingml/2006/main" noGrp="1"/>
+          </p:cNvSpPr>
+          <p:nvPr/>
+        </p:nvSpPr>
+        <p:spPr>
+          <a:xfrm xmlns:a="http://schemas.openxmlformats.org/drawingml/2006/main">
+            <a:off x="876300" y="3433763"/>
+            <a:ext cx="609600" cy="342900"/>
+          </a:xfrm>
+          <a:prstGeom xmlns:a="http://schemas.openxmlformats.org/drawingml/2006/main" prst="rect">
+            <a:avLst/>
+          </a:prstGeom>
+          <a:noFill xmlns:a="http://schemas.openxmlformats.org/drawingml/2006/main"/>
+          <a:ln xmlns:a="http://schemas.openxmlformats.org/drawingml/2006/main" w="0">
+            <a:noFill/>
+          </a:ln>
+        </p:spPr>
+        <p:txBody>
+          <a:bodyPr xmlns:a="http://schemas.openxmlformats.org/drawingml/2006/main" anchor="ctr">
+            <a:normAutofit fontScale="100000"/>
+          </a:bodyPr>
+          <a:lstStyle xmlns:a="http://schemas.openxmlformats.org/drawingml/2006/main"/>
+          <a:p xmlns:a="http://schemas.openxmlformats.org/drawingml/2006/main">
+            <a:pPr algn="r">
+              <a:defRPr sz="1050" b="0">
+                <a:solidFill>
+                  <a:srgbClr val="63708A"/>
+                </a:solidFill>
+                <a:latin typeface="Arial"/>
+                <a:ea typeface="Arial"/>
+                <a:cs typeface="Arial"/>
+              </a:defRPr>
+            </a:pPr>
+            <a:r>
+              <a:rPr sz="1050" b="0">
+                <a:solidFill>
+                  <a:srgbClr val="63708A"/>
+                </a:solidFill>
+                <a:latin typeface="Arial"/>
+                <a:ea typeface="Arial"/>
+                <a:cs typeface="Arial"/>
+              </a:rPr>
+              <a:t>RU</a:t>
+            </a:r>
+          </a:p>
+        </p:txBody>
+      </p:sp>
+      <p:sp>
+        <p:nvSpPr>
+          <p:cNvPr id="25" name="">
+            <a:extLst xmlns:a="http://schemas.openxmlformats.org/drawingml/2006/main">
+              <a:ext uri="{FF2B5EF4-FFF2-40B4-BE49-F238E27FC236}">
+                <a16:creationId xmlns:a16="http://schemas.microsoft.com/office/drawing/2014/main" id="{B5B3EED2-52C8-44B6-8511-4168897138A9}"/>
+              </a:ext>
+            </a:extLst>
+          </p:cNvPr>
+          <p:cNvSpPr>
+            <a:spLocks xmlns:a="http://schemas.openxmlformats.org/drawingml/2006/main" noGrp="1"/>
+          </p:cNvSpPr>
+          <p:nvPr/>
+        </p:nvSpPr>
+        <p:spPr>
+          <a:xfrm xmlns:a="http://schemas.openxmlformats.org/drawingml/2006/main">
+            <a:off x="1600200" y="3338513"/>
+            <a:ext cx="3570446" cy="533400"/>
+          </a:xfrm>
+          <a:prstGeom xmlns:a="http://schemas.openxmlformats.org/drawingml/2006/main" prst="rect">
+            <a:avLst/>
+          </a:prstGeom>
+          <a:solidFill xmlns:a="http://schemas.openxmlformats.org/drawingml/2006/main">
+            <a:srgbClr val="2F6BFF"/>
+          </a:solidFill>
+          <a:ln xmlns:a="http://schemas.openxmlformats.org/drawingml/2006/main" w="0">
+            <a:noFill/>
+          </a:ln>
+        </p:spPr>
+      </p:sp>
+      <p:sp>
+        <p:nvSpPr>
+          <p:cNvPr id="26" name="">
+            <a:extLst xmlns:a="http://schemas.openxmlformats.org/drawingml/2006/main">
+              <a:ext uri="{FF2B5EF4-FFF2-40B4-BE49-F238E27FC236}">
+                <a16:creationId xmlns:a16="http://schemas.microsoft.com/office/drawing/2014/main" id="{8009271B-AABD-4D95-86AF-714D697FC5F3}"/>
+              </a:ext>
+            </a:extLst>
+          </p:cNvPr>
+          <p:cNvSpPr>
+            <a:spLocks xmlns:a="http://schemas.openxmlformats.org/drawingml/2006/main" noGrp="1"/>
+          </p:cNvSpPr>
+          <p:nvPr/>
+        </p:nvSpPr>
+        <p:spPr>
+          <a:xfrm xmlns:a="http://schemas.openxmlformats.org/drawingml/2006/main">
+            <a:off x="5246846" y="3433763"/>
+            <a:ext cx="609600" cy="342900"/>
+          </a:xfrm>
+          <a:prstGeom xmlns:a="http://schemas.openxmlformats.org/drawingml/2006/main" prst="rect">
+            <a:avLst/>
+          </a:prstGeom>
+          <a:noFill xmlns:a="http://schemas.openxmlformats.org/drawingml/2006/main"/>
+          <a:ln xmlns:a="http://schemas.openxmlformats.org/drawingml/2006/main" w="0">
+            <a:noFill/>
+          </a:ln>
+        </p:spPr>
+        <p:txBody>
+          <a:bodyPr xmlns:a="http://schemas.openxmlformats.org/drawingml/2006/main" anchor="ctr">
+            <a:normAutofit fontScale="100000"/>
+          </a:bodyPr>
+          <a:lstStyle xmlns:a="http://schemas.openxmlformats.org/drawingml/2006/main"/>
+          <a:p xmlns:a="http://schemas.openxmlformats.org/drawingml/2006/main">
+            <a:pPr algn="l">
+              <a:defRPr sz="1050" b="1">
+                <a:solidFill>
+                  <a:srgbClr val="14213D"/>
+                </a:solidFill>
+                <a:latin typeface="Arial"/>
+                <a:ea typeface="Arial"/>
+                <a:cs typeface="Arial"/>
+              </a:defRPr>
+            </a:pPr>
+            <a:r>
+              <a:rPr sz="1050" b="1">
+                <a:solidFill>
+                  <a:srgbClr val="14213D"/>
+                </a:solidFill>
+                <a:latin typeface="Arial"/>
+                <a:ea typeface="Arial"/>
+                <a:cs typeface="Arial"/>
+              </a:rPr>
+              <a:t>17,9%</a:t>
+            </a:r>
+          </a:p>
+        </p:txBody>
+      </p:sp>
+      <p:sp>
+        <p:nvSpPr>
+          <p:cNvPr id="27" name="">
+            <a:extLst xmlns:a="http://schemas.openxmlformats.org/drawingml/2006/main">
+              <a:ext uri="{FF2B5EF4-FFF2-40B4-BE49-F238E27FC236}">
+                <a16:creationId xmlns:a16="http://schemas.microsoft.com/office/drawing/2014/main" id="{CA538DBE-51DC-4B6D-AC92-2DBEC1E92669}"/>
+              </a:ext>
+            </a:extLst>
+          </p:cNvPr>
+          <p:cNvSpPr>
+            <a:spLocks xmlns:a="http://schemas.openxmlformats.org/drawingml/2006/main" noGrp="1"/>
+          </p:cNvSpPr>
+          <p:nvPr/>
+        </p:nvSpPr>
+        <p:spPr>
+          <a:xfrm xmlns:a="http://schemas.openxmlformats.org/drawingml/2006/main">
+            <a:off x="876300" y="4364038"/>
+            <a:ext cx="609600" cy="342900"/>
+          </a:xfrm>
+          <a:prstGeom xmlns:a="http://schemas.openxmlformats.org/drawingml/2006/main" prst="rect">
+            <a:avLst/>
+          </a:prstGeom>
+          <a:noFill xmlns:a="http://schemas.openxmlformats.org/drawingml/2006/main"/>
+          <a:ln xmlns:a="http://schemas.openxmlformats.org/drawingml/2006/main" w="0">
+            <a:noFill/>
+          </a:ln>
+        </p:spPr>
+        <p:txBody>
+          <a:bodyPr xmlns:a="http://schemas.openxmlformats.org/drawingml/2006/main" anchor="ctr">
+            <a:normAutofit fontScale="100000"/>
+          </a:bodyPr>
+          <a:lstStyle xmlns:a="http://schemas.openxmlformats.org/drawingml/2006/main"/>
+          <a:p xmlns:a="http://schemas.openxmlformats.org/drawingml/2006/main">
+            <a:pPr algn="r">
+              <a:defRPr sz="1050" b="0">
+                <a:solidFill>
+                  <a:srgbClr val="63708A"/>
+                </a:solidFill>
+                <a:latin typeface="Arial"/>
+                <a:ea typeface="Arial"/>
+                <a:cs typeface="Arial"/>
+              </a:defRPr>
+            </a:pPr>
+            <a:r>
+              <a:rPr sz="1050" b="0">
+                <a:solidFill>
+                  <a:srgbClr val="63708A"/>
+                </a:solidFill>
+                <a:latin typeface="Arial"/>
+                <a:ea typeface="Arial"/>
+                <a:cs typeface="Arial"/>
+              </a:rPr>
+              <a:t>EN</a:t>
+            </a:r>
+          </a:p>
+        </p:txBody>
+      </p:sp>
+      <p:sp>
+        <p:nvSpPr>
+          <p:cNvPr id="28" name="">
+            <a:extLst xmlns:a="http://schemas.openxmlformats.org/drawingml/2006/main">
+              <a:ext uri="{FF2B5EF4-FFF2-40B4-BE49-F238E27FC236}">
+                <a16:creationId xmlns:a16="http://schemas.microsoft.com/office/drawing/2014/main" id="{1F4D22E4-829B-42AF-B5C1-0C4A9AB13E72}"/>
+              </a:ext>
+            </a:extLst>
+          </p:cNvPr>
+          <p:cNvSpPr>
+            <a:spLocks xmlns:a="http://schemas.openxmlformats.org/drawingml/2006/main" noGrp="1"/>
+          </p:cNvSpPr>
+          <p:nvPr/>
+        </p:nvSpPr>
+        <p:spPr>
+          <a:xfrm xmlns:a="http://schemas.openxmlformats.org/drawingml/2006/main">
+            <a:off x="1600200" y="4268788"/>
+            <a:ext cx="2954369" cy="533400"/>
+          </a:xfrm>
+          <a:prstGeom xmlns:a="http://schemas.openxmlformats.org/drawingml/2006/main" prst="rect">
+            <a:avLst/>
+          </a:prstGeom>
+          <a:solidFill xmlns:a="http://schemas.openxmlformats.org/drawingml/2006/main">
+            <a:srgbClr val="2F6BFF"/>
+          </a:solidFill>
+          <a:ln xmlns:a="http://schemas.openxmlformats.org/drawingml/2006/main" w="0">
+            <a:noFill/>
+          </a:ln>
+        </p:spPr>
+      </p:sp>
+      <p:sp>
+        <p:nvSpPr>
+          <p:cNvPr id="29" name="">
+            <a:extLst xmlns:a="http://schemas.openxmlformats.org/drawingml/2006/main">
+              <a:ext uri="{FF2B5EF4-FFF2-40B4-BE49-F238E27FC236}">
+                <a16:creationId xmlns:a16="http://schemas.microsoft.com/office/drawing/2014/main" id="{06E7E15C-5F2F-4BF6-9A27-1C5D38597483}"/>
+              </a:ext>
+            </a:extLst>
+          </p:cNvPr>
+          <p:cNvSpPr>
+            <a:spLocks xmlns:a="http://schemas.openxmlformats.org/drawingml/2006/main" noGrp="1"/>
+          </p:cNvSpPr>
+          <p:nvPr/>
+        </p:nvSpPr>
+        <p:spPr>
+          <a:xfrm xmlns:a="http://schemas.openxmlformats.org/drawingml/2006/main">
+            <a:off x="4630769" y="4364038"/>
+            <a:ext cx="609600" cy="342900"/>
+          </a:xfrm>
+          <a:prstGeom xmlns:a="http://schemas.openxmlformats.org/drawingml/2006/main" prst="rect">
+            <a:avLst/>
+          </a:prstGeom>
+          <a:noFill xmlns:a="http://schemas.openxmlformats.org/drawingml/2006/main"/>
+          <a:ln xmlns:a="http://schemas.openxmlformats.org/drawingml/2006/main" w="0">
+            <a:noFill/>
+          </a:ln>
+        </p:spPr>
+        <p:txBody>
+          <a:bodyPr xmlns:a="http://schemas.openxmlformats.org/drawingml/2006/main" anchor="ctr">
+            <a:normAutofit fontScale="100000"/>
+          </a:bodyPr>
+          <a:lstStyle xmlns:a="http://schemas.openxmlformats.org/drawingml/2006/main"/>
+          <a:p xmlns:a="http://schemas.openxmlformats.org/drawingml/2006/main">
+            <a:pPr algn="l">
+              <a:defRPr sz="1050" b="1">
+                <a:solidFill>
+                  <a:srgbClr val="14213D"/>
+                </a:solidFill>
+                <a:latin typeface="Arial"/>
+                <a:ea typeface="Arial"/>
+                <a:cs typeface="Arial"/>
+              </a:defRPr>
+            </a:pPr>
+            <a:r>
+              <a:rPr sz="1050" b="1">
+                <a:solidFill>
+                  <a:srgbClr val="14213D"/>
+                </a:solidFill>
+                <a:latin typeface="Arial"/>
+                <a:ea typeface="Arial"/>
+                <a:cs typeface="Arial"/>
+              </a:rPr>
+              <a:t>14,8%</a:t>
+            </a:r>
+          </a:p>
+        </p:txBody>
+      </p:sp>
+      <p:sp>
+        <p:nvSpPr>
+          <p:cNvPr id="30" name="">
+            <a:extLst xmlns:a="http://schemas.openxmlformats.org/drawingml/2006/main">
+              <a:ext uri="{FF2B5EF4-FFF2-40B4-BE49-F238E27FC236}">
+                <a16:creationId xmlns:a16="http://schemas.microsoft.com/office/drawing/2014/main" id="{213A2662-6A32-4708-815B-F6092F021B5A}"/>
               </a:ext>
             </a:extLst>
           </p:cNvPr>
@@ -19107,10 +21018,10 @@
       </p:sp>
       <p:sp>
         <p:nvSpPr>
-          <p:cNvPr id="8" name="">
-            <a:extLst xmlns:a="http://schemas.openxmlformats.org/drawingml/2006/main">
-              <a:ext uri="{FF2B5EF4-FFF2-40B4-BE49-F238E27FC236}">
-                <a16:creationId xmlns:a16="http://schemas.microsoft.com/office/drawing/2014/main" id="{7B07D5E4-9CD4-4C44-869B-58EA843737B5}"/>
+          <p:cNvPr id="31" name="">
+            <a:extLst xmlns:a="http://schemas.openxmlformats.org/drawingml/2006/main">
+              <a:ext uri="{FF2B5EF4-FFF2-40B4-BE49-F238E27FC236}">
+                <a16:creationId xmlns:a16="http://schemas.microsoft.com/office/drawing/2014/main" id="{3A322A43-87F3-4D2B-A11B-B525D46C3258}"/>
               </a:ext>
             </a:extLst>
           </p:cNvPr>
@@ -19164,10 +21075,10 @@
       </p:sp>
       <p:sp>
         <p:nvSpPr>
-          <p:cNvPr id="9" name="">
-            <a:extLst xmlns:a="http://schemas.openxmlformats.org/drawingml/2006/main">
-              <a:ext uri="{FF2B5EF4-FFF2-40B4-BE49-F238E27FC236}">
-                <a16:creationId xmlns:a16="http://schemas.microsoft.com/office/drawing/2014/main" id="{11F7C857-53DE-481B-A5EF-D1C78649F935}"/>
+          <p:cNvPr id="32" name="">
+            <a:extLst xmlns:a="http://schemas.openxmlformats.org/drawingml/2006/main">
+              <a:ext uri="{FF2B5EF4-FFF2-40B4-BE49-F238E27FC236}">
+                <a16:creationId xmlns:a16="http://schemas.microsoft.com/office/drawing/2014/main" id="{C420BE4E-C359-4E0E-90B4-2B3BCE0405A6}"/>
               </a:ext>
             </a:extLst>
           </p:cNvPr>
@@ -19221,10 +21132,10 @@
       </p:sp>
       <p:sp>
         <p:nvSpPr>
-          <p:cNvPr id="10" name="">
-            <a:extLst xmlns:a="http://schemas.openxmlformats.org/drawingml/2006/main">
-              <a:ext uri="{FF2B5EF4-FFF2-40B4-BE49-F238E27FC236}">
-                <a16:creationId xmlns:a16="http://schemas.microsoft.com/office/drawing/2014/main" id="{EE000184-21F0-429F-8FED-A5DF94C40759}"/>
+          <p:cNvPr id="33" name="">
+            <a:extLst xmlns:a="http://schemas.openxmlformats.org/drawingml/2006/main">
+              <a:ext uri="{FF2B5EF4-FFF2-40B4-BE49-F238E27FC236}">
+                <a16:creationId xmlns:a16="http://schemas.microsoft.com/office/drawing/2014/main" id="{394ACBB6-7B5C-477A-A132-C632A420ED81}"/>
               </a:ext>
             </a:extLst>
           </p:cNvPr>
@@ -19253,10 +21164,10 @@
       </p:sp>
       <p:sp>
         <p:nvSpPr>
-          <p:cNvPr id="11" name="">
-            <a:extLst xmlns:a="http://schemas.openxmlformats.org/drawingml/2006/main">
-              <a:ext uri="{FF2B5EF4-FFF2-40B4-BE49-F238E27FC236}">
-                <a16:creationId xmlns:a16="http://schemas.microsoft.com/office/drawing/2014/main" id="{02544F7E-461B-4E06-89AA-E2D9BC2997AC}"/>
+          <p:cNvPr id="34" name="">
+            <a:extLst xmlns:a="http://schemas.openxmlformats.org/drawingml/2006/main">
+              <a:ext uri="{FF2B5EF4-FFF2-40B4-BE49-F238E27FC236}">
+                <a16:creationId xmlns:a16="http://schemas.microsoft.com/office/drawing/2014/main" id="{1A4BEE84-AF9A-444C-AD8D-30EE082A121B}"/>
               </a:ext>
             </a:extLst>
           </p:cNvPr>
@@ -19333,10 +21244,10 @@
       </p:sp>
       <p:sp>
         <p:nvSpPr>
-          <p:cNvPr id="12" name="">
-            <a:extLst xmlns:a="http://schemas.openxmlformats.org/drawingml/2006/main">
-              <a:ext uri="{FF2B5EF4-FFF2-40B4-BE49-F238E27FC236}">
-                <a16:creationId xmlns:a16="http://schemas.microsoft.com/office/drawing/2014/main" id="{B9204C7A-05C7-4E9E-860F-DB5D4F14B5A0}"/>
+          <p:cNvPr id="35" name="">
+            <a:extLst xmlns:a="http://schemas.openxmlformats.org/drawingml/2006/main">
+              <a:ext uri="{FF2B5EF4-FFF2-40B4-BE49-F238E27FC236}">
+                <a16:creationId xmlns:a16="http://schemas.microsoft.com/office/drawing/2014/main" id="{4F69CF86-E540-4A18-92E7-0D5ED7E1F294}"/>
               </a:ext>
             </a:extLst>
           </p:cNvPr>
@@ -19391,7 +21302,7 @@
     </p:spTree>
     <p:extLst>
       <p:ext uri="{BB962C8B-B14F-4D97-AF65-F5344CB8AC3E}">
-        <p14:creationId xmlns:p14="http://schemas.microsoft.com/office/powerpoint/2010/main" val="668080504"/>
+        <p14:creationId xmlns:p14="http://schemas.microsoft.com/office/powerpoint/2010/main" val="1387425392"/>
       </p:ext>
     </p:extLst>
   </p:cSld>
@@ -19419,10 +21330,10 @@
       </p:grpSpPr>
       <p:sp>
         <p:nvSpPr>
-          <p:cNvPr id="13" name="">
-            <a:extLst xmlns:a="http://schemas.openxmlformats.org/drawingml/2006/main">
-              <a:ext uri="{FF2B5EF4-FFF2-40B4-BE49-F238E27FC236}">
-                <a16:creationId xmlns:a16="http://schemas.microsoft.com/office/drawing/2014/main" id="{EB3CAF0D-6027-4626-8865-569F7093EEC0}"/>
+          <p:cNvPr id="34" name="">
+            <a:extLst xmlns:a="http://schemas.openxmlformats.org/drawingml/2006/main">
+              <a:ext uri="{FF2B5EF4-FFF2-40B4-BE49-F238E27FC236}">
+                <a16:creationId xmlns:a16="http://schemas.microsoft.com/office/drawing/2014/main" id="{4512E972-D9A1-41AB-AE80-F2290B15D69E}"/>
               </a:ext>
             </a:extLst>
           </p:cNvPr>
@@ -19452,7 +21363,7 @@
           <p:cNvPr id="2" name="">
             <a:extLst xmlns:a="http://schemas.openxmlformats.org/drawingml/2006/main">
               <a:ext uri="{FF2B5EF4-FFF2-40B4-BE49-F238E27FC236}">
-                <a16:creationId xmlns:a16="http://schemas.microsoft.com/office/drawing/2014/main" id="{30B1DDB4-66DD-48F1-AD9B-D9E62333A77A}"/>
+                <a16:creationId xmlns:a16="http://schemas.microsoft.com/office/drawing/2014/main" id="{9C9E5313-D983-4B23-A83E-B8641E881820}"/>
               </a:ext>
             </a:extLst>
           </p:cNvPr>
@@ -19509,7 +21420,7 @@
           <p:cNvPr id="3" name="">
             <a:extLst xmlns:a="http://schemas.openxmlformats.org/drawingml/2006/main">
               <a:ext uri="{FF2B5EF4-FFF2-40B4-BE49-F238E27FC236}">
-                <a16:creationId xmlns:a16="http://schemas.microsoft.com/office/drawing/2014/main" id="{9EC5ABCA-9D8D-436C-9A40-BBC2E77382BA}"/>
+                <a16:creationId xmlns:a16="http://schemas.microsoft.com/office/drawing/2014/main" id="{85257532-6693-46BE-BE59-CFF21F833FC6}"/>
               </a:ext>
             </a:extLst>
           </p:cNvPr>
@@ -19566,7 +21477,7 @@
           <p:cNvPr id="4" name="">
             <a:extLst xmlns:a="http://schemas.openxmlformats.org/drawingml/2006/main">
               <a:ext uri="{FF2B5EF4-FFF2-40B4-BE49-F238E27FC236}">
-                <a16:creationId xmlns:a16="http://schemas.microsoft.com/office/drawing/2014/main" id="{C81C03EB-8F03-49C3-AB4E-FAA2ACB1B409}"/>
+                <a16:creationId xmlns:a16="http://schemas.microsoft.com/office/drawing/2014/main" id="{5C25B585-4B10-48D7-9F6C-096303813918}"/>
               </a:ext>
             </a:extLst>
           </p:cNvPr>
@@ -19597,7 +21508,7 @@
           <p:cNvPr id="5" name="">
             <a:extLst xmlns:a="http://schemas.openxmlformats.org/drawingml/2006/main">
               <a:ext uri="{FF2B5EF4-FFF2-40B4-BE49-F238E27FC236}">
-                <a16:creationId xmlns:a16="http://schemas.microsoft.com/office/drawing/2014/main" id="{C6F4BEFA-EA66-4670-A39C-D739B33CA3EC}"/>
+                <a16:creationId xmlns:a16="http://schemas.microsoft.com/office/drawing/2014/main" id="{9DD1B8FF-1C30-4F80-920A-8E283318B90A}"/>
               </a:ext>
             </a:extLst>
           </p:cNvPr>
@@ -19649,28 +21560,1029 @@
           </a:p>
         </p:txBody>
       </p:sp>
-      <p:graphicFrame>
-        <p:nvGraphicFramePr>
-          <p:cNvPr id="18" name="Chart"/>
-          <p:cNvGraphicFramePr/>
-          <p:nvPr/>
-        </p:nvGraphicFramePr>
-        <p:xfrm>
-          <a:off xmlns:a="http://schemas.openxmlformats.org/drawingml/2006/main" x="838200" y="1619250"/>
-          <a:ext xmlns:a="http://schemas.openxmlformats.org/drawingml/2006/main" cx="7524750" cy="3857625"/>
-        </p:xfrm>
-        <a:graphic xmlns:a="http://schemas.openxmlformats.org/drawingml/2006/main">
-          <a:graphicData uri="http://schemas.openxmlformats.org/drawingml/2006/chart">
-            <c:chart xmlns:r="http://schemas.openxmlformats.org/officeDocument/2006/relationships" xmlns:c="http://schemas.openxmlformats.org/drawingml/2006/chart" r:id="Rffdac9b859434324"/>
-          </a:graphicData>
-        </a:graphic>
-      </p:graphicFrame>
+      <p:sp>
+        <p:nvSpPr>
+          <p:cNvPr id="6" name="">
+            <a:extLst xmlns:a="http://schemas.openxmlformats.org/drawingml/2006/main">
+              <a:ext uri="{FF2B5EF4-FFF2-40B4-BE49-F238E27FC236}">
+                <a16:creationId xmlns:a16="http://schemas.microsoft.com/office/drawing/2014/main" id="{1CEB5E05-6A32-4F15-AF6B-C6A4ED231A5D}"/>
+              </a:ext>
+            </a:extLst>
+          </p:cNvPr>
+          <p:cNvSpPr>
+            <a:spLocks xmlns:a="http://schemas.openxmlformats.org/drawingml/2006/main" noGrp="1"/>
+          </p:cNvSpPr>
+          <p:nvPr/>
+        </p:nvSpPr>
+        <p:spPr>
+          <a:xfrm xmlns:a="http://schemas.openxmlformats.org/drawingml/2006/main">
+            <a:off x="838200" y="1619250"/>
+            <a:ext cx="7524750" cy="323850"/>
+          </a:xfrm>
+          <a:prstGeom xmlns:a="http://schemas.openxmlformats.org/drawingml/2006/main" prst="rect">
+            <a:avLst/>
+          </a:prstGeom>
+          <a:noFill xmlns:a="http://schemas.openxmlformats.org/drawingml/2006/main"/>
+          <a:ln xmlns:a="http://schemas.openxmlformats.org/drawingml/2006/main" w="0">
+            <a:noFill/>
+          </a:ln>
+        </p:spPr>
+        <p:txBody>
+          <a:bodyPr xmlns:a="http://schemas.openxmlformats.org/drawingml/2006/main" anchor="ctr">
+            <a:normAutofit fontScale="100000"/>
+          </a:bodyPr>
+          <a:lstStyle xmlns:a="http://schemas.openxmlformats.org/drawingml/2006/main"/>
+          <a:p xmlns:a="http://schemas.openxmlformats.org/drawingml/2006/main">
+            <a:pPr algn="ctr">
+              <a:defRPr sz="1350" b="1">
+                <a:solidFill>
+                  <a:srgbClr val="14213D"/>
+                </a:solidFill>
+                <a:latin typeface="Arial"/>
+                <a:ea typeface="Arial"/>
+                <a:cs typeface="Arial"/>
+              </a:defRPr>
+            </a:pPr>
+            <a:r>
+              <a:rPr sz="1350" b="1">
+                <a:solidFill>
+                  <a:srgbClr val="14213D"/>
+                </a:solidFill>
+                <a:latin typeface="Arial"/>
+                <a:ea typeface="Arial"/>
+                <a:cs typeface="Arial"/>
+              </a:rPr>
+              <a:t>Доля фактических ошибок по модели (%)</a:t>
+            </a:r>
+          </a:p>
+        </p:txBody>
+      </p:sp>
       <p:sp>
         <p:nvSpPr>
           <p:cNvPr id="7" name="">
             <a:extLst xmlns:a="http://schemas.openxmlformats.org/drawingml/2006/main">
               <a:ext uri="{FF2B5EF4-FFF2-40B4-BE49-F238E27FC236}">
-                <a16:creationId xmlns:a16="http://schemas.microsoft.com/office/drawing/2014/main" id="{FDB724B6-DED0-4FD5-AE73-ABC182DE7BCB}"/>
+                <a16:creationId xmlns:a16="http://schemas.microsoft.com/office/drawing/2014/main" id="{C98EC6B0-D225-4485-8CB1-8B0CEA48CAFF}"/>
+              </a:ext>
+            </a:extLst>
+          </p:cNvPr>
+          <p:cNvSpPr>
+            <a:spLocks xmlns:a="http://schemas.openxmlformats.org/drawingml/2006/main" noGrp="1"/>
+          </p:cNvSpPr>
+          <p:nvPr/>
+        </p:nvSpPr>
+        <p:spPr>
+          <a:xfrm xmlns:a="http://schemas.openxmlformats.org/drawingml/2006/main">
+            <a:off x="2076450" y="2209800"/>
+            <a:ext cx="0" cy="2790825"/>
+          </a:xfrm>
+          <a:prstGeom xmlns:a="http://schemas.openxmlformats.org/drawingml/2006/main" prst="line">
+            <a:avLst/>
+          </a:prstGeom>
+          <a:noFill xmlns:a="http://schemas.openxmlformats.org/drawingml/2006/main"/>
+          <a:ln xmlns:a="http://schemas.openxmlformats.org/drawingml/2006/main" w="9525">
+            <a:solidFill>
+              <a:srgbClr val="DDE4EF"/>
+            </a:solidFill>
+            <a:prstDash val="solid"/>
+          </a:ln>
+        </p:spPr>
+      </p:sp>
+      <p:sp>
+        <p:nvSpPr>
+          <p:cNvPr id="8" name="">
+            <a:extLst xmlns:a="http://schemas.openxmlformats.org/drawingml/2006/main">
+              <a:ext uri="{FF2B5EF4-FFF2-40B4-BE49-F238E27FC236}">
+                <a16:creationId xmlns:a16="http://schemas.microsoft.com/office/drawing/2014/main" id="{EC88F470-DB5E-4449-9796-846B680C8780}"/>
+              </a:ext>
+            </a:extLst>
+          </p:cNvPr>
+          <p:cNvSpPr>
+            <a:spLocks xmlns:a="http://schemas.openxmlformats.org/drawingml/2006/main" noGrp="1"/>
+          </p:cNvSpPr>
+          <p:nvPr/>
+        </p:nvSpPr>
+        <p:spPr>
+          <a:xfrm xmlns:a="http://schemas.openxmlformats.org/drawingml/2006/main">
+            <a:off x="1885950" y="5076825"/>
+            <a:ext cx="381000" cy="209550"/>
+          </a:xfrm>
+          <a:prstGeom xmlns:a="http://schemas.openxmlformats.org/drawingml/2006/main" prst="rect">
+            <a:avLst/>
+          </a:prstGeom>
+          <a:noFill xmlns:a="http://schemas.openxmlformats.org/drawingml/2006/main"/>
+          <a:ln xmlns:a="http://schemas.openxmlformats.org/drawingml/2006/main" w="0">
+            <a:noFill/>
+          </a:ln>
+        </p:spPr>
+        <p:txBody>
+          <a:bodyPr xmlns:a="http://schemas.openxmlformats.org/drawingml/2006/main" anchor="ctr">
+            <a:normAutofit fontScale="86111"/>
+          </a:bodyPr>
+          <a:lstStyle xmlns:a="http://schemas.openxmlformats.org/drawingml/2006/main"/>
+          <a:p xmlns:a="http://schemas.openxmlformats.org/drawingml/2006/main">
+            <a:pPr algn="ctr">
+              <a:defRPr sz="900" b="1">
+                <a:solidFill>
+                  <a:srgbClr val="63708A"/>
+                </a:solidFill>
+                <a:latin typeface="Arial"/>
+                <a:ea typeface="Arial"/>
+                <a:cs typeface="Arial"/>
+              </a:defRPr>
+            </a:pPr>
+            <a:r>
+              <a:rPr sz="900" b="1">
+                <a:solidFill>
+                  <a:srgbClr val="63708A"/>
+                </a:solidFill>
+                <a:latin typeface="Arial"/>
+                <a:ea typeface="Arial"/>
+                <a:cs typeface="Arial"/>
+              </a:rPr>
+              <a:t>0</a:t>
+            </a:r>
+          </a:p>
+        </p:txBody>
+      </p:sp>
+      <p:sp>
+        <p:nvSpPr>
+          <p:cNvPr id="9" name="">
+            <a:extLst xmlns:a="http://schemas.openxmlformats.org/drawingml/2006/main">
+              <a:ext uri="{FF2B5EF4-FFF2-40B4-BE49-F238E27FC236}">
+                <a16:creationId xmlns:a16="http://schemas.microsoft.com/office/drawing/2014/main" id="{FE48D5D7-7601-43E5-87C7-33C9CC52BBEB}"/>
+              </a:ext>
+            </a:extLst>
+          </p:cNvPr>
+          <p:cNvSpPr>
+            <a:spLocks xmlns:a="http://schemas.openxmlformats.org/drawingml/2006/main" noGrp="1"/>
+          </p:cNvSpPr>
+          <p:nvPr/>
+        </p:nvSpPr>
+        <p:spPr>
+          <a:xfrm xmlns:a="http://schemas.openxmlformats.org/drawingml/2006/main">
+            <a:off x="3230880" y="2209800"/>
+            <a:ext cx="0" cy="2790825"/>
+          </a:xfrm>
+          <a:prstGeom xmlns:a="http://schemas.openxmlformats.org/drawingml/2006/main" prst="line">
+            <a:avLst/>
+          </a:prstGeom>
+          <a:noFill xmlns:a="http://schemas.openxmlformats.org/drawingml/2006/main"/>
+          <a:ln xmlns:a="http://schemas.openxmlformats.org/drawingml/2006/main" w="9525">
+            <a:solidFill>
+              <a:srgbClr val="DDE4EF"/>
+            </a:solidFill>
+            <a:prstDash val="solid"/>
+          </a:ln>
+        </p:spPr>
+      </p:sp>
+      <p:sp>
+        <p:nvSpPr>
+          <p:cNvPr id="10" name="">
+            <a:extLst xmlns:a="http://schemas.openxmlformats.org/drawingml/2006/main">
+              <a:ext uri="{FF2B5EF4-FFF2-40B4-BE49-F238E27FC236}">
+                <a16:creationId xmlns:a16="http://schemas.microsoft.com/office/drawing/2014/main" id="{08D3EA9D-2C6E-4F81-9569-2A1A4E50F252}"/>
+              </a:ext>
+            </a:extLst>
+          </p:cNvPr>
+          <p:cNvSpPr>
+            <a:spLocks xmlns:a="http://schemas.openxmlformats.org/drawingml/2006/main" noGrp="1"/>
+          </p:cNvSpPr>
+          <p:nvPr/>
+        </p:nvSpPr>
+        <p:spPr>
+          <a:xfrm xmlns:a="http://schemas.openxmlformats.org/drawingml/2006/main">
+            <a:off x="3040380" y="5076825"/>
+            <a:ext cx="381000" cy="209550"/>
+          </a:xfrm>
+          <a:prstGeom xmlns:a="http://schemas.openxmlformats.org/drawingml/2006/main" prst="rect">
+            <a:avLst/>
+          </a:prstGeom>
+          <a:noFill xmlns:a="http://schemas.openxmlformats.org/drawingml/2006/main"/>
+          <a:ln xmlns:a="http://schemas.openxmlformats.org/drawingml/2006/main" w="0">
+            <a:noFill/>
+          </a:ln>
+        </p:spPr>
+        <p:txBody>
+          <a:bodyPr xmlns:a="http://schemas.openxmlformats.org/drawingml/2006/main" anchor="ctr">
+            <a:normAutofit fontScale="86111"/>
+          </a:bodyPr>
+          <a:lstStyle xmlns:a="http://schemas.openxmlformats.org/drawingml/2006/main"/>
+          <a:p xmlns:a="http://schemas.openxmlformats.org/drawingml/2006/main">
+            <a:pPr algn="ctr">
+              <a:defRPr sz="900" b="0">
+                <a:solidFill>
+                  <a:srgbClr val="63708A"/>
+                </a:solidFill>
+                <a:latin typeface="Arial"/>
+                <a:ea typeface="Arial"/>
+                <a:cs typeface="Arial"/>
+              </a:defRPr>
+            </a:pPr>
+            <a:r>
+              <a:rPr sz="900" b="0">
+                <a:solidFill>
+                  <a:srgbClr val="63708A"/>
+                </a:solidFill>
+                <a:latin typeface="Arial"/>
+                <a:ea typeface="Arial"/>
+                <a:cs typeface="Arial"/>
+              </a:rPr>
+              <a:t>5</a:t>
+            </a:r>
+          </a:p>
+        </p:txBody>
+      </p:sp>
+      <p:sp>
+        <p:nvSpPr>
+          <p:cNvPr id="11" name="">
+            <a:extLst xmlns:a="http://schemas.openxmlformats.org/drawingml/2006/main">
+              <a:ext uri="{FF2B5EF4-FFF2-40B4-BE49-F238E27FC236}">
+                <a16:creationId xmlns:a16="http://schemas.microsoft.com/office/drawing/2014/main" id="{9ED875A2-E14E-441A-9F9C-015BB2AB1071}"/>
+              </a:ext>
+            </a:extLst>
+          </p:cNvPr>
+          <p:cNvSpPr>
+            <a:spLocks xmlns:a="http://schemas.openxmlformats.org/drawingml/2006/main" noGrp="1"/>
+          </p:cNvSpPr>
+          <p:nvPr/>
+        </p:nvSpPr>
+        <p:spPr>
+          <a:xfrm xmlns:a="http://schemas.openxmlformats.org/drawingml/2006/main">
+            <a:off x="4385310" y="2209800"/>
+            <a:ext cx="0" cy="2790825"/>
+          </a:xfrm>
+          <a:prstGeom xmlns:a="http://schemas.openxmlformats.org/drawingml/2006/main" prst="line">
+            <a:avLst/>
+          </a:prstGeom>
+          <a:noFill xmlns:a="http://schemas.openxmlformats.org/drawingml/2006/main"/>
+          <a:ln xmlns:a="http://schemas.openxmlformats.org/drawingml/2006/main" w="9525">
+            <a:solidFill>
+              <a:srgbClr val="DDE4EF"/>
+            </a:solidFill>
+            <a:prstDash val="solid"/>
+          </a:ln>
+        </p:spPr>
+      </p:sp>
+      <p:sp>
+        <p:nvSpPr>
+          <p:cNvPr id="12" name="">
+            <a:extLst xmlns:a="http://schemas.openxmlformats.org/drawingml/2006/main">
+              <a:ext uri="{FF2B5EF4-FFF2-40B4-BE49-F238E27FC236}">
+                <a16:creationId xmlns:a16="http://schemas.microsoft.com/office/drawing/2014/main" id="{0D8939FD-0E17-4FD8-91C5-590EA6D5F2CF}"/>
+              </a:ext>
+            </a:extLst>
+          </p:cNvPr>
+          <p:cNvSpPr>
+            <a:spLocks xmlns:a="http://schemas.openxmlformats.org/drawingml/2006/main" noGrp="1"/>
+          </p:cNvSpPr>
+          <p:nvPr/>
+        </p:nvSpPr>
+        <p:spPr>
+          <a:xfrm xmlns:a="http://schemas.openxmlformats.org/drawingml/2006/main">
+            <a:off x="4194810" y="5076825"/>
+            <a:ext cx="381000" cy="209550"/>
+          </a:xfrm>
+          <a:prstGeom xmlns:a="http://schemas.openxmlformats.org/drawingml/2006/main" prst="rect">
+            <a:avLst/>
+          </a:prstGeom>
+          <a:noFill xmlns:a="http://schemas.openxmlformats.org/drawingml/2006/main"/>
+          <a:ln xmlns:a="http://schemas.openxmlformats.org/drawingml/2006/main" w="0">
+            <a:noFill/>
+          </a:ln>
+        </p:spPr>
+        <p:txBody>
+          <a:bodyPr xmlns:a="http://schemas.openxmlformats.org/drawingml/2006/main" anchor="ctr">
+            <a:normAutofit fontScale="86111"/>
+          </a:bodyPr>
+          <a:lstStyle xmlns:a="http://schemas.openxmlformats.org/drawingml/2006/main"/>
+          <a:p xmlns:a="http://schemas.openxmlformats.org/drawingml/2006/main">
+            <a:pPr algn="ctr">
+              <a:defRPr sz="900" b="0">
+                <a:solidFill>
+                  <a:srgbClr val="63708A"/>
+                </a:solidFill>
+                <a:latin typeface="Arial"/>
+                <a:ea typeface="Arial"/>
+                <a:cs typeface="Arial"/>
+              </a:defRPr>
+            </a:pPr>
+            <a:r>
+              <a:rPr sz="900" b="0">
+                <a:solidFill>
+                  <a:srgbClr val="63708A"/>
+                </a:solidFill>
+                <a:latin typeface="Arial"/>
+                <a:ea typeface="Arial"/>
+                <a:cs typeface="Arial"/>
+              </a:rPr>
+              <a:t>10</a:t>
+            </a:r>
+          </a:p>
+        </p:txBody>
+      </p:sp>
+      <p:sp>
+        <p:nvSpPr>
+          <p:cNvPr id="13" name="">
+            <a:extLst xmlns:a="http://schemas.openxmlformats.org/drawingml/2006/main">
+              <a:ext uri="{FF2B5EF4-FFF2-40B4-BE49-F238E27FC236}">
+                <a16:creationId xmlns:a16="http://schemas.microsoft.com/office/drawing/2014/main" id="{18E81DF6-DFCE-454E-BB93-55E164F8F7E3}"/>
+              </a:ext>
+            </a:extLst>
+          </p:cNvPr>
+          <p:cNvSpPr>
+            <a:spLocks xmlns:a="http://schemas.openxmlformats.org/drawingml/2006/main" noGrp="1"/>
+          </p:cNvSpPr>
+          <p:nvPr/>
+        </p:nvSpPr>
+        <p:spPr>
+          <a:xfrm xmlns:a="http://schemas.openxmlformats.org/drawingml/2006/main">
+            <a:off x="5539740" y="2209800"/>
+            <a:ext cx="0" cy="2790825"/>
+          </a:xfrm>
+          <a:prstGeom xmlns:a="http://schemas.openxmlformats.org/drawingml/2006/main" prst="line">
+            <a:avLst/>
+          </a:prstGeom>
+          <a:noFill xmlns:a="http://schemas.openxmlformats.org/drawingml/2006/main"/>
+          <a:ln xmlns:a="http://schemas.openxmlformats.org/drawingml/2006/main" w="9525">
+            <a:solidFill>
+              <a:srgbClr val="DDE4EF"/>
+            </a:solidFill>
+            <a:prstDash val="solid"/>
+          </a:ln>
+        </p:spPr>
+      </p:sp>
+      <p:sp>
+        <p:nvSpPr>
+          <p:cNvPr id="14" name="">
+            <a:extLst xmlns:a="http://schemas.openxmlformats.org/drawingml/2006/main">
+              <a:ext uri="{FF2B5EF4-FFF2-40B4-BE49-F238E27FC236}">
+                <a16:creationId xmlns:a16="http://schemas.microsoft.com/office/drawing/2014/main" id="{8B84EF99-B124-42C2-AB84-F26F7A5AF11F}"/>
+              </a:ext>
+            </a:extLst>
+          </p:cNvPr>
+          <p:cNvSpPr>
+            <a:spLocks xmlns:a="http://schemas.openxmlformats.org/drawingml/2006/main" noGrp="1"/>
+          </p:cNvSpPr>
+          <p:nvPr/>
+        </p:nvSpPr>
+        <p:spPr>
+          <a:xfrm xmlns:a="http://schemas.openxmlformats.org/drawingml/2006/main">
+            <a:off x="5349240" y="5076825"/>
+            <a:ext cx="381000" cy="209550"/>
+          </a:xfrm>
+          <a:prstGeom xmlns:a="http://schemas.openxmlformats.org/drawingml/2006/main" prst="rect">
+            <a:avLst/>
+          </a:prstGeom>
+          <a:noFill xmlns:a="http://schemas.openxmlformats.org/drawingml/2006/main"/>
+          <a:ln xmlns:a="http://schemas.openxmlformats.org/drawingml/2006/main" w="0">
+            <a:noFill/>
+          </a:ln>
+        </p:spPr>
+        <p:txBody>
+          <a:bodyPr xmlns:a="http://schemas.openxmlformats.org/drawingml/2006/main" anchor="ctr">
+            <a:normAutofit fontScale="86111"/>
+          </a:bodyPr>
+          <a:lstStyle xmlns:a="http://schemas.openxmlformats.org/drawingml/2006/main"/>
+          <a:p xmlns:a="http://schemas.openxmlformats.org/drawingml/2006/main">
+            <a:pPr algn="ctr">
+              <a:defRPr sz="900" b="0">
+                <a:solidFill>
+                  <a:srgbClr val="63708A"/>
+                </a:solidFill>
+                <a:latin typeface="Arial"/>
+                <a:ea typeface="Arial"/>
+                <a:cs typeface="Arial"/>
+              </a:defRPr>
+            </a:pPr>
+            <a:r>
+              <a:rPr sz="900" b="0">
+                <a:solidFill>
+                  <a:srgbClr val="63708A"/>
+                </a:solidFill>
+                <a:latin typeface="Arial"/>
+                <a:ea typeface="Arial"/>
+                <a:cs typeface="Arial"/>
+              </a:rPr>
+              <a:t>15</a:t>
+            </a:r>
+          </a:p>
+        </p:txBody>
+      </p:sp>
+      <p:sp>
+        <p:nvSpPr>
+          <p:cNvPr id="15" name="">
+            <a:extLst xmlns:a="http://schemas.openxmlformats.org/drawingml/2006/main">
+              <a:ext uri="{FF2B5EF4-FFF2-40B4-BE49-F238E27FC236}">
+                <a16:creationId xmlns:a16="http://schemas.microsoft.com/office/drawing/2014/main" id="{101A1EE5-4FD8-4C66-9A29-FAF85BB93185}"/>
+              </a:ext>
+            </a:extLst>
+          </p:cNvPr>
+          <p:cNvSpPr>
+            <a:spLocks xmlns:a="http://schemas.openxmlformats.org/drawingml/2006/main" noGrp="1"/>
+          </p:cNvSpPr>
+          <p:nvPr/>
+        </p:nvSpPr>
+        <p:spPr>
+          <a:xfrm xmlns:a="http://schemas.openxmlformats.org/drawingml/2006/main">
+            <a:off x="6694170" y="2209800"/>
+            <a:ext cx="0" cy="2790825"/>
+          </a:xfrm>
+          <a:prstGeom xmlns:a="http://schemas.openxmlformats.org/drawingml/2006/main" prst="line">
+            <a:avLst/>
+          </a:prstGeom>
+          <a:noFill xmlns:a="http://schemas.openxmlformats.org/drawingml/2006/main"/>
+          <a:ln xmlns:a="http://schemas.openxmlformats.org/drawingml/2006/main" w="9525">
+            <a:solidFill>
+              <a:srgbClr val="DDE4EF"/>
+            </a:solidFill>
+            <a:prstDash val="solid"/>
+          </a:ln>
+        </p:spPr>
+      </p:sp>
+      <p:sp>
+        <p:nvSpPr>
+          <p:cNvPr id="16" name="">
+            <a:extLst xmlns:a="http://schemas.openxmlformats.org/drawingml/2006/main">
+              <a:ext uri="{FF2B5EF4-FFF2-40B4-BE49-F238E27FC236}">
+                <a16:creationId xmlns:a16="http://schemas.microsoft.com/office/drawing/2014/main" id="{6DA31139-25BC-45B0-B988-3607DA9052CE}"/>
+              </a:ext>
+            </a:extLst>
+          </p:cNvPr>
+          <p:cNvSpPr>
+            <a:spLocks xmlns:a="http://schemas.openxmlformats.org/drawingml/2006/main" noGrp="1"/>
+          </p:cNvSpPr>
+          <p:nvPr/>
+        </p:nvSpPr>
+        <p:spPr>
+          <a:xfrm xmlns:a="http://schemas.openxmlformats.org/drawingml/2006/main">
+            <a:off x="6503670" y="5076825"/>
+            <a:ext cx="381000" cy="209550"/>
+          </a:xfrm>
+          <a:prstGeom xmlns:a="http://schemas.openxmlformats.org/drawingml/2006/main" prst="rect">
+            <a:avLst/>
+          </a:prstGeom>
+          <a:noFill xmlns:a="http://schemas.openxmlformats.org/drawingml/2006/main"/>
+          <a:ln xmlns:a="http://schemas.openxmlformats.org/drawingml/2006/main" w="0">
+            <a:noFill/>
+          </a:ln>
+        </p:spPr>
+        <p:txBody>
+          <a:bodyPr xmlns:a="http://schemas.openxmlformats.org/drawingml/2006/main" anchor="ctr">
+            <a:normAutofit fontScale="86111"/>
+          </a:bodyPr>
+          <a:lstStyle xmlns:a="http://schemas.openxmlformats.org/drawingml/2006/main"/>
+          <a:p xmlns:a="http://schemas.openxmlformats.org/drawingml/2006/main">
+            <a:pPr algn="ctr">
+              <a:defRPr sz="900" b="0">
+                <a:solidFill>
+                  <a:srgbClr val="63708A"/>
+                </a:solidFill>
+                <a:latin typeface="Arial"/>
+                <a:ea typeface="Arial"/>
+                <a:cs typeface="Arial"/>
+              </a:defRPr>
+            </a:pPr>
+            <a:r>
+              <a:rPr sz="900" b="0">
+                <a:solidFill>
+                  <a:srgbClr val="63708A"/>
+                </a:solidFill>
+                <a:latin typeface="Arial"/>
+                <a:ea typeface="Arial"/>
+                <a:cs typeface="Arial"/>
+              </a:rPr>
+              <a:t>20</a:t>
+            </a:r>
+          </a:p>
+        </p:txBody>
+      </p:sp>
+      <p:sp>
+        <p:nvSpPr>
+          <p:cNvPr id="17" name="">
+            <a:extLst xmlns:a="http://schemas.openxmlformats.org/drawingml/2006/main">
+              <a:ext uri="{FF2B5EF4-FFF2-40B4-BE49-F238E27FC236}">
+                <a16:creationId xmlns:a16="http://schemas.microsoft.com/office/drawing/2014/main" id="{B8AC9382-5D10-4164-AF22-65A82EB6027E}"/>
+              </a:ext>
+            </a:extLst>
+          </p:cNvPr>
+          <p:cNvSpPr>
+            <a:spLocks xmlns:a="http://schemas.openxmlformats.org/drawingml/2006/main" noGrp="1"/>
+          </p:cNvSpPr>
+          <p:nvPr/>
+        </p:nvSpPr>
+        <p:spPr>
+          <a:xfrm xmlns:a="http://schemas.openxmlformats.org/drawingml/2006/main">
+            <a:off x="7848600" y="2209800"/>
+            <a:ext cx="0" cy="2790825"/>
+          </a:xfrm>
+          <a:prstGeom xmlns:a="http://schemas.openxmlformats.org/drawingml/2006/main" prst="line">
+            <a:avLst/>
+          </a:prstGeom>
+          <a:noFill xmlns:a="http://schemas.openxmlformats.org/drawingml/2006/main"/>
+          <a:ln xmlns:a="http://schemas.openxmlformats.org/drawingml/2006/main" w="9525">
+            <a:solidFill>
+              <a:srgbClr val="DDE4EF"/>
+            </a:solidFill>
+            <a:prstDash val="solid"/>
+          </a:ln>
+        </p:spPr>
+      </p:sp>
+      <p:sp>
+        <p:nvSpPr>
+          <p:cNvPr id="18" name="">
+            <a:extLst xmlns:a="http://schemas.openxmlformats.org/drawingml/2006/main">
+              <a:ext uri="{FF2B5EF4-FFF2-40B4-BE49-F238E27FC236}">
+                <a16:creationId xmlns:a16="http://schemas.microsoft.com/office/drawing/2014/main" id="{5AB56A14-5DD7-4D9A-8F24-5C83BE934BD3}"/>
+              </a:ext>
+            </a:extLst>
+          </p:cNvPr>
+          <p:cNvSpPr>
+            <a:spLocks xmlns:a="http://schemas.openxmlformats.org/drawingml/2006/main" noGrp="1"/>
+          </p:cNvSpPr>
+          <p:nvPr/>
+        </p:nvSpPr>
+        <p:spPr>
+          <a:xfrm xmlns:a="http://schemas.openxmlformats.org/drawingml/2006/main">
+            <a:off x="7658100" y="5076825"/>
+            <a:ext cx="381000" cy="209550"/>
+          </a:xfrm>
+          <a:prstGeom xmlns:a="http://schemas.openxmlformats.org/drawingml/2006/main" prst="rect">
+            <a:avLst/>
+          </a:prstGeom>
+          <a:noFill xmlns:a="http://schemas.openxmlformats.org/drawingml/2006/main"/>
+          <a:ln xmlns:a="http://schemas.openxmlformats.org/drawingml/2006/main" w="0">
+            <a:noFill/>
+          </a:ln>
+        </p:spPr>
+        <p:txBody>
+          <a:bodyPr xmlns:a="http://schemas.openxmlformats.org/drawingml/2006/main" anchor="ctr">
+            <a:normAutofit fontScale="86111"/>
+          </a:bodyPr>
+          <a:lstStyle xmlns:a="http://schemas.openxmlformats.org/drawingml/2006/main"/>
+          <a:p xmlns:a="http://schemas.openxmlformats.org/drawingml/2006/main">
+            <a:pPr algn="ctr">
+              <a:defRPr sz="900" b="0">
+                <a:solidFill>
+                  <a:srgbClr val="63708A"/>
+                </a:solidFill>
+                <a:latin typeface="Arial"/>
+                <a:ea typeface="Arial"/>
+                <a:cs typeface="Arial"/>
+              </a:defRPr>
+            </a:pPr>
+            <a:r>
+              <a:rPr sz="900" b="0">
+                <a:solidFill>
+                  <a:srgbClr val="63708A"/>
+                </a:solidFill>
+                <a:latin typeface="Arial"/>
+                <a:ea typeface="Arial"/>
+                <a:cs typeface="Arial"/>
+              </a:rPr>
+              <a:t>25</a:t>
+            </a:r>
+          </a:p>
+        </p:txBody>
+      </p:sp>
+      <p:sp>
+        <p:nvSpPr>
+          <p:cNvPr id="19" name="">
+            <a:extLst xmlns:a="http://schemas.openxmlformats.org/drawingml/2006/main">
+              <a:ext uri="{FF2B5EF4-FFF2-40B4-BE49-F238E27FC236}">
+                <a16:creationId xmlns:a16="http://schemas.microsoft.com/office/drawing/2014/main" id="{09822779-9210-4C65-B464-D5189ECE0F90}"/>
+              </a:ext>
+            </a:extLst>
+          </p:cNvPr>
+          <p:cNvSpPr>
+            <a:spLocks xmlns:a="http://schemas.openxmlformats.org/drawingml/2006/main" noGrp="1"/>
+          </p:cNvSpPr>
+          <p:nvPr/>
+        </p:nvSpPr>
+        <p:spPr>
+          <a:xfrm xmlns:a="http://schemas.openxmlformats.org/drawingml/2006/main">
+            <a:off x="838200" y="2503488"/>
+            <a:ext cx="1123950" cy="342900"/>
+          </a:xfrm>
+          <a:prstGeom xmlns:a="http://schemas.openxmlformats.org/drawingml/2006/main" prst="rect">
+            <a:avLst/>
+          </a:prstGeom>
+          <a:noFill xmlns:a="http://schemas.openxmlformats.org/drawingml/2006/main"/>
+          <a:ln xmlns:a="http://schemas.openxmlformats.org/drawingml/2006/main" w="0">
+            <a:noFill/>
+          </a:ln>
+        </p:spPr>
+        <p:txBody>
+          <a:bodyPr xmlns:a="http://schemas.openxmlformats.org/drawingml/2006/main" anchor="ctr">
+            <a:normAutofit fontScale="100000"/>
+          </a:bodyPr>
+          <a:lstStyle xmlns:a="http://schemas.openxmlformats.org/drawingml/2006/main"/>
+          <a:p xmlns:a="http://schemas.openxmlformats.org/drawingml/2006/main">
+            <a:pPr algn="r">
+              <a:defRPr sz="1050" b="0">
+                <a:solidFill>
+                  <a:srgbClr val="63708A"/>
+                </a:solidFill>
+                <a:latin typeface="Arial"/>
+                <a:ea typeface="Arial"/>
+                <a:cs typeface="Arial"/>
+              </a:defRPr>
+            </a:pPr>
+            <a:r>
+              <a:rPr sz="1050" b="0">
+                <a:solidFill>
+                  <a:srgbClr val="63708A"/>
+                </a:solidFill>
+                <a:latin typeface="Arial"/>
+                <a:ea typeface="Arial"/>
+                <a:cs typeface="Arial"/>
+              </a:rPr>
+              <a:t>GPT-OSS 20B</a:t>
+            </a:r>
+          </a:p>
+        </p:txBody>
+      </p:sp>
+      <p:sp>
+        <p:nvSpPr>
+          <p:cNvPr id="20" name="">
+            <a:extLst xmlns:a="http://schemas.openxmlformats.org/drawingml/2006/main">
+              <a:ext uri="{FF2B5EF4-FFF2-40B4-BE49-F238E27FC236}">
+                <a16:creationId xmlns:a16="http://schemas.microsoft.com/office/drawing/2014/main" id="{8C68CA7F-F8EC-44DA-82E2-16B19E02277B}"/>
+              </a:ext>
+            </a:extLst>
+          </p:cNvPr>
+          <p:cNvSpPr>
+            <a:spLocks xmlns:a="http://schemas.openxmlformats.org/drawingml/2006/main" noGrp="1"/>
+          </p:cNvSpPr>
+          <p:nvPr/>
+        </p:nvSpPr>
+        <p:spPr>
+          <a:xfrm xmlns:a="http://schemas.openxmlformats.org/drawingml/2006/main">
+            <a:off x="2076450" y="2408238"/>
+            <a:ext cx="5363482" cy="533400"/>
+          </a:xfrm>
+          <a:prstGeom xmlns:a="http://schemas.openxmlformats.org/drawingml/2006/main" prst="rect">
+            <a:avLst/>
+          </a:prstGeom>
+          <a:solidFill xmlns:a="http://schemas.openxmlformats.org/drawingml/2006/main">
+            <a:srgbClr val="FF6B6B"/>
+          </a:solidFill>
+          <a:ln xmlns:a="http://schemas.openxmlformats.org/drawingml/2006/main" w="0">
+            <a:noFill/>
+          </a:ln>
+        </p:spPr>
+      </p:sp>
+      <p:sp>
+        <p:nvSpPr>
+          <p:cNvPr id="21" name="">
+            <a:extLst xmlns:a="http://schemas.openxmlformats.org/drawingml/2006/main">
+              <a:ext uri="{FF2B5EF4-FFF2-40B4-BE49-F238E27FC236}">
+                <a16:creationId xmlns:a16="http://schemas.microsoft.com/office/drawing/2014/main" id="{A6F99EEE-52F0-4371-93D7-88F593E5C128}"/>
+              </a:ext>
+            </a:extLst>
+          </p:cNvPr>
+          <p:cNvSpPr>
+            <a:spLocks xmlns:a="http://schemas.openxmlformats.org/drawingml/2006/main" noGrp="1"/>
+          </p:cNvSpPr>
+          <p:nvPr/>
+        </p:nvSpPr>
+        <p:spPr>
+          <a:xfrm xmlns:a="http://schemas.openxmlformats.org/drawingml/2006/main">
+            <a:off x="7516132" y="2503488"/>
+            <a:ext cx="609600" cy="342900"/>
+          </a:xfrm>
+          <a:prstGeom xmlns:a="http://schemas.openxmlformats.org/drawingml/2006/main" prst="rect">
+            <a:avLst/>
+          </a:prstGeom>
+          <a:noFill xmlns:a="http://schemas.openxmlformats.org/drawingml/2006/main"/>
+          <a:ln xmlns:a="http://schemas.openxmlformats.org/drawingml/2006/main" w="0">
+            <a:noFill/>
+          </a:ln>
+        </p:spPr>
+        <p:txBody>
+          <a:bodyPr xmlns:a="http://schemas.openxmlformats.org/drawingml/2006/main" anchor="ctr">
+            <a:normAutofit fontScale="100000"/>
+          </a:bodyPr>
+          <a:lstStyle xmlns:a="http://schemas.openxmlformats.org/drawingml/2006/main"/>
+          <a:p xmlns:a="http://schemas.openxmlformats.org/drawingml/2006/main">
+            <a:pPr algn="l">
+              <a:defRPr sz="1050" b="1">
+                <a:solidFill>
+                  <a:srgbClr val="14213D"/>
+                </a:solidFill>
+                <a:latin typeface="Arial"/>
+                <a:ea typeface="Arial"/>
+                <a:cs typeface="Arial"/>
+              </a:defRPr>
+            </a:pPr>
+            <a:r>
+              <a:rPr sz="1050" b="1">
+                <a:solidFill>
+                  <a:srgbClr val="14213D"/>
+                </a:solidFill>
+                <a:latin typeface="Arial"/>
+                <a:ea typeface="Arial"/>
+                <a:cs typeface="Arial"/>
+              </a:rPr>
+              <a:t>23,2%</a:t>
+            </a:r>
+          </a:p>
+        </p:txBody>
+      </p:sp>
+      <p:sp>
+        <p:nvSpPr>
+          <p:cNvPr id="22" name="">
+            <a:extLst xmlns:a="http://schemas.openxmlformats.org/drawingml/2006/main">
+              <a:ext uri="{FF2B5EF4-FFF2-40B4-BE49-F238E27FC236}">
+                <a16:creationId xmlns:a16="http://schemas.microsoft.com/office/drawing/2014/main" id="{8993564F-990D-473C-920B-F1D58B912383}"/>
+              </a:ext>
+            </a:extLst>
+          </p:cNvPr>
+          <p:cNvSpPr>
+            <a:spLocks xmlns:a="http://schemas.openxmlformats.org/drawingml/2006/main" noGrp="1"/>
+          </p:cNvSpPr>
+          <p:nvPr/>
+        </p:nvSpPr>
+        <p:spPr>
+          <a:xfrm xmlns:a="http://schemas.openxmlformats.org/drawingml/2006/main">
+            <a:off x="838200" y="3433763"/>
+            <a:ext cx="1123950" cy="342900"/>
+          </a:xfrm>
+          <a:prstGeom xmlns:a="http://schemas.openxmlformats.org/drawingml/2006/main" prst="rect">
+            <a:avLst/>
+          </a:prstGeom>
+          <a:noFill xmlns:a="http://schemas.openxmlformats.org/drawingml/2006/main"/>
+          <a:ln xmlns:a="http://schemas.openxmlformats.org/drawingml/2006/main" w="0">
+            <a:noFill/>
+          </a:ln>
+        </p:spPr>
+        <p:txBody>
+          <a:bodyPr xmlns:a="http://schemas.openxmlformats.org/drawingml/2006/main" anchor="ctr">
+            <a:normAutofit fontScale="100000"/>
+          </a:bodyPr>
+          <a:lstStyle xmlns:a="http://schemas.openxmlformats.org/drawingml/2006/main"/>
+          <a:p xmlns:a="http://schemas.openxmlformats.org/drawingml/2006/main">
+            <a:pPr algn="r">
+              <a:defRPr sz="1050" b="0">
+                <a:solidFill>
+                  <a:srgbClr val="63708A"/>
+                </a:solidFill>
+                <a:latin typeface="Arial"/>
+                <a:ea typeface="Arial"/>
+                <a:cs typeface="Arial"/>
+              </a:defRPr>
+            </a:pPr>
+            <a:r>
+              <a:rPr sz="1050" b="0">
+                <a:solidFill>
+                  <a:srgbClr val="63708A"/>
+                </a:solidFill>
+                <a:latin typeface="Arial"/>
+                <a:ea typeface="Arial"/>
+                <a:cs typeface="Arial"/>
+              </a:rPr>
+              <a:t>Qwen 3.8</a:t>
+            </a:r>
+          </a:p>
+        </p:txBody>
+      </p:sp>
+      <p:sp>
+        <p:nvSpPr>
+          <p:cNvPr id="23" name="">
+            <a:extLst xmlns:a="http://schemas.openxmlformats.org/drawingml/2006/main">
+              <a:ext uri="{FF2B5EF4-FFF2-40B4-BE49-F238E27FC236}">
+                <a16:creationId xmlns:a16="http://schemas.microsoft.com/office/drawing/2014/main" id="{928F7718-D2FA-4196-BE7C-2BAB8DB4F8B2}"/>
+              </a:ext>
+            </a:extLst>
+          </p:cNvPr>
+          <p:cNvSpPr>
+            <a:spLocks xmlns:a="http://schemas.openxmlformats.org/drawingml/2006/main" noGrp="1"/>
+          </p:cNvSpPr>
+          <p:nvPr/>
+        </p:nvSpPr>
+        <p:spPr>
+          <a:xfrm xmlns:a="http://schemas.openxmlformats.org/drawingml/2006/main">
+            <a:off x="2076450" y="3338513"/>
+            <a:ext cx="4885548" cy="533400"/>
+          </a:xfrm>
+          <a:prstGeom xmlns:a="http://schemas.openxmlformats.org/drawingml/2006/main" prst="rect">
+            <a:avLst/>
+          </a:prstGeom>
+          <a:solidFill xmlns:a="http://schemas.openxmlformats.org/drawingml/2006/main">
+            <a:srgbClr val="2F6BFF"/>
+          </a:solidFill>
+          <a:ln xmlns:a="http://schemas.openxmlformats.org/drawingml/2006/main" w="0">
+            <a:noFill/>
+          </a:ln>
+        </p:spPr>
+      </p:sp>
+      <p:sp>
+        <p:nvSpPr>
+          <p:cNvPr id="24" name="">
+            <a:extLst xmlns:a="http://schemas.openxmlformats.org/drawingml/2006/main">
+              <a:ext uri="{FF2B5EF4-FFF2-40B4-BE49-F238E27FC236}">
+                <a16:creationId xmlns:a16="http://schemas.microsoft.com/office/drawing/2014/main" id="{BD3D87EB-E0A4-4F91-84D9-6221F7095C5E}"/>
+              </a:ext>
+            </a:extLst>
+          </p:cNvPr>
+          <p:cNvSpPr>
+            <a:spLocks xmlns:a="http://schemas.openxmlformats.org/drawingml/2006/main" noGrp="1"/>
+          </p:cNvSpPr>
+          <p:nvPr/>
+        </p:nvSpPr>
+        <p:spPr>
+          <a:xfrm xmlns:a="http://schemas.openxmlformats.org/drawingml/2006/main">
+            <a:off x="7038198" y="3433763"/>
+            <a:ext cx="609600" cy="342900"/>
+          </a:xfrm>
+          <a:prstGeom xmlns:a="http://schemas.openxmlformats.org/drawingml/2006/main" prst="rect">
+            <a:avLst/>
+          </a:prstGeom>
+          <a:noFill xmlns:a="http://schemas.openxmlformats.org/drawingml/2006/main"/>
+          <a:ln xmlns:a="http://schemas.openxmlformats.org/drawingml/2006/main" w="0">
+            <a:noFill/>
+          </a:ln>
+        </p:spPr>
+        <p:txBody>
+          <a:bodyPr xmlns:a="http://schemas.openxmlformats.org/drawingml/2006/main" anchor="ctr">
+            <a:normAutofit fontScale="100000"/>
+          </a:bodyPr>
+          <a:lstStyle xmlns:a="http://schemas.openxmlformats.org/drawingml/2006/main"/>
+          <a:p xmlns:a="http://schemas.openxmlformats.org/drawingml/2006/main">
+            <a:pPr algn="l">
+              <a:defRPr sz="1050" b="1">
+                <a:solidFill>
+                  <a:srgbClr val="14213D"/>
+                </a:solidFill>
+                <a:latin typeface="Arial"/>
+                <a:ea typeface="Arial"/>
+                <a:cs typeface="Arial"/>
+              </a:defRPr>
+            </a:pPr>
+            <a:r>
+              <a:rPr sz="1050" b="1">
+                <a:solidFill>
+                  <a:srgbClr val="14213D"/>
+                </a:solidFill>
+                <a:latin typeface="Arial"/>
+                <a:ea typeface="Arial"/>
+                <a:cs typeface="Arial"/>
+              </a:rPr>
+              <a:t>21,2%</a:t>
+            </a:r>
+          </a:p>
+        </p:txBody>
+      </p:sp>
+      <p:sp>
+        <p:nvSpPr>
+          <p:cNvPr id="25" name="">
+            <a:extLst xmlns:a="http://schemas.openxmlformats.org/drawingml/2006/main">
+              <a:ext uri="{FF2B5EF4-FFF2-40B4-BE49-F238E27FC236}">
+                <a16:creationId xmlns:a16="http://schemas.microsoft.com/office/drawing/2014/main" id="{77C20E9C-C0ED-4BDF-BFF8-0E164514611F}"/>
+              </a:ext>
+            </a:extLst>
+          </p:cNvPr>
+          <p:cNvSpPr>
+            <a:spLocks xmlns:a="http://schemas.openxmlformats.org/drawingml/2006/main" noGrp="1"/>
+          </p:cNvSpPr>
+          <p:nvPr/>
+        </p:nvSpPr>
+        <p:spPr>
+          <a:xfrm xmlns:a="http://schemas.openxmlformats.org/drawingml/2006/main">
+            <a:off x="838200" y="4364038"/>
+            <a:ext cx="1123950" cy="342900"/>
+          </a:xfrm>
+          <a:prstGeom xmlns:a="http://schemas.openxmlformats.org/drawingml/2006/main" prst="rect">
+            <a:avLst/>
+          </a:prstGeom>
+          <a:noFill xmlns:a="http://schemas.openxmlformats.org/drawingml/2006/main"/>
+          <a:ln xmlns:a="http://schemas.openxmlformats.org/drawingml/2006/main" w="0">
+            <a:noFill/>
+          </a:ln>
+        </p:spPr>
+        <p:txBody>
+          <a:bodyPr xmlns:a="http://schemas.openxmlformats.org/drawingml/2006/main" anchor="ctr">
+            <a:normAutofit fontScale="100000"/>
+          </a:bodyPr>
+          <a:lstStyle xmlns:a="http://schemas.openxmlformats.org/drawingml/2006/main"/>
+          <a:p xmlns:a="http://schemas.openxmlformats.org/drawingml/2006/main">
+            <a:pPr algn="r">
+              <a:defRPr sz="1050" b="0">
+                <a:solidFill>
+                  <a:srgbClr val="63708A"/>
+                </a:solidFill>
+                <a:latin typeface="Arial"/>
+                <a:ea typeface="Arial"/>
+                <a:cs typeface="Arial"/>
+              </a:defRPr>
+            </a:pPr>
+            <a:r>
+              <a:rPr sz="1050" b="0">
+                <a:solidFill>
+                  <a:srgbClr val="63708A"/>
+                </a:solidFill>
+                <a:latin typeface="Arial"/>
+                <a:ea typeface="Arial"/>
+                <a:cs typeface="Arial"/>
+              </a:rPr>
+              <a:t>Qwen 3.6</a:t>
+            </a:r>
+          </a:p>
+        </p:txBody>
+      </p:sp>
+      <p:sp>
+        <p:nvSpPr>
+          <p:cNvPr id="26" name="">
+            <a:extLst xmlns:a="http://schemas.openxmlformats.org/drawingml/2006/main">
+              <a:ext uri="{FF2B5EF4-FFF2-40B4-BE49-F238E27FC236}">
+                <a16:creationId xmlns:a16="http://schemas.microsoft.com/office/drawing/2014/main" id="{2570E47D-CD2E-416F-A5E7-B41036D9A62A}"/>
+              </a:ext>
+            </a:extLst>
+          </p:cNvPr>
+          <p:cNvSpPr>
+            <a:spLocks xmlns:a="http://schemas.openxmlformats.org/drawingml/2006/main" noGrp="1"/>
+          </p:cNvSpPr>
+          <p:nvPr/>
+        </p:nvSpPr>
+        <p:spPr>
+          <a:xfrm xmlns:a="http://schemas.openxmlformats.org/drawingml/2006/main">
+            <a:off x="2076450" y="4268788"/>
+            <a:ext cx="3398642" cy="533400"/>
+          </a:xfrm>
+          <a:prstGeom xmlns:a="http://schemas.openxmlformats.org/drawingml/2006/main" prst="rect">
+            <a:avLst/>
+          </a:prstGeom>
+          <a:solidFill xmlns:a="http://schemas.openxmlformats.org/drawingml/2006/main">
+            <a:srgbClr val="2EC4B6"/>
+          </a:solidFill>
+          <a:ln xmlns:a="http://schemas.openxmlformats.org/drawingml/2006/main" w="0">
+            <a:noFill/>
+          </a:ln>
+        </p:spPr>
+      </p:sp>
+      <p:sp>
+        <p:nvSpPr>
+          <p:cNvPr id="27" name="">
+            <a:extLst xmlns:a="http://schemas.openxmlformats.org/drawingml/2006/main">
+              <a:ext uri="{FF2B5EF4-FFF2-40B4-BE49-F238E27FC236}">
+                <a16:creationId xmlns:a16="http://schemas.microsoft.com/office/drawing/2014/main" id="{1E73146B-915F-4DF1-9ADD-7918C1562D30}"/>
+              </a:ext>
+            </a:extLst>
+          </p:cNvPr>
+          <p:cNvSpPr>
+            <a:spLocks xmlns:a="http://schemas.openxmlformats.org/drawingml/2006/main" noGrp="1"/>
+          </p:cNvSpPr>
+          <p:nvPr/>
+        </p:nvSpPr>
+        <p:spPr>
+          <a:xfrm xmlns:a="http://schemas.openxmlformats.org/drawingml/2006/main">
+            <a:off x="5551292" y="4364038"/>
+            <a:ext cx="609600" cy="342900"/>
+          </a:xfrm>
+          <a:prstGeom xmlns:a="http://schemas.openxmlformats.org/drawingml/2006/main" prst="rect">
+            <a:avLst/>
+          </a:prstGeom>
+          <a:noFill xmlns:a="http://schemas.openxmlformats.org/drawingml/2006/main"/>
+          <a:ln xmlns:a="http://schemas.openxmlformats.org/drawingml/2006/main" w="0">
+            <a:noFill/>
+          </a:ln>
+        </p:spPr>
+        <p:txBody>
+          <a:bodyPr xmlns:a="http://schemas.openxmlformats.org/drawingml/2006/main" anchor="ctr">
+            <a:normAutofit fontScale="100000"/>
+          </a:bodyPr>
+          <a:lstStyle xmlns:a="http://schemas.openxmlformats.org/drawingml/2006/main"/>
+          <a:p xmlns:a="http://schemas.openxmlformats.org/drawingml/2006/main">
+            <a:pPr algn="l">
+              <a:defRPr sz="1050" b="1">
+                <a:solidFill>
+                  <a:srgbClr val="14213D"/>
+                </a:solidFill>
+                <a:latin typeface="Arial"/>
+                <a:ea typeface="Arial"/>
+                <a:cs typeface="Arial"/>
+              </a:defRPr>
+            </a:pPr>
+            <a:r>
+              <a:rPr sz="1050" b="1">
+                <a:solidFill>
+                  <a:srgbClr val="14213D"/>
+                </a:solidFill>
+                <a:latin typeface="Arial"/>
+                <a:ea typeface="Arial"/>
+                <a:cs typeface="Arial"/>
+              </a:rPr>
+              <a:t>14,7%</a:t>
+            </a:r>
+          </a:p>
+        </p:txBody>
+      </p:sp>
+      <p:sp>
+        <p:nvSpPr>
+          <p:cNvPr id="28" name="">
+            <a:extLst xmlns:a="http://schemas.openxmlformats.org/drawingml/2006/main">
+              <a:ext uri="{FF2B5EF4-FFF2-40B4-BE49-F238E27FC236}">
+                <a16:creationId xmlns:a16="http://schemas.microsoft.com/office/drawing/2014/main" id="{D6B8296C-7BDC-47C6-83FB-6E34AA5F7FC3}"/>
               </a:ext>
             </a:extLst>
           </p:cNvPr>
@@ -19724,10 +22636,10 @@
       </p:sp>
       <p:sp>
         <p:nvSpPr>
-          <p:cNvPr id="8" name="">
-            <a:extLst xmlns:a="http://schemas.openxmlformats.org/drawingml/2006/main">
-              <a:ext uri="{FF2B5EF4-FFF2-40B4-BE49-F238E27FC236}">
-                <a16:creationId xmlns:a16="http://schemas.microsoft.com/office/drawing/2014/main" id="{FF1EE341-4B84-4A9D-9566-0BC9D7CB3CF1}"/>
+          <p:cNvPr id="29" name="">
+            <a:extLst xmlns:a="http://schemas.openxmlformats.org/drawingml/2006/main">
+              <a:ext uri="{FF2B5EF4-FFF2-40B4-BE49-F238E27FC236}">
+                <a16:creationId xmlns:a16="http://schemas.microsoft.com/office/drawing/2014/main" id="{6967B941-E153-4813-AEE6-E11649986D43}"/>
               </a:ext>
             </a:extLst>
           </p:cNvPr>
@@ -19781,10 +22693,10 @@
       </p:sp>
       <p:sp>
         <p:nvSpPr>
-          <p:cNvPr id="9" name="">
-            <a:extLst xmlns:a="http://schemas.openxmlformats.org/drawingml/2006/main">
-              <a:ext uri="{FF2B5EF4-FFF2-40B4-BE49-F238E27FC236}">
-                <a16:creationId xmlns:a16="http://schemas.microsoft.com/office/drawing/2014/main" id="{46A633D7-4F1F-485C-AB0E-11C31169FADD}"/>
+          <p:cNvPr id="30" name="">
+            <a:extLst xmlns:a="http://schemas.openxmlformats.org/drawingml/2006/main">
+              <a:ext uri="{FF2B5EF4-FFF2-40B4-BE49-F238E27FC236}">
+                <a16:creationId xmlns:a16="http://schemas.microsoft.com/office/drawing/2014/main" id="{2E5FE911-6BAC-423C-A917-14BCCDCEB7C7}"/>
               </a:ext>
             </a:extLst>
           </p:cNvPr>
@@ -19816,10 +22728,10 @@
       </p:sp>
       <p:sp>
         <p:nvSpPr>
-          <p:cNvPr id="10" name="">
-            <a:extLst xmlns:a="http://schemas.openxmlformats.org/drawingml/2006/main">
-              <a:ext uri="{FF2B5EF4-FFF2-40B4-BE49-F238E27FC236}">
-                <a16:creationId xmlns:a16="http://schemas.microsoft.com/office/drawing/2014/main" id="{A76DFE48-1FB3-42AB-909E-A030128E6FD3}"/>
+          <p:cNvPr id="31" name="">
+            <a:extLst xmlns:a="http://schemas.openxmlformats.org/drawingml/2006/main">
+              <a:ext uri="{FF2B5EF4-FFF2-40B4-BE49-F238E27FC236}">
+                <a16:creationId xmlns:a16="http://schemas.microsoft.com/office/drawing/2014/main" id="{E9FC6341-9C85-46B1-9B7A-3C11B0AF351D}"/>
               </a:ext>
             </a:extLst>
           </p:cNvPr>
@@ -19873,10 +22785,10 @@
       </p:sp>
       <p:sp>
         <p:nvSpPr>
-          <p:cNvPr id="11" name="">
-            <a:extLst xmlns:a="http://schemas.openxmlformats.org/drawingml/2006/main">
-              <a:ext uri="{FF2B5EF4-FFF2-40B4-BE49-F238E27FC236}">
-                <a16:creationId xmlns:a16="http://schemas.microsoft.com/office/drawing/2014/main" id="{886C42A3-5161-426C-8C12-9005F3815D16}"/>
+          <p:cNvPr id="32" name="">
+            <a:extLst xmlns:a="http://schemas.openxmlformats.org/drawingml/2006/main">
+              <a:ext uri="{FF2B5EF4-FFF2-40B4-BE49-F238E27FC236}">
+                <a16:creationId xmlns:a16="http://schemas.microsoft.com/office/drawing/2014/main" id="{BCF732A8-307A-4030-B9A1-EE7A1334F698}"/>
               </a:ext>
             </a:extLst>
           </p:cNvPr>
@@ -19976,10 +22888,10 @@
       </p:sp>
       <p:sp>
         <p:nvSpPr>
-          <p:cNvPr id="12" name="">
-            <a:extLst xmlns:a="http://schemas.openxmlformats.org/drawingml/2006/main">
-              <a:ext uri="{FF2B5EF4-FFF2-40B4-BE49-F238E27FC236}">
-                <a16:creationId xmlns:a16="http://schemas.microsoft.com/office/drawing/2014/main" id="{E05CCA57-6C42-4BC4-82F1-4E3207C6D56C}"/>
+          <p:cNvPr id="33" name="">
+            <a:extLst xmlns:a="http://schemas.openxmlformats.org/drawingml/2006/main">
+              <a:ext uri="{FF2B5EF4-FFF2-40B4-BE49-F238E27FC236}">
+                <a16:creationId xmlns:a16="http://schemas.microsoft.com/office/drawing/2014/main" id="{027AB127-5379-46A1-BFE0-4BFA689D6B7F}"/>
               </a:ext>
             </a:extLst>
           </p:cNvPr>
@@ -20034,7 +22946,7 @@
     </p:spTree>
     <p:extLst>
       <p:ext uri="{BB962C8B-B14F-4D97-AF65-F5344CB8AC3E}">
-        <p14:creationId xmlns:p14="http://schemas.microsoft.com/office/powerpoint/2010/main" val="194343972"/>
+        <p14:creationId xmlns:p14="http://schemas.microsoft.com/office/powerpoint/2010/main" val="676000022"/>
       </p:ext>
     </p:extLst>
   </p:cSld>
